--- a/public/downloads/praesentation/M12.pptx
+++ b/public/downloads/praesentation/M12.pptx
@@ -31,6 +31,9 @@
     <p:sldId id="279" r:id="rId30"/>
     <p:sldId id="280" r:id="rId31"/>
     <p:sldId id="281" r:id="rId32"/>
+    <p:sldId id="282" r:id="rId33"/>
+    <p:sldId id="283" r:id="rId34"/>
+    <p:sldId id="284" r:id="rId35"/>
   </p:sldIdLst>
   <p:sldSz cx="12188952" cy="6858000" type="screen4x3"/>
   <p:notesSz cx="6858000" cy="9144000"/>
@@ -3172,8 +3175,8 @@
         </p:nvSpPr>
         <p:spPr>
           <a:xfrm>
-            <a:off x="365760" y="365760"/>
-            <a:ext cx="11430000" cy="457200"/>
+            <a:off x="365760" y="320040"/>
+            <a:ext cx="11430000" cy="411480"/>
           </a:xfrm>
           <a:prstGeom prst="rect">
             <a:avLst/>
@@ -3188,13 +3191,13 @@
           <a:p>
             <a:pPr algn="l"/>
             <a:r>
-              <a:rPr sz="1100" b="0">
-                <a:solidFill>
-                  <a:srgbClr val="FFFFFF"/>
-                </a:solidFill>
-                <a:latin typeface="Arial"/>
-              </a:rPr>
-              <a:t>M12  ·  K-03 Gesprächsführung &amp; Beratung  ·  Stratege  ·  1 Tag (ca. 8 Std.)</a:t>
+              <a:rPr sz="1100" b="0" i="0">
+                <a:solidFill>
+                  <a:srgbClr val="BBCCEE"/>
+                </a:solidFill>
+                <a:latin typeface="Arial"/>
+              </a:rPr>
+              <a:t>M12  ·  K-03 Gesprächsführung &amp; Beratung  ·  Zielstufe: Stratege  ·  1 Tag (ca. 8 Std.)</a:t>
             </a:r>
           </a:p>
         </p:txBody>
@@ -3207,14 +3210,14 @@
         </p:nvSpPr>
         <p:spPr>
           <a:xfrm>
-            <a:off x="365760" y="868680"/>
-            <a:ext cx="7315200" cy="27432"/>
+            <a:off x="365760" y="804672"/>
+            <a:ext cx="8229600" cy="22860"/>
           </a:xfrm>
           <a:prstGeom prst="rect">
             <a:avLst/>
           </a:prstGeom>
           <a:solidFill>
-            <a:srgbClr val="FFFFFF"/>
+            <a:srgbClr val="335CC0"/>
           </a:solidFill>
           <a:ln>
             <a:noFill/>
@@ -3250,8 +3253,8 @@
         </p:nvSpPr>
         <p:spPr>
           <a:xfrm>
-            <a:off x="365760" y="1097280"/>
-            <a:ext cx="11430000" cy="2286000"/>
+            <a:off x="365760" y="1005840"/>
+            <a:ext cx="11430000" cy="2560320"/>
           </a:xfrm>
           <a:prstGeom prst="rect">
             <a:avLst/>
@@ -3266,7 +3269,7 @@
           <a:p>
             <a:pPr algn="l"/>
             <a:r>
-              <a:rPr sz="4000" b="1">
+              <a:rPr sz="4200" b="1" i="0">
                 <a:solidFill>
                   <a:srgbClr val="FFFFFF"/>
                 </a:solidFill>
@@ -3285,8 +3288,8 @@
         </p:nvSpPr>
         <p:spPr>
           <a:xfrm>
-            <a:off x="365760" y="3200400"/>
-            <a:ext cx="9144000" cy="914400"/>
+            <a:off x="365760" y="3383280"/>
+            <a:ext cx="10058400" cy="822960"/>
           </a:xfrm>
           <a:prstGeom prst="rect">
             <a:avLst/>
@@ -3301,7 +3304,7 @@
           <a:p>
             <a:pPr algn="l"/>
             <a:r>
-              <a:rPr sz="2000" b="0">
+              <a:rPr sz="2000" b="0" i="1">
                 <a:solidFill>
                   <a:srgbClr val="CCD6F0"/>
                 </a:solidFill>
@@ -3320,8 +3323,8 @@
         </p:nvSpPr>
         <p:spPr>
           <a:xfrm>
-            <a:off x="365760" y="6217920"/>
-            <a:ext cx="11430000" cy="457200"/>
+            <a:off x="365760" y="6309360"/>
+            <a:ext cx="11430000" cy="365760"/>
           </a:xfrm>
           <a:prstGeom prst="rect">
             <a:avLst/>
@@ -3336,9 +3339,9 @@
           <a:p>
             <a:pPr algn="l"/>
             <a:r>
-              <a:rPr sz="1000" b="0">
-                <a:solidFill>
-                  <a:srgbClr val="99AACC"/>
+              <a:rPr sz="900" b="0" i="0">
+                <a:solidFill>
+                  <a:srgbClr val="889ACC"/>
                 </a:solidFill>
                 <a:latin typeface="Arial"/>
               </a:rPr>
@@ -3424,8 +3427,8 @@
         </p:nvSpPr>
         <p:spPr>
           <a:xfrm>
-            <a:off x="365760" y="274320"/>
-            <a:ext cx="11430000" cy="822960"/>
+            <a:off x="228600" y="182880"/>
+            <a:ext cx="11430000" cy="320040"/>
           </a:xfrm>
           <a:prstGeom prst="rect">
             <a:avLst/>
@@ -3440,33 +3443,68 @@
           <a:p>
             <a:pPr algn="l"/>
             <a:r>
-              <a:rPr sz="2200" b="1">
+              <a:rPr sz="900" b="0" i="0">
+                <a:solidFill>
+                  <a:srgbClr val="556575"/>
+                </a:solidFill>
+                <a:latin typeface="Arial"/>
+              </a:rPr>
+              <a:t>M12 · Modulinhalte</a:t>
+            </a:r>
+          </a:p>
+        </p:txBody>
+      </p:sp>
+      <p:sp>
+        <p:nvSpPr>
+          <p:cNvPr id="4" name="TextBox 3"/>
+          <p:cNvSpPr txBox="1"/>
+          <p:nvPr/>
+        </p:nvSpPr>
+        <p:spPr>
+          <a:xfrm>
+            <a:off x="365760" y="274320"/>
+            <a:ext cx="11430000" cy="777240"/>
+          </a:xfrm>
+          <a:prstGeom prst="rect">
+            <a:avLst/>
+          </a:prstGeom>
+          <a:noFill/>
+        </p:spPr>
+        <p:txBody>
+          <a:bodyPr wrap="square">
+            <a:spAutoFit/>
+          </a:bodyPr>
+          <a:lstStyle/>
+          <a:p>
+            <a:pPr algn="l"/>
+            <a:r>
+              <a:rPr sz="2200" b="1" i="0">
                 <a:solidFill>
                   <a:srgbClr val="003DA5"/>
                 </a:solidFill>
                 <a:latin typeface="Arial"/>
               </a:rPr>
-              <a:t>Regulatorische Eckpunkte (Orientierungsrahmen)</a:t>
-            </a:r>
-          </a:p>
-        </p:txBody>
-      </p:sp>
-      <p:sp>
-        <p:nvSpPr>
-          <p:cNvPr id="4" name="Rectangle 3"/>
+              <a:t>Lösungsorientierte Zukunftsfragen (de Shazer, 1985)</a:t>
+            </a:r>
+          </a:p>
+        </p:txBody>
+      </p:sp>
+      <p:sp>
+        <p:nvSpPr>
+          <p:cNvPr id="5" name="Rectangle 4"/>
           <p:cNvSpPr/>
           <p:nvPr/>
         </p:nvSpPr>
         <p:spPr>
           <a:xfrm>
-            <a:off x="365760" y="1051560"/>
+            <a:off x="365760" y="1005840"/>
             <a:ext cx="11430000" cy="27432"/>
           </a:xfrm>
           <a:prstGeom prst="rect">
             <a:avLst/>
           </a:prstGeom>
           <a:solidFill>
-            <a:srgbClr val="E5E7EB"/>
+            <a:srgbClr val="D1D5DB"/>
           </a:solidFill>
           <a:ln>
             <a:noFill/>
@@ -3496,13 +3534,13 @@
       </p:sp>
       <p:sp>
         <p:nvSpPr>
-          <p:cNvPr id="5" name="TextBox 4"/>
+          <p:cNvPr id="6" name="TextBox 5"/>
           <p:cNvSpPr txBox="1"/>
           <p:nvPr/>
         </p:nvSpPr>
         <p:spPr>
           <a:xfrm>
-            <a:off x="365760" y="1234440"/>
+            <a:off x="365760" y="1143000"/>
             <a:ext cx="11430000" cy="5212080"/>
           </a:xfrm>
           <a:prstGeom prst="rect">
@@ -3518,7 +3556,7 @@
           <a:p>
             <a:pPr>
               <a:spcBef>
-                <a:spcPts val="400"/>
+                <a:spcPts val="500"/>
               </a:spcBef>
             </a:pPr>
             <a:r>
@@ -3537,13 +3575,13 @@
                 </a:solidFill>
                 <a:latin typeface="Arial"/>
               </a:rPr>
-              <a:t>Erbschaftsteuer / Schenkungsteuer: § 13a ErbStG regelt die Begünstigungen für Betriebsvermögen bei familieninterner Übergabe (Verschonungsabschlag 85 %; Optionsverschonung 100 %; Behaltensfristen 5 bzw. 7 Jahre). Der persönliche Freibetrag nach § 16 Abs. 1 Nr. 2 ErbStG beträgt 400.000 EUR je Elternteil und je Kind – d.h. ein Kind kann im Erbfall von beiden Elternteilen zusammen bis zu 800.000 EUR steuerfrei erhalten. Wichtig: Dieser Freibetrag kann alle 10 Jahre erneut genutzt werden – eine schrittweise Schenkung über mehrere Jahre kann daher steuerlich deutlich günstiger sein als eine Einmal-Übertragung. Hinweis: Diese Orientierungsinformation ersetzt keine steuerrechtliche Beratung – stets Steuerberater einbinden.</a:t>
+              <a:t>Die lösungsorientierte Gesprächsführung hilft, den Unternehmer aus Lähmung oder Verdrängung herauszuholen:</a:t>
             </a:r>
           </a:p>
           <a:p>
             <a:pPr>
               <a:spcBef>
-                <a:spcPts val="400"/>
+                <a:spcPts val="500"/>
               </a:spcBef>
             </a:pPr>
             <a:r>
@@ -3562,13 +3600,13 @@
                 </a:solidFill>
                 <a:latin typeface="Arial"/>
               </a:rPr>
-              <a:t>Gesellschaftsrechtliche Fragen (GmbH-G, HGB): Sind Gesellschafterverträge aktuell? Gibt es Vorkaufsrechte?</a:t>
+              <a:t>- Wunder-Frage: „Angenommen, über Nacht geschähe ein Wunder und Ihre Nachfolge wäre perfekt gelöst – wie würde das konkret aussehen? Was wäre anders?" -…</a:t>
             </a:r>
           </a:p>
           <a:p>
             <a:pPr>
               <a:spcBef>
-                <a:spcPts val="400"/>
+                <a:spcPts val="500"/>
               </a:spcBef>
             </a:pPr>
             <a:r>
@@ -3587,67 +3625,7 @@
                 </a:solidFill>
                 <a:latin typeface="Arial"/>
               </a:rPr>
-              <a:t>Arbeitsrecht (insbesondere bei MBO): Betriebsrat-Mitsprache; Kündigungsschutz</a:t>
-            </a:r>
-          </a:p>
-          <a:p>
-            <a:pPr>
-              <a:spcBef>
-                <a:spcPts val="400"/>
-              </a:spcBef>
-            </a:pPr>
-            <a:r>
-              <a:rPr sz="1500">
-                <a:solidFill>
-                  <a:srgbClr val="003DA5"/>
-                </a:solidFill>
-                <a:latin typeface="Arial"/>
-              </a:rPr>
-              <a:t>▪  </a:t>
-            </a:r>
-            <a:r>
-              <a:rPr sz="1700">
-                <a:solidFill>
-                  <a:srgbClr val="1A1A1A"/>
-                </a:solidFill>
-                <a:latin typeface="Arial"/>
-              </a:rPr>
-              <a:t>Finanzierungsrecht (KWG, CRR/CRD, MaRisk): Bonitätsbeurteilung des Nachfolgers; Besicherung</a:t>
-            </a:r>
-          </a:p>
-        </p:txBody>
-      </p:sp>
-      <p:sp>
-        <p:nvSpPr>
-          <p:cNvPr id="6" name="TextBox 5"/>
-          <p:cNvSpPr txBox="1"/>
-          <p:nvPr/>
-        </p:nvSpPr>
-        <p:spPr>
-          <a:xfrm>
-            <a:off x="11704320" y="6492240"/>
-            <a:ext cx="365760" cy="274320"/>
-          </a:xfrm>
-          <a:prstGeom prst="rect">
-            <a:avLst/>
-          </a:prstGeom>
-          <a:noFill/>
-        </p:spPr>
-        <p:txBody>
-          <a:bodyPr wrap="square">
-            <a:spAutoFit/>
-          </a:bodyPr>
-          <a:lstStyle/>
-          <a:p>
-            <a:pPr algn="r"/>
-            <a:r>
-              <a:rPr sz="1000" b="0">
-                <a:solidFill>
-                  <a:srgbClr val="6B7280"/>
-                </a:solidFill>
-                <a:latin typeface="Arial"/>
-              </a:rPr>
-              <a:t>8</a:t>
+              <a:t>Diese Fragen ermöglichen es dem Unternehmer, aus der Problemtrance herauszutreten und Ziele zu visualisieren.</a:t>
             </a:r>
           </a:p>
         </p:txBody>
@@ -3729,8 +3707,8 @@
         </p:nvSpPr>
         <p:spPr>
           <a:xfrm>
-            <a:off x="365760" y="274320"/>
-            <a:ext cx="11430000" cy="822960"/>
+            <a:off x="228600" y="182880"/>
+            <a:ext cx="11430000" cy="320040"/>
           </a:xfrm>
           <a:prstGeom prst="rect">
             <a:avLst/>
@@ -3745,33 +3723,68 @@
           <a:p>
             <a:pPr algn="l"/>
             <a:r>
-              <a:rPr sz="2200" b="1">
+              <a:rPr sz="900" b="0" i="0">
+                <a:solidFill>
+                  <a:srgbClr val="556575"/>
+                </a:solidFill>
+                <a:latin typeface="Arial"/>
+              </a:rPr>
+              <a:t>M12 · Modulinhalte</a:t>
+            </a:r>
+          </a:p>
+        </p:txBody>
+      </p:sp>
+      <p:sp>
+        <p:nvSpPr>
+          <p:cNvPr id="4" name="TextBox 3"/>
+          <p:cNvSpPr txBox="1"/>
+          <p:nvPr/>
+        </p:nvSpPr>
+        <p:spPr>
+          <a:xfrm>
+            <a:off x="365760" y="274320"/>
+            <a:ext cx="11430000" cy="777240"/>
+          </a:xfrm>
+          <a:prstGeom prst="rect">
+            <a:avLst/>
+          </a:prstGeom>
+          <a:noFill/>
+        </p:spPr>
+        <p:txBody>
+          <a:bodyPr wrap="square">
+            <a:spAutoFit/>
+          </a:bodyPr>
+          <a:lstStyle/>
+          <a:p>
+            <a:pPr algn="l"/>
+            <a:r>
+              <a:rPr sz="2200" b="1" i="0">
                 <a:solidFill>
                   <a:srgbClr val="003DA5"/>
                 </a:solidFill>
                 <a:latin typeface="Arial"/>
               </a:rPr>
-              <a:t>Kontrollverlust und Identitätsbedrohung</a:t>
-            </a:r>
-          </a:p>
-        </p:txBody>
-      </p:sp>
-      <p:sp>
-        <p:nvSpPr>
-          <p:cNvPr id="4" name="Rectangle 3"/>
+              <a:t>Haltung: Echte Neugier statt versteckter Agenda</a:t>
+            </a:r>
+          </a:p>
+        </p:txBody>
+      </p:sp>
+      <p:sp>
+        <p:nvSpPr>
+          <p:cNvPr id="5" name="Rectangle 4"/>
           <p:cNvSpPr/>
           <p:nvPr/>
         </p:nvSpPr>
         <p:spPr>
           <a:xfrm>
-            <a:off x="365760" y="1051560"/>
+            <a:off x="365760" y="1005840"/>
             <a:ext cx="11430000" cy="27432"/>
           </a:xfrm>
           <a:prstGeom prst="rect">
             <a:avLst/>
           </a:prstGeom>
           <a:solidFill>
-            <a:srgbClr val="E5E7EB"/>
+            <a:srgbClr val="D1D5DB"/>
           </a:solidFill>
           <a:ln>
             <a:noFill/>
@@ -3801,13 +3814,13 @@
       </p:sp>
       <p:sp>
         <p:nvSpPr>
-          <p:cNvPr id="5" name="TextBox 4"/>
+          <p:cNvPr id="6" name="TextBox 5"/>
           <p:cNvSpPr txBox="1"/>
           <p:nvPr/>
         </p:nvSpPr>
         <p:spPr>
           <a:xfrm>
-            <a:off x="365760" y="1234440"/>
+            <a:off x="365760" y="1143000"/>
             <a:ext cx="11430000" cy="5212080"/>
           </a:xfrm>
           <a:prstGeom prst="rect">
@@ -3823,7 +3836,7 @@
           <a:p>
             <a:pPr>
               <a:spcBef>
-                <a:spcPts val="400"/>
+                <a:spcPts val="500"/>
               </a:spcBef>
             </a:pPr>
             <a:r>
@@ -3842,13 +3855,13 @@
                 </a:solidFill>
                 <a:latin typeface="Arial"/>
               </a:rPr>
-              <a:t>Für viele Unternehmer ist das Unternehmen ein Kern ihrer Identität. Der Unternehmer ist sein Unternehmen – in…</a:t>
+              <a:t>Systemische Fragetechniken erfordern eine innere Haltung der genuinen Neugier (Tomm, 1987). Der FK darf nicht bereits wissen, wohin die Antwort führen soll:</a:t>
             </a:r>
           </a:p>
           <a:p>
             <a:pPr>
               <a:spcBef>
-                <a:spcPts val="400"/>
+                <a:spcPts val="500"/>
               </a:spcBef>
             </a:pPr>
             <a:r>
@@ -3867,92 +3880,7 @@
                 </a:solidFill>
                 <a:latin typeface="Arial"/>
               </a:rPr>
-              <a:t>Diese existenzielle Angst wird oft verdrängt oder rationalisiert. Psychologisch handelt es sich um einen Trauerprozess…</a:t>
-            </a:r>
-          </a:p>
-          <a:p>
-            <a:pPr>
-              <a:spcBef>
-                <a:spcPts val="400"/>
-              </a:spcBef>
-            </a:pPr>
-            <a:r>
-              <a:rPr sz="1500">
-                <a:solidFill>
-                  <a:srgbClr val="003DA5"/>
-                </a:solidFill>
-                <a:latin typeface="Arial"/>
-              </a:rPr>
-              <a:t>▪  </a:t>
-            </a:r>
-            <a:r>
-              <a:rPr sz="1700">
-                <a:solidFill>
-                  <a:srgbClr val="1A1A1A"/>
-                </a:solidFill>
-                <a:latin typeface="Arial"/>
-              </a:rPr>
-              <a:t>1. Verleugnung: „Das Thema ist noch gar nicht aktuell." 2. Widerstand: „Mein Sohn ist noch nicht bereit." 3.…</a:t>
-            </a:r>
-          </a:p>
-          <a:p>
-            <a:pPr>
-              <a:spcBef>
-                <a:spcPts val="400"/>
-              </a:spcBef>
-            </a:pPr>
-            <a:r>
-              <a:rPr sz="1500">
-                <a:solidFill>
-                  <a:srgbClr val="003DA5"/>
-                </a:solidFill>
-                <a:latin typeface="Arial"/>
-              </a:rPr>
-              <a:t>▪  </a:t>
-            </a:r>
-            <a:r>
-              <a:rPr sz="1700">
-                <a:solidFill>
-                  <a:srgbClr val="1A1A1A"/>
-                </a:solidFill>
-                <a:latin typeface="Arial"/>
-              </a:rPr>
-              <a:t>Der FK, der diesen Prozess versteht, behandelt Loslasswiderstände nicht als Irrationalität, sondern als normal und…</a:t>
-            </a:r>
-          </a:p>
-        </p:txBody>
-      </p:sp>
-      <p:sp>
-        <p:nvSpPr>
-          <p:cNvPr id="6" name="TextBox 5"/>
-          <p:cNvSpPr txBox="1"/>
-          <p:nvPr/>
-        </p:nvSpPr>
-        <p:spPr>
-          <a:xfrm>
-            <a:off x="11704320" y="6492240"/>
-            <a:ext cx="365760" cy="274320"/>
-          </a:xfrm>
-          <a:prstGeom prst="rect">
-            <a:avLst/>
-          </a:prstGeom>
-          <a:noFill/>
-        </p:spPr>
-        <p:txBody>
-          <a:bodyPr wrap="square">
-            <a:spAutoFit/>
-          </a:bodyPr>
-          <a:lstStyle/>
-          <a:p>
-            <a:pPr algn="r"/>
-            <a:r>
-              <a:rPr sz="1000" b="0">
-                <a:solidFill>
-                  <a:srgbClr val="6B7280"/>
-                </a:solidFill>
-                <a:latin typeface="Arial"/>
-              </a:rPr>
-              <a:t>9</a:t>
+              <a:t>- Fragen offen stellen, nicht suggestiv - Die Antwort wirklich hören, nicht bereits das nächste Ziel-Frame vorbereiten - Nachfragen zeigen: „Ich bin daran…</a:t>
             </a:r>
           </a:p>
         </p:txBody>
@@ -3971,7 +3899,7 @@
     <p:bg>
       <p:bgPr>
         <a:solidFill>
-          <a:srgbClr val="FFFFFF"/>
+          <a:srgbClr val="1A1A1A"/>
         </a:solidFill>
         <a:effectLst/>
       </p:bgPr>
@@ -3998,7 +3926,7 @@
             <a:avLst/>
           </a:prstGeom>
           <a:solidFill>
-            <a:srgbClr val="003DA5"/>
+            <a:srgbClr val="E05B00"/>
           </a:solidFill>
           <a:ln>
             <a:noFill/>
@@ -4034,8 +3962,8 @@
         </p:nvSpPr>
         <p:spPr>
           <a:xfrm>
-            <a:off x="365760" y="274320"/>
-            <a:ext cx="11430000" cy="822960"/>
+            <a:off x="365760" y="2011680"/>
+            <a:ext cx="11430000" cy="2011680"/>
           </a:xfrm>
           <a:prstGeom prst="rect">
             <a:avLst/>
@@ -4050,214 +3978,13 @@
           <a:p>
             <a:pPr algn="l"/>
             <a:r>
-              <a:rPr sz="2200" b="1">
-                <a:solidFill>
-                  <a:srgbClr val="003DA5"/>
-                </a:solidFill>
-                <a:latin typeface="Arial"/>
-              </a:rPr>
-              <a:t>Das Vermächtnis-Dilemma</a:t>
-            </a:r>
-          </a:p>
-        </p:txBody>
-      </p:sp>
-      <p:sp>
-        <p:nvSpPr>
-          <p:cNvPr id="4" name="Rectangle 3"/>
-          <p:cNvSpPr/>
-          <p:nvPr/>
-        </p:nvSpPr>
-        <p:spPr>
-          <a:xfrm>
-            <a:off x="365760" y="1051560"/>
-            <a:ext cx="11430000" cy="27432"/>
-          </a:xfrm>
-          <a:prstGeom prst="rect">
-            <a:avLst/>
-          </a:prstGeom>
-          <a:solidFill>
-            <a:srgbClr val="E5E7EB"/>
-          </a:solidFill>
-          <a:ln>
-            <a:noFill/>
-          </a:ln>
-        </p:spPr>
-        <p:style>
-          <a:lnRef idx="1">
-            <a:schemeClr val="accent1"/>
-          </a:lnRef>
-          <a:fillRef idx="3">
-            <a:schemeClr val="accent1"/>
-          </a:fillRef>
-          <a:effectRef idx="2">
-            <a:schemeClr val="accent1"/>
-          </a:effectRef>
-          <a:fontRef idx="minor">
-            <a:schemeClr val="lt1"/>
-          </a:fontRef>
-        </p:style>
-        <p:txBody>
-          <a:bodyPr rtlCol="0" anchor="ctr"/>
-          <a:lstStyle/>
-          <a:p>
-            <a:pPr algn="ctr"/>
-          </a:p>
-        </p:txBody>
-      </p:sp>
-      <p:sp>
-        <p:nvSpPr>
-          <p:cNvPr id="5" name="TextBox 4"/>
-          <p:cNvSpPr txBox="1"/>
-          <p:nvPr/>
-        </p:nvSpPr>
-        <p:spPr>
-          <a:xfrm>
-            <a:off x="365760" y="1234440"/>
-            <a:ext cx="11430000" cy="5212080"/>
-          </a:xfrm>
-          <a:prstGeom prst="rect">
-            <a:avLst/>
-          </a:prstGeom>
-          <a:noFill/>
-        </p:spPr>
-        <p:txBody>
-          <a:bodyPr wrap="square">
-            <a:spAutoFit/>
-          </a:bodyPr>
-          <a:lstStyle/>
-          <a:p>
-            <a:pPr>
-              <a:spcBef>
-                <a:spcPts val="400"/>
-              </a:spcBef>
-            </a:pPr>
-            <a:r>
-              <a:rPr sz="1500">
-                <a:solidFill>
-                  <a:srgbClr val="003DA5"/>
-                </a:solidFill>
-                <a:latin typeface="Arial"/>
-              </a:rPr>
-              <a:t>▪  </a:t>
-            </a:r>
-            <a:r>
-              <a:rPr sz="1700">
-                <a:solidFill>
-                  <a:srgbClr val="1A1A1A"/>
-                </a:solidFill>
-                <a:latin typeface="Arial"/>
-              </a:rPr>
-              <a:t>Kontrolle bewahren: „Nur ich kann das Unternehmen richtig führen."</a:t>
-            </a:r>
-          </a:p>
-          <a:p>
-            <a:pPr>
-              <a:spcBef>
-                <a:spcPts val="400"/>
-              </a:spcBef>
-            </a:pPr>
-            <a:r>
-              <a:rPr sz="1500">
-                <a:solidFill>
-                  <a:srgbClr val="003DA5"/>
-                </a:solidFill>
-                <a:latin typeface="Arial"/>
-              </a:rPr>
-              <a:t>▪  </a:t>
-            </a:r>
-            <a:r>
-              <a:rPr sz="1700">
-                <a:solidFill>
-                  <a:srgbClr val="1A1A1A"/>
-                </a:solidFill>
-                <a:latin typeface="Arial"/>
-              </a:rPr>
-              <a:t>Vermächtnis hinterlassen: „Mein Lebenswerk soll weiterleben und florieren."</a:t>
-            </a:r>
-          </a:p>
-          <a:p>
-            <a:pPr>
-              <a:spcBef>
-                <a:spcPts val="400"/>
-              </a:spcBef>
-            </a:pPr>
-            <a:r>
-              <a:rPr sz="1500">
-                <a:solidFill>
-                  <a:srgbClr val="003DA5"/>
-                </a:solidFill>
-                <a:latin typeface="Arial"/>
-              </a:rPr>
-              <a:t>▪  </a:t>
-            </a:r>
-            <a:r>
-              <a:rPr sz="1700">
-                <a:solidFill>
-                  <a:srgbClr val="1A1A1A"/>
-                </a:solidFill>
-                <a:latin typeface="Arial"/>
-              </a:rPr>
-              <a:t>„Was ist Ihnen wichtiger: die Kontrolle über die nächsten 5 Jahre zu behalten – oder ein Vermächtnis zu schaffen, das 20 Jahre bestand hat?"</a:t>
-            </a:r>
-          </a:p>
-          <a:p>
-            <a:pPr>
-              <a:spcBef>
-                <a:spcPts val="400"/>
-              </a:spcBef>
-            </a:pPr>
-            <a:r>
-              <a:rPr sz="1500">
-                <a:solidFill>
-                  <a:srgbClr val="003DA5"/>
-                </a:solidFill>
-                <a:latin typeface="Arial"/>
-              </a:rPr>
-              <a:t>▪  </a:t>
-            </a:r>
-            <a:r>
-              <a:rPr sz="1700">
-                <a:solidFill>
-                  <a:srgbClr val="1A1A1A"/>
-                </a:solidFill>
-                <a:latin typeface="Arial"/>
-              </a:rPr>
-              <a:t>„Wenn Sie Ihre besten Mitarbeiter und Ihre Strategie an einen vertrauenswürdigen Nachfolger übergeben – was könnten Sie dann gut machen, was Sie jetzt nicht können?"</a:t>
-            </a:r>
-          </a:p>
-        </p:txBody>
-      </p:sp>
-      <p:sp>
-        <p:nvSpPr>
-          <p:cNvPr id="6" name="TextBox 5"/>
-          <p:cNvSpPr txBox="1"/>
-          <p:nvPr/>
-        </p:nvSpPr>
-        <p:spPr>
-          <a:xfrm>
-            <a:off x="11704320" y="6492240"/>
-            <a:ext cx="365760" cy="274320"/>
-          </a:xfrm>
-          <a:prstGeom prst="rect">
-            <a:avLst/>
-          </a:prstGeom>
-          <a:noFill/>
-        </p:spPr>
-        <p:txBody>
-          <a:bodyPr wrap="square">
-            <a:spAutoFit/>
-          </a:bodyPr>
-          <a:lstStyle/>
-          <a:p>
-            <a:pPr algn="r"/>
-            <a:r>
-              <a:rPr sz="1000" b="0">
-                <a:solidFill>
-                  <a:srgbClr val="6B7280"/>
-                </a:solidFill>
-                <a:latin typeface="Arial"/>
-              </a:rPr>
-              <a:t>10</a:t>
+              <a:rPr sz="3600" b="1" i="0">
+                <a:solidFill>
+                  <a:srgbClr val="FFFFFF"/>
+                </a:solidFill>
+                <a:latin typeface="Arial"/>
+              </a:rPr>
+              <a:t>4.3 Theorie-Input: Nachfolge-Typen und Prozess im Überblick</a:t>
             </a:r>
           </a:p>
         </p:txBody>
@@ -4339,8 +4066,8 @@
         </p:nvSpPr>
         <p:spPr>
           <a:xfrm>
-            <a:off x="365760" y="274320"/>
-            <a:ext cx="11430000" cy="822960"/>
+            <a:off x="228600" y="182880"/>
+            <a:ext cx="11430000" cy="320040"/>
           </a:xfrm>
           <a:prstGeom prst="rect">
             <a:avLst/>
@@ -4355,33 +4082,68 @@
           <a:p>
             <a:pPr algn="l"/>
             <a:r>
-              <a:rPr sz="2200" b="1">
+              <a:rPr sz="900" b="0" i="0">
+                <a:solidFill>
+                  <a:srgbClr val="556575"/>
+                </a:solidFill>
+                <a:latin typeface="Arial"/>
+              </a:rPr>
+              <a:t>M12 · Modulinhalte</a:t>
+            </a:r>
+          </a:p>
+        </p:txBody>
+      </p:sp>
+      <p:sp>
+        <p:nvSpPr>
+          <p:cNvPr id="4" name="TextBox 3"/>
+          <p:cNvSpPr txBox="1"/>
+          <p:nvPr/>
+        </p:nvSpPr>
+        <p:spPr>
+          <a:xfrm>
+            <a:off x="365760" y="274320"/>
+            <a:ext cx="11430000" cy="777240"/>
+          </a:xfrm>
+          <a:prstGeom prst="rect">
+            <a:avLst/>
+          </a:prstGeom>
+          <a:noFill/>
+        </p:spPr>
+        <p:txBody>
+          <a:bodyPr wrap="square">
+            <a:spAutoFit/>
+          </a:bodyPr>
+          <a:lstStyle/>
+          <a:p>
+            <a:pPr algn="l"/>
+            <a:r>
+              <a:rPr sz="2200" b="1" i="0">
                 <a:solidFill>
                   <a:srgbClr val="003DA5"/>
                 </a:solidFill>
                 <a:latin typeface="Arial"/>
               </a:rPr>
-              <a:t>Ausgangssituation</a:t>
-            </a:r>
-          </a:p>
-        </p:txBody>
-      </p:sp>
-      <p:sp>
-        <p:nvSpPr>
-          <p:cNvPr id="4" name="Rectangle 3"/>
+              <a:t>Die vier Hauptnachfolgearten</a:t>
+            </a:r>
+          </a:p>
+        </p:txBody>
+      </p:sp>
+      <p:sp>
+        <p:nvSpPr>
+          <p:cNvPr id="5" name="Rectangle 4"/>
           <p:cNvSpPr/>
           <p:nvPr/>
         </p:nvSpPr>
         <p:spPr>
           <a:xfrm>
-            <a:off x="365760" y="1051560"/>
+            <a:off x="365760" y="1005840"/>
             <a:ext cx="11430000" cy="27432"/>
           </a:xfrm>
           <a:prstGeom prst="rect">
             <a:avLst/>
           </a:prstGeom>
           <a:solidFill>
-            <a:srgbClr val="E5E7EB"/>
+            <a:srgbClr val="D1D5DB"/>
           </a:solidFill>
           <a:ln>
             <a:noFill/>
@@ -4409,89 +4171,574 @@
           </a:p>
         </p:txBody>
       </p:sp>
-      <p:sp>
-        <p:nvSpPr>
-          <p:cNvPr id="5" name="TextBox 4"/>
-          <p:cNvSpPr txBox="1"/>
-          <p:nvPr/>
-        </p:nvSpPr>
-        <p:spPr>
-          <a:xfrm>
-            <a:off x="365760" y="1234440"/>
-            <a:ext cx="11430000" cy="5212080"/>
-          </a:xfrm>
-          <a:prstGeom prst="rect">
-            <a:avLst/>
-          </a:prstGeom>
-          <a:noFill/>
-        </p:spPr>
-        <p:txBody>
-          <a:bodyPr wrap="square">
-            <a:spAutoFit/>
-          </a:bodyPr>
-          <a:lstStyle/>
-          <a:p>
-            <a:pPr>
-              <a:spcBef>
-                <a:spcPts val="400"/>
-              </a:spcBef>
-            </a:pPr>
-            <a:r>
-              <a:rPr sz="1500">
-                <a:solidFill>
-                  <a:srgbClr val="003DA5"/>
-                </a:solidFill>
-                <a:latin typeface="Arial"/>
-              </a:rPr>
-              <a:t>▪  </a:t>
-            </a:r>
-            <a:r>
-              <a:rPr sz="1700">
-                <a:solidFill>
-                  <a:srgbClr val="1A1A1A"/>
-                </a:solidFill>
-                <a:latin typeface="Arial"/>
-              </a:rPr>
-              <a:t>FK Claudia Merz trifft Karl Wagner Jun. zum Jahresgespräch. Karl wirkt heute angespannt. Nach den üblichen Begrüßungen…</a:t>
-            </a:r>
-          </a:p>
-        </p:txBody>
-      </p:sp>
-      <p:sp>
-        <p:nvSpPr>
-          <p:cNvPr id="6" name="TextBox 5"/>
-          <p:cNvSpPr txBox="1"/>
-          <p:nvPr/>
-        </p:nvSpPr>
-        <p:spPr>
-          <a:xfrm>
-            <a:off x="11704320" y="6492240"/>
-            <a:ext cx="365760" cy="274320"/>
-          </a:xfrm>
-          <a:prstGeom prst="rect">
-            <a:avLst/>
-          </a:prstGeom>
-          <a:noFill/>
-        </p:spPr>
-        <p:txBody>
-          <a:bodyPr wrap="square">
-            <a:spAutoFit/>
-          </a:bodyPr>
-          <a:lstStyle/>
-          <a:p>
-            <a:pPr algn="r"/>
-            <a:r>
-              <a:rPr sz="1000" b="0">
-                <a:solidFill>
-                  <a:srgbClr val="6B7280"/>
-                </a:solidFill>
-                <a:latin typeface="Arial"/>
-              </a:rPr>
-              <a:t>11</a:t>
-            </a:r>
-          </a:p>
-        </p:txBody>
-      </p:sp>
+      <p:graphicFrame>
+        <p:nvGraphicFramePr>
+          <p:cNvPr id="6" name="Table 5"/>
+          <p:cNvGraphicFramePr>
+            <a:graphicFrameLocks noGrp="1"/>
+          </p:cNvGraphicFramePr>
+          <p:nvPr/>
+        </p:nvGraphicFramePr>
+        <p:xfrm>
+          <a:off x="365760" y="1143000"/>
+          <a:ext cx="11430000" cy="2852928"/>
+        </p:xfrm>
+        <a:graphic>
+          <a:graphicData uri="http://schemas.openxmlformats.org/drawingml/2006/table">
+            <a:tbl>
+              <a:tblPr firstRow="1" bandRow="1">
+                <a:tableStyleId>{5C22544A-7EE6-4342-B048-85BDC9FD1C3A}</a:tableStyleId>
+              </a:tblPr>
+              <a:tblGrid>
+                <a:gridCol w="2857500"/>
+                <a:gridCol w="2857500"/>
+                <a:gridCol w="2857500"/>
+                <a:gridCol w="2857500"/>
+              </a:tblGrid>
+              <a:tr h="475488">
+                <a:tc>
+                  <a:txBody>
+                    <a:bodyPr wrap="square"/>
+                    <a:lstStyle/>
+                    <a:p>
+                      <a:r>
+                        <a:rPr sz="1100" b="1">
+                          <a:solidFill>
+                            <a:srgbClr val="FFFFFF"/>
+                          </a:solidFill>
+                          <a:latin typeface="Arial"/>
+                        </a:rPr>
+                        <a:t>Nachfolgeart</a:t>
+                      </a:r>
+                    </a:p>
+                  </a:txBody>
+                  <a:tcPr>
+                    <a:solidFill>
+                      <a:srgbClr val="003DA5"/>
+                    </a:solidFill>
+                  </a:tcPr>
+                </a:tc>
+                <a:tc>
+                  <a:txBody>
+                    <a:bodyPr wrap="square"/>
+                    <a:lstStyle/>
+                    <a:p>
+                      <a:r>
+                        <a:rPr sz="1100" b="1">
+                          <a:solidFill>
+                            <a:srgbClr val="FFFFFF"/>
+                          </a:solidFill>
+                          <a:latin typeface="Arial"/>
+                        </a:rPr>
+                        <a:t>Charakteristik</a:t>
+                      </a:r>
+                    </a:p>
+                  </a:txBody>
+                  <a:tcPr>
+                    <a:solidFill>
+                      <a:srgbClr val="003DA5"/>
+                    </a:solidFill>
+                  </a:tcPr>
+                </a:tc>
+                <a:tc>
+                  <a:txBody>
+                    <a:bodyPr wrap="square"/>
+                    <a:lstStyle/>
+                    <a:p>
+                      <a:r>
+                        <a:rPr sz="1100" b="1">
+                          <a:solidFill>
+                            <a:srgbClr val="FFFFFF"/>
+                          </a:solidFill>
+                          <a:latin typeface="Arial"/>
+                        </a:rPr>
+                        <a:t>Typische Dauer</a:t>
+                      </a:r>
+                    </a:p>
+                  </a:txBody>
+                  <a:tcPr>
+                    <a:solidFill>
+                      <a:srgbClr val="003DA5"/>
+                    </a:solidFill>
+                  </a:tcPr>
+                </a:tc>
+                <a:tc>
+                  <a:txBody>
+                    <a:bodyPr wrap="square"/>
+                    <a:lstStyle/>
+                    <a:p>
+                      <a:r>
+                        <a:rPr sz="1100" b="1">
+                          <a:solidFill>
+                            <a:srgbClr val="FFFFFF"/>
+                          </a:solidFill>
+                          <a:latin typeface="Arial"/>
+                        </a:rPr>
+                        <a:t>VR-Bank-Rolle</a:t>
+                      </a:r>
+                    </a:p>
+                  </a:txBody>
+                  <a:tcPr>
+                    <a:solidFill>
+                      <a:srgbClr val="003DA5"/>
+                    </a:solidFill>
+                  </a:tcPr>
+                </a:tc>
+              </a:tr>
+              <a:tr h="475488">
+                <a:tc>
+                  <a:txBody>
+                    <a:bodyPr wrap="square"/>
+                    <a:lstStyle/>
+                    <a:p>
+                      <a:r>
+                        <a:rPr sz="1100" b="0">
+                          <a:solidFill>
+                            <a:srgbClr val="1A1A1A"/>
+                          </a:solidFill>
+                          <a:latin typeface="Arial"/>
+                        </a:rPr>
+                        <a:t>Familienintern</a:t>
+                      </a:r>
+                    </a:p>
+                  </a:txBody>
+                  <a:tcPr>
+                    <a:solidFill>
+                      <a:srgbClr val="FFFFFF"/>
+                    </a:solidFill>
+                  </a:tcPr>
+                </a:tc>
+                <a:tc>
+                  <a:txBody>
+                    <a:bodyPr wrap="square"/>
+                    <a:lstStyle/>
+                    <a:p>
+                      <a:r>
+                        <a:rPr sz="1100" b="0">
+                          <a:solidFill>
+                            <a:srgbClr val="1A1A1A"/>
+                          </a:solidFill>
+                          <a:latin typeface="Arial"/>
+                        </a:rPr>
+                        <a:t>Übergabe an Kind/Angehörige; emotional belastet; Vertrauen hoch, aber Abhängigkeiten</a:t>
+                      </a:r>
+                    </a:p>
+                  </a:txBody>
+                  <a:tcPr>
+                    <a:solidFill>
+                      <a:srgbClr val="FFFFFF"/>
+                    </a:solidFill>
+                  </a:tcPr>
+                </a:tc>
+                <a:tc>
+                  <a:txBody>
+                    <a:bodyPr wrap="square"/>
+                    <a:lstStyle/>
+                    <a:p>
+                      <a:r>
+                        <a:rPr sz="1100" b="0">
+                          <a:solidFill>
+                            <a:srgbClr val="1A1A1A"/>
+                          </a:solidFill>
+                          <a:latin typeface="Arial"/>
+                        </a:rPr>
+                        <a:t>3–7 Jahre</a:t>
+                      </a:r>
+                    </a:p>
+                  </a:txBody>
+                  <a:tcPr>
+                    <a:solidFill>
+                      <a:srgbClr val="FFFFFF"/>
+                    </a:solidFill>
+                  </a:tcPr>
+                </a:tc>
+                <a:tc>
+                  <a:txBody>
+                    <a:bodyPr wrap="square"/>
+                    <a:lstStyle/>
+                    <a:p>
+                      <a:r>
+                        <a:rPr sz="1100" b="0">
+                          <a:solidFill>
+                            <a:srgbClr val="1A1A1A"/>
+                          </a:solidFill>
+                          <a:latin typeface="Arial"/>
+                        </a:rPr>
+                        <a:t>Finanzierungspartner; emotionale Begleitung; Vermittlung ext. Berater</a:t>
+                      </a:r>
+                    </a:p>
+                  </a:txBody>
+                  <a:tcPr>
+                    <a:solidFill>
+                      <a:srgbClr val="FFFFFF"/>
+                    </a:solidFill>
+                  </a:tcPr>
+                </a:tc>
+              </a:tr>
+              <a:tr h="475488">
+                <a:tc>
+                  <a:txBody>
+                    <a:bodyPr wrap="square"/>
+                    <a:lstStyle/>
+                    <a:p>
+                      <a:r>
+                        <a:rPr sz="1100" b="0">
+                          <a:solidFill>
+                            <a:srgbClr val="1A1A1A"/>
+                          </a:solidFill>
+                          <a:latin typeface="Arial"/>
+                        </a:rPr>
+                        <a:t>Family Equity</a:t>
+                      </a:r>
+                    </a:p>
+                  </a:txBody>
+                  <a:tcPr>
+                    <a:solidFill>
+                      <a:srgbClr val="F4F6FA"/>
+                    </a:solidFill>
+                  </a:tcPr>
+                </a:tc>
+                <a:tc>
+                  <a:txBody>
+                    <a:bodyPr wrap="square"/>
+                    <a:lstStyle/>
+                    <a:p>
+                      <a:r>
+                        <a:rPr sz="1100" b="0">
+                          <a:solidFill>
+                            <a:srgbClr val="1A1A1A"/>
+                          </a:solidFill>
+                          <a:latin typeface="Arial"/>
+                        </a:rPr>
+                        <a:t>Familienangehörige werden als stille Gesellschafter beteiligt, ohne operative Verantwortung zu übernehmen; häufiger als echte Stiftung im VR-Mittelstand</a:t>
+                      </a:r>
+                    </a:p>
+                  </a:txBody>
+                  <a:tcPr>
+                    <a:solidFill>
+                      <a:srgbClr val="F4F6FA"/>
+                    </a:solidFill>
+                  </a:tcPr>
+                </a:tc>
+                <a:tc>
+                  <a:txBody>
+                    <a:bodyPr wrap="square"/>
+                    <a:lstStyle/>
+                    <a:p>
+                      <a:r>
+                        <a:rPr sz="1100" b="0">
+                          <a:solidFill>
+                            <a:srgbClr val="1A1A1A"/>
+                          </a:solidFill>
+                          <a:latin typeface="Arial"/>
+                        </a:rPr>
+                        <a:t>2–5 Jahre</a:t>
+                      </a:r>
+                    </a:p>
+                  </a:txBody>
+                  <a:tcPr>
+                    <a:solidFill>
+                      <a:srgbClr val="F4F6FA"/>
+                    </a:solidFill>
+                  </a:tcPr>
+                </a:tc>
+                <a:tc>
+                  <a:txBody>
+                    <a:bodyPr wrap="square"/>
+                    <a:lstStyle/>
+                    <a:p>
+                      <a:r>
+                        <a:rPr sz="1100" b="0">
+                          <a:solidFill>
+                            <a:srgbClr val="1A1A1A"/>
+                          </a:solidFill>
+                          <a:latin typeface="Arial"/>
+                        </a:rPr>
+                        <a:t>Finanzierungsstrukturierung; Begleitung Einlagengestaltung; Verbindung zu DZ BANK</a:t>
+                      </a:r>
+                    </a:p>
+                  </a:txBody>
+                  <a:tcPr>
+                    <a:solidFill>
+                      <a:srgbClr val="F4F6FA"/>
+                    </a:solidFill>
+                  </a:tcPr>
+                </a:tc>
+              </a:tr>
+              <a:tr h="475488">
+                <a:tc>
+                  <a:txBody>
+                    <a:bodyPr wrap="square"/>
+                    <a:lstStyle/>
+                    <a:p>
+                      <a:r>
+                        <a:rPr sz="1100" b="0">
+                          <a:solidFill>
+                            <a:srgbClr val="1A1A1A"/>
+                          </a:solidFill>
+                          <a:latin typeface="Arial"/>
+                        </a:rPr>
+                        <a:t>MBO (Management Buy-Out)</a:t>
+                      </a:r>
+                    </a:p>
+                  </a:txBody>
+                  <a:tcPr>
+                    <a:solidFill>
+                      <a:srgbClr val="FFFFFF"/>
+                    </a:solidFill>
+                  </a:tcPr>
+                </a:tc>
+                <a:tc>
+                  <a:txBody>
+                    <a:bodyPr wrap="square"/>
+                    <a:lstStyle/>
+                    <a:p>
+                      <a:r>
+                        <a:rPr sz="1100" b="0">
+                          <a:solidFill>
+                            <a:srgbClr val="1A1A1A"/>
+                          </a:solidFill>
+                          <a:latin typeface="Arial"/>
+                        </a:rPr>
+                        <a:t>Verkauf an bestehendes Management-Team; Finanzierung durch Bank ± Private Equity; hohe Komplexität</a:t>
+                      </a:r>
+                    </a:p>
+                  </a:txBody>
+                  <a:tcPr>
+                    <a:solidFill>
+                      <a:srgbClr val="FFFFFF"/>
+                    </a:solidFill>
+                  </a:tcPr>
+                </a:tc>
+                <a:tc>
+                  <a:txBody>
+                    <a:bodyPr wrap="square"/>
+                    <a:lstStyle/>
+                    <a:p>
+                      <a:r>
+                        <a:rPr sz="1100" b="0">
+                          <a:solidFill>
+                            <a:srgbClr val="1A1A1A"/>
+                          </a:solidFill>
+                          <a:latin typeface="Arial"/>
+                        </a:rPr>
+                        <a:t>2–5 Jahre</a:t>
+                      </a:r>
+                    </a:p>
+                  </a:txBody>
+                  <a:tcPr>
+                    <a:solidFill>
+                      <a:srgbClr val="FFFFFF"/>
+                    </a:solidFill>
+                  </a:tcPr>
+                </a:tc>
+                <a:tc>
+                  <a:txBody>
+                    <a:bodyPr wrap="square"/>
+                    <a:lstStyle/>
+                    <a:p>
+                      <a:r>
+                        <a:rPr sz="1100" b="0">
+                          <a:solidFill>
+                            <a:srgbClr val="1A1A1A"/>
+                          </a:solidFill>
+                          <a:latin typeface="Arial"/>
+                        </a:rPr>
+                        <a:t>Primärer Finanzierungspartner; Due-Diligence-Support; Kreditstrukturierung</a:t>
+                      </a:r>
+                    </a:p>
+                  </a:txBody>
+                  <a:tcPr>
+                    <a:solidFill>
+                      <a:srgbClr val="FFFFFF"/>
+                    </a:solidFill>
+                  </a:tcPr>
+                </a:tc>
+              </a:tr>
+              <a:tr h="475488">
+                <a:tc>
+                  <a:txBody>
+                    <a:bodyPr wrap="square"/>
+                    <a:lstStyle/>
+                    <a:p>
+                      <a:r>
+                        <a:rPr sz="1100" b="0">
+                          <a:solidFill>
+                            <a:srgbClr val="1A1A1A"/>
+                          </a:solidFill>
+                          <a:latin typeface="Arial"/>
+                        </a:rPr>
+                        <a:t>Strategischer Verkauf</a:t>
+                      </a:r>
+                    </a:p>
+                  </a:txBody>
+                  <a:tcPr>
+                    <a:solidFill>
+                      <a:srgbClr val="F4F6FA"/>
+                    </a:solidFill>
+                  </a:tcPr>
+                </a:tc>
+                <a:tc>
+                  <a:txBody>
+                    <a:bodyPr wrap="square"/>
+                    <a:lstStyle/>
+                    <a:p>
+                      <a:r>
+                        <a:rPr sz="1100" b="0">
+                          <a:solidFill>
+                            <a:srgbClr val="1A1A1A"/>
+                          </a:solidFill>
+                          <a:latin typeface="Arial"/>
+                        </a:rPr>
+                        <a:t>Verkauf an strategischen Käufer; oft Mehrheitsverkauf; Prozess durch M&amp;A-Berater</a:t>
+                      </a:r>
+                    </a:p>
+                  </a:txBody>
+                  <a:tcPr>
+                    <a:solidFill>
+                      <a:srgbClr val="F4F6FA"/>
+                    </a:solidFill>
+                  </a:tcPr>
+                </a:tc>
+                <a:tc>
+                  <a:txBody>
+                    <a:bodyPr wrap="square"/>
+                    <a:lstStyle/>
+                    <a:p>
+                      <a:r>
+                        <a:rPr sz="1100" b="0">
+                          <a:solidFill>
+                            <a:srgbClr val="1A1A1A"/>
+                          </a:solidFill>
+                          <a:latin typeface="Arial"/>
+                        </a:rPr>
+                        <a:t>1–3 Jahre</a:t>
+                      </a:r>
+                    </a:p>
+                  </a:txBody>
+                  <a:tcPr>
+                    <a:solidFill>
+                      <a:srgbClr val="F4F6FA"/>
+                    </a:solidFill>
+                  </a:tcPr>
+                </a:tc>
+                <a:tc>
+                  <a:txBody>
+                    <a:bodyPr wrap="square"/>
+                    <a:lstStyle/>
+                    <a:p>
+                      <a:r>
+                        <a:rPr sz="1100" b="0">
+                          <a:solidFill>
+                            <a:srgbClr val="1A1A1A"/>
+                          </a:solidFill>
+                          <a:latin typeface="Arial"/>
+                        </a:rPr>
+                        <a:t>Netzwerk-Partner; Refinanzierung des Käufers; ggf. DZ BANK Corporate Finance</a:t>
+                      </a:r>
+                    </a:p>
+                  </a:txBody>
+                  <a:tcPr>
+                    <a:solidFill>
+                      <a:srgbClr val="F4F6FA"/>
+                    </a:solidFill>
+                  </a:tcPr>
+                </a:tc>
+              </a:tr>
+              <a:tr h="475488">
+                <a:tc>
+                  <a:txBody>
+                    <a:bodyPr wrap="square"/>
+                    <a:lstStyle/>
+                    <a:p>
+                      <a:r>
+                        <a:rPr sz="1100" b="0">
+                          <a:solidFill>
+                            <a:srgbClr val="1A1A1A"/>
+                          </a:solidFill>
+                          <a:latin typeface="Arial"/>
+                        </a:rPr>
+                        <a:t>Stiftungslösung</a:t>
+                      </a:r>
+                    </a:p>
+                  </a:txBody>
+                  <a:tcPr>
+                    <a:solidFill>
+                      <a:srgbClr val="FFFFFF"/>
+                    </a:solidFill>
+                  </a:tcPr>
+                </a:tc>
+                <a:tc>
+                  <a:txBody>
+                    <a:bodyPr wrap="square"/>
+                    <a:lstStyle/>
+                    <a:p>
+                      <a:r>
+                        <a:rPr sz="1100" b="0">
+                          <a:solidFill>
+                            <a:srgbClr val="1A1A1A"/>
+                          </a:solidFill>
+                          <a:latin typeface="Arial"/>
+                        </a:rPr>
+                        <a:t>Übergabe an gemeinnützige oder Familienstiftung; emotional für sozialverantwortliche Unternehmer; im VR-Mittelstand selten, aber wachsend</a:t>
+                      </a:r>
+                    </a:p>
+                  </a:txBody>
+                  <a:tcPr>
+                    <a:solidFill>
+                      <a:srgbClr val="FFFFFF"/>
+                    </a:solidFill>
+                  </a:tcPr>
+                </a:tc>
+                <a:tc>
+                  <a:txBody>
+                    <a:bodyPr wrap="square"/>
+                    <a:lstStyle/>
+                    <a:p>
+                      <a:r>
+                        <a:rPr sz="1100" b="0">
+                          <a:solidFill>
+                            <a:srgbClr val="1A1A1A"/>
+                          </a:solidFill>
+                          <a:latin typeface="Arial"/>
+                        </a:rPr>
+                        <a:t>3–5 Jahre</a:t>
+                      </a:r>
+                    </a:p>
+                  </a:txBody>
+                  <a:tcPr>
+                    <a:solidFill>
+                      <a:srgbClr val="FFFFFF"/>
+                    </a:solidFill>
+                  </a:tcPr>
+                </a:tc>
+                <a:tc>
+                  <a:txBody>
+                    <a:bodyPr wrap="square"/>
+                    <a:lstStyle/>
+                    <a:p>
+                      <a:r>
+                        <a:rPr sz="1100" b="0">
+                          <a:solidFill>
+                            <a:srgbClr val="1A1A1A"/>
+                          </a:solidFill>
+                          <a:latin typeface="Arial"/>
+                        </a:rPr>
+                        <a:t>Beratungspartner; ggf. Teilfinanzierung; Steuerberater zwingend</a:t>
+                      </a:r>
+                    </a:p>
+                  </a:txBody>
+                  <a:tcPr>
+                    <a:solidFill>
+                      <a:srgbClr val="FFFFFF"/>
+                    </a:solidFill>
+                  </a:tcPr>
+                </a:tc>
+              </a:tr>
+            </a:tbl>
+          </a:graphicData>
+        </a:graphic>
+      </p:graphicFrame>
     </p:spTree>
   </p:cSld>
   <p:clrMapOvr>
@@ -4569,8 +4816,8 @@
         </p:nvSpPr>
         <p:spPr>
           <a:xfrm>
-            <a:off x="365760" y="274320"/>
-            <a:ext cx="11430000" cy="822960"/>
+            <a:off x="228600" y="182880"/>
+            <a:ext cx="11430000" cy="320040"/>
           </a:xfrm>
           <a:prstGeom prst="rect">
             <a:avLst/>
@@ -4585,33 +4832,68 @@
           <a:p>
             <a:pPr algn="l"/>
             <a:r>
-              <a:rPr sz="2200" b="1">
+              <a:rPr sz="900" b="0" i="0">
+                <a:solidFill>
+                  <a:srgbClr val="556575"/>
+                </a:solidFill>
+                <a:latin typeface="Arial"/>
+              </a:rPr>
+              <a:t>M12 · Modulinhalte</a:t>
+            </a:r>
+          </a:p>
+        </p:txBody>
+      </p:sp>
+      <p:sp>
+        <p:nvSpPr>
+          <p:cNvPr id="4" name="TextBox 3"/>
+          <p:cNvSpPr txBox="1"/>
+          <p:nvPr/>
+        </p:nvSpPr>
+        <p:spPr>
+          <a:xfrm>
+            <a:off x="365760" y="274320"/>
+            <a:ext cx="11430000" cy="777240"/>
+          </a:xfrm>
+          <a:prstGeom prst="rect">
+            <a:avLst/>
+          </a:prstGeom>
+          <a:noFill/>
+        </p:spPr>
+        <p:txBody>
+          <a:bodyPr wrap="square">
+            <a:spAutoFit/>
+          </a:bodyPr>
+          <a:lstStyle/>
+          <a:p>
+            <a:pPr algn="l"/>
+            <a:r>
+              <a:rPr sz="2200" b="1" i="0">
                 <a:solidFill>
                   <a:srgbClr val="003DA5"/>
                 </a:solidFill>
                 <a:latin typeface="Arial"/>
               </a:rPr>
-              <a:t>Diagnostische Aufgaben für Claudia</a:t>
-            </a:r>
-          </a:p>
-        </p:txBody>
-      </p:sp>
-      <p:sp>
-        <p:nvSpPr>
-          <p:cNvPr id="4" name="Rectangle 3"/>
+              <a:t>Nachfolgeprozess – fünf Phasen</a:t>
+            </a:r>
+          </a:p>
+        </p:txBody>
+      </p:sp>
+      <p:sp>
+        <p:nvSpPr>
+          <p:cNvPr id="5" name="Rectangle 4"/>
           <p:cNvSpPr/>
           <p:nvPr/>
         </p:nvSpPr>
         <p:spPr>
           <a:xfrm>
-            <a:off x="365760" y="1051560"/>
+            <a:off x="365760" y="1005840"/>
             <a:ext cx="11430000" cy="27432"/>
           </a:xfrm>
           <a:prstGeom prst="rect">
             <a:avLst/>
           </a:prstGeom>
           <a:solidFill>
-            <a:srgbClr val="E5E7EB"/>
+            <a:srgbClr val="D1D5DB"/>
           </a:solidFill>
           <a:ln>
             <a:noFill/>
@@ -4639,89 +4921,574 @@
           </a:p>
         </p:txBody>
       </p:sp>
-      <p:sp>
-        <p:nvSpPr>
-          <p:cNvPr id="5" name="TextBox 4"/>
-          <p:cNvSpPr txBox="1"/>
-          <p:nvPr/>
-        </p:nvSpPr>
-        <p:spPr>
-          <a:xfrm>
-            <a:off x="365760" y="1234440"/>
-            <a:ext cx="11430000" cy="5212080"/>
-          </a:xfrm>
-          <a:prstGeom prst="rect">
-            <a:avLst/>
-          </a:prstGeom>
-          <a:noFill/>
-        </p:spPr>
-        <p:txBody>
-          <a:bodyPr wrap="square">
-            <a:spAutoFit/>
-          </a:bodyPr>
-          <a:lstStyle/>
-          <a:p>
-            <a:pPr>
-              <a:spcBef>
-                <a:spcPts val="400"/>
-              </a:spcBef>
-            </a:pPr>
-            <a:r>
-              <a:rPr sz="1500">
-                <a:solidFill>
-                  <a:srgbClr val="003DA5"/>
-                </a:solidFill>
-                <a:latin typeface="Arial"/>
-              </a:rPr>
-              <a:t>▪  </a:t>
-            </a:r>
-            <a:r>
-              <a:rPr sz="1700">
-                <a:solidFill>
-                  <a:srgbClr val="1A1A1A"/>
-                </a:solidFill>
-                <a:latin typeface="Arial"/>
-              </a:rPr>
-              <a:t>1. Emotionaler Zustand: Ist Karl müde, oder ist das eine echte Nachfolgekrise? 2. Nachfolgepotenziale: Sind die Kinder…</a:t>
-            </a:r>
-          </a:p>
-        </p:txBody>
-      </p:sp>
-      <p:sp>
-        <p:nvSpPr>
-          <p:cNvPr id="6" name="TextBox 5"/>
-          <p:cNvSpPr txBox="1"/>
-          <p:nvPr/>
-        </p:nvSpPr>
-        <p:spPr>
-          <a:xfrm>
-            <a:off x="11704320" y="6492240"/>
-            <a:ext cx="365760" cy="274320"/>
-          </a:xfrm>
-          <a:prstGeom prst="rect">
-            <a:avLst/>
-          </a:prstGeom>
-          <a:noFill/>
-        </p:spPr>
-        <p:txBody>
-          <a:bodyPr wrap="square">
-            <a:spAutoFit/>
-          </a:bodyPr>
-          <a:lstStyle/>
-          <a:p>
-            <a:pPr algn="r"/>
-            <a:r>
-              <a:rPr sz="1000" b="0">
-                <a:solidFill>
-                  <a:srgbClr val="6B7280"/>
-                </a:solidFill>
-                <a:latin typeface="Arial"/>
-              </a:rPr>
-              <a:t>12</a:t>
-            </a:r>
-          </a:p>
-        </p:txBody>
-      </p:sp>
+      <p:graphicFrame>
+        <p:nvGraphicFramePr>
+          <p:cNvPr id="6" name="Table 5"/>
+          <p:cNvGraphicFramePr>
+            <a:graphicFrameLocks noGrp="1"/>
+          </p:cNvGraphicFramePr>
+          <p:nvPr/>
+        </p:nvGraphicFramePr>
+        <p:xfrm>
+          <a:off x="365760" y="1143000"/>
+          <a:ext cx="11430000" cy="2852928"/>
+        </p:xfrm>
+        <a:graphic>
+          <a:graphicData uri="http://schemas.openxmlformats.org/drawingml/2006/table">
+            <a:tbl>
+              <a:tblPr firstRow="1" bandRow="1">
+                <a:tableStyleId>{5C22544A-7EE6-4342-B048-85BDC9FD1C3A}</a:tableStyleId>
+              </a:tblPr>
+              <a:tblGrid>
+                <a:gridCol w="2857500"/>
+                <a:gridCol w="2857500"/>
+                <a:gridCol w="2857500"/>
+                <a:gridCol w="2857500"/>
+              </a:tblGrid>
+              <a:tr h="475488">
+                <a:tc>
+                  <a:txBody>
+                    <a:bodyPr wrap="square"/>
+                    <a:lstStyle/>
+                    <a:p>
+                      <a:r>
+                        <a:rPr sz="1100" b="1">
+                          <a:solidFill>
+                            <a:srgbClr val="FFFFFF"/>
+                          </a:solidFill>
+                          <a:latin typeface="Arial"/>
+                        </a:rPr>
+                        <a:t>Phase</a:t>
+                      </a:r>
+                    </a:p>
+                  </a:txBody>
+                  <a:tcPr>
+                    <a:solidFill>
+                      <a:srgbClr val="003DA5"/>
+                    </a:solidFill>
+                  </a:tcPr>
+                </a:tc>
+                <a:tc>
+                  <a:txBody>
+                    <a:bodyPr wrap="square"/>
+                    <a:lstStyle/>
+                    <a:p>
+                      <a:r>
+                        <a:rPr sz="1100" b="1">
+                          <a:solidFill>
+                            <a:srgbClr val="FFFFFF"/>
+                          </a:solidFill>
+                          <a:latin typeface="Arial"/>
+                        </a:rPr>
+                        <a:t>Zeitraum</a:t>
+                      </a:r>
+                    </a:p>
+                  </a:txBody>
+                  <a:tcPr>
+                    <a:solidFill>
+                      <a:srgbClr val="003DA5"/>
+                    </a:solidFill>
+                  </a:tcPr>
+                </a:tc>
+                <a:tc>
+                  <a:txBody>
+                    <a:bodyPr wrap="square"/>
+                    <a:lstStyle/>
+                    <a:p>
+                      <a:r>
+                        <a:rPr sz="1100" b="1">
+                          <a:solidFill>
+                            <a:srgbClr val="FFFFFF"/>
+                          </a:solidFill>
+                          <a:latin typeface="Arial"/>
+                        </a:rPr>
+                        <a:t>Kern-Aufgaben</a:t>
+                      </a:r>
+                    </a:p>
+                  </a:txBody>
+                  <a:tcPr>
+                    <a:solidFill>
+                      <a:srgbClr val="003DA5"/>
+                    </a:solidFill>
+                  </a:tcPr>
+                </a:tc>
+                <a:tc>
+                  <a:txBody>
+                    <a:bodyPr wrap="square"/>
+                    <a:lstStyle/>
+                    <a:p>
+                      <a:r>
+                        <a:rPr sz="1100" b="1">
+                          <a:solidFill>
+                            <a:srgbClr val="FFFFFF"/>
+                          </a:solidFill>
+                          <a:latin typeface="Arial"/>
+                        </a:rPr>
+                        <a:t>FK-Aufgabe</a:t>
+                      </a:r>
+                    </a:p>
+                  </a:txBody>
+                  <a:tcPr>
+                    <a:solidFill>
+                      <a:srgbClr val="003DA5"/>
+                    </a:solidFill>
+                  </a:tcPr>
+                </a:tc>
+              </a:tr>
+              <a:tr h="475488">
+                <a:tc>
+                  <a:txBody>
+                    <a:bodyPr wrap="square"/>
+                    <a:lstStyle/>
+                    <a:p>
+                      <a:r>
+                        <a:rPr sz="1100" b="0">
+                          <a:solidFill>
+                            <a:srgbClr val="1A1A1A"/>
+                          </a:solidFill>
+                          <a:latin typeface="Arial"/>
+                        </a:rPr>
+                        <a:t>1 Bewusstseinsbildung</a:t>
+                      </a:r>
+                    </a:p>
+                  </a:txBody>
+                  <a:tcPr>
+                    <a:solidFill>
+                      <a:srgbClr val="FFFFFF"/>
+                    </a:solidFill>
+                  </a:tcPr>
+                </a:tc>
+                <a:tc>
+                  <a:txBody>
+                    <a:bodyPr wrap="square"/>
+                    <a:lstStyle/>
+                    <a:p>
+                      <a:r>
+                        <a:rPr sz="1100" b="0">
+                          <a:solidFill>
+                            <a:srgbClr val="1A1A1A"/>
+                          </a:solidFill>
+                          <a:latin typeface="Arial"/>
+                        </a:rPr>
+                        <a:t>Jahr −3 bis −2</a:t>
+                      </a:r>
+                    </a:p>
+                  </a:txBody>
+                  <a:tcPr>
+                    <a:solidFill>
+                      <a:srgbClr val="FFFFFF"/>
+                    </a:solidFill>
+                  </a:tcPr>
+                </a:tc>
+                <a:tc>
+                  <a:txBody>
+                    <a:bodyPr wrap="square"/>
+                    <a:lstStyle/>
+                    <a:p>
+                      <a:r>
+                        <a:rPr sz="1100" b="0">
+                          <a:solidFill>
+                            <a:srgbClr val="1A1A1A"/>
+                          </a:solidFill>
+                          <a:latin typeface="Arial"/>
+                        </a:rPr>
+                        <a:t>Nachfolge als Thema anerkennen; erste exploratorische Gespräche</a:t>
+                      </a:r>
+                    </a:p>
+                  </a:txBody>
+                  <a:tcPr>
+                    <a:solidFill>
+                      <a:srgbClr val="FFFFFF"/>
+                    </a:solidFill>
+                  </a:tcPr>
+                </a:tc>
+                <a:tc>
+                  <a:txBody>
+                    <a:bodyPr wrap="square"/>
+                    <a:lstStyle/>
+                    <a:p>
+                      <a:r>
+                        <a:rPr sz="1100" b="0">
+                          <a:solidFill>
+                            <a:srgbClr val="1A1A1A"/>
+                          </a:solidFill>
+                          <a:latin typeface="Arial"/>
+                        </a:rPr>
+                        <a:t>Enttabuisieren; Szenarien aufzeigen; psychologische Sicherheit schaffen</a:t>
+                      </a:r>
+                    </a:p>
+                  </a:txBody>
+                  <a:tcPr>
+                    <a:solidFill>
+                      <a:srgbClr val="FFFFFF"/>
+                    </a:solidFill>
+                  </a:tcPr>
+                </a:tc>
+              </a:tr>
+              <a:tr h="475488">
+                <a:tc>
+                  <a:txBody>
+                    <a:bodyPr wrap="square"/>
+                    <a:lstStyle/>
+                    <a:p>
+                      <a:r>
+                        <a:rPr sz="1100" b="0">
+                          <a:solidFill>
+                            <a:srgbClr val="1A1A1A"/>
+                          </a:solidFill>
+                          <a:latin typeface="Arial"/>
+                        </a:rPr>
+                        <a:t>2 Vorbereitung</a:t>
+                      </a:r>
+                    </a:p>
+                  </a:txBody>
+                  <a:tcPr>
+                    <a:solidFill>
+                      <a:srgbClr val="F4F6FA"/>
+                    </a:solidFill>
+                  </a:tcPr>
+                </a:tc>
+                <a:tc>
+                  <a:txBody>
+                    <a:bodyPr wrap="square"/>
+                    <a:lstStyle/>
+                    <a:p>
+                      <a:r>
+                        <a:rPr sz="1100" b="0">
+                          <a:solidFill>
+                            <a:srgbClr val="1A1A1A"/>
+                          </a:solidFill>
+                          <a:latin typeface="Arial"/>
+                        </a:rPr>
+                        <a:t>Jahr −2 bis −1</a:t>
+                      </a:r>
+                    </a:p>
+                  </a:txBody>
+                  <a:tcPr>
+                    <a:solidFill>
+                      <a:srgbClr val="F4F6FA"/>
+                    </a:solidFill>
+                  </a:tcPr>
+                </a:tc>
+                <a:tc>
+                  <a:txBody>
+                    <a:bodyPr wrap="square"/>
+                    <a:lstStyle/>
+                    <a:p>
+                      <a:r>
+                        <a:rPr sz="1100" b="0">
+                          <a:solidFill>
+                            <a:srgbClr val="1A1A1A"/>
+                          </a:solidFill>
+                          <a:latin typeface="Arial"/>
+                        </a:rPr>
+                        <a:t>Unternehmensbewertung; Optionen-Analyse; externe Berater einbinden</a:t>
+                      </a:r>
+                    </a:p>
+                  </a:txBody>
+                  <a:tcPr>
+                    <a:solidFill>
+                      <a:srgbClr val="F4F6FA"/>
+                    </a:solidFill>
+                  </a:tcPr>
+                </a:tc>
+                <a:tc>
+                  <a:txBody>
+                    <a:bodyPr wrap="square"/>
+                    <a:lstStyle/>
+                    <a:p>
+                      <a:r>
+                        <a:rPr sz="1100" b="0">
+                          <a:solidFill>
+                            <a:srgbClr val="1A1A1A"/>
+                          </a:solidFill>
+                          <a:latin typeface="Arial"/>
+                        </a:rPr>
+                        <a:t>Finanzierungskonzepte entwickeln; Verbundpartner koordinieren</a:t>
+                      </a:r>
+                    </a:p>
+                  </a:txBody>
+                  <a:tcPr>
+                    <a:solidFill>
+                      <a:srgbClr val="F4F6FA"/>
+                    </a:solidFill>
+                  </a:tcPr>
+                </a:tc>
+              </a:tr>
+              <a:tr h="475488">
+                <a:tc>
+                  <a:txBody>
+                    <a:bodyPr wrap="square"/>
+                    <a:lstStyle/>
+                    <a:p>
+                      <a:r>
+                        <a:rPr sz="1100" b="0">
+                          <a:solidFill>
+                            <a:srgbClr val="1A1A1A"/>
+                          </a:solidFill>
+                          <a:latin typeface="Arial"/>
+                        </a:rPr>
+                        <a:t>3 Entscheidung &amp; Verhandlung</a:t>
+                      </a:r>
+                    </a:p>
+                  </a:txBody>
+                  <a:tcPr>
+                    <a:solidFill>
+                      <a:srgbClr val="FFFFFF"/>
+                    </a:solidFill>
+                  </a:tcPr>
+                </a:tc>
+                <a:tc>
+                  <a:txBody>
+                    <a:bodyPr wrap="square"/>
+                    <a:lstStyle/>
+                    <a:p>
+                      <a:r>
+                        <a:rPr sz="1100" b="0">
+                          <a:solidFill>
+                            <a:srgbClr val="1A1A1A"/>
+                          </a:solidFill>
+                          <a:latin typeface="Arial"/>
+                        </a:rPr>
+                        <a:t>Jahr −1</a:t>
+                      </a:r>
+                    </a:p>
+                  </a:txBody>
+                  <a:tcPr>
+                    <a:solidFill>
+                      <a:srgbClr val="FFFFFF"/>
+                    </a:solidFill>
+                  </a:tcPr>
+                </a:tc>
+                <a:tc>
+                  <a:txBody>
+                    <a:bodyPr wrap="square"/>
+                    <a:lstStyle/>
+                    <a:p>
+                      <a:r>
+                        <a:rPr sz="1100" b="0">
+                          <a:solidFill>
+                            <a:srgbClr val="1A1A1A"/>
+                          </a:solidFill>
+                          <a:latin typeface="Arial"/>
+                        </a:rPr>
+                        <a:t>Nachfolgeart verbindlich wählen; Kaufpreis verhandeln; notarielle Regelungen</a:t>
+                      </a:r>
+                    </a:p>
+                  </a:txBody>
+                  <a:tcPr>
+                    <a:solidFill>
+                      <a:srgbClr val="FFFFFF"/>
+                    </a:solidFill>
+                  </a:tcPr>
+                </a:tc>
+                <a:tc>
+                  <a:txBody>
+                    <a:bodyPr wrap="square"/>
+                    <a:lstStyle/>
+                    <a:p>
+                      <a:r>
+                        <a:rPr sz="1100" b="0">
+                          <a:solidFill>
+                            <a:srgbClr val="1A1A1A"/>
+                          </a:solidFill>
+                          <a:latin typeface="Arial"/>
+                        </a:rPr>
+                        <a:t>Finanzierungszusage; Due-Diligence-Support; Treuhänder-Funktion</a:t>
+                      </a:r>
+                    </a:p>
+                  </a:txBody>
+                  <a:tcPr>
+                    <a:solidFill>
+                      <a:srgbClr val="FFFFFF"/>
+                    </a:solidFill>
+                  </a:tcPr>
+                </a:tc>
+              </a:tr>
+              <a:tr h="475488">
+                <a:tc>
+                  <a:txBody>
+                    <a:bodyPr wrap="square"/>
+                    <a:lstStyle/>
+                    <a:p>
+                      <a:r>
+                        <a:rPr sz="1100" b="0">
+                          <a:solidFill>
+                            <a:srgbClr val="1A1A1A"/>
+                          </a:solidFill>
+                          <a:latin typeface="Arial"/>
+                        </a:rPr>
+                        <a:t>4 Handover</a:t>
+                      </a:r>
+                    </a:p>
+                  </a:txBody>
+                  <a:tcPr>
+                    <a:solidFill>
+                      <a:srgbClr val="F4F6FA"/>
+                    </a:solidFill>
+                  </a:tcPr>
+                </a:tc>
+                <a:tc>
+                  <a:txBody>
+                    <a:bodyPr wrap="square"/>
+                    <a:lstStyle/>
+                    <a:p>
+                      <a:r>
+                        <a:rPr sz="1100" b="0">
+                          <a:solidFill>
+                            <a:srgbClr val="1A1A1A"/>
+                          </a:solidFill>
+                          <a:latin typeface="Arial"/>
+                        </a:rPr>
+                        <a:t>Übergabejahr</a:t>
+                      </a:r>
+                    </a:p>
+                  </a:txBody>
+                  <a:tcPr>
+                    <a:solidFill>
+                      <a:srgbClr val="F4F6FA"/>
+                    </a:solidFill>
+                  </a:tcPr>
+                </a:tc>
+                <a:tc>
+                  <a:txBody>
+                    <a:bodyPr wrap="square"/>
+                    <a:lstStyle/>
+                    <a:p>
+                      <a:r>
+                        <a:rPr sz="1100" b="0">
+                          <a:solidFill>
+                            <a:srgbClr val="1A1A1A"/>
+                          </a:solidFill>
+                          <a:latin typeface="Arial"/>
+                        </a:rPr>
+                        <a:t>Formale Übergabe; Einarbeitung des Nachfolgers (6–12 Monate)</a:t>
+                      </a:r>
+                    </a:p>
+                  </a:txBody>
+                  <a:tcPr>
+                    <a:solidFill>
+                      <a:srgbClr val="F4F6FA"/>
+                    </a:solidFill>
+                  </a:tcPr>
+                </a:tc>
+                <a:tc>
+                  <a:txBody>
+                    <a:bodyPr wrap="square"/>
+                    <a:lstStyle/>
+                    <a:p>
+                      <a:r>
+                        <a:rPr sz="1100" b="0">
+                          <a:solidFill>
+                            <a:srgbClr val="1A1A1A"/>
+                          </a:solidFill>
+                          <a:latin typeface="Arial"/>
+                        </a:rPr>
+                        <a:t>Kreditumstellung; Psychological Support; Loslassbegleitung</a:t>
+                      </a:r>
+                    </a:p>
+                  </a:txBody>
+                  <a:tcPr>
+                    <a:solidFill>
+                      <a:srgbClr val="F4F6FA"/>
+                    </a:solidFill>
+                  </a:tcPr>
+                </a:tc>
+              </a:tr>
+              <a:tr h="475488">
+                <a:tc>
+                  <a:txBody>
+                    <a:bodyPr wrap="square"/>
+                    <a:lstStyle/>
+                    <a:p>
+                      <a:r>
+                        <a:rPr sz="1100" b="0">
+                          <a:solidFill>
+                            <a:srgbClr val="1A1A1A"/>
+                          </a:solidFill>
+                          <a:latin typeface="Arial"/>
+                        </a:rPr>
+                        <a:t>5 Nachbegleitung</a:t>
+                      </a:r>
+                    </a:p>
+                  </a:txBody>
+                  <a:tcPr>
+                    <a:solidFill>
+                      <a:srgbClr val="FFFFFF"/>
+                    </a:solidFill>
+                  </a:tcPr>
+                </a:tc>
+                <a:tc>
+                  <a:txBody>
+                    <a:bodyPr wrap="square"/>
+                    <a:lstStyle/>
+                    <a:p>
+                      <a:r>
+                        <a:rPr sz="1100" b="0">
+                          <a:solidFill>
+                            <a:srgbClr val="1A1A1A"/>
+                          </a:solidFill>
+                          <a:latin typeface="Arial"/>
+                        </a:rPr>
+                        <a:t>Jahr +1 bis +2</a:t>
+                      </a:r>
+                    </a:p>
+                  </a:txBody>
+                  <a:tcPr>
+                    <a:solidFill>
+                      <a:srgbClr val="FFFFFF"/>
+                    </a:solidFill>
+                  </a:tcPr>
+                </a:tc>
+                <a:tc>
+                  <a:txBody>
+                    <a:bodyPr wrap="square"/>
+                    <a:lstStyle/>
+                    <a:p>
+                      <a:r>
+                        <a:rPr sz="1100" b="0">
+                          <a:solidFill>
+                            <a:srgbClr val="1A1A1A"/>
+                          </a:solidFill>
+                          <a:latin typeface="Arial"/>
+                        </a:rPr>
+                        <a:t>Vorgänger tritt aus operativer Rolle aus; Nachfolger übernimmt vollständig</a:t>
+                      </a:r>
+                    </a:p>
+                  </a:txBody>
+                  <a:tcPr>
+                    <a:solidFill>
+                      <a:srgbClr val="FFFFFF"/>
+                    </a:solidFill>
+                  </a:tcPr>
+                </a:tc>
+                <a:tc>
+                  <a:txBody>
+                    <a:bodyPr wrap="square"/>
+                    <a:lstStyle/>
+                    <a:p>
+                      <a:r>
+                        <a:rPr sz="1100" b="0">
+                          <a:solidFill>
+                            <a:srgbClr val="1A1A1A"/>
+                          </a:solidFill>
+                          <a:latin typeface="Arial"/>
+                        </a:rPr>
+                        <a:t>Kontinuität in der Geschäftsbeziehung; neuen Kreditberater etablieren</a:t>
+                      </a:r>
+                    </a:p>
+                  </a:txBody>
+                  <a:tcPr>
+                    <a:solidFill>
+                      <a:srgbClr val="FFFFFF"/>
+                    </a:solidFill>
+                  </a:tcPr>
+                </a:tc>
+              </a:tr>
+            </a:tbl>
+          </a:graphicData>
+        </a:graphic>
+      </p:graphicFrame>
     </p:spTree>
   </p:cSld>
   <p:clrMapOvr>
@@ -4799,8 +5566,8 @@
         </p:nvSpPr>
         <p:spPr>
           <a:xfrm>
-            <a:off x="365760" y="274320"/>
-            <a:ext cx="11430000" cy="822960"/>
+            <a:off x="228600" y="182880"/>
+            <a:ext cx="11430000" cy="320040"/>
           </a:xfrm>
           <a:prstGeom prst="rect">
             <a:avLst/>
@@ -4815,33 +5582,68 @@
           <a:p>
             <a:pPr algn="l"/>
             <a:r>
-              <a:rPr sz="2200" b="1">
+              <a:rPr sz="900" b="0" i="0">
+                <a:solidFill>
+                  <a:srgbClr val="556575"/>
+                </a:solidFill>
+                <a:latin typeface="Arial"/>
+              </a:rPr>
+              <a:t>M12 · Modulinhalte</a:t>
+            </a:r>
+          </a:p>
+        </p:txBody>
+      </p:sp>
+      <p:sp>
+        <p:nvSpPr>
+          <p:cNvPr id="4" name="TextBox 3"/>
+          <p:cNvSpPr txBox="1"/>
+          <p:nvPr/>
+        </p:nvSpPr>
+        <p:spPr>
+          <a:xfrm>
+            <a:off x="365760" y="274320"/>
+            <a:ext cx="11430000" cy="777240"/>
+          </a:xfrm>
+          <a:prstGeom prst="rect">
+            <a:avLst/>
+          </a:prstGeom>
+          <a:noFill/>
+        </p:spPr>
+        <p:txBody>
+          <a:bodyPr wrap="square">
+            <a:spAutoFit/>
+          </a:bodyPr>
+          <a:lstStyle/>
+          <a:p>
+            <a:pPr algn="l"/>
+            <a:r>
+              <a:rPr sz="2200" b="1" i="0">
                 <a:solidFill>
                   <a:srgbClr val="003DA5"/>
                 </a:solidFill>
                 <a:latin typeface="Arial"/>
               </a:rPr>
-              <a:t>Beispiel-Gesprächsverlauf (systemische Technik)</a:t>
-            </a:r>
-          </a:p>
-        </p:txBody>
-      </p:sp>
-      <p:sp>
-        <p:nvSpPr>
-          <p:cNvPr id="4" name="Rectangle 3"/>
+              <a:t>Regulatorische Eckpunkte (Orientierungsrahmen)</a:t>
+            </a:r>
+          </a:p>
+        </p:txBody>
+      </p:sp>
+      <p:sp>
+        <p:nvSpPr>
+          <p:cNvPr id="5" name="Rectangle 4"/>
           <p:cNvSpPr/>
           <p:nvPr/>
         </p:nvSpPr>
         <p:spPr>
           <a:xfrm>
-            <a:off x="365760" y="1051560"/>
+            <a:off x="365760" y="1005840"/>
             <a:ext cx="11430000" cy="27432"/>
           </a:xfrm>
           <a:prstGeom prst="rect">
             <a:avLst/>
           </a:prstGeom>
           <a:solidFill>
-            <a:srgbClr val="E5E7EB"/>
+            <a:srgbClr val="D1D5DB"/>
           </a:solidFill>
           <a:ln>
             <a:noFill/>
@@ -4871,13 +5673,13 @@
       </p:sp>
       <p:sp>
         <p:nvSpPr>
-          <p:cNvPr id="5" name="TextBox 4"/>
+          <p:cNvPr id="6" name="TextBox 5"/>
           <p:cNvSpPr txBox="1"/>
           <p:nvPr/>
         </p:nvSpPr>
         <p:spPr>
           <a:xfrm>
-            <a:off x="365760" y="1234440"/>
+            <a:off x="365760" y="1143000"/>
             <a:ext cx="11430000" cy="5212080"/>
           </a:xfrm>
           <a:prstGeom prst="rect">
@@ -4893,7 +5695,7 @@
           <a:p>
             <a:pPr>
               <a:spcBef>
-                <a:spcPts val="400"/>
+                <a:spcPts val="500"/>
               </a:spcBef>
             </a:pPr>
             <a:r>
@@ -4906,19 +5708,28 @@
               <a:t>▪  </a:t>
             </a:r>
             <a:r>
+              <a:rPr sz="1700" b="1">
+                <a:solidFill>
+                  <a:srgbClr val="003DA5"/>
+                </a:solidFill>
+                <a:latin typeface="Arial"/>
+              </a:rPr>
+              <a:t>Erbschaftsteuer / Schenkungsteuer: </a:t>
+            </a:r>
+            <a:r>
               <a:rPr sz="1700">
                 <a:solidFill>
                   <a:srgbClr val="1A1A1A"/>
                 </a:solidFill>
                 <a:latin typeface="Arial"/>
               </a:rPr>
-              <a:t>Claudia: „Karl, ich freue mich, dass Sie das Thema ansprechen. Das ist nicht einfach. Bevor wir über Lösungen sprechen…</a:t>
+              <a:t>§ 13a ErbStG regelt die Begünstigungen für Betriebsvermögen bei familieninterner Übergabe (Verschonungsabschlag 85 %; Optionsverschonung 100 %; Behaltensfristen 5 bzw. 7 Jahre).…</a:t>
             </a:r>
           </a:p>
           <a:p>
             <a:pPr>
               <a:spcBef>
-                <a:spcPts val="400"/>
+                <a:spcPts val="500"/>
               </a:spcBef>
             </a:pPr>
             <a:r>
@@ -4931,19 +5742,28 @@
               <a:t>▪  </a:t>
             </a:r>
             <a:r>
+              <a:rPr sz="1700" b="1">
+                <a:solidFill>
+                  <a:srgbClr val="003DA5"/>
+                </a:solidFill>
+                <a:latin typeface="Arial"/>
+              </a:rPr>
+              <a:t>400.000 EUR je Elternteil und je Kind: </a:t>
+            </a:r>
+            <a:r>
               <a:rPr sz="1700">
                 <a:solidFill>
                   <a:srgbClr val="1A1A1A"/>
                 </a:solidFill>
                 <a:latin typeface="Arial"/>
               </a:rPr>
-              <a:t>Karl: [Nickt]</a:t>
+              <a:t>– d.h. ein Kind kann im Erbfall von beiden Elternteilen zusammen bis zu 800.000 EUR steuerfrei erhalten. Wichtig: Dieser Freibetrag kann</a:t>
             </a:r>
           </a:p>
           <a:p>
             <a:pPr>
               <a:spcBef>
-                <a:spcPts val="400"/>
+                <a:spcPts val="500"/>
               </a:spcBef>
             </a:pPr>
             <a:r>
@@ -4956,19 +5776,28 @@
               <a:t>▪  </a:t>
             </a:r>
             <a:r>
+              <a:rPr sz="1700" b="1">
+                <a:solidFill>
+                  <a:srgbClr val="003DA5"/>
+                </a:solidFill>
+                <a:latin typeface="Arial"/>
+              </a:rPr>
+              <a:t>alle 10 Jahre erneut genutzt werden: </a:t>
+            </a:r>
+            <a:r>
               <a:rPr sz="1700">
                 <a:solidFill>
                   <a:srgbClr val="1A1A1A"/>
                 </a:solidFill>
                 <a:latin typeface="Arial"/>
               </a:rPr>
-              <a:t>Claudia: „Wenn Sie sagen ‚ich weiß nicht, wie ich das übergeben soll' – was ist das Größte daran, das Ihnen Sorge…</a:t>
+              <a:t>– eine schrittweise Schenkung über mehrere Jahre kann daher steuerlich deutlich günstiger sein als eine Einmal-Übertragung. Hinweis: Diese Orientierungsinformation ersetzt keine…</a:t>
             </a:r>
           </a:p>
           <a:p>
             <a:pPr>
               <a:spcBef>
-                <a:spcPts val="400"/>
+                <a:spcPts val="500"/>
               </a:spcBef>
             </a:pPr>
             <a:r>
@@ -4981,19 +5810,28 @@
               <a:t>▪  </a:t>
             </a:r>
             <a:r>
+              <a:rPr sz="1700" b="1">
+                <a:solidFill>
+                  <a:srgbClr val="003DA5"/>
+                </a:solidFill>
+                <a:latin typeface="Arial"/>
+              </a:rPr>
+              <a:t>Gesellschaftsrechtliche Fragen: </a:t>
+            </a:r>
+            <a:r>
               <a:rPr sz="1700">
                 <a:solidFill>
                   <a:srgbClr val="1A1A1A"/>
                 </a:solidFill>
                 <a:latin typeface="Arial"/>
               </a:rPr>
-              <a:t>Karl: „Dass das Unternehmen in schlechte Hände kommt. Meine Mitarbeiter sind wie meine Familie. Ich kann mir nicht…</a:t>
+              <a:t>(GmbH-G, HGB): Sind Gesellschafterverträge aktuell? Gibt es Vorkaufsrechte?</a:t>
             </a:r>
           </a:p>
           <a:p>
             <a:pPr>
               <a:spcBef>
-                <a:spcPts val="400"/>
+                <a:spcPts val="500"/>
               </a:spcBef>
             </a:pPr>
             <a:r>
@@ -5006,73 +5844,22 @@
               <a:t>▪  </a:t>
             </a:r>
             <a:r>
+              <a:rPr sz="1700" b="1">
+                <a:solidFill>
+                  <a:srgbClr val="003DA5"/>
+                </a:solidFill>
+                <a:latin typeface="Arial"/>
+              </a:rPr>
+              <a:t>Praxishinweis: Der Steuerberater als Gatekeeper: </a:t>
+            </a:r>
+            <a:r>
               <a:rPr sz="1700">
                 <a:solidFill>
                   <a:srgbClr val="1A1A1A"/>
                 </a:solidFill>
                 <a:latin typeface="Arial"/>
               </a:rPr>
-              <a:t>Claudia: [Zirkuläre Frage] „Spannend. Wenn ich Ihren Meister Dieter fragen würde – wie würde der das sehen?"</a:t>
-            </a:r>
-          </a:p>
-          <a:p>
-            <a:pPr>
-              <a:spcBef>
-                <a:spcPts val="400"/>
-              </a:spcBef>
-            </a:pPr>
-            <a:r>
-              <a:rPr sz="1500">
-                <a:solidFill>
-                  <a:srgbClr val="003DA5"/>
-                </a:solidFill>
-                <a:latin typeface="Arial"/>
-              </a:rPr>
-              <a:t>▪  </a:t>
-            </a:r>
-            <a:r>
-              <a:rPr sz="1700">
-                <a:solidFill>
-                  <a:srgbClr val="1A1A1A"/>
-                </a:solidFill>
-                <a:latin typeface="Arial"/>
-              </a:rPr>
-              <a:t>Karl: „Ah… naja, Dieter würde sich sicher fühlen wollen, dass alles beim Alten bleibt. Wir haben das nie besprochen,…</a:t>
-            </a:r>
-          </a:p>
-        </p:txBody>
-      </p:sp>
-      <p:sp>
-        <p:nvSpPr>
-          <p:cNvPr id="6" name="TextBox 5"/>
-          <p:cNvSpPr txBox="1"/>
-          <p:nvPr/>
-        </p:nvSpPr>
-        <p:spPr>
-          <a:xfrm>
-            <a:off x="11704320" y="6492240"/>
-            <a:ext cx="365760" cy="274320"/>
-          </a:xfrm>
-          <a:prstGeom prst="rect">
-            <a:avLst/>
-          </a:prstGeom>
-          <a:noFill/>
-        </p:spPr>
-        <p:txBody>
-          <a:bodyPr wrap="square">
-            <a:spAutoFit/>
-          </a:bodyPr>
-          <a:lstStyle/>
-          <a:p>
-            <a:pPr algn="r"/>
-            <a:r>
-              <a:rPr sz="1000" b="0">
-                <a:solidFill>
-                  <a:srgbClr val="6B7280"/>
-                </a:solidFill>
-                <a:latin typeface="Arial"/>
-              </a:rPr>
-              <a:t>13</a:t>
+              <a:t>&gt; &gt; In der Praxis ist oft nicht der FK der erste Ansprechpartner für Nachfolgefragen – sondern der Steuerberater. Wenn dieser die Bank nicht mag, seinen eigenen M&amp;A-Kontakt hat…</a:t>
             </a:r>
           </a:p>
         </p:txBody>
@@ -5154,8 +5941,8 @@
         </p:nvSpPr>
         <p:spPr>
           <a:xfrm>
-            <a:off x="365760" y="274320"/>
-            <a:ext cx="11430000" cy="822960"/>
+            <a:off x="228600" y="182880"/>
+            <a:ext cx="11430000" cy="320040"/>
           </a:xfrm>
           <a:prstGeom prst="rect">
             <a:avLst/>
@@ -5170,33 +5957,68 @@
           <a:p>
             <a:pPr algn="l"/>
             <a:r>
-              <a:rPr sz="2200" b="1">
+              <a:rPr sz="900" b="0" i="0">
+                <a:solidFill>
+                  <a:srgbClr val="556575"/>
+                </a:solidFill>
+                <a:latin typeface="Arial"/>
+              </a:rPr>
+              <a:t>M12 · Modulinhalte</a:t>
+            </a:r>
+          </a:p>
+        </p:txBody>
+      </p:sp>
+      <p:sp>
+        <p:nvSpPr>
+          <p:cNvPr id="4" name="TextBox 3"/>
+          <p:cNvSpPr txBox="1"/>
+          <p:nvPr/>
+        </p:nvSpPr>
+        <p:spPr>
+          <a:xfrm>
+            <a:off x="365760" y="274320"/>
+            <a:ext cx="11430000" cy="777240"/>
+          </a:xfrm>
+          <a:prstGeom prst="rect">
+            <a:avLst/>
+          </a:prstGeom>
+          <a:noFill/>
+        </p:spPr>
+        <p:txBody>
+          <a:bodyPr wrap="square">
+            <a:spAutoFit/>
+          </a:bodyPr>
+          <a:lstStyle/>
+          <a:p>
+            <a:pPr algn="l"/>
+            <a:r>
+              <a:rPr sz="2200" b="1" i="0">
                 <a:solidFill>
                   <a:srgbClr val="003DA5"/>
                 </a:solidFill>
                 <a:latin typeface="Arial"/>
               </a:rPr>
-              <a:t>Vorbereitung (vor dem Gespräch)</a:t>
-            </a:r>
-          </a:p>
-        </p:txBody>
-      </p:sp>
-      <p:sp>
-        <p:nvSpPr>
-          <p:cNvPr id="4" name="Rectangle 3"/>
+              <a:t>Regulatorische Eckpunkte (Orientierungsrahmen)</a:t>
+            </a:r>
+          </a:p>
+        </p:txBody>
+      </p:sp>
+      <p:sp>
+        <p:nvSpPr>
+          <p:cNvPr id="5" name="Rectangle 4"/>
           <p:cNvSpPr/>
           <p:nvPr/>
         </p:nvSpPr>
         <p:spPr>
           <a:xfrm>
-            <a:off x="365760" y="1051560"/>
+            <a:off x="365760" y="1005840"/>
             <a:ext cx="11430000" cy="27432"/>
           </a:xfrm>
           <a:prstGeom prst="rect">
             <a:avLst/>
           </a:prstGeom>
           <a:solidFill>
-            <a:srgbClr val="E5E7EB"/>
+            <a:srgbClr val="D1D5DB"/>
           </a:solidFill>
           <a:ln>
             <a:noFill/>
@@ -5226,13 +6048,13 @@
       </p:sp>
       <p:sp>
         <p:nvSpPr>
-          <p:cNvPr id="5" name="TextBox 4"/>
+          <p:cNvPr id="6" name="TextBox 5"/>
           <p:cNvSpPr txBox="1"/>
           <p:nvPr/>
         </p:nvSpPr>
         <p:spPr>
           <a:xfrm>
-            <a:off x="365760" y="1234440"/>
+            <a:off x="365760" y="1143000"/>
             <a:ext cx="11430000" cy="5212080"/>
           </a:xfrm>
           <a:prstGeom prst="rect">
@@ -5248,7 +6070,7 @@
           <a:p>
             <a:pPr>
               <a:spcBef>
-                <a:spcPts val="400"/>
+                <a:spcPts val="500"/>
               </a:spcBef>
             </a:pPr>
             <a:r>
@@ -5261,19 +6083,28 @@
               <a:t>▪  </a:t>
             </a:r>
             <a:r>
+              <a:rPr sz="1700" b="1">
+                <a:solidFill>
+                  <a:srgbClr val="003DA5"/>
+                </a:solidFill>
+                <a:latin typeface="Arial"/>
+              </a:rPr>
+              <a:t>Strategische Partnerschaft statt Konkurrenz: </a:t>
+            </a:r>
+            <a:r>
               <a:rPr sz="1700">
                 <a:solidFill>
                   <a:srgbClr val="1A1A1A"/>
                 </a:solidFill>
                 <a:latin typeface="Arial"/>
               </a:rPr>
-              <a:t>☐ Unternehmensdaten zusammentragen (Umsatz, Gewinn, Mitarbeiter, Branche)</a:t>
+              <a:t>&gt; - Den Steuerberater frühzeitig einbinden und aktiv einladen: „Wir sehen unsere Rolle als Finanzierungspartner – die steuerliche Gestaltung liegt bei Ihnen. Gemeinsam können wir…</a:t>
             </a:r>
           </a:p>
           <a:p>
             <a:pPr>
               <a:spcBef>
-                <a:spcPts val="400"/>
+                <a:spcPts val="500"/>
               </a:spcBef>
             </a:pPr>
             <a:r>
@@ -5286,19 +6117,28 @@
               <a:t>▪  </a:t>
             </a:r>
             <a:r>
+              <a:rPr sz="1700" b="1">
+                <a:solidFill>
+                  <a:srgbClr val="003DA5"/>
+                </a:solidFill>
+                <a:latin typeface="Arial"/>
+              </a:rPr>
+              <a:t>Arbeitsrecht: </a:t>
+            </a:r>
+            <a:r>
               <a:rPr sz="1700">
                 <a:solidFill>
                   <a:srgbClr val="1A1A1A"/>
                 </a:solidFill>
                 <a:latin typeface="Arial"/>
               </a:rPr>
-              <a:t>☐ Familie erkunden: Wer sind potenzielle Nachfolger? Alter, Ausbildung, Interesse?</a:t>
+              <a:t>(insbesondere bei MBO): Betriebsrat-Mitsprache; Kündigungsschutz -</a:t>
             </a:r>
           </a:p>
           <a:p>
             <a:pPr>
               <a:spcBef>
-                <a:spcPts val="400"/>
+                <a:spcPts val="500"/>
               </a:spcBef>
             </a:pPr>
             <a:r>
@@ -5311,73 +6151,22 @@
               <a:t>▪  </a:t>
             </a:r>
             <a:r>
+              <a:rPr sz="1700" b="1">
+                <a:solidFill>
+                  <a:srgbClr val="003DA5"/>
+                </a:solidFill>
+                <a:latin typeface="Arial"/>
+              </a:rPr>
+              <a:t>Finanzierungsrecht: </a:t>
+            </a:r>
+            <a:r>
               <a:rPr sz="1700">
                 <a:solidFill>
                   <a:srgbClr val="1A1A1A"/>
                 </a:solidFill>
                 <a:latin typeface="Arial"/>
               </a:rPr>
-              <a:t>☐ Frühere FK-Notizen lesen: Hat der Unternehmer schon mal Nachfolge erwähnt?</a:t>
-            </a:r>
-          </a:p>
-          <a:p>
-            <a:pPr>
-              <a:spcBef>
-                <a:spcPts val="400"/>
-              </a:spcBef>
-            </a:pPr>
-            <a:r>
-              <a:rPr sz="1500">
-                <a:solidFill>
-                  <a:srgbClr val="003DA5"/>
-                </a:solidFill>
-                <a:latin typeface="Arial"/>
-              </a:rPr>
-              <a:t>▪  </a:t>
-            </a:r>
-            <a:r>
-              <a:rPr sz="1700">
-                <a:solidFill>
-                  <a:srgbClr val="1A1A1A"/>
-                </a:solidFill>
-                <a:latin typeface="Arial"/>
-              </a:rPr>
-              <a:t>☐ Emotional-Register einschätzen: Wirkt er bereit – oder verdrängt er das Thema?</a:t>
-            </a:r>
-          </a:p>
-        </p:txBody>
-      </p:sp>
-      <p:sp>
-        <p:nvSpPr>
-          <p:cNvPr id="6" name="TextBox 5"/>
-          <p:cNvSpPr txBox="1"/>
-          <p:nvPr/>
-        </p:nvSpPr>
-        <p:spPr>
-          <a:xfrm>
-            <a:off x="11704320" y="6492240"/>
-            <a:ext cx="365760" cy="274320"/>
-          </a:xfrm>
-          <a:prstGeom prst="rect">
-            <a:avLst/>
-          </a:prstGeom>
-          <a:noFill/>
-        </p:spPr>
-        <p:txBody>
-          <a:bodyPr wrap="square">
-            <a:spAutoFit/>
-          </a:bodyPr>
-          <a:lstStyle/>
-          <a:p>
-            <a:pPr algn="r"/>
-            <a:r>
-              <a:rPr sz="1000" b="0">
-                <a:solidFill>
-                  <a:srgbClr val="6B7280"/>
-                </a:solidFill>
-                <a:latin typeface="Arial"/>
-              </a:rPr>
-              <a:t>14</a:t>
+              <a:t>(KWG, CRR/CRD, MaRisk): Bonitätsbeurteilung des Nachfolgers; Besicherung</a:t>
             </a:r>
           </a:p>
         </p:txBody>
@@ -5396,7 +6185,7 @@
     <p:bg>
       <p:bgPr>
         <a:solidFill>
-          <a:srgbClr val="FFFFFF"/>
+          <a:srgbClr val="1A1A1A"/>
         </a:solidFill>
         <a:effectLst/>
       </p:bgPr>
@@ -5423,7 +6212,7 @@
             <a:avLst/>
           </a:prstGeom>
           <a:solidFill>
-            <a:srgbClr val="003DA5"/>
+            <a:srgbClr val="E05B00"/>
           </a:solidFill>
           <a:ln>
             <a:noFill/>
@@ -5459,8 +6248,8 @@
         </p:nvSpPr>
         <p:spPr>
           <a:xfrm>
-            <a:off x="365760" y="274320"/>
-            <a:ext cx="11430000" cy="822960"/>
+            <a:off x="365760" y="2011680"/>
+            <a:ext cx="11430000" cy="2011680"/>
           </a:xfrm>
           <a:prstGeom prst="rect">
             <a:avLst/>
@@ -5475,189 +6264,13 @@
           <a:p>
             <a:pPr algn="l"/>
             <a:r>
-              <a:rPr sz="2200" b="1">
-                <a:solidFill>
-                  <a:srgbClr val="003DA5"/>
-                </a:solidFill>
-                <a:latin typeface="Arial"/>
-              </a:rPr>
-              <a:t>Eröffnungsphase (5 Min)</a:t>
-            </a:r>
-          </a:p>
-        </p:txBody>
-      </p:sp>
-      <p:sp>
-        <p:nvSpPr>
-          <p:cNvPr id="4" name="Rectangle 3"/>
-          <p:cNvSpPr/>
-          <p:nvPr/>
-        </p:nvSpPr>
-        <p:spPr>
-          <a:xfrm>
-            <a:off x="365760" y="1051560"/>
-            <a:ext cx="11430000" cy="27432"/>
-          </a:xfrm>
-          <a:prstGeom prst="rect">
-            <a:avLst/>
-          </a:prstGeom>
-          <a:solidFill>
-            <a:srgbClr val="E5E7EB"/>
-          </a:solidFill>
-          <a:ln>
-            <a:noFill/>
-          </a:ln>
-        </p:spPr>
-        <p:style>
-          <a:lnRef idx="1">
-            <a:schemeClr val="accent1"/>
-          </a:lnRef>
-          <a:fillRef idx="3">
-            <a:schemeClr val="accent1"/>
-          </a:fillRef>
-          <a:effectRef idx="2">
-            <a:schemeClr val="accent1"/>
-          </a:effectRef>
-          <a:fontRef idx="minor">
-            <a:schemeClr val="lt1"/>
-          </a:fontRef>
-        </p:style>
-        <p:txBody>
-          <a:bodyPr rtlCol="0" anchor="ctr"/>
-          <a:lstStyle/>
-          <a:p>
-            <a:pPr algn="ctr"/>
-          </a:p>
-        </p:txBody>
-      </p:sp>
-      <p:sp>
-        <p:nvSpPr>
-          <p:cNvPr id="5" name="TextBox 4"/>
-          <p:cNvSpPr txBox="1"/>
-          <p:nvPr/>
-        </p:nvSpPr>
-        <p:spPr>
-          <a:xfrm>
-            <a:off x="365760" y="1234440"/>
-            <a:ext cx="11430000" cy="5212080"/>
-          </a:xfrm>
-          <a:prstGeom prst="rect">
-            <a:avLst/>
-          </a:prstGeom>
-          <a:noFill/>
-        </p:spPr>
-        <p:txBody>
-          <a:bodyPr wrap="square">
-            <a:spAutoFit/>
-          </a:bodyPr>
-          <a:lstStyle/>
-          <a:p>
-            <a:pPr>
-              <a:spcBef>
-                <a:spcPts val="400"/>
-              </a:spcBef>
-            </a:pPr>
-            <a:r>
-              <a:rPr sz="1500">
-                <a:solidFill>
-                  <a:srgbClr val="003DA5"/>
-                </a:solidFill>
-                <a:latin typeface="Arial"/>
-              </a:rPr>
-              <a:t>▪  </a:t>
-            </a:r>
-            <a:r>
-              <a:rPr sz="1700">
-                <a:solidFill>
-                  <a:srgbClr val="1A1A1A"/>
-                </a:solidFill>
-                <a:latin typeface="Arial"/>
-              </a:rPr>
-              <a:t>☐ Psychologische Sicherheit signalisieren: „Was Sie mir erzählen, bleibt vertraulich."</a:t>
-            </a:r>
-          </a:p>
-          <a:p>
-            <a:pPr>
-              <a:spcBef>
-                <a:spcPts val="400"/>
-              </a:spcBef>
-            </a:pPr>
-            <a:r>
-              <a:rPr sz="1500">
-                <a:solidFill>
-                  <a:srgbClr val="003DA5"/>
-                </a:solidFill>
-                <a:latin typeface="Arial"/>
-              </a:rPr>
-              <a:t>▪  </a:t>
-            </a:r>
-            <a:r>
-              <a:rPr sz="1700">
-                <a:solidFill>
-                  <a:srgbClr val="1A1A1A"/>
-                </a:solidFill>
-                <a:latin typeface="Arial"/>
-              </a:rPr>
-              <a:t>☐ Gleichwertigkeit klarstellen: „Ich bin nicht als Prüfer hier, sondern als Begleiter."</a:t>
-            </a:r>
-          </a:p>
-          <a:p>
-            <a:pPr>
-              <a:spcBef>
-                <a:spcPts val="400"/>
-              </a:spcBef>
-            </a:pPr>
-            <a:r>
-              <a:rPr sz="1500">
-                <a:solidFill>
-                  <a:srgbClr val="003DA5"/>
-                </a:solidFill>
-                <a:latin typeface="Arial"/>
-              </a:rPr>
-              <a:t>▪  </a:t>
-            </a:r>
-            <a:r>
-              <a:rPr sz="1700">
-                <a:solidFill>
-                  <a:srgbClr val="1A1A1A"/>
-                </a:solidFill>
-                <a:latin typeface="Arial"/>
-              </a:rPr>
-              <a:t>☐ Agenda transparent machen: „Ich möchte heute verstehen, wie es für Sie um die Nachfolge steht – ohne Druck."</a:t>
-            </a:r>
-          </a:p>
-        </p:txBody>
-      </p:sp>
-      <p:sp>
-        <p:nvSpPr>
-          <p:cNvPr id="6" name="TextBox 5"/>
-          <p:cNvSpPr txBox="1"/>
-          <p:nvPr/>
-        </p:nvSpPr>
-        <p:spPr>
-          <a:xfrm>
-            <a:off x="11704320" y="6492240"/>
-            <a:ext cx="365760" cy="274320"/>
-          </a:xfrm>
-          <a:prstGeom prst="rect">
-            <a:avLst/>
-          </a:prstGeom>
-          <a:noFill/>
-        </p:spPr>
-        <p:txBody>
-          <a:bodyPr wrap="square">
-            <a:spAutoFit/>
-          </a:bodyPr>
-          <a:lstStyle/>
-          <a:p>
-            <a:pPr algn="r"/>
-            <a:r>
-              <a:rPr sz="1000" b="0">
-                <a:solidFill>
-                  <a:srgbClr val="6B7280"/>
-                </a:solidFill>
-                <a:latin typeface="Arial"/>
-              </a:rPr>
-              <a:t>15</a:t>
+              <a:rPr sz="3600" b="1" i="0">
+                <a:solidFill>
+                  <a:srgbClr val="FFFFFF"/>
+                </a:solidFill>
+                <a:latin typeface="Arial"/>
+              </a:rPr>
+              <a:t>4.4 Theorie-Input: Die emotionale Dimension der Nachfolge</a:t>
             </a:r>
           </a:p>
         </p:txBody>
@@ -5739,8 +6352,8 @@
         </p:nvSpPr>
         <p:spPr>
           <a:xfrm>
-            <a:off x="365760" y="274320"/>
-            <a:ext cx="11430000" cy="822960"/>
+            <a:off x="228600" y="182880"/>
+            <a:ext cx="11430000" cy="320040"/>
           </a:xfrm>
           <a:prstGeom prst="rect">
             <a:avLst/>
@@ -5755,33 +6368,68 @@
           <a:p>
             <a:pPr algn="l"/>
             <a:r>
-              <a:rPr sz="2200" b="1">
+              <a:rPr sz="900" b="0" i="0">
+                <a:solidFill>
+                  <a:srgbClr val="556575"/>
+                </a:solidFill>
+                <a:latin typeface="Arial"/>
+              </a:rPr>
+              <a:t>M12 · Modulinhalte</a:t>
+            </a:r>
+          </a:p>
+        </p:txBody>
+      </p:sp>
+      <p:sp>
+        <p:nvSpPr>
+          <p:cNvPr id="4" name="TextBox 3"/>
+          <p:cNvSpPr txBox="1"/>
+          <p:nvPr/>
+        </p:nvSpPr>
+        <p:spPr>
+          <a:xfrm>
+            <a:off x="365760" y="274320"/>
+            <a:ext cx="11430000" cy="777240"/>
+          </a:xfrm>
+          <a:prstGeom prst="rect">
+            <a:avLst/>
+          </a:prstGeom>
+          <a:noFill/>
+        </p:spPr>
+        <p:txBody>
+          <a:bodyPr wrap="square">
+            <a:spAutoFit/>
+          </a:bodyPr>
+          <a:lstStyle/>
+          <a:p>
+            <a:pPr algn="l"/>
+            <a:r>
+              <a:rPr sz="2200" b="1" i="0">
                 <a:solidFill>
                   <a:srgbClr val="003DA5"/>
                 </a:solidFill>
                 <a:latin typeface="Arial"/>
               </a:rPr>
-              <a:t>Diagnostische Phase (20–30 Min)</a:t>
-            </a:r>
-          </a:p>
-        </p:txBody>
-      </p:sp>
-      <p:sp>
-        <p:nvSpPr>
-          <p:cNvPr id="4" name="Rectangle 3"/>
+              <a:t>Kontrollverlust und Identitätsbedrohung</a:t>
+            </a:r>
+          </a:p>
+        </p:txBody>
+      </p:sp>
+      <p:sp>
+        <p:nvSpPr>
+          <p:cNvPr id="5" name="Rectangle 4"/>
           <p:cNvSpPr/>
           <p:nvPr/>
         </p:nvSpPr>
         <p:spPr>
           <a:xfrm>
-            <a:off x="365760" y="1051560"/>
+            <a:off x="365760" y="1005840"/>
             <a:ext cx="11430000" cy="27432"/>
           </a:xfrm>
           <a:prstGeom prst="rect">
             <a:avLst/>
           </a:prstGeom>
           <a:solidFill>
-            <a:srgbClr val="E5E7EB"/>
+            <a:srgbClr val="D1D5DB"/>
           </a:solidFill>
           <a:ln>
             <a:noFill/>
@@ -5811,13 +6459,13 @@
       </p:sp>
       <p:sp>
         <p:nvSpPr>
-          <p:cNvPr id="5" name="TextBox 4"/>
+          <p:cNvPr id="6" name="TextBox 5"/>
           <p:cNvSpPr txBox="1"/>
           <p:nvPr/>
         </p:nvSpPr>
         <p:spPr>
           <a:xfrm>
-            <a:off x="365760" y="1234440"/>
+            <a:off x="365760" y="1143000"/>
             <a:ext cx="11430000" cy="5212080"/>
           </a:xfrm>
           <a:prstGeom prst="rect">
@@ -5833,7 +6481,7 @@
           <a:p>
             <a:pPr>
               <a:spcBef>
-                <a:spcPts val="400"/>
+                <a:spcPts val="500"/>
               </a:spcBef>
             </a:pPr>
             <a:r>
@@ -5846,19 +6494,28 @@
               <a:t>▪  </a:t>
             </a:r>
             <a:r>
+              <a:rPr sz="1700" b="1">
+                <a:solidFill>
+                  <a:srgbClr val="003DA5"/>
+                </a:solidFill>
+                <a:latin typeface="Arial"/>
+              </a:rPr>
+              <a:t>Verleugnung: </a:t>
+            </a:r>
+            <a:r>
               <a:rPr sz="1700">
                 <a:solidFill>
                   <a:srgbClr val="1A1A1A"/>
                 </a:solidFill>
                 <a:latin typeface="Arial"/>
               </a:rPr>
-              <a:t>☐ „Wie lange beschäftigt Sie das Nachfolge-Thema schon?"</a:t>
+              <a:t>„Das Thema ist noch gar nicht aktuell." 2.</a:t>
             </a:r>
           </a:p>
           <a:p>
             <a:pPr>
               <a:spcBef>
-                <a:spcPts val="400"/>
+                <a:spcPts val="500"/>
               </a:spcBef>
             </a:pPr>
             <a:r>
@@ -5871,19 +6528,28 @@
               <a:t>▪  </a:t>
             </a:r>
             <a:r>
+              <a:rPr sz="1700" b="1">
+                <a:solidFill>
+                  <a:srgbClr val="003DA5"/>
+                </a:solidFill>
+                <a:latin typeface="Arial"/>
+              </a:rPr>
+              <a:t>Widerstand: </a:t>
+            </a:r>
+            <a:r>
               <a:rPr sz="1700">
                 <a:solidFill>
                   <a:srgbClr val="1A1A1A"/>
                 </a:solidFill>
                 <a:latin typeface="Arial"/>
               </a:rPr>
-              <a:t>☐ „Was hat Sie bewogen, es jetzt anzusprechen?"</a:t>
+              <a:t>„Mein Sohn ist noch nicht bereit." 3.</a:t>
             </a:r>
           </a:p>
           <a:p>
             <a:pPr>
               <a:spcBef>
-                <a:spcPts val="400"/>
+                <a:spcPts val="500"/>
               </a:spcBef>
             </a:pPr>
             <a:r>
@@ -5896,19 +6562,28 @@
               <a:t>▪  </a:t>
             </a:r>
             <a:r>
+              <a:rPr sz="1700" b="1">
+                <a:solidFill>
+                  <a:srgbClr val="003DA5"/>
+                </a:solidFill>
+                <a:latin typeface="Arial"/>
+              </a:rPr>
+              <a:t>Verhandeln: </a:t>
+            </a:r>
+            <a:r>
               <a:rPr sz="1700">
                 <a:solidFill>
                   <a:srgbClr val="1A1A1A"/>
                 </a:solidFill>
                 <a:latin typeface="Arial"/>
               </a:rPr>
-              <a:t>☐ „Wer in Ihrer Familie oder Ihrem Team kennt Ihre Gedanken zur Nachfolge?"</a:t>
+              <a:t>„Vielleicht mache ich noch ein paar Jahre." 4.</a:t>
             </a:r>
           </a:p>
           <a:p>
             <a:pPr>
               <a:spcBef>
-                <a:spcPts val="400"/>
+                <a:spcPts val="500"/>
               </a:spcBef>
             </a:pPr>
             <a:r>
@@ -5921,19 +6596,28 @@
               <a:t>▪  </a:t>
             </a:r>
             <a:r>
+              <a:rPr sz="1700" b="1">
+                <a:solidFill>
+                  <a:srgbClr val="003DA5"/>
+                </a:solidFill>
+                <a:latin typeface="Arial"/>
+              </a:rPr>
+              <a:t>Trauer: </a:t>
+            </a:r>
+            <a:r>
               <a:rPr sz="1700">
                 <a:solidFill>
                   <a:srgbClr val="1A1A1A"/>
                 </a:solidFill>
                 <a:latin typeface="Arial"/>
               </a:rPr>
-              <a:t>☐ „Was ist das Größte, das Ihnen Sorge macht bei einer Nachfolge?"</a:t>
+              <a:t>Tiefe emotionale Aufarbeitung des Loslassens. 5.</a:t>
             </a:r>
           </a:p>
           <a:p>
             <a:pPr>
               <a:spcBef>
-                <a:spcPts val="400"/>
+                <a:spcPts val="500"/>
               </a:spcBef>
             </a:pPr>
             <a:r>
@@ -5946,73 +6630,22 @@
               <a:t>▪  </a:t>
             </a:r>
             <a:r>
+              <a:rPr sz="1700" b="1">
+                <a:solidFill>
+                  <a:srgbClr val="003DA5"/>
+                </a:solidFill>
+                <a:latin typeface="Arial"/>
+              </a:rPr>
+              <a:t>Akzeptanz: </a:t>
+            </a:r>
+            <a:r>
               <a:rPr sz="1700">
                 <a:solidFill>
                   <a:srgbClr val="1A1A1A"/>
                 </a:solidFill>
                 <a:latin typeface="Arial"/>
               </a:rPr>
-              <a:t>☐ [Zirkuläre Frage] „Wie würde Ihr ältester Mitarbeiter die Situation beschreiben – wenn Sie ihn fragten?"</a:t>
-            </a:r>
-          </a:p>
-          <a:p>
-            <a:pPr>
-              <a:spcBef>
-                <a:spcPts val="400"/>
-              </a:spcBef>
-            </a:pPr>
-            <a:r>
-              <a:rPr sz="1500">
-                <a:solidFill>
-                  <a:srgbClr val="003DA5"/>
-                </a:solidFill>
-                <a:latin typeface="Arial"/>
-              </a:rPr>
-              <a:t>▪  </a:t>
-            </a:r>
-            <a:r>
-              <a:rPr sz="1700">
-                <a:solidFill>
-                  <a:srgbClr val="1A1A1A"/>
-                </a:solidFill>
-                <a:latin typeface="Arial"/>
-              </a:rPr>
-              <a:t>☐ „Wer könnte aus Ihrer Sicht für die Nachfolge infrage kommen?"</a:t>
-            </a:r>
-          </a:p>
-        </p:txBody>
-      </p:sp>
-      <p:sp>
-        <p:nvSpPr>
-          <p:cNvPr id="6" name="TextBox 5"/>
-          <p:cNvSpPr txBox="1"/>
-          <p:nvPr/>
-        </p:nvSpPr>
-        <p:spPr>
-          <a:xfrm>
-            <a:off x="11704320" y="6492240"/>
-            <a:ext cx="365760" cy="274320"/>
-          </a:xfrm>
-          <a:prstGeom prst="rect">
-            <a:avLst/>
-          </a:prstGeom>
-          <a:noFill/>
-        </p:spPr>
-        <p:txBody>
-          <a:bodyPr wrap="square">
-            <a:spAutoFit/>
-          </a:bodyPr>
-          <a:lstStyle/>
-          <a:p>
-            <a:pPr algn="r"/>
-            <a:r>
-              <a:rPr sz="1000" b="0">
-                <a:solidFill>
-                  <a:srgbClr val="6B7280"/>
-                </a:solidFill>
-                <a:latin typeface="Arial"/>
-              </a:rPr>
-              <a:t>16</a:t>
+              <a:t>Umgestaltung der Identität: „Ich bin jetzt Mentor."</a:t>
             </a:r>
           </a:p>
         </p:txBody>
@@ -6094,8 +6727,8 @@
         </p:nvSpPr>
         <p:spPr>
           <a:xfrm>
-            <a:off x="365760" y="274320"/>
-            <a:ext cx="11430000" cy="822960"/>
+            <a:off x="228600" y="182880"/>
+            <a:ext cx="11430000" cy="320040"/>
           </a:xfrm>
           <a:prstGeom prst="rect">
             <a:avLst/>
@@ -6110,33 +6743,68 @@
           <a:p>
             <a:pPr algn="l"/>
             <a:r>
-              <a:rPr sz="2200" b="1">
+              <a:rPr sz="900" b="0" i="0">
+                <a:solidFill>
+                  <a:srgbClr val="556575"/>
+                </a:solidFill>
+                <a:latin typeface="Arial"/>
+              </a:rPr>
+              <a:t>M12 · Modulinhalte</a:t>
+            </a:r>
+          </a:p>
+        </p:txBody>
+      </p:sp>
+      <p:sp>
+        <p:nvSpPr>
+          <p:cNvPr id="4" name="TextBox 3"/>
+          <p:cNvSpPr txBox="1"/>
+          <p:nvPr/>
+        </p:nvSpPr>
+        <p:spPr>
+          <a:xfrm>
+            <a:off x="365760" y="274320"/>
+            <a:ext cx="11430000" cy="777240"/>
+          </a:xfrm>
+          <a:prstGeom prst="rect">
+            <a:avLst/>
+          </a:prstGeom>
+          <a:noFill/>
+        </p:spPr>
+        <p:txBody>
+          <a:bodyPr wrap="square">
+            <a:spAutoFit/>
+          </a:bodyPr>
+          <a:lstStyle/>
+          <a:p>
+            <a:pPr algn="l"/>
+            <a:r>
+              <a:rPr sz="2200" b="1" i="0">
                 <a:solidFill>
                   <a:srgbClr val="003DA5"/>
                 </a:solidFill>
                 <a:latin typeface="Arial"/>
               </a:rPr>
-              <a:t>Strukturierungsphase (10–15 Min)</a:t>
-            </a:r>
-          </a:p>
-        </p:txBody>
-      </p:sp>
-      <p:sp>
-        <p:nvSpPr>
-          <p:cNvPr id="4" name="Rectangle 3"/>
+              <a:t>Das Vermächtnis-Dilemma</a:t>
+            </a:r>
+          </a:p>
+        </p:txBody>
+      </p:sp>
+      <p:sp>
+        <p:nvSpPr>
+          <p:cNvPr id="5" name="Rectangle 4"/>
           <p:cNvSpPr/>
           <p:nvPr/>
         </p:nvSpPr>
         <p:spPr>
           <a:xfrm>
-            <a:off x="365760" y="1051560"/>
+            <a:off x="365760" y="1005840"/>
             <a:ext cx="11430000" cy="27432"/>
           </a:xfrm>
           <a:prstGeom prst="rect">
             <a:avLst/>
           </a:prstGeom>
           <a:solidFill>
-            <a:srgbClr val="E5E7EB"/>
+            <a:srgbClr val="D1D5DB"/>
           </a:solidFill>
           <a:ln>
             <a:noFill/>
@@ -6166,13 +6834,13 @@
       </p:sp>
       <p:sp>
         <p:nvSpPr>
-          <p:cNvPr id="5" name="TextBox 4"/>
+          <p:cNvPr id="6" name="TextBox 5"/>
           <p:cNvSpPr txBox="1"/>
           <p:nvPr/>
         </p:nvSpPr>
         <p:spPr>
           <a:xfrm>
-            <a:off x="365760" y="1234440"/>
+            <a:off x="365760" y="1143000"/>
             <a:ext cx="11430000" cy="5212080"/>
           </a:xfrm>
           <a:prstGeom prst="rect">
@@ -6188,7 +6856,7 @@
           <a:p>
             <a:pPr>
               <a:spcBef>
-                <a:spcPts val="400"/>
+                <a:spcPts val="500"/>
               </a:spcBef>
             </a:pPr>
             <a:r>
@@ -6207,13 +6875,13 @@
                 </a:solidFill>
                 <a:latin typeface="Arial"/>
               </a:rPr>
-              <a:t>☐ Nachfolgeart eingrenzen: Familienintern / MBO / Strategischer Verkauf / Stiftung</a:t>
+              <a:t>Viele Unternehmer tragen zwei widersprüchliche Wünsche: - Kontrolle bewahren: „Nur ich kann das Unternehmen richtig führen." - Vermächtnis hinterlassen: „Mein…</a:t>
             </a:r>
           </a:p>
           <a:p>
             <a:pPr>
               <a:spcBef>
-                <a:spcPts val="400"/>
+                <a:spcPts val="500"/>
               </a:spcBef>
             </a:pPr>
             <a:r>
@@ -6232,13 +6900,13 @@
                 </a:solidFill>
                 <a:latin typeface="Arial"/>
               </a:rPr>
-              <a:t>☐ Zeithorizont klären: „In welcher Zeitspanne sehen Sie die Nachfolge?"</a:t>
+              <a:t>Der FK hilft durch gezielte Fragen, diesen Widerspruch aufzulösen:</a:t>
             </a:r>
           </a:p>
           <a:p>
             <a:pPr>
               <a:spcBef>
-                <a:spcPts val="400"/>
+                <a:spcPts val="500"/>
               </a:spcBef>
             </a:pPr>
             <a:r>
@@ -6257,13 +6925,13 @@
                 </a:solidFill>
                 <a:latin typeface="Arial"/>
               </a:rPr>
-              <a:t>☐ Nächste Schritte vereinbaren: Wer macht was bis wann?</a:t>
+              <a:t>- „Was ist Ihnen wichtiger: die Kontrolle über die nächsten 5 Jahre zu behalten – oder ein Vermächtnis zu schaffen, das 20 Jahre bestand hat?" - „Wenn Sie Ihre…</a:t>
             </a:r>
           </a:p>
           <a:p>
             <a:pPr>
               <a:spcBef>
-                <a:spcPts val="400"/>
+                <a:spcPts val="500"/>
               </a:spcBef>
             </a:pPr>
             <a:r>
@@ -6282,92 +6950,7 @@
                 </a:solidFill>
                 <a:latin typeface="Arial"/>
               </a:rPr>
-              <a:t>☐ Verbundpartner benennen und Handlungspfad klären:</a:t>
-            </a:r>
-          </a:p>
-          <a:p>
-            <a:pPr>
-              <a:spcBef>
-                <a:spcPts val="400"/>
-              </a:spcBef>
-            </a:pPr>
-            <a:r>
-              <a:rPr sz="1500">
-                <a:solidFill>
-                  <a:srgbClr val="003DA5"/>
-                </a:solidFill>
-                <a:latin typeface="Arial"/>
-              </a:rPr>
-              <a:t>▪  </a:t>
-            </a:r>
-            <a:r>
-              <a:rPr sz="1700">
-                <a:solidFill>
-                  <a:srgbClr val="1A1A1A"/>
-                </a:solidFill>
-                <a:latin typeface="Arial"/>
-              </a:rPr>
-              <a:t>DZ BANK Corporate Finance: Ansprechstelle für MBO-Finanzierungen und größere Unternehmenstransaktionen (&gt; 5 Mio. EUR Kaufpreis) – Kontakt über Firmenkundenleiter oder DZ BANK Regionalbetreuung</a:t>
-            </a:r>
-          </a:p>
-          <a:p>
-            <a:pPr>
-              <a:spcBef>
-                <a:spcPts val="400"/>
-              </a:spcBef>
-            </a:pPr>
-            <a:r>
-              <a:rPr sz="1500">
-                <a:solidFill>
-                  <a:srgbClr val="003DA5"/>
-                </a:solidFill>
-                <a:latin typeface="Arial"/>
-              </a:rPr>
-              <a:t>▪  </a:t>
-            </a:r>
-            <a:r>
-              <a:rPr sz="1700">
-                <a:solidFill>
-                  <a:srgbClr val="1A1A1A"/>
-                </a:solidFill>
-                <a:latin typeface="Arial"/>
-              </a:rPr>
-              <a:t>BVR / GenoAkademie: Unternehmer-Nachfolgeberatung; Coaching-Programme für Unternehmer; ggf. BVR-Nachfolge-Netzwerk anfragen</a:t>
-            </a:r>
-          </a:p>
-        </p:txBody>
-      </p:sp>
-      <p:sp>
-        <p:nvSpPr>
-          <p:cNvPr id="6" name="TextBox 5"/>
-          <p:cNvSpPr txBox="1"/>
-          <p:nvPr/>
-        </p:nvSpPr>
-        <p:spPr>
-          <a:xfrm>
-            <a:off x="11704320" y="6492240"/>
-            <a:ext cx="365760" cy="274320"/>
-          </a:xfrm>
-          <a:prstGeom prst="rect">
-            <a:avLst/>
-          </a:prstGeom>
-          <a:noFill/>
-        </p:spPr>
-        <p:txBody>
-          <a:bodyPr wrap="square">
-            <a:spAutoFit/>
-          </a:bodyPr>
-          <a:lstStyle/>
-          <a:p>
-            <a:pPr algn="r"/>
-            <a:r>
-              <a:rPr sz="1000" b="0">
-                <a:solidFill>
-                  <a:srgbClr val="6B7280"/>
-                </a:solidFill>
-                <a:latin typeface="Arial"/>
-              </a:rPr>
-              <a:t>17</a:t>
+              <a:t>Nachfolge wird so nicht als Verlust, sondern als Möglichkeit zur Neugestaltung der Rolle gerahmt.</a:t>
             </a:r>
           </a:p>
         </p:txBody>
@@ -6386,7 +6969,7 @@
     <p:bg>
       <p:bgPr>
         <a:solidFill>
-          <a:srgbClr val="F5F7FA"/>
+          <a:srgbClr val="F4F6FA"/>
         </a:solidFill>
         <a:effectLst/>
       </p:bgPr>
@@ -6449,14 +7032,14 @@
         </p:nvSpPr>
         <p:spPr>
           <a:xfrm>
-            <a:off x="365760" y="868680"/>
-            <a:ext cx="7315200" cy="27432"/>
+            <a:off x="228600" y="804672"/>
+            <a:ext cx="11612880" cy="22860"/>
           </a:xfrm>
           <a:prstGeom prst="rect">
             <a:avLst/>
           </a:prstGeom>
           <a:solidFill>
-            <a:srgbClr val="E5E7EB"/>
+            <a:srgbClr val="D1D5DB"/>
           </a:solidFill>
           <a:ln>
             <a:noFill/>
@@ -6493,7 +7076,7 @@
         <p:spPr>
           <a:xfrm>
             <a:off x="365760" y="320040"/>
-            <a:ext cx="3657600" cy="365760"/>
+            <a:ext cx="4572000" cy="347472"/>
           </a:xfrm>
           <a:prstGeom prst="rect">
             <a:avLst/>
@@ -6508,7 +7091,7 @@
           <a:p>
             <a:pPr algn="l"/>
             <a:r>
-              <a:rPr sz="1000" b="1">
+              <a:rPr sz="900" b="1" i="0">
                 <a:solidFill>
                   <a:srgbClr val="003DA5"/>
                 </a:solidFill>
@@ -6528,7 +7111,7 @@
         <p:spPr>
           <a:xfrm>
             <a:off x="365760" y="502920"/>
-            <a:ext cx="9144000" cy="548640"/>
+            <a:ext cx="10058400" cy="640080"/>
           </a:xfrm>
           <a:prstGeom prst="rect">
             <a:avLst/>
@@ -6543,7 +7126,7 @@
           <a:p>
             <a:pPr algn="l"/>
             <a:r>
-              <a:rPr sz="2200" b="1">
+              <a:rPr sz="2400" b="1" i="0">
                 <a:solidFill>
                   <a:srgbClr val="1A1A1A"/>
                 </a:solidFill>
@@ -6562,7 +7145,7 @@
         </p:nvSpPr>
         <p:spPr>
           <a:xfrm>
-            <a:off x="365760" y="1188720"/>
+            <a:off x="365760" y="1234440"/>
             <a:ext cx="11430000" cy="5303520"/>
           </a:xfrm>
           <a:prstGeom prst="rect">
@@ -6578,11 +7161,11 @@
           <a:p>
             <a:pPr>
               <a:spcBef>
-                <a:spcPts val="400"/>
+                <a:spcPts val="500"/>
               </a:spcBef>
             </a:pPr>
             <a:r>
-              <a:rPr sz="1400">
+              <a:rPr sz="1500">
                 <a:solidFill>
                   <a:srgbClr val="003DA5"/>
                 </a:solidFill>
@@ -6591,7 +7174,7 @@
               <a:t>▪  </a:t>
             </a:r>
             <a:r>
-              <a:rPr sz="1600">
+              <a:rPr sz="1700">
                 <a:solidFill>
                   <a:srgbClr val="1A1A1A"/>
                 </a:solidFill>
@@ -6603,11 +7186,11 @@
           <a:p>
             <a:pPr>
               <a:spcBef>
-                <a:spcPts val="400"/>
+                <a:spcPts val="500"/>
               </a:spcBef>
             </a:pPr>
             <a:r>
-              <a:rPr sz="1400">
+              <a:rPr sz="1500">
                 <a:solidFill>
                   <a:srgbClr val="003DA5"/>
                 </a:solidFill>
@@ -6616,7 +7199,7 @@
               <a:t>▪  </a:t>
             </a:r>
             <a:r>
-              <a:rPr sz="1600">
+              <a:rPr sz="1700">
                 <a:solidFill>
                   <a:srgbClr val="1A1A1A"/>
                 </a:solidFill>
@@ -6628,11 +7211,11 @@
           <a:p>
             <a:pPr>
               <a:spcBef>
-                <a:spcPts val="400"/>
+                <a:spcPts val="500"/>
               </a:spcBef>
             </a:pPr>
             <a:r>
-              <a:rPr sz="1400">
+              <a:rPr sz="1500">
                 <a:solidFill>
                   <a:srgbClr val="003DA5"/>
                 </a:solidFill>
@@ -6641,7 +7224,7 @@
               <a:t>▪  </a:t>
             </a:r>
             <a:r>
-              <a:rPr sz="1600">
+              <a:rPr sz="1700">
                 <a:solidFill>
                   <a:srgbClr val="1A1A1A"/>
                 </a:solidFill>
@@ -6653,11 +7236,11 @@
           <a:p>
             <a:pPr>
               <a:spcBef>
-                <a:spcPts val="400"/>
+                <a:spcPts val="500"/>
               </a:spcBef>
             </a:pPr>
             <a:r>
-              <a:rPr sz="1400">
+              <a:rPr sz="1500">
                 <a:solidFill>
                   <a:srgbClr val="003DA5"/>
                 </a:solidFill>
@@ -6666,7 +7249,7 @@
               <a:t>▪  </a:t>
             </a:r>
             <a:r>
-              <a:rPr sz="1600">
+              <a:rPr sz="1700">
                 <a:solidFill>
                   <a:srgbClr val="1A1A1A"/>
                 </a:solidFill>
@@ -6678,11 +7261,11 @@
           <a:p>
             <a:pPr>
               <a:spcBef>
-                <a:spcPts val="400"/>
+                <a:spcPts val="500"/>
               </a:spcBef>
             </a:pPr>
             <a:r>
-              <a:rPr sz="1400">
+              <a:rPr sz="1500">
                 <a:solidFill>
                   <a:srgbClr val="003DA5"/>
                 </a:solidFill>
@@ -6691,7 +7274,7 @@
               <a:t>▪  </a:t>
             </a:r>
             <a:r>
-              <a:rPr sz="1600">
+              <a:rPr sz="1700">
                 <a:solidFill>
                   <a:srgbClr val="1A1A1A"/>
                 </a:solidFill>
@@ -6716,7 +7299,7 @@
     <p:bg>
       <p:bgPr>
         <a:solidFill>
-          <a:srgbClr val="1A1A1A"/>
+          <a:srgbClr val="FFFFFF"/>
         </a:solidFill>
         <a:effectLst/>
       </p:bgPr>
@@ -6743,7 +7326,7 @@
             <a:avLst/>
           </a:prstGeom>
           <a:solidFill>
-            <a:srgbClr val="E05B00"/>
+            <a:srgbClr val="003DA5"/>
           </a:solidFill>
           <a:ln>
             <a:noFill/>
@@ -6779,8 +7362,8 @@
         </p:nvSpPr>
         <p:spPr>
           <a:xfrm>
-            <a:off x="365760" y="2286000"/>
-            <a:ext cx="11430000" cy="1828800"/>
+            <a:off x="228600" y="182880"/>
+            <a:ext cx="11430000" cy="320040"/>
           </a:xfrm>
           <a:prstGeom prst="rect">
             <a:avLst/>
@@ -6795,17 +7378,351 @@
           <a:p>
             <a:pPr algn="l"/>
             <a:r>
-              <a:rPr sz="3600" b="1">
-                <a:solidFill>
-                  <a:srgbClr val="FFFFFF"/>
-                </a:solidFill>
-                <a:latin typeface="Arial"/>
-              </a:rPr>
-              <a:t>5.1 Transferaufgabe (innerhalb von 4 Wochen)</a:t>
-            </a:r>
-          </a:p>
-        </p:txBody>
-      </p:sp>
+              <a:rPr sz="900" b="0" i="0">
+                <a:solidFill>
+                  <a:srgbClr val="556575"/>
+                </a:solidFill>
+                <a:latin typeface="Arial"/>
+              </a:rPr>
+              <a:t>M12 · Modulinhalte</a:t>
+            </a:r>
+          </a:p>
+        </p:txBody>
+      </p:sp>
+      <p:sp>
+        <p:nvSpPr>
+          <p:cNvPr id="4" name="TextBox 3"/>
+          <p:cNvSpPr txBox="1"/>
+          <p:nvPr/>
+        </p:nvSpPr>
+        <p:spPr>
+          <a:xfrm>
+            <a:off x="365760" y="274320"/>
+            <a:ext cx="11430000" cy="777240"/>
+          </a:xfrm>
+          <a:prstGeom prst="rect">
+            <a:avLst/>
+          </a:prstGeom>
+          <a:noFill/>
+        </p:spPr>
+        <p:txBody>
+          <a:bodyPr wrap="square">
+            <a:spAutoFit/>
+          </a:bodyPr>
+          <a:lstStyle/>
+          <a:p>
+            <a:pPr algn="l"/>
+            <a:r>
+              <a:rPr sz="2200" b="1" i="0">
+                <a:solidFill>
+                  <a:srgbClr val="003DA5"/>
+                </a:solidFill>
+                <a:latin typeface="Arial"/>
+              </a:rPr>
+              <a:t>Praktische Interventionen zur Loslassbegleitung</a:t>
+            </a:r>
+          </a:p>
+        </p:txBody>
+      </p:sp>
+      <p:sp>
+        <p:nvSpPr>
+          <p:cNvPr id="5" name="Rectangle 4"/>
+          <p:cNvSpPr/>
+          <p:nvPr/>
+        </p:nvSpPr>
+        <p:spPr>
+          <a:xfrm>
+            <a:off x="365760" y="1005840"/>
+            <a:ext cx="11430000" cy="27432"/>
+          </a:xfrm>
+          <a:prstGeom prst="rect">
+            <a:avLst/>
+          </a:prstGeom>
+          <a:solidFill>
+            <a:srgbClr val="D1D5DB"/>
+          </a:solidFill>
+          <a:ln>
+            <a:noFill/>
+          </a:ln>
+        </p:spPr>
+        <p:style>
+          <a:lnRef idx="1">
+            <a:schemeClr val="accent1"/>
+          </a:lnRef>
+          <a:fillRef idx="3">
+            <a:schemeClr val="accent1"/>
+          </a:fillRef>
+          <a:effectRef idx="2">
+            <a:schemeClr val="accent1"/>
+          </a:effectRef>
+          <a:fontRef idx="minor">
+            <a:schemeClr val="lt1"/>
+          </a:fontRef>
+        </p:style>
+        <p:txBody>
+          <a:bodyPr rtlCol="0" anchor="ctr"/>
+          <a:lstStyle/>
+          <a:p>
+            <a:pPr algn="ctr"/>
+          </a:p>
+        </p:txBody>
+      </p:sp>
+      <p:graphicFrame>
+        <p:nvGraphicFramePr>
+          <p:cNvPr id="6" name="Table 5"/>
+          <p:cNvGraphicFramePr>
+            <a:graphicFrameLocks noGrp="1"/>
+          </p:cNvGraphicFramePr>
+          <p:nvPr/>
+        </p:nvGraphicFramePr>
+        <p:xfrm>
+          <a:off x="365760" y="1143000"/>
+          <a:ext cx="11430000" cy="2377440"/>
+        </p:xfrm>
+        <a:graphic>
+          <a:graphicData uri="http://schemas.openxmlformats.org/drawingml/2006/table">
+            <a:tbl>
+              <a:tblPr firstRow="1" bandRow="1">
+                <a:tableStyleId>{5C22544A-7EE6-4342-B048-85BDC9FD1C3A}</a:tableStyleId>
+              </a:tblPr>
+              <a:tblGrid>
+                <a:gridCol w="5715000"/>
+                <a:gridCol w="5715000"/>
+              </a:tblGrid>
+              <a:tr h="475488">
+                <a:tc>
+                  <a:txBody>
+                    <a:bodyPr wrap="square"/>
+                    <a:lstStyle/>
+                    <a:p>
+                      <a:r>
+                        <a:rPr sz="1100" b="1">
+                          <a:solidFill>
+                            <a:srgbClr val="FFFFFF"/>
+                          </a:solidFill>
+                          <a:latin typeface="Arial"/>
+                        </a:rPr>
+                        <a:t>Technik</a:t>
+                      </a:r>
+                    </a:p>
+                  </a:txBody>
+                  <a:tcPr>
+                    <a:solidFill>
+                      <a:srgbClr val="003DA5"/>
+                    </a:solidFill>
+                  </a:tcPr>
+                </a:tc>
+                <a:tc>
+                  <a:txBody>
+                    <a:bodyPr wrap="square"/>
+                    <a:lstStyle/>
+                    <a:p>
+                      <a:r>
+                        <a:rPr sz="1100" b="1">
+                          <a:solidFill>
+                            <a:srgbClr val="FFFFFF"/>
+                          </a:solidFill>
+                          <a:latin typeface="Arial"/>
+                        </a:rPr>
+                        <a:t>Formulierungsbeispiel</a:t>
+                      </a:r>
+                    </a:p>
+                  </a:txBody>
+                  <a:tcPr>
+                    <a:solidFill>
+                      <a:srgbClr val="003DA5"/>
+                    </a:solidFill>
+                  </a:tcPr>
+                </a:tc>
+              </a:tr>
+              <a:tr h="475488">
+                <a:tc>
+                  <a:txBody>
+                    <a:bodyPr wrap="square"/>
+                    <a:lstStyle/>
+                    <a:p>
+                      <a:r>
+                        <a:rPr sz="1100" b="0">
+                          <a:solidFill>
+                            <a:srgbClr val="1A1A1A"/>
+                          </a:solidFill>
+                          <a:latin typeface="Arial"/>
+                        </a:rPr>
+                        <a:t>Externe Validierung</a:t>
+                      </a:r>
+                    </a:p>
+                  </a:txBody>
+                  <a:tcPr>
+                    <a:solidFill>
+                      <a:srgbClr val="FFFFFF"/>
+                    </a:solidFill>
+                  </a:tcPr>
+                </a:tc>
+                <a:tc>
+                  <a:txBody>
+                    <a:bodyPr wrap="square"/>
+                    <a:lstStyle/>
+                    <a:p>
+                      <a:r>
+                        <a:rPr sz="1100" b="0">
+                          <a:solidFill>
+                            <a:srgbClr val="1A1A1A"/>
+                          </a:solidFill>
+                          <a:latin typeface="Arial"/>
+                        </a:rPr>
+                        <a:t>„Die Unternehmer, die ich am meisten respektiere, haben den Mut gehabt loszulassen – und gemerkt, dass das Unternehmen ohne sie gedeiht. Das war für sie befreiend."</a:t>
+                      </a:r>
+                    </a:p>
+                  </a:txBody>
+                  <a:tcPr>
+                    <a:solidFill>
+                      <a:srgbClr val="FFFFFF"/>
+                    </a:solidFill>
+                  </a:tcPr>
+                </a:tc>
+              </a:tr>
+              <a:tr h="475488">
+                <a:tc>
+                  <a:txBody>
+                    <a:bodyPr wrap="square"/>
+                    <a:lstStyle/>
+                    <a:p>
+                      <a:r>
+                        <a:rPr sz="1100" b="0">
+                          <a:solidFill>
+                            <a:srgbClr val="1A1A1A"/>
+                          </a:solidFill>
+                          <a:latin typeface="Arial"/>
+                        </a:rPr>
+                        <a:t>Rollenneugestaltung</a:t>
+                      </a:r>
+                    </a:p>
+                  </a:txBody>
+                  <a:tcPr>
+                    <a:solidFill>
+                      <a:srgbClr val="F4F6FA"/>
+                    </a:solidFill>
+                  </a:tcPr>
+                </a:tc>
+                <a:tc>
+                  <a:txBody>
+                    <a:bodyPr wrap="square"/>
+                    <a:lstStyle/>
+                    <a:p>
+                      <a:r>
+                        <a:rPr sz="1100" b="0">
+                          <a:solidFill>
+                            <a:srgbClr val="1A1A1A"/>
+                          </a:solidFill>
+                          <a:latin typeface="Arial"/>
+                        </a:rPr>
+                        <a:t>„Statt ‚ausscheiden' – wie wäre es mit ‚in eine neue Rolle wechseln'? Verwaltungsrat? Mentor? Mehr Zeit für andere Leidenschaften?"</a:t>
+                      </a:r>
+                    </a:p>
+                  </a:txBody>
+                  <a:tcPr>
+                    <a:solidFill>
+                      <a:srgbClr val="F4F6FA"/>
+                    </a:solidFill>
+                  </a:tcPr>
+                </a:tc>
+              </a:tr>
+              <a:tr h="475488">
+                <a:tc>
+                  <a:txBody>
+                    <a:bodyPr wrap="square"/>
+                    <a:lstStyle/>
+                    <a:p>
+                      <a:r>
+                        <a:rPr sz="1100" b="0">
+                          <a:solidFill>
+                            <a:srgbClr val="1A1A1A"/>
+                          </a:solidFill>
+                          <a:latin typeface="Arial"/>
+                        </a:rPr>
+                        <a:t>Kleines Experiment</a:t>
+                      </a:r>
+                    </a:p>
+                  </a:txBody>
+                  <a:tcPr>
+                    <a:solidFill>
+                      <a:srgbClr val="FFFFFF"/>
+                    </a:solidFill>
+                  </a:tcPr>
+                </a:tc>
+                <a:tc>
+                  <a:txBody>
+                    <a:bodyPr wrap="square"/>
+                    <a:lstStyle/>
+                    <a:p>
+                      <a:r>
+                        <a:rPr sz="1100" b="0">
+                          <a:solidFill>
+                            <a:srgbClr val="1A1A1A"/>
+                          </a:solidFill>
+                          <a:latin typeface="Arial"/>
+                        </a:rPr>
+                        <a:t>„Hätten Sie Lust, das einmal auszuprobieren? Zwei Wochen, in denen Sie bewusst delegieren – nicht weil Sie müssen, sondern um zu sehen, was passiert. Was denken Sie?"</a:t>
+                      </a:r>
+                    </a:p>
+                  </a:txBody>
+                  <a:tcPr>
+                    <a:solidFill>
+                      <a:srgbClr val="FFFFFF"/>
+                    </a:solidFill>
+                  </a:tcPr>
+                </a:tc>
+              </a:tr>
+              <a:tr h="475488">
+                <a:tc>
+                  <a:txBody>
+                    <a:bodyPr wrap="square"/>
+                    <a:lstStyle/>
+                    <a:p>
+                      <a:r>
+                        <a:rPr sz="1100" b="0">
+                          <a:solidFill>
+                            <a:srgbClr val="1A1A1A"/>
+                          </a:solidFill>
+                          <a:latin typeface="Arial"/>
+                        </a:rPr>
+                        <a:t>Zeithoheit geben</a:t>
+                      </a:r>
+                    </a:p>
+                  </a:txBody>
+                  <a:tcPr>
+                    <a:solidFill>
+                      <a:srgbClr val="F4F6FA"/>
+                    </a:solidFill>
+                  </a:tcPr>
+                </a:tc>
+                <a:tc>
+                  <a:txBody>
+                    <a:bodyPr wrap="square"/>
+                    <a:lstStyle/>
+                    <a:p>
+                      <a:r>
+                        <a:rPr sz="1100" b="0">
+                          <a:solidFill>
+                            <a:srgbClr val="1A1A1A"/>
+                          </a:solidFill>
+                          <a:latin typeface="Arial"/>
+                        </a:rPr>
+                        <a:t>„Wir machen einen Plan und entwickeln Ihren Nachfolger. Sie entscheiden selbst, wann der Punkt kommt."</a:t>
+                      </a:r>
+                    </a:p>
+                  </a:txBody>
+                  <a:tcPr>
+                    <a:solidFill>
+                      <a:srgbClr val="F4F6FA"/>
+                    </a:solidFill>
+                  </a:tcPr>
+                </a:tc>
+              </a:tr>
+            </a:tbl>
+          </a:graphicData>
+        </a:graphic>
+      </p:graphicFrame>
     </p:spTree>
   </p:cSld>
   <p:clrMapOvr>
@@ -6883,8 +7800,8 @@
         </p:nvSpPr>
         <p:spPr>
           <a:xfrm>
-            <a:off x="365760" y="2286000"/>
-            <a:ext cx="11430000" cy="1828800"/>
+            <a:off x="365760" y="2011680"/>
+            <a:ext cx="11430000" cy="2011680"/>
           </a:xfrm>
           <a:prstGeom prst="rect">
             <a:avLst/>
@@ -6899,13 +7816,48 @@
           <a:p>
             <a:pPr algn="l"/>
             <a:r>
-              <a:rPr sz="3600" b="1">
+              <a:rPr sz="3600" b="1" i="0">
                 <a:solidFill>
                   <a:srgbClr val="FFFFFF"/>
                 </a:solidFill>
                 <a:latin typeface="Arial"/>
               </a:rPr>
-              <a:t>5.2 Selbstcheck nach 4 Wochen</a:t>
+              <a:t>4.5 Praxisfall: Metallverarbeitung Wagner KG, Stuttgart</a:t>
+            </a:r>
+          </a:p>
+        </p:txBody>
+      </p:sp>
+      <p:sp>
+        <p:nvSpPr>
+          <p:cNvPr id="4" name="TextBox 3"/>
+          <p:cNvSpPr txBox="1"/>
+          <p:nvPr/>
+        </p:nvSpPr>
+        <p:spPr>
+          <a:xfrm>
+            <a:off x="365760" y="3931920"/>
+            <a:ext cx="10058400" cy="731520"/>
+          </a:xfrm>
+          <a:prstGeom prst="rect">
+            <a:avLst/>
+          </a:prstGeom>
+          <a:noFill/>
+        </p:spPr>
+        <p:txBody>
+          <a:bodyPr wrap="square">
+            <a:spAutoFit/>
+          </a:bodyPr>
+          <a:lstStyle/>
+          <a:p>
+            <a:pPr algn="l"/>
+            <a:r>
+              <a:rPr sz="1800" b="0" i="1">
+                <a:solidFill>
+                  <a:srgbClr val="556575"/>
+                </a:solidFill>
+                <a:latin typeface="Arial"/>
+              </a:rPr>
+              <a:t>Praxisfall &amp; Fallanalyse</a:t>
             </a:r>
           </a:p>
         </p:txBody>
@@ -6924,7 +7876,7 @@
     <p:bg>
       <p:bgPr>
         <a:solidFill>
-          <a:srgbClr val="1A1A1A"/>
+          <a:srgbClr val="FFFFFF"/>
         </a:solidFill>
         <a:effectLst/>
       </p:bgPr>
@@ -6951,6 +7903,84 @@
             <a:avLst/>
           </a:prstGeom>
           <a:solidFill>
+            <a:srgbClr val="003DA5"/>
+          </a:solidFill>
+          <a:ln>
+            <a:noFill/>
+          </a:ln>
+        </p:spPr>
+        <p:style>
+          <a:lnRef idx="1">
+            <a:schemeClr val="accent1"/>
+          </a:lnRef>
+          <a:fillRef idx="3">
+            <a:schemeClr val="accent1"/>
+          </a:fillRef>
+          <a:effectRef idx="2">
+            <a:schemeClr val="accent1"/>
+          </a:effectRef>
+          <a:fontRef idx="minor">
+            <a:schemeClr val="lt1"/>
+          </a:fontRef>
+        </p:style>
+        <p:txBody>
+          <a:bodyPr rtlCol="0" anchor="ctr"/>
+          <a:lstStyle/>
+          <a:p>
+            <a:pPr algn="ctr"/>
+          </a:p>
+        </p:txBody>
+      </p:sp>
+      <p:sp>
+        <p:nvSpPr>
+          <p:cNvPr id="3" name="TextBox 2"/>
+          <p:cNvSpPr txBox="1"/>
+          <p:nvPr/>
+        </p:nvSpPr>
+        <p:spPr>
+          <a:xfrm>
+            <a:off x="228600" y="182880"/>
+            <a:ext cx="11430000" cy="320040"/>
+          </a:xfrm>
+          <a:prstGeom prst="rect">
+            <a:avLst/>
+          </a:prstGeom>
+          <a:noFill/>
+        </p:spPr>
+        <p:txBody>
+          <a:bodyPr wrap="square">
+            <a:spAutoFit/>
+          </a:bodyPr>
+          <a:lstStyle/>
+          <a:p>
+            <a:pPr algn="l"/>
+            <a:r>
+              <a:rPr sz="900" b="0" i="0">
+                <a:solidFill>
+                  <a:srgbClr val="556575"/>
+                </a:solidFill>
+                <a:latin typeface="Arial"/>
+              </a:rPr>
+              <a:t>M12 · Modulinhalte</a:t>
+            </a:r>
+          </a:p>
+        </p:txBody>
+      </p:sp>
+      <p:sp>
+        <p:nvSpPr>
+          <p:cNvPr id="4" name="Rectangle 3"/>
+          <p:cNvSpPr/>
+          <p:nvPr/>
+        </p:nvSpPr>
+        <p:spPr>
+          <a:xfrm>
+            <a:off x="228600" y="228600"/>
+            <a:ext cx="11750040" cy="685800"/>
+          </a:xfrm>
+          <a:prstGeom prst="rect">
+            <a:avLst/>
+          </a:prstGeom>
+          <a:solidFill>
             <a:srgbClr val="E05B00"/>
           </a:solidFill>
           <a:ln>
@@ -6981,14 +8011,14 @@
       </p:sp>
       <p:sp>
         <p:nvSpPr>
-          <p:cNvPr id="3" name="TextBox 2"/>
+          <p:cNvPr id="5" name="TextBox 4"/>
           <p:cNvSpPr txBox="1"/>
           <p:nvPr/>
         </p:nvSpPr>
         <p:spPr>
           <a:xfrm>
-            <a:off x="365760" y="2286000"/>
-            <a:ext cx="11430000" cy="1828800"/>
+            <a:off x="365760" y="256032"/>
+            <a:ext cx="3657600" cy="347472"/>
           </a:xfrm>
           <a:prstGeom prst="rect">
             <a:avLst/>
@@ -7003,13 +8033,317 @@
           <a:p>
             <a:pPr algn="l"/>
             <a:r>
-              <a:rPr sz="3600" b="1">
+              <a:rPr sz="900" b="1" i="0">
                 <a:solidFill>
                   <a:srgbClr val="FFFFFF"/>
                 </a:solidFill>
                 <a:latin typeface="Arial"/>
               </a:rPr>
-              <a:t>Didaktik &amp; Kompetenzmodell</a:t>
+              <a:t>PRAXISFALL</a:t>
+            </a:r>
+          </a:p>
+        </p:txBody>
+      </p:sp>
+      <p:sp>
+        <p:nvSpPr>
+          <p:cNvPr id="6" name="TextBox 5"/>
+          <p:cNvSpPr txBox="1"/>
+          <p:nvPr/>
+        </p:nvSpPr>
+        <p:spPr>
+          <a:xfrm>
+            <a:off x="4114800" y="256032"/>
+            <a:ext cx="7772400" cy="384048"/>
+          </a:xfrm>
+          <a:prstGeom prst="rect">
+            <a:avLst/>
+          </a:prstGeom>
+          <a:noFill/>
+        </p:spPr>
+        <p:txBody>
+          <a:bodyPr wrap="square">
+            <a:spAutoFit/>
+          </a:bodyPr>
+          <a:lstStyle/>
+          <a:p>
+            <a:pPr algn="r"/>
+            <a:r>
+              <a:rPr sz="1600" b="1" i="0">
+                <a:solidFill>
+                  <a:srgbClr val="FFFFFF"/>
+                </a:solidFill>
+                <a:latin typeface="Arial"/>
+              </a:rPr>
+              <a:t>4.5 Praxisfall: Metallverarbeitung Wagner KG, Stuttgart</a:t>
+            </a:r>
+          </a:p>
+        </p:txBody>
+      </p:sp>
+      <p:sp>
+        <p:nvSpPr>
+          <p:cNvPr id="7" name="Rectangle 6"/>
+          <p:cNvSpPr/>
+          <p:nvPr/>
+        </p:nvSpPr>
+        <p:spPr>
+          <a:xfrm>
+            <a:off x="228600" y="1005840"/>
+            <a:ext cx="5623560" cy="5120640"/>
+          </a:xfrm>
+          <a:prstGeom prst="rect">
+            <a:avLst/>
+          </a:prstGeom>
+          <a:solidFill>
+            <a:srgbClr val="F4F6FA"/>
+          </a:solidFill>
+          <a:ln>
+            <a:noFill/>
+          </a:ln>
+        </p:spPr>
+        <p:style>
+          <a:lnRef idx="1">
+            <a:schemeClr val="accent1"/>
+          </a:lnRef>
+          <a:fillRef idx="3">
+            <a:schemeClr val="accent1"/>
+          </a:fillRef>
+          <a:effectRef idx="2">
+            <a:schemeClr val="accent1"/>
+          </a:effectRef>
+          <a:fontRef idx="minor">
+            <a:schemeClr val="lt1"/>
+          </a:fontRef>
+        </p:style>
+        <p:txBody>
+          <a:bodyPr rtlCol="0" anchor="ctr"/>
+          <a:lstStyle/>
+          <a:p>
+            <a:pPr algn="ctr"/>
+          </a:p>
+        </p:txBody>
+      </p:sp>
+      <p:sp>
+        <p:nvSpPr>
+          <p:cNvPr id="8" name="TextBox 7"/>
+          <p:cNvSpPr txBox="1"/>
+          <p:nvPr/>
+        </p:nvSpPr>
+        <p:spPr>
+          <a:xfrm>
+            <a:off x="411480" y="1097280"/>
+            <a:ext cx="5120640" cy="365760"/>
+          </a:xfrm>
+          <a:prstGeom prst="rect">
+            <a:avLst/>
+          </a:prstGeom>
+          <a:noFill/>
+        </p:spPr>
+        <p:txBody>
+          <a:bodyPr wrap="square">
+            <a:spAutoFit/>
+          </a:bodyPr>
+          <a:lstStyle/>
+          <a:p>
+            <a:pPr algn="l"/>
+            <a:r>
+              <a:rPr sz="800" b="1" i="0">
+                <a:solidFill>
+                  <a:srgbClr val="556575"/>
+                </a:solidFill>
+                <a:latin typeface="Arial"/>
+              </a:rPr>
+              <a:t>UNTERNEHMENSPORTRAIT</a:t>
+            </a:r>
+          </a:p>
+        </p:txBody>
+      </p:sp>
+      <p:sp>
+        <p:nvSpPr>
+          <p:cNvPr id="9" name="TextBox 8"/>
+          <p:cNvSpPr txBox="1"/>
+          <p:nvPr/>
+        </p:nvSpPr>
+        <p:spPr>
+          <a:xfrm>
+            <a:off x="411480" y="1508760"/>
+            <a:ext cx="5212080" cy="4389120"/>
+          </a:xfrm>
+          <a:prstGeom prst="rect">
+            <a:avLst/>
+          </a:prstGeom>
+          <a:noFill/>
+        </p:spPr>
+        <p:txBody>
+          <a:bodyPr wrap="square">
+            <a:spAutoFit/>
+          </a:bodyPr>
+          <a:lstStyle/>
+          <a:p>
+            <a:pPr algn="l"/>
+            <a:r>
+              <a:rPr sz="1300" b="0" i="0">
+                <a:solidFill>
+                  <a:srgbClr val="1A1A1A"/>
+                </a:solidFill>
+                <a:latin typeface="Arial"/>
+              </a:rPr>
+              <a:t>Unternehmensprofil</a:t>
+            </a:r>
+          </a:p>
+        </p:txBody>
+      </p:sp>
+      <p:sp>
+        <p:nvSpPr>
+          <p:cNvPr id="10" name="Rectangle 9"/>
+          <p:cNvSpPr/>
+          <p:nvPr/>
+        </p:nvSpPr>
+        <p:spPr>
+          <a:xfrm>
+            <a:off x="5989320" y="1005840"/>
+            <a:ext cx="5989320" cy="5120640"/>
+          </a:xfrm>
+          <a:prstGeom prst="rect">
+            <a:avLst/>
+          </a:prstGeom>
+          <a:solidFill>
+            <a:srgbClr val="FFF8F0"/>
+          </a:solidFill>
+          <a:ln>
+            <a:noFill/>
+          </a:ln>
+        </p:spPr>
+        <p:style>
+          <a:lnRef idx="1">
+            <a:schemeClr val="accent1"/>
+          </a:lnRef>
+          <a:fillRef idx="3">
+            <a:schemeClr val="accent1"/>
+          </a:fillRef>
+          <a:effectRef idx="2">
+            <a:schemeClr val="accent1"/>
+          </a:effectRef>
+          <a:fontRef idx="minor">
+            <a:schemeClr val="lt1"/>
+          </a:fontRef>
+        </p:style>
+        <p:txBody>
+          <a:bodyPr rtlCol="0" anchor="ctr"/>
+          <a:lstStyle/>
+          <a:p>
+            <a:pPr algn="ctr"/>
+          </a:p>
+        </p:txBody>
+      </p:sp>
+      <p:sp>
+        <p:nvSpPr>
+          <p:cNvPr id="11" name="Rectangle 10"/>
+          <p:cNvSpPr/>
+          <p:nvPr/>
+        </p:nvSpPr>
+        <p:spPr>
+          <a:xfrm>
+            <a:off x="5989320" y="1005840"/>
+            <a:ext cx="54864" cy="5120640"/>
+          </a:xfrm>
+          <a:prstGeom prst="rect">
+            <a:avLst/>
+          </a:prstGeom>
+          <a:solidFill>
+            <a:srgbClr val="E05B00"/>
+          </a:solidFill>
+          <a:ln>
+            <a:noFill/>
+          </a:ln>
+        </p:spPr>
+        <p:style>
+          <a:lnRef idx="1">
+            <a:schemeClr val="accent1"/>
+          </a:lnRef>
+          <a:fillRef idx="3">
+            <a:schemeClr val="accent1"/>
+          </a:fillRef>
+          <a:effectRef idx="2">
+            <a:schemeClr val="accent1"/>
+          </a:effectRef>
+          <a:fontRef idx="minor">
+            <a:schemeClr val="lt1"/>
+          </a:fontRef>
+        </p:style>
+        <p:txBody>
+          <a:bodyPr rtlCol="0" anchor="ctr"/>
+          <a:lstStyle/>
+          <a:p>
+            <a:pPr algn="ctr"/>
+          </a:p>
+        </p:txBody>
+      </p:sp>
+      <p:sp>
+        <p:nvSpPr>
+          <p:cNvPr id="12" name="TextBox 11"/>
+          <p:cNvSpPr txBox="1"/>
+          <p:nvPr/>
+        </p:nvSpPr>
+        <p:spPr>
+          <a:xfrm>
+            <a:off x="6172200" y="1097280"/>
+            <a:ext cx="5486400" cy="365760"/>
+          </a:xfrm>
+          <a:prstGeom prst="rect">
+            <a:avLst/>
+          </a:prstGeom>
+          <a:noFill/>
+        </p:spPr>
+        <p:txBody>
+          <a:bodyPr wrap="square">
+            <a:spAutoFit/>
+          </a:bodyPr>
+          <a:lstStyle/>
+          <a:p>
+            <a:pPr algn="l"/>
+            <a:r>
+              <a:rPr sz="800" b="1" i="0">
+                <a:solidFill>
+                  <a:srgbClr val="E05B00"/>
+                </a:solidFill>
+                <a:latin typeface="Arial"/>
+              </a:rPr>
+              <a:t>SITUATION &amp; AUFTRAG</a:t>
+            </a:r>
+          </a:p>
+        </p:txBody>
+      </p:sp>
+      <p:sp>
+        <p:nvSpPr>
+          <p:cNvPr id="13" name="TextBox 12"/>
+          <p:cNvSpPr txBox="1"/>
+          <p:nvPr/>
+        </p:nvSpPr>
+        <p:spPr>
+          <a:xfrm>
+            <a:off x="6172200" y="1508760"/>
+            <a:ext cx="5623560" cy="4389120"/>
+          </a:xfrm>
+          <a:prstGeom prst="rect">
+            <a:avLst/>
+          </a:prstGeom>
+          <a:noFill/>
+        </p:spPr>
+        <p:txBody>
+          <a:bodyPr wrap="square">
+            <a:spAutoFit/>
+          </a:bodyPr>
+          <a:lstStyle/>
+          <a:p>
+            <a:pPr algn="l"/>
+            <a:r>
+              <a:rPr sz="1400" b="0" i="0">
+                <a:solidFill>
+                  <a:srgbClr val="1A1A1A"/>
+                </a:solidFill>
+                <a:latin typeface="Arial"/>
+              </a:rPr>
+              <a:t>Ausgangssituation</a:t>
             </a:r>
           </a:p>
         </p:txBody>
@@ -7028,7 +8362,7 @@
     <p:bg>
       <p:bgPr>
         <a:solidFill>
-          <a:srgbClr val="1A1A1A"/>
+          <a:srgbClr val="FFFFFF"/>
         </a:solidFill>
         <a:effectLst/>
       </p:bgPr>
@@ -7055,7 +8389,7 @@
             <a:avLst/>
           </a:prstGeom>
           <a:solidFill>
-            <a:srgbClr val="E05B00"/>
+            <a:srgbClr val="003DA5"/>
           </a:solidFill>
           <a:ln>
             <a:noFill/>
@@ -7091,8 +8425,8 @@
         </p:nvSpPr>
         <p:spPr>
           <a:xfrm>
-            <a:off x="365760" y="2286000"/>
-            <a:ext cx="11430000" cy="1828800"/>
+            <a:off x="228600" y="182880"/>
+            <a:ext cx="11430000" cy="320040"/>
           </a:xfrm>
           <a:prstGeom prst="rect">
             <a:avLst/>
@@ -7107,17 +8441,857 @@
           <a:p>
             <a:pPr algn="l"/>
             <a:r>
-              <a:rPr sz="3600" b="1">
-                <a:solidFill>
-                  <a:srgbClr val="FFFFFF"/>
-                </a:solidFill>
-                <a:latin typeface="Arial"/>
-              </a:rPr>
-              <a:t>Systemische Beratung &amp; Fragetechniken</a:t>
-            </a:r>
-          </a:p>
-        </p:txBody>
-      </p:sp>
+              <a:rPr sz="900" b="0" i="0">
+                <a:solidFill>
+                  <a:srgbClr val="556575"/>
+                </a:solidFill>
+                <a:latin typeface="Arial"/>
+              </a:rPr>
+              <a:t>M12 · Modulinhalte</a:t>
+            </a:r>
+          </a:p>
+        </p:txBody>
+      </p:sp>
+      <p:sp>
+        <p:nvSpPr>
+          <p:cNvPr id="4" name="TextBox 3"/>
+          <p:cNvSpPr txBox="1"/>
+          <p:nvPr/>
+        </p:nvSpPr>
+        <p:spPr>
+          <a:xfrm>
+            <a:off x="365760" y="274320"/>
+            <a:ext cx="11430000" cy="777240"/>
+          </a:xfrm>
+          <a:prstGeom prst="rect">
+            <a:avLst/>
+          </a:prstGeom>
+          <a:noFill/>
+        </p:spPr>
+        <p:txBody>
+          <a:bodyPr wrap="square">
+            <a:spAutoFit/>
+          </a:bodyPr>
+          <a:lstStyle/>
+          <a:p>
+            <a:pPr algn="l"/>
+            <a:r>
+              <a:rPr sz="2200" b="1" i="0">
+                <a:solidFill>
+                  <a:srgbClr val="003DA5"/>
+                </a:solidFill>
+                <a:latin typeface="Arial"/>
+              </a:rPr>
+              <a:t>Arbeitsaufgabe – 4.5 Praxisfall: Metallverarbeitung Wagner KG, Stuttgart</a:t>
+            </a:r>
+          </a:p>
+        </p:txBody>
+      </p:sp>
+      <p:sp>
+        <p:nvSpPr>
+          <p:cNvPr id="5" name="Rectangle 4"/>
+          <p:cNvSpPr/>
+          <p:nvPr/>
+        </p:nvSpPr>
+        <p:spPr>
+          <a:xfrm>
+            <a:off x="365760" y="1005840"/>
+            <a:ext cx="11430000" cy="27432"/>
+          </a:xfrm>
+          <a:prstGeom prst="rect">
+            <a:avLst/>
+          </a:prstGeom>
+          <a:solidFill>
+            <a:srgbClr val="D1D5DB"/>
+          </a:solidFill>
+          <a:ln>
+            <a:noFill/>
+          </a:ln>
+        </p:spPr>
+        <p:style>
+          <a:lnRef idx="1">
+            <a:schemeClr val="accent1"/>
+          </a:lnRef>
+          <a:fillRef idx="3">
+            <a:schemeClr val="accent1"/>
+          </a:fillRef>
+          <a:effectRef idx="2">
+            <a:schemeClr val="accent1"/>
+          </a:effectRef>
+          <a:fontRef idx="minor">
+            <a:schemeClr val="lt1"/>
+          </a:fontRef>
+        </p:style>
+        <p:txBody>
+          <a:bodyPr rtlCol="0" anchor="ctr"/>
+          <a:lstStyle/>
+          <a:p>
+            <a:pPr algn="ctr"/>
+          </a:p>
+        </p:txBody>
+      </p:sp>
+      <p:graphicFrame>
+        <p:nvGraphicFramePr>
+          <p:cNvPr id="6" name="Table 5"/>
+          <p:cNvGraphicFramePr>
+            <a:graphicFrameLocks noGrp="1"/>
+          </p:cNvGraphicFramePr>
+          <p:nvPr/>
+        </p:nvGraphicFramePr>
+        <p:xfrm>
+          <a:off x="365760" y="1143000"/>
+          <a:ext cx="11430000" cy="5029200"/>
+        </p:xfrm>
+        <a:graphic>
+          <a:graphicData uri="http://schemas.openxmlformats.org/drawingml/2006/table">
+            <a:tbl>
+              <a:tblPr firstRow="1" bandRow="1">
+                <a:tableStyleId>{5C22544A-7EE6-4342-B048-85BDC9FD1C3A}</a:tableStyleId>
+              </a:tblPr>
+              <a:tblGrid>
+                <a:gridCol w="5715000"/>
+                <a:gridCol w="5715000"/>
+              </a:tblGrid>
+              <a:tr h="314325">
+                <a:tc>
+                  <a:txBody>
+                    <a:bodyPr wrap="square"/>
+                    <a:lstStyle/>
+                    <a:p>
+                      <a:r>
+                        <a:rPr sz="1100" b="1">
+                          <a:solidFill>
+                            <a:srgbClr val="FFFFFF"/>
+                          </a:solidFill>
+                          <a:latin typeface="Arial"/>
+                        </a:rPr>
+                        <a:t>Merkmal</a:t>
+                      </a:r>
+                    </a:p>
+                  </a:txBody>
+                  <a:tcPr>
+                    <a:solidFill>
+                      <a:srgbClr val="003DA5"/>
+                    </a:solidFill>
+                  </a:tcPr>
+                </a:tc>
+                <a:tc>
+                  <a:txBody>
+                    <a:bodyPr wrap="square"/>
+                    <a:lstStyle/>
+                    <a:p>
+                      <a:r>
+                        <a:rPr sz="1100" b="1">
+                          <a:solidFill>
+                            <a:srgbClr val="FFFFFF"/>
+                          </a:solidFill>
+                          <a:latin typeface="Arial"/>
+                        </a:rPr>
+                        <a:t>Detail</a:t>
+                      </a:r>
+                    </a:p>
+                  </a:txBody>
+                  <a:tcPr>
+                    <a:solidFill>
+                      <a:srgbClr val="003DA5"/>
+                    </a:solidFill>
+                  </a:tcPr>
+                </a:tc>
+              </a:tr>
+              <a:tr h="314325">
+                <a:tc>
+                  <a:txBody>
+                    <a:bodyPr wrap="square"/>
+                    <a:lstStyle/>
+                    <a:p>
+                      <a:r>
+                        <a:rPr sz="1100" b="0">
+                          <a:solidFill>
+                            <a:srgbClr val="1A1A1A"/>
+                          </a:solidFill>
+                          <a:latin typeface="Arial"/>
+                        </a:rPr>
+                        <a:t>Unternehmen</a:t>
+                      </a:r>
+                    </a:p>
+                  </a:txBody>
+                  <a:tcPr>
+                    <a:solidFill>
+                      <a:srgbClr val="FFFFFF"/>
+                    </a:solidFill>
+                  </a:tcPr>
+                </a:tc>
+                <a:tc>
+                  <a:txBody>
+                    <a:bodyPr wrap="square"/>
+                    <a:lstStyle/>
+                    <a:p>
+                      <a:r>
+                        <a:rPr sz="1100" b="0">
+                          <a:solidFill>
+                            <a:srgbClr val="1A1A1A"/>
+                          </a:solidFill>
+                          <a:latin typeface="Arial"/>
+                        </a:rPr>
+                        <a:t>Metallverarbeitung Wagner KG (fiktiv)</a:t>
+                      </a:r>
+                    </a:p>
+                  </a:txBody>
+                  <a:tcPr>
+                    <a:solidFill>
+                      <a:srgbClr val="FFFFFF"/>
+                    </a:solidFill>
+                  </a:tcPr>
+                </a:tc>
+              </a:tr>
+              <a:tr h="314325">
+                <a:tc>
+                  <a:txBody>
+                    <a:bodyPr wrap="square"/>
+                    <a:lstStyle/>
+                    <a:p>
+                      <a:r>
+                        <a:rPr sz="1100" b="0">
+                          <a:solidFill>
+                            <a:srgbClr val="1A1A1A"/>
+                          </a:solidFill>
+                          <a:latin typeface="Arial"/>
+                        </a:rPr>
+                        <a:t>Branche</a:t>
+                      </a:r>
+                    </a:p>
+                  </a:txBody>
+                  <a:tcPr>
+                    <a:solidFill>
+                      <a:srgbClr val="F4F6FA"/>
+                    </a:solidFill>
+                  </a:tcPr>
+                </a:tc>
+                <a:tc>
+                  <a:txBody>
+                    <a:bodyPr wrap="square"/>
+                    <a:lstStyle/>
+                    <a:p>
+                      <a:r>
+                        <a:rPr sz="1100" b="0">
+                          <a:solidFill>
+                            <a:srgbClr val="1A1A1A"/>
+                          </a:solidFill>
+                          <a:latin typeface="Arial"/>
+                        </a:rPr>
+                        <a:t>Präzisionsmechanik / Maschinenbau-Zulieferer</a:t>
+                      </a:r>
+                    </a:p>
+                  </a:txBody>
+                  <a:tcPr>
+                    <a:solidFill>
+                      <a:srgbClr val="F4F6FA"/>
+                    </a:solidFill>
+                  </a:tcPr>
+                </a:tc>
+              </a:tr>
+              <a:tr h="314325">
+                <a:tc>
+                  <a:txBody>
+                    <a:bodyPr wrap="square"/>
+                    <a:lstStyle/>
+                    <a:p>
+                      <a:r>
+                        <a:rPr sz="1100" b="0">
+                          <a:solidFill>
+                            <a:srgbClr val="1A1A1A"/>
+                          </a:solidFill>
+                          <a:latin typeface="Arial"/>
+                        </a:rPr>
+                        <a:t>Gründung</a:t>
+                      </a:r>
+                    </a:p>
+                  </a:txBody>
+                  <a:tcPr>
+                    <a:solidFill>
+                      <a:srgbClr val="FFFFFF"/>
+                    </a:solidFill>
+                  </a:tcPr>
+                </a:tc>
+                <a:tc>
+                  <a:txBody>
+                    <a:bodyPr wrap="square"/>
+                    <a:lstStyle/>
+                    <a:p>
+                      <a:r>
+                        <a:rPr sz="1100" b="0">
+                          <a:solidFill>
+                            <a:srgbClr val="1A1A1A"/>
+                          </a:solidFill>
+                          <a:latin typeface="Arial"/>
+                        </a:rPr>
+                        <a:t>1978 durch Karl Wagner Sen.</a:t>
+                      </a:r>
+                    </a:p>
+                  </a:txBody>
+                  <a:tcPr>
+                    <a:solidFill>
+                      <a:srgbClr val="FFFFFF"/>
+                    </a:solidFill>
+                  </a:tcPr>
+                </a:tc>
+              </a:tr>
+              <a:tr h="314325">
+                <a:tc>
+                  <a:txBody>
+                    <a:bodyPr wrap="square"/>
+                    <a:lstStyle/>
+                    <a:p>
+                      <a:r>
+                        <a:rPr sz="1100" b="0">
+                          <a:solidFill>
+                            <a:srgbClr val="1A1A1A"/>
+                          </a:solidFill>
+                          <a:latin typeface="Arial"/>
+                        </a:rPr>
+                        <a:t>Geschäftsführer</a:t>
+                      </a:r>
+                    </a:p>
+                  </a:txBody>
+                  <a:tcPr>
+                    <a:solidFill>
+                      <a:srgbClr val="F4F6FA"/>
+                    </a:solidFill>
+                  </a:tcPr>
+                </a:tc>
+                <a:tc>
+                  <a:txBody>
+                    <a:bodyPr wrap="square"/>
+                    <a:lstStyle/>
+                    <a:p>
+                      <a:r>
+                        <a:rPr sz="1100" b="0">
+                          <a:solidFill>
+                            <a:srgbClr val="1A1A1A"/>
+                          </a:solidFill>
+                          <a:latin typeface="Arial"/>
+                        </a:rPr>
+                        <a:t>Karl Wagner Jun. (57 Jahre)</a:t>
+                      </a:r>
+                    </a:p>
+                  </a:txBody>
+                  <a:tcPr>
+                    <a:solidFill>
+                      <a:srgbClr val="F4F6FA"/>
+                    </a:solidFill>
+                  </a:tcPr>
+                </a:tc>
+              </a:tr>
+              <a:tr h="314325">
+                <a:tc>
+                  <a:txBody>
+                    <a:bodyPr wrap="square"/>
+                    <a:lstStyle/>
+                    <a:p>
+                      <a:r>
+                        <a:rPr sz="1100" b="0">
+                          <a:solidFill>
+                            <a:srgbClr val="1A1A1A"/>
+                          </a:solidFill>
+                          <a:latin typeface="Arial"/>
+                        </a:rPr>
+                        <a:t>Umsatz</a:t>
+                      </a:r>
+                    </a:p>
+                  </a:txBody>
+                  <a:tcPr>
+                    <a:solidFill>
+                      <a:srgbClr val="FFFFFF"/>
+                    </a:solidFill>
+                  </a:tcPr>
+                </a:tc>
+                <a:tc>
+                  <a:txBody>
+                    <a:bodyPr wrap="square"/>
+                    <a:lstStyle/>
+                    <a:p>
+                      <a:r>
+                        <a:rPr sz="1100" b="0">
+                          <a:solidFill>
+                            <a:srgbClr val="1A1A1A"/>
+                          </a:solidFill>
+                          <a:latin typeface="Arial"/>
+                        </a:rPr>
+                        <a:t>12 Mio. EUR (2024)</a:t>
+                      </a:r>
+                    </a:p>
+                  </a:txBody>
+                  <a:tcPr>
+                    <a:solidFill>
+                      <a:srgbClr val="FFFFFF"/>
+                    </a:solidFill>
+                  </a:tcPr>
+                </a:tc>
+              </a:tr>
+              <a:tr h="314325">
+                <a:tc>
+                  <a:txBody>
+                    <a:bodyPr wrap="square"/>
+                    <a:lstStyle/>
+                    <a:p>
+                      <a:r>
+                        <a:rPr sz="1100" b="0">
+                          <a:solidFill>
+                            <a:srgbClr val="1A1A1A"/>
+                          </a:solidFill>
+                          <a:latin typeface="Arial"/>
+                        </a:rPr>
+                        <a:t>EBIT-Marge</a:t>
+                      </a:r>
+                    </a:p>
+                  </a:txBody>
+                  <a:tcPr>
+                    <a:solidFill>
+                      <a:srgbClr val="F4F6FA"/>
+                    </a:solidFill>
+                  </a:tcPr>
+                </a:tc>
+                <a:tc>
+                  <a:txBody>
+                    <a:bodyPr wrap="square"/>
+                    <a:lstStyle/>
+                    <a:p>
+                      <a:r>
+                        <a:rPr sz="1100" b="0">
+                          <a:solidFill>
+                            <a:srgbClr val="1A1A1A"/>
+                          </a:solidFill>
+                          <a:latin typeface="Arial"/>
+                        </a:rPr>
+                        <a:t>10 % (1,2 Mio. EUR)</a:t>
+                      </a:r>
+                    </a:p>
+                  </a:txBody>
+                  <a:tcPr>
+                    <a:solidFill>
+                      <a:srgbClr val="F4F6FA"/>
+                    </a:solidFill>
+                  </a:tcPr>
+                </a:tc>
+              </a:tr>
+              <a:tr h="314325">
+                <a:tc>
+                  <a:txBody>
+                    <a:bodyPr wrap="square"/>
+                    <a:lstStyle/>
+                    <a:p>
+                      <a:r>
+                        <a:rPr sz="1100" b="0">
+                          <a:solidFill>
+                            <a:srgbClr val="1A1A1A"/>
+                          </a:solidFill>
+                          <a:latin typeface="Arial"/>
+                        </a:rPr>
+                        <a:t>Unternehmenswert (Schätzung)</a:t>
+                      </a:r>
+                    </a:p>
+                  </a:txBody>
+                  <a:tcPr>
+                    <a:solidFill>
+                      <a:srgbClr val="FFFFFF"/>
+                    </a:solidFill>
+                  </a:tcPr>
+                </a:tc>
+                <a:tc>
+                  <a:txBody>
+                    <a:bodyPr wrap="square"/>
+                    <a:lstStyle/>
+                    <a:p>
+                      <a:r>
+                        <a:rPr sz="1100" b="0">
+                          <a:solidFill>
+                            <a:srgbClr val="1A1A1A"/>
+                          </a:solidFill>
+                          <a:latin typeface="Arial"/>
+                        </a:rPr>
+                        <a:t>ca. 5–6 Mio. EUR (EBIT-Multiplikator 4–5x; Maschinenbau-Zulieferer typisch)</a:t>
+                      </a:r>
+                    </a:p>
+                  </a:txBody>
+                  <a:tcPr>
+                    <a:solidFill>
+                      <a:srgbClr val="FFFFFF"/>
+                    </a:solidFill>
+                  </a:tcPr>
+                </a:tc>
+              </a:tr>
+              <a:tr h="314325">
+                <a:tc>
+                  <a:txBody>
+                    <a:bodyPr wrap="square"/>
+                    <a:lstStyle/>
+                    <a:p>
+                      <a:r>
+                        <a:rPr sz="1100" b="0">
+                          <a:solidFill>
+                            <a:srgbClr val="1A1A1A"/>
+                          </a:solidFill>
+                          <a:latin typeface="Arial"/>
+                        </a:rPr>
+                        <a:t>MBO-Finanzierbarkeit</a:t>
+                      </a:r>
+                    </a:p>
+                  </a:txBody>
+                  <a:tcPr>
+                    <a:solidFill>
+                      <a:srgbClr val="F4F6FA"/>
+                    </a:solidFill>
+                  </a:tcPr>
+                </a:tc>
+                <a:tc>
+                  <a:txBody>
+                    <a:bodyPr wrap="square"/>
+                    <a:lstStyle/>
+                    <a:p>
+                      <a:r>
+                        <a:rPr sz="1100" b="0">
+                          <a:solidFill>
+                            <a:srgbClr val="1A1A1A"/>
+                          </a:solidFill>
+                          <a:latin typeface="Arial"/>
+                        </a:rPr>
+                        <a:t>Bei EK-Quote 20–25 % (1,0–1,5 Mio. EUR Eigenanteil Käufer) und FK-Finanzierung 3,5–4,5 Mio. EUR – anspruchsvoll aber realistisch für einen Meister mit entsprechender Bonität</a:t>
+                      </a:r>
+                    </a:p>
+                  </a:txBody>
+                  <a:tcPr>
+                    <a:solidFill>
+                      <a:srgbClr val="F4F6FA"/>
+                    </a:solidFill>
+                  </a:tcPr>
+                </a:tc>
+              </a:tr>
+              <a:tr h="314325">
+                <a:tc>
+                  <a:txBody>
+                    <a:bodyPr wrap="square"/>
+                    <a:lstStyle/>
+                    <a:p>
+                      <a:r>
+                        <a:rPr sz="1100" b="0">
+                          <a:solidFill>
+                            <a:srgbClr val="1A1A1A"/>
+                          </a:solidFill>
+                          <a:latin typeface="Arial"/>
+                        </a:rPr>
+                        <a:t>Mitarbeiter</a:t>
+                      </a:r>
+                    </a:p>
+                  </a:txBody>
+                  <a:tcPr>
+                    <a:solidFill>
+                      <a:srgbClr val="FFFFFF"/>
+                    </a:solidFill>
+                  </a:tcPr>
+                </a:tc>
+                <a:tc>
+                  <a:txBody>
+                    <a:bodyPr wrap="square"/>
+                    <a:lstStyle/>
+                    <a:p>
+                      <a:r>
+                        <a:rPr sz="1100" b="0">
+                          <a:solidFill>
+                            <a:srgbClr val="1A1A1A"/>
+                          </a:solidFill>
+                          <a:latin typeface="Arial"/>
+                        </a:rPr>
+                        <a:t>45 (davon: 3 Meister, 8 Techniker, 34 Facharbeiter)</a:t>
+                      </a:r>
+                    </a:p>
+                  </a:txBody>
+                  <a:tcPr>
+                    <a:solidFill>
+                      <a:srgbClr val="FFFFFF"/>
+                    </a:solidFill>
+                  </a:tcPr>
+                </a:tc>
+              </a:tr>
+              <a:tr h="314325">
+                <a:tc>
+                  <a:txBody>
+                    <a:bodyPr wrap="square"/>
+                    <a:lstStyle/>
+                    <a:p>
+                      <a:r>
+                        <a:rPr sz="1100" b="0">
+                          <a:solidFill>
+                            <a:srgbClr val="1A1A1A"/>
+                          </a:solidFill>
+                          <a:latin typeface="Arial"/>
+                        </a:rPr>
+                        <a:t>Kreditvolumen VR-Bank</a:t>
+                      </a:r>
+                    </a:p>
+                  </a:txBody>
+                  <a:tcPr>
+                    <a:solidFill>
+                      <a:srgbClr val="F4F6FA"/>
+                    </a:solidFill>
+                  </a:tcPr>
+                </a:tc>
+                <a:tc>
+                  <a:txBody>
+                    <a:bodyPr wrap="square"/>
+                    <a:lstStyle/>
+                    <a:p>
+                      <a:r>
+                        <a:rPr sz="1100" b="0">
+                          <a:solidFill>
+                            <a:srgbClr val="1A1A1A"/>
+                          </a:solidFill>
+                          <a:latin typeface="Arial"/>
+                        </a:rPr>
+                        <a:t>2,8 Mio. EUR (Betriebsmittellinie + Maschinenfinanzierungen)</a:t>
+                      </a:r>
+                    </a:p>
+                  </a:txBody>
+                  <a:tcPr>
+                    <a:solidFill>
+                      <a:srgbClr val="F4F6FA"/>
+                    </a:solidFill>
+                  </a:tcPr>
+                </a:tc>
+              </a:tr>
+              <a:tr h="314325">
+                <a:tc>
+                  <a:txBody>
+                    <a:bodyPr wrap="square"/>
+                    <a:lstStyle/>
+                    <a:p>
+                      <a:r>
+                        <a:rPr sz="1100" b="0">
+                          <a:solidFill>
+                            <a:srgbClr val="1A1A1A"/>
+                          </a:solidFill>
+                          <a:latin typeface="Arial"/>
+                        </a:rPr>
+                        <a:t>Familie</a:t>
+                      </a:r>
+                    </a:p>
+                  </a:txBody>
+                  <a:tcPr>
+                    <a:solidFill>
+                      <a:srgbClr val="FFFFFF"/>
+                    </a:solidFill>
+                  </a:tcPr>
+                </a:tc>
+                <a:tc>
+                  <a:txBody>
+                    <a:bodyPr wrap="square"/>
+                    <a:lstStyle/>
+                    <a:p>
+                      <a:r>
+                        <a:rPr sz="1100" b="0">
+                          <a:solidFill>
+                            <a:srgbClr val="1A1A1A"/>
+                          </a:solidFill>
+                          <a:latin typeface="Arial"/>
+                        </a:rPr>
+                        <a:t>Verheiratet; zwei Kinder: Katrin (32, Lehrerin) / Michael (29, IT-Studium abgebrochen)</a:t>
+                      </a:r>
+                    </a:p>
+                  </a:txBody>
+                  <a:tcPr>
+                    <a:solidFill>
+                      <a:srgbClr val="FFFFFF"/>
+                    </a:solidFill>
+                  </a:tcPr>
+                </a:tc>
+              </a:tr>
+              <a:tr h="314325">
+                <a:tc>
+                  <a:txBody>
+                    <a:bodyPr wrap="square"/>
+                    <a:lstStyle/>
+                    <a:p>
+                      <a:r>
+                        <a:rPr sz="1100" b="0">
+                          <a:solidFill>
+                            <a:srgbClr val="1A1A1A"/>
+                          </a:solidFill>
+                          <a:latin typeface="Arial"/>
+                        </a:rPr>
+                        <a:t>Zeitraum</a:t>
+                      </a:r>
+                    </a:p>
+                  </a:txBody>
+                  <a:tcPr>
+                    <a:solidFill>
+                      <a:srgbClr val="F4F6FA"/>
+                    </a:solidFill>
+                  </a:tcPr>
+                </a:tc>
+                <a:tc>
+                  <a:txBody>
+                    <a:bodyPr wrap="square"/>
+                    <a:lstStyle/>
+                    <a:p>
+                      <a:r>
+                        <a:rPr sz="1100" b="0">
+                          <a:solidFill>
+                            <a:srgbClr val="1A1A1A"/>
+                          </a:solidFill>
+                          <a:latin typeface="Arial"/>
+                        </a:rPr>
+                        <a:t>Schritte</a:t>
+                      </a:r>
+                    </a:p>
+                  </a:txBody>
+                  <a:tcPr>
+                    <a:solidFill>
+                      <a:srgbClr val="F4F6FA"/>
+                    </a:solidFill>
+                  </a:tcPr>
+                </a:tc>
+              </a:tr>
+              <a:tr h="314325">
+                <a:tc>
+                  <a:txBody>
+                    <a:bodyPr wrap="square"/>
+                    <a:lstStyle/>
+                    <a:p>
+                      <a:r>
+                        <a:rPr sz="1100" b="0">
+                          <a:solidFill>
+                            <a:srgbClr val="1A1A1A"/>
+                          </a:solidFill>
+                          <a:latin typeface="Arial"/>
+                        </a:rPr>
+                        <a:t>Nächste 4 Wochen</a:t>
+                      </a:r>
+                    </a:p>
+                  </a:txBody>
+                  <a:tcPr>
+                    <a:solidFill>
+                      <a:srgbClr val="FFFFFF"/>
+                    </a:solidFill>
+                  </a:tcPr>
+                </a:tc>
+                <a:tc>
+                  <a:txBody>
+                    <a:bodyPr wrap="square"/>
+                    <a:lstStyle/>
+                    <a:p>
+                      <a:r>
+                        <a:rPr sz="1100" b="0">
+                          <a:solidFill>
+                            <a:srgbClr val="1A1A1A"/>
+                          </a:solidFill>
+                          <a:latin typeface="Arial"/>
+                        </a:rPr>
+                        <a:t>Unternehmensbewertung (Kaufpreis-Grundlage); finanzielle Prüfung (Hidden Liabilities?); Klärung: Darf Claudia diskret mit Dieter und Michael sprechen?</a:t>
+                      </a:r>
+                    </a:p>
+                  </a:txBody>
+                  <a:tcPr>
+                    <a:solidFill>
+                      <a:srgbClr val="FFFFFF"/>
+                    </a:solidFill>
+                  </a:tcPr>
+                </a:tc>
+              </a:tr>
+              <a:tr h="314325">
+                <a:tc>
+                  <a:txBody>
+                    <a:bodyPr wrap="square"/>
+                    <a:lstStyle/>
+                    <a:p>
+                      <a:r>
+                        <a:rPr sz="1100" b="0">
+                          <a:solidFill>
+                            <a:srgbClr val="1A1A1A"/>
+                          </a:solidFill>
+                          <a:latin typeface="Arial"/>
+                        </a:rPr>
+                        <a:t>Wochen 5–16</a:t>
+                      </a:r>
+                    </a:p>
+                  </a:txBody>
+                  <a:tcPr>
+                    <a:solidFill>
+                      <a:srgbClr val="F4F6FA"/>
+                    </a:solidFill>
+                  </a:tcPr>
+                </a:tc>
+                <a:tc>
+                  <a:txBody>
+                    <a:bodyPr wrap="square"/>
+                    <a:lstStyle/>
+                    <a:p>
+                      <a:r>
+                        <a:rPr sz="1100" b="0">
+                          <a:solidFill>
+                            <a:srgbClr val="1A1A1A"/>
+                          </a:solidFill>
+                          <a:latin typeface="Arial"/>
+                        </a:rPr>
+                        <a:t>MBO-Szenario mit Dieter erkunden (Finanzierungskraft, Interesse); Michael an externe KMU-Ausbildung/Unternehmer-Programm vermitteln; DZ BANK M&amp;A-Team für MBO-Expertise einbinden</a:t>
+                      </a:r>
+                    </a:p>
+                  </a:txBody>
+                  <a:tcPr>
+                    <a:solidFill>
+                      <a:srgbClr val="F4F6FA"/>
+                    </a:solidFill>
+                  </a:tcPr>
+                </a:tc>
+              </a:tr>
+              <a:tr h="314325">
+                <a:tc>
+                  <a:txBody>
+                    <a:bodyPr wrap="square"/>
+                    <a:lstStyle/>
+                    <a:p>
+                      <a:r>
+                        <a:rPr sz="1100" b="0">
+                          <a:solidFill>
+                            <a:srgbClr val="1A1A1A"/>
+                          </a:solidFill>
+                          <a:latin typeface="Arial"/>
+                        </a:rPr>
+                        <a:t>Wochen 17–52</a:t>
+                      </a:r>
+                    </a:p>
+                  </a:txBody>
+                  <a:tcPr>
+                    <a:solidFill>
+                      <a:srgbClr val="FFFFFF"/>
+                    </a:solidFill>
+                  </a:tcPr>
+                </a:tc>
+                <a:tc>
+                  <a:txBody>
+                    <a:bodyPr wrap="square"/>
+                    <a:lstStyle/>
+                    <a:p>
+                      <a:r>
+                        <a:rPr sz="1100" b="0">
+                          <a:solidFill>
+                            <a:srgbClr val="1A1A1A"/>
+                          </a:solidFill>
+                          <a:latin typeface="Arial"/>
+                        </a:rPr>
+                        <a:t>Verbindliche Finanzierungszusage erarbeiten; Steuerberater &amp; Notar einbinden (GmbH-Vertrag, ErbStG-Optimierung); Karl in „Mentor-Rolle" entwickeln</a:t>
+                      </a:r>
+                    </a:p>
+                  </a:txBody>
+                  <a:tcPr>
+                    <a:solidFill>
+                      <a:srgbClr val="FFFFFF"/>
+                    </a:solidFill>
+                  </a:tcPr>
+                </a:tc>
+              </a:tr>
+            </a:tbl>
+          </a:graphicData>
+        </a:graphic>
+      </p:graphicFrame>
     </p:spTree>
   </p:cSld>
   <p:clrMapOvr>
@@ -7195,8 +9369,8 @@
         </p:nvSpPr>
         <p:spPr>
           <a:xfrm>
-            <a:off x="365760" y="2286000"/>
-            <a:ext cx="11430000" cy="1828800"/>
+            <a:off x="365760" y="2011680"/>
+            <a:ext cx="11430000" cy="2011680"/>
           </a:xfrm>
           <a:prstGeom prst="rect">
             <a:avLst/>
@@ -7211,13 +9385,13 @@
           <a:p>
             <a:pPr algn="l"/>
             <a:r>
-              <a:rPr sz="3600" b="1">
+              <a:rPr sz="3600" b="1" i="0">
                 <a:solidFill>
                   <a:srgbClr val="FFFFFF"/>
                 </a:solidFill>
                 <a:latin typeface="Arial"/>
               </a:rPr>
-              <a:t>Bedarfsanalyse &amp; Gesprächsführung</a:t>
+              <a:t>4.6 Arbeitsblatt: Nachfolge-Erstgespräch strukturieren</a:t>
             </a:r>
           </a:p>
         </p:txBody>
@@ -7231,6 +9405,1472 @@
 </file>
 
 <file path=ppt/slides/slide25.xml><?xml version="1.0" encoding="utf-8"?>
+<p:sld xmlns:a="http://schemas.openxmlformats.org/drawingml/2006/main" xmlns:p="http://schemas.openxmlformats.org/presentationml/2006/main" xmlns:r="http://schemas.openxmlformats.org/officeDocument/2006/relationships">
+  <p:cSld>
+    <p:bg>
+      <p:bgPr>
+        <a:solidFill>
+          <a:srgbClr val="FFFFFF"/>
+        </a:solidFill>
+        <a:effectLst/>
+      </p:bgPr>
+    </p:bg>
+    <p:spTree>
+      <p:nvGrpSpPr>
+        <p:cNvPr id="1" name=""/>
+        <p:cNvGrpSpPr/>
+        <p:nvPr/>
+      </p:nvGrpSpPr>
+      <p:grpSpPr/>
+      <p:sp>
+        <p:nvSpPr>
+          <p:cNvPr id="2" name="Rectangle 1"/>
+          <p:cNvSpPr/>
+          <p:nvPr/>
+        </p:nvSpPr>
+        <p:spPr>
+          <a:xfrm>
+            <a:off x="0" y="0"/>
+            <a:ext cx="73152" cy="6858000"/>
+          </a:xfrm>
+          <a:prstGeom prst="rect">
+            <a:avLst/>
+          </a:prstGeom>
+          <a:solidFill>
+            <a:srgbClr val="003DA5"/>
+          </a:solidFill>
+          <a:ln>
+            <a:noFill/>
+          </a:ln>
+        </p:spPr>
+        <p:style>
+          <a:lnRef idx="1">
+            <a:schemeClr val="accent1"/>
+          </a:lnRef>
+          <a:fillRef idx="3">
+            <a:schemeClr val="accent1"/>
+          </a:fillRef>
+          <a:effectRef idx="2">
+            <a:schemeClr val="accent1"/>
+          </a:effectRef>
+          <a:fontRef idx="minor">
+            <a:schemeClr val="lt1"/>
+          </a:fontRef>
+        </p:style>
+        <p:txBody>
+          <a:bodyPr rtlCol="0" anchor="ctr"/>
+          <a:lstStyle/>
+          <a:p>
+            <a:pPr algn="ctr"/>
+          </a:p>
+        </p:txBody>
+      </p:sp>
+      <p:sp>
+        <p:nvSpPr>
+          <p:cNvPr id="3" name="TextBox 2"/>
+          <p:cNvSpPr txBox="1"/>
+          <p:nvPr/>
+        </p:nvSpPr>
+        <p:spPr>
+          <a:xfrm>
+            <a:off x="228600" y="182880"/>
+            <a:ext cx="11430000" cy="320040"/>
+          </a:xfrm>
+          <a:prstGeom prst="rect">
+            <a:avLst/>
+          </a:prstGeom>
+          <a:noFill/>
+        </p:spPr>
+        <p:txBody>
+          <a:bodyPr wrap="square">
+            <a:spAutoFit/>
+          </a:bodyPr>
+          <a:lstStyle/>
+          <a:p>
+            <a:pPr algn="l"/>
+            <a:r>
+              <a:rPr sz="900" b="0" i="0">
+                <a:solidFill>
+                  <a:srgbClr val="556575"/>
+                </a:solidFill>
+                <a:latin typeface="Arial"/>
+              </a:rPr>
+              <a:t>M12 · Modulinhalte</a:t>
+            </a:r>
+          </a:p>
+        </p:txBody>
+      </p:sp>
+      <p:sp>
+        <p:nvSpPr>
+          <p:cNvPr id="4" name="TextBox 3"/>
+          <p:cNvSpPr txBox="1"/>
+          <p:nvPr/>
+        </p:nvSpPr>
+        <p:spPr>
+          <a:xfrm>
+            <a:off x="365760" y="274320"/>
+            <a:ext cx="11430000" cy="777240"/>
+          </a:xfrm>
+          <a:prstGeom prst="rect">
+            <a:avLst/>
+          </a:prstGeom>
+          <a:noFill/>
+        </p:spPr>
+        <p:txBody>
+          <a:bodyPr wrap="square">
+            <a:spAutoFit/>
+          </a:bodyPr>
+          <a:lstStyle/>
+          <a:p>
+            <a:pPr algn="l"/>
+            <a:r>
+              <a:rPr sz="2200" b="1" i="0">
+                <a:solidFill>
+                  <a:srgbClr val="003DA5"/>
+                </a:solidFill>
+                <a:latin typeface="Arial"/>
+              </a:rPr>
+              <a:t>Vorbereitung (vor dem Gespräch)</a:t>
+            </a:r>
+          </a:p>
+        </p:txBody>
+      </p:sp>
+      <p:sp>
+        <p:nvSpPr>
+          <p:cNvPr id="5" name="Rectangle 4"/>
+          <p:cNvSpPr/>
+          <p:nvPr/>
+        </p:nvSpPr>
+        <p:spPr>
+          <a:xfrm>
+            <a:off x="365760" y="1005840"/>
+            <a:ext cx="11430000" cy="27432"/>
+          </a:xfrm>
+          <a:prstGeom prst="rect">
+            <a:avLst/>
+          </a:prstGeom>
+          <a:solidFill>
+            <a:srgbClr val="D1D5DB"/>
+          </a:solidFill>
+          <a:ln>
+            <a:noFill/>
+          </a:ln>
+        </p:spPr>
+        <p:style>
+          <a:lnRef idx="1">
+            <a:schemeClr val="accent1"/>
+          </a:lnRef>
+          <a:fillRef idx="3">
+            <a:schemeClr val="accent1"/>
+          </a:fillRef>
+          <a:effectRef idx="2">
+            <a:schemeClr val="accent1"/>
+          </a:effectRef>
+          <a:fontRef idx="minor">
+            <a:schemeClr val="lt1"/>
+          </a:fontRef>
+        </p:style>
+        <p:txBody>
+          <a:bodyPr rtlCol="0" anchor="ctr"/>
+          <a:lstStyle/>
+          <a:p>
+            <a:pPr algn="ctr"/>
+          </a:p>
+        </p:txBody>
+      </p:sp>
+      <p:sp>
+        <p:nvSpPr>
+          <p:cNvPr id="6" name="TextBox 5"/>
+          <p:cNvSpPr txBox="1"/>
+          <p:nvPr/>
+        </p:nvSpPr>
+        <p:spPr>
+          <a:xfrm>
+            <a:off x="365760" y="1143000"/>
+            <a:ext cx="11430000" cy="5212080"/>
+          </a:xfrm>
+          <a:prstGeom prst="rect">
+            <a:avLst/>
+          </a:prstGeom>
+          <a:noFill/>
+        </p:spPr>
+        <p:txBody>
+          <a:bodyPr wrap="square">
+            <a:spAutoFit/>
+          </a:bodyPr>
+          <a:lstStyle/>
+          <a:p>
+            <a:pPr>
+              <a:spcBef>
+                <a:spcPts val="500"/>
+              </a:spcBef>
+            </a:pPr>
+            <a:r>
+              <a:rPr sz="1500">
+                <a:solidFill>
+                  <a:srgbClr val="003DA5"/>
+                </a:solidFill>
+                <a:latin typeface="Arial"/>
+              </a:rPr>
+              <a:t>▪  </a:t>
+            </a:r>
+            <a:r>
+              <a:rPr sz="1700">
+                <a:solidFill>
+                  <a:srgbClr val="1A1A1A"/>
+                </a:solidFill>
+                <a:latin typeface="Arial"/>
+              </a:rPr>
+              <a:t>- ☐ Unternehmensdaten zusammentragen (Umsatz, Gewinn, Mitarbeiter, Branche) - ☐ Familie erkunden: Wer sind potenzielle Nachfolger? Alter, Ausbildung,…</a:t>
+            </a:r>
+          </a:p>
+        </p:txBody>
+      </p:sp>
+    </p:spTree>
+  </p:cSld>
+  <p:clrMapOvr>
+    <a:masterClrMapping/>
+  </p:clrMapOvr>
+</p:sld>
+</file>
+
+<file path=ppt/slides/slide26.xml><?xml version="1.0" encoding="utf-8"?>
+<p:sld xmlns:a="http://schemas.openxmlformats.org/drawingml/2006/main" xmlns:p="http://schemas.openxmlformats.org/presentationml/2006/main" xmlns:r="http://schemas.openxmlformats.org/officeDocument/2006/relationships">
+  <p:cSld>
+    <p:bg>
+      <p:bgPr>
+        <a:solidFill>
+          <a:srgbClr val="FFFFFF"/>
+        </a:solidFill>
+        <a:effectLst/>
+      </p:bgPr>
+    </p:bg>
+    <p:spTree>
+      <p:nvGrpSpPr>
+        <p:cNvPr id="1" name=""/>
+        <p:cNvGrpSpPr/>
+        <p:nvPr/>
+      </p:nvGrpSpPr>
+      <p:grpSpPr/>
+      <p:sp>
+        <p:nvSpPr>
+          <p:cNvPr id="2" name="Rectangle 1"/>
+          <p:cNvSpPr/>
+          <p:nvPr/>
+        </p:nvSpPr>
+        <p:spPr>
+          <a:xfrm>
+            <a:off x="0" y="0"/>
+            <a:ext cx="73152" cy="6858000"/>
+          </a:xfrm>
+          <a:prstGeom prst="rect">
+            <a:avLst/>
+          </a:prstGeom>
+          <a:solidFill>
+            <a:srgbClr val="003DA5"/>
+          </a:solidFill>
+          <a:ln>
+            <a:noFill/>
+          </a:ln>
+        </p:spPr>
+        <p:style>
+          <a:lnRef idx="1">
+            <a:schemeClr val="accent1"/>
+          </a:lnRef>
+          <a:fillRef idx="3">
+            <a:schemeClr val="accent1"/>
+          </a:fillRef>
+          <a:effectRef idx="2">
+            <a:schemeClr val="accent1"/>
+          </a:effectRef>
+          <a:fontRef idx="minor">
+            <a:schemeClr val="lt1"/>
+          </a:fontRef>
+        </p:style>
+        <p:txBody>
+          <a:bodyPr rtlCol="0" anchor="ctr"/>
+          <a:lstStyle/>
+          <a:p>
+            <a:pPr algn="ctr"/>
+          </a:p>
+        </p:txBody>
+      </p:sp>
+      <p:sp>
+        <p:nvSpPr>
+          <p:cNvPr id="3" name="TextBox 2"/>
+          <p:cNvSpPr txBox="1"/>
+          <p:nvPr/>
+        </p:nvSpPr>
+        <p:spPr>
+          <a:xfrm>
+            <a:off x="228600" y="182880"/>
+            <a:ext cx="11430000" cy="320040"/>
+          </a:xfrm>
+          <a:prstGeom prst="rect">
+            <a:avLst/>
+          </a:prstGeom>
+          <a:noFill/>
+        </p:spPr>
+        <p:txBody>
+          <a:bodyPr wrap="square">
+            <a:spAutoFit/>
+          </a:bodyPr>
+          <a:lstStyle/>
+          <a:p>
+            <a:pPr algn="l"/>
+            <a:r>
+              <a:rPr sz="900" b="0" i="0">
+                <a:solidFill>
+                  <a:srgbClr val="556575"/>
+                </a:solidFill>
+                <a:latin typeface="Arial"/>
+              </a:rPr>
+              <a:t>M12 · Modulinhalte</a:t>
+            </a:r>
+          </a:p>
+        </p:txBody>
+      </p:sp>
+      <p:sp>
+        <p:nvSpPr>
+          <p:cNvPr id="4" name="TextBox 3"/>
+          <p:cNvSpPr txBox="1"/>
+          <p:nvPr/>
+        </p:nvSpPr>
+        <p:spPr>
+          <a:xfrm>
+            <a:off x="365760" y="274320"/>
+            <a:ext cx="11430000" cy="777240"/>
+          </a:xfrm>
+          <a:prstGeom prst="rect">
+            <a:avLst/>
+          </a:prstGeom>
+          <a:noFill/>
+        </p:spPr>
+        <p:txBody>
+          <a:bodyPr wrap="square">
+            <a:spAutoFit/>
+          </a:bodyPr>
+          <a:lstStyle/>
+          <a:p>
+            <a:pPr algn="l"/>
+            <a:r>
+              <a:rPr sz="2200" b="1" i="0">
+                <a:solidFill>
+                  <a:srgbClr val="003DA5"/>
+                </a:solidFill>
+                <a:latin typeface="Arial"/>
+              </a:rPr>
+              <a:t>Eröffnungsphase (5 Min)</a:t>
+            </a:r>
+          </a:p>
+        </p:txBody>
+      </p:sp>
+      <p:sp>
+        <p:nvSpPr>
+          <p:cNvPr id="5" name="Rectangle 4"/>
+          <p:cNvSpPr/>
+          <p:nvPr/>
+        </p:nvSpPr>
+        <p:spPr>
+          <a:xfrm>
+            <a:off x="365760" y="1005840"/>
+            <a:ext cx="11430000" cy="27432"/>
+          </a:xfrm>
+          <a:prstGeom prst="rect">
+            <a:avLst/>
+          </a:prstGeom>
+          <a:solidFill>
+            <a:srgbClr val="D1D5DB"/>
+          </a:solidFill>
+          <a:ln>
+            <a:noFill/>
+          </a:ln>
+        </p:spPr>
+        <p:style>
+          <a:lnRef idx="1">
+            <a:schemeClr val="accent1"/>
+          </a:lnRef>
+          <a:fillRef idx="3">
+            <a:schemeClr val="accent1"/>
+          </a:fillRef>
+          <a:effectRef idx="2">
+            <a:schemeClr val="accent1"/>
+          </a:effectRef>
+          <a:fontRef idx="minor">
+            <a:schemeClr val="lt1"/>
+          </a:fontRef>
+        </p:style>
+        <p:txBody>
+          <a:bodyPr rtlCol="0" anchor="ctr"/>
+          <a:lstStyle/>
+          <a:p>
+            <a:pPr algn="ctr"/>
+          </a:p>
+        </p:txBody>
+      </p:sp>
+      <p:sp>
+        <p:nvSpPr>
+          <p:cNvPr id="6" name="TextBox 5"/>
+          <p:cNvSpPr txBox="1"/>
+          <p:nvPr/>
+        </p:nvSpPr>
+        <p:spPr>
+          <a:xfrm>
+            <a:off x="365760" y="1143000"/>
+            <a:ext cx="11430000" cy="5212080"/>
+          </a:xfrm>
+          <a:prstGeom prst="rect">
+            <a:avLst/>
+          </a:prstGeom>
+          <a:noFill/>
+        </p:spPr>
+        <p:txBody>
+          <a:bodyPr wrap="square">
+            <a:spAutoFit/>
+          </a:bodyPr>
+          <a:lstStyle/>
+          <a:p>
+            <a:pPr>
+              <a:spcBef>
+                <a:spcPts val="500"/>
+              </a:spcBef>
+            </a:pPr>
+            <a:r>
+              <a:rPr sz="1500">
+                <a:solidFill>
+                  <a:srgbClr val="003DA5"/>
+                </a:solidFill>
+                <a:latin typeface="Arial"/>
+              </a:rPr>
+              <a:t>▪  </a:t>
+            </a:r>
+            <a:r>
+              <a:rPr sz="1700">
+                <a:solidFill>
+                  <a:srgbClr val="1A1A1A"/>
+                </a:solidFill>
+                <a:latin typeface="Arial"/>
+              </a:rPr>
+              <a:t>- ☐ Psychologische Sicherheit signalisieren: „Was Sie mir erzählen, bleibt vertraulich." - ☐ Gleichwertigkeit klarstellen: „Ich bin nicht als Prüfer hier,…</a:t>
+            </a:r>
+          </a:p>
+        </p:txBody>
+      </p:sp>
+    </p:spTree>
+  </p:cSld>
+  <p:clrMapOvr>
+    <a:masterClrMapping/>
+  </p:clrMapOvr>
+</p:sld>
+</file>
+
+<file path=ppt/slides/slide27.xml><?xml version="1.0" encoding="utf-8"?>
+<p:sld xmlns:a="http://schemas.openxmlformats.org/drawingml/2006/main" xmlns:p="http://schemas.openxmlformats.org/presentationml/2006/main" xmlns:r="http://schemas.openxmlformats.org/officeDocument/2006/relationships">
+  <p:cSld>
+    <p:bg>
+      <p:bgPr>
+        <a:solidFill>
+          <a:srgbClr val="FFFFFF"/>
+        </a:solidFill>
+        <a:effectLst/>
+      </p:bgPr>
+    </p:bg>
+    <p:spTree>
+      <p:nvGrpSpPr>
+        <p:cNvPr id="1" name=""/>
+        <p:cNvGrpSpPr/>
+        <p:nvPr/>
+      </p:nvGrpSpPr>
+      <p:grpSpPr/>
+      <p:sp>
+        <p:nvSpPr>
+          <p:cNvPr id="2" name="Rectangle 1"/>
+          <p:cNvSpPr/>
+          <p:nvPr/>
+        </p:nvSpPr>
+        <p:spPr>
+          <a:xfrm>
+            <a:off x="0" y="0"/>
+            <a:ext cx="73152" cy="6858000"/>
+          </a:xfrm>
+          <a:prstGeom prst="rect">
+            <a:avLst/>
+          </a:prstGeom>
+          <a:solidFill>
+            <a:srgbClr val="003DA5"/>
+          </a:solidFill>
+          <a:ln>
+            <a:noFill/>
+          </a:ln>
+        </p:spPr>
+        <p:style>
+          <a:lnRef idx="1">
+            <a:schemeClr val="accent1"/>
+          </a:lnRef>
+          <a:fillRef idx="3">
+            <a:schemeClr val="accent1"/>
+          </a:fillRef>
+          <a:effectRef idx="2">
+            <a:schemeClr val="accent1"/>
+          </a:effectRef>
+          <a:fontRef idx="minor">
+            <a:schemeClr val="lt1"/>
+          </a:fontRef>
+        </p:style>
+        <p:txBody>
+          <a:bodyPr rtlCol="0" anchor="ctr"/>
+          <a:lstStyle/>
+          <a:p>
+            <a:pPr algn="ctr"/>
+          </a:p>
+        </p:txBody>
+      </p:sp>
+      <p:sp>
+        <p:nvSpPr>
+          <p:cNvPr id="3" name="TextBox 2"/>
+          <p:cNvSpPr txBox="1"/>
+          <p:nvPr/>
+        </p:nvSpPr>
+        <p:spPr>
+          <a:xfrm>
+            <a:off x="228600" y="182880"/>
+            <a:ext cx="11430000" cy="320040"/>
+          </a:xfrm>
+          <a:prstGeom prst="rect">
+            <a:avLst/>
+          </a:prstGeom>
+          <a:noFill/>
+        </p:spPr>
+        <p:txBody>
+          <a:bodyPr wrap="square">
+            <a:spAutoFit/>
+          </a:bodyPr>
+          <a:lstStyle/>
+          <a:p>
+            <a:pPr algn="l"/>
+            <a:r>
+              <a:rPr sz="900" b="0" i="0">
+                <a:solidFill>
+                  <a:srgbClr val="556575"/>
+                </a:solidFill>
+                <a:latin typeface="Arial"/>
+              </a:rPr>
+              <a:t>M12 · Modulinhalte</a:t>
+            </a:r>
+          </a:p>
+        </p:txBody>
+      </p:sp>
+      <p:sp>
+        <p:nvSpPr>
+          <p:cNvPr id="4" name="TextBox 3"/>
+          <p:cNvSpPr txBox="1"/>
+          <p:nvPr/>
+        </p:nvSpPr>
+        <p:spPr>
+          <a:xfrm>
+            <a:off x="365760" y="274320"/>
+            <a:ext cx="11430000" cy="777240"/>
+          </a:xfrm>
+          <a:prstGeom prst="rect">
+            <a:avLst/>
+          </a:prstGeom>
+          <a:noFill/>
+        </p:spPr>
+        <p:txBody>
+          <a:bodyPr wrap="square">
+            <a:spAutoFit/>
+          </a:bodyPr>
+          <a:lstStyle/>
+          <a:p>
+            <a:pPr algn="l"/>
+            <a:r>
+              <a:rPr sz="2200" b="1" i="0">
+                <a:solidFill>
+                  <a:srgbClr val="003DA5"/>
+                </a:solidFill>
+                <a:latin typeface="Arial"/>
+              </a:rPr>
+              <a:t>Diagnostische Phase (20–30 Min)</a:t>
+            </a:r>
+          </a:p>
+        </p:txBody>
+      </p:sp>
+      <p:sp>
+        <p:nvSpPr>
+          <p:cNvPr id="5" name="Rectangle 4"/>
+          <p:cNvSpPr/>
+          <p:nvPr/>
+        </p:nvSpPr>
+        <p:spPr>
+          <a:xfrm>
+            <a:off x="365760" y="1005840"/>
+            <a:ext cx="11430000" cy="27432"/>
+          </a:xfrm>
+          <a:prstGeom prst="rect">
+            <a:avLst/>
+          </a:prstGeom>
+          <a:solidFill>
+            <a:srgbClr val="D1D5DB"/>
+          </a:solidFill>
+          <a:ln>
+            <a:noFill/>
+          </a:ln>
+        </p:spPr>
+        <p:style>
+          <a:lnRef idx="1">
+            <a:schemeClr val="accent1"/>
+          </a:lnRef>
+          <a:fillRef idx="3">
+            <a:schemeClr val="accent1"/>
+          </a:fillRef>
+          <a:effectRef idx="2">
+            <a:schemeClr val="accent1"/>
+          </a:effectRef>
+          <a:fontRef idx="minor">
+            <a:schemeClr val="lt1"/>
+          </a:fontRef>
+        </p:style>
+        <p:txBody>
+          <a:bodyPr rtlCol="0" anchor="ctr"/>
+          <a:lstStyle/>
+          <a:p>
+            <a:pPr algn="ctr"/>
+          </a:p>
+        </p:txBody>
+      </p:sp>
+      <p:sp>
+        <p:nvSpPr>
+          <p:cNvPr id="6" name="TextBox 5"/>
+          <p:cNvSpPr txBox="1"/>
+          <p:nvPr/>
+        </p:nvSpPr>
+        <p:spPr>
+          <a:xfrm>
+            <a:off x="365760" y="1143000"/>
+            <a:ext cx="11430000" cy="5212080"/>
+          </a:xfrm>
+          <a:prstGeom prst="rect">
+            <a:avLst/>
+          </a:prstGeom>
+          <a:noFill/>
+        </p:spPr>
+        <p:txBody>
+          <a:bodyPr wrap="square">
+            <a:spAutoFit/>
+          </a:bodyPr>
+          <a:lstStyle/>
+          <a:p>
+            <a:pPr>
+              <a:spcBef>
+                <a:spcPts val="500"/>
+              </a:spcBef>
+            </a:pPr>
+            <a:r>
+              <a:rPr sz="1500">
+                <a:solidFill>
+                  <a:srgbClr val="003DA5"/>
+                </a:solidFill>
+                <a:latin typeface="Arial"/>
+              </a:rPr>
+              <a:t>▪  </a:t>
+            </a:r>
+            <a:r>
+              <a:rPr sz="1700" b="1">
+                <a:solidFill>
+                  <a:srgbClr val="003DA5"/>
+                </a:solidFill>
+                <a:latin typeface="Arial"/>
+              </a:rPr>
+              <a:t>Zur Bewusstseinsbildung: </a:t>
+            </a:r>
+            <a:r>
+              <a:rPr sz="1700">
+                <a:solidFill>
+                  <a:srgbClr val="1A1A1A"/>
+                </a:solidFill>
+                <a:latin typeface="Arial"/>
+              </a:rPr>
+              <a:t>- ☐ „Wie lange beschäftigt Sie das Nachfolge-Thema schon?" - ☐ „Was hat Sie bewogen, es jetzt anzusprechen?" - ☐ „Wer in Ihrer Familie oder Ihrem Team kennt Ihre Gedanken zur…</a:t>
+            </a:r>
+          </a:p>
+          <a:p>
+            <a:pPr>
+              <a:spcBef>
+                <a:spcPts val="500"/>
+              </a:spcBef>
+            </a:pPr>
+            <a:r>
+              <a:rPr sz="1500">
+                <a:solidFill>
+                  <a:srgbClr val="003DA5"/>
+                </a:solidFill>
+                <a:latin typeface="Arial"/>
+              </a:rPr>
+              <a:t>▪  </a:t>
+            </a:r>
+            <a:r>
+              <a:rPr sz="1700" b="1">
+                <a:solidFill>
+                  <a:srgbClr val="003DA5"/>
+                </a:solidFill>
+                <a:latin typeface="Arial"/>
+              </a:rPr>
+              <a:t>Zu Emotion und Blockaden: </a:t>
+            </a:r>
+            <a:r>
+              <a:rPr sz="1700">
+                <a:solidFill>
+                  <a:srgbClr val="1A1A1A"/>
+                </a:solidFill>
+                <a:latin typeface="Arial"/>
+              </a:rPr>
+              <a:t>- ☐ „Was ist das Größte, das Ihnen Sorge macht bei einer Nachfolge?" - ☐ [Zirkuläre Frage] „Wie würde Ihr ältester Mitarbeiter die Situation beschreiben – wenn Sie ihn fragten?"</a:t>
+            </a:r>
+          </a:p>
+          <a:p>
+            <a:pPr>
+              <a:spcBef>
+                <a:spcPts val="500"/>
+              </a:spcBef>
+            </a:pPr>
+            <a:r>
+              <a:rPr sz="1500">
+                <a:solidFill>
+                  <a:srgbClr val="003DA5"/>
+                </a:solidFill>
+                <a:latin typeface="Arial"/>
+              </a:rPr>
+              <a:t>▪  </a:t>
+            </a:r>
+            <a:r>
+              <a:rPr sz="1700" b="1">
+                <a:solidFill>
+                  <a:srgbClr val="003DA5"/>
+                </a:solidFill>
+                <a:latin typeface="Arial"/>
+              </a:rPr>
+              <a:t>Zu potenziellen Nachfolgern: </a:t>
+            </a:r>
+            <a:r>
+              <a:rPr sz="1700">
+                <a:solidFill>
+                  <a:srgbClr val="1A1A1A"/>
+                </a:solidFill>
+                <a:latin typeface="Arial"/>
+              </a:rPr>
+              <a:t>- ☐ „Wer könnte aus Ihrer Sicht für die Nachfolge infrage kommen?" - ☐ „Was würde die Person brauchen, um bereit zu sein?" - ☐ „Haben Sie mit ihr/ihm schon offen darüber…</a:t>
+            </a:r>
+          </a:p>
+          <a:p>
+            <a:pPr>
+              <a:spcBef>
+                <a:spcPts val="500"/>
+              </a:spcBef>
+            </a:pPr>
+            <a:r>
+              <a:rPr sz="1500">
+                <a:solidFill>
+                  <a:srgbClr val="003DA5"/>
+                </a:solidFill>
+                <a:latin typeface="Arial"/>
+              </a:rPr>
+              <a:t>▪  </a:t>
+            </a:r>
+            <a:r>
+              <a:rPr sz="1700" b="1">
+                <a:solidFill>
+                  <a:srgbClr val="003DA5"/>
+                </a:solidFill>
+                <a:latin typeface="Arial"/>
+              </a:rPr>
+              <a:t>Zur Lösungsvision: </a:t>
+            </a:r>
+            <a:r>
+              <a:rPr sz="1700">
+                <a:solidFill>
+                  <a:srgbClr val="1A1A1A"/>
+                </a:solidFill>
+                <a:latin typeface="Arial"/>
+              </a:rPr>
+              <a:t>- ☐ [Wunder-Frage] „Angenommen, die Nachfolge wäre morgen perfekt gelöst – wie würde sie aussehen?" - ☐ „Was ist Ihnen wichtiger: die Kontrolle zu behalten oder ein dauerhaftes…</a:t>
+            </a:r>
+          </a:p>
+        </p:txBody>
+      </p:sp>
+    </p:spTree>
+  </p:cSld>
+  <p:clrMapOvr>
+    <a:masterClrMapping/>
+  </p:clrMapOvr>
+</p:sld>
+</file>
+
+<file path=ppt/slides/slide28.xml><?xml version="1.0" encoding="utf-8"?>
+<p:sld xmlns:a="http://schemas.openxmlformats.org/drawingml/2006/main" xmlns:p="http://schemas.openxmlformats.org/presentationml/2006/main" xmlns:r="http://schemas.openxmlformats.org/officeDocument/2006/relationships">
+  <p:cSld>
+    <p:bg>
+      <p:bgPr>
+        <a:solidFill>
+          <a:srgbClr val="FFFFFF"/>
+        </a:solidFill>
+        <a:effectLst/>
+      </p:bgPr>
+    </p:bg>
+    <p:spTree>
+      <p:nvGrpSpPr>
+        <p:cNvPr id="1" name=""/>
+        <p:cNvGrpSpPr/>
+        <p:nvPr/>
+      </p:nvGrpSpPr>
+      <p:grpSpPr/>
+      <p:sp>
+        <p:nvSpPr>
+          <p:cNvPr id="2" name="Rectangle 1"/>
+          <p:cNvSpPr/>
+          <p:nvPr/>
+        </p:nvSpPr>
+        <p:spPr>
+          <a:xfrm>
+            <a:off x="0" y="0"/>
+            <a:ext cx="73152" cy="6858000"/>
+          </a:xfrm>
+          <a:prstGeom prst="rect">
+            <a:avLst/>
+          </a:prstGeom>
+          <a:solidFill>
+            <a:srgbClr val="003DA5"/>
+          </a:solidFill>
+          <a:ln>
+            <a:noFill/>
+          </a:ln>
+        </p:spPr>
+        <p:style>
+          <a:lnRef idx="1">
+            <a:schemeClr val="accent1"/>
+          </a:lnRef>
+          <a:fillRef idx="3">
+            <a:schemeClr val="accent1"/>
+          </a:fillRef>
+          <a:effectRef idx="2">
+            <a:schemeClr val="accent1"/>
+          </a:effectRef>
+          <a:fontRef idx="minor">
+            <a:schemeClr val="lt1"/>
+          </a:fontRef>
+        </p:style>
+        <p:txBody>
+          <a:bodyPr rtlCol="0" anchor="ctr"/>
+          <a:lstStyle/>
+          <a:p>
+            <a:pPr algn="ctr"/>
+          </a:p>
+        </p:txBody>
+      </p:sp>
+      <p:sp>
+        <p:nvSpPr>
+          <p:cNvPr id="3" name="TextBox 2"/>
+          <p:cNvSpPr txBox="1"/>
+          <p:nvPr/>
+        </p:nvSpPr>
+        <p:spPr>
+          <a:xfrm>
+            <a:off x="228600" y="182880"/>
+            <a:ext cx="11430000" cy="320040"/>
+          </a:xfrm>
+          <a:prstGeom prst="rect">
+            <a:avLst/>
+          </a:prstGeom>
+          <a:noFill/>
+        </p:spPr>
+        <p:txBody>
+          <a:bodyPr wrap="square">
+            <a:spAutoFit/>
+          </a:bodyPr>
+          <a:lstStyle/>
+          <a:p>
+            <a:pPr algn="l"/>
+            <a:r>
+              <a:rPr sz="900" b="0" i="0">
+                <a:solidFill>
+                  <a:srgbClr val="556575"/>
+                </a:solidFill>
+                <a:latin typeface="Arial"/>
+              </a:rPr>
+              <a:t>M12 · Modulinhalte</a:t>
+            </a:r>
+          </a:p>
+        </p:txBody>
+      </p:sp>
+      <p:sp>
+        <p:nvSpPr>
+          <p:cNvPr id="4" name="TextBox 3"/>
+          <p:cNvSpPr txBox="1"/>
+          <p:nvPr/>
+        </p:nvSpPr>
+        <p:spPr>
+          <a:xfrm>
+            <a:off x="365760" y="274320"/>
+            <a:ext cx="11430000" cy="777240"/>
+          </a:xfrm>
+          <a:prstGeom prst="rect">
+            <a:avLst/>
+          </a:prstGeom>
+          <a:noFill/>
+        </p:spPr>
+        <p:txBody>
+          <a:bodyPr wrap="square">
+            <a:spAutoFit/>
+          </a:bodyPr>
+          <a:lstStyle/>
+          <a:p>
+            <a:pPr algn="l"/>
+            <a:r>
+              <a:rPr sz="2200" b="1" i="0">
+                <a:solidFill>
+                  <a:srgbClr val="003DA5"/>
+                </a:solidFill>
+                <a:latin typeface="Arial"/>
+              </a:rPr>
+              <a:t>Strukturierungsphase (10–15 Min)</a:t>
+            </a:r>
+          </a:p>
+        </p:txBody>
+      </p:sp>
+      <p:sp>
+        <p:nvSpPr>
+          <p:cNvPr id="5" name="Rectangle 4"/>
+          <p:cNvSpPr/>
+          <p:nvPr/>
+        </p:nvSpPr>
+        <p:spPr>
+          <a:xfrm>
+            <a:off x="365760" y="1005840"/>
+            <a:ext cx="11430000" cy="27432"/>
+          </a:xfrm>
+          <a:prstGeom prst="rect">
+            <a:avLst/>
+          </a:prstGeom>
+          <a:solidFill>
+            <a:srgbClr val="D1D5DB"/>
+          </a:solidFill>
+          <a:ln>
+            <a:noFill/>
+          </a:ln>
+        </p:spPr>
+        <p:style>
+          <a:lnRef idx="1">
+            <a:schemeClr val="accent1"/>
+          </a:lnRef>
+          <a:fillRef idx="3">
+            <a:schemeClr val="accent1"/>
+          </a:fillRef>
+          <a:effectRef idx="2">
+            <a:schemeClr val="accent1"/>
+          </a:effectRef>
+          <a:fontRef idx="minor">
+            <a:schemeClr val="lt1"/>
+          </a:fontRef>
+        </p:style>
+        <p:txBody>
+          <a:bodyPr rtlCol="0" anchor="ctr"/>
+          <a:lstStyle/>
+          <a:p>
+            <a:pPr algn="ctr"/>
+          </a:p>
+        </p:txBody>
+      </p:sp>
+      <p:sp>
+        <p:nvSpPr>
+          <p:cNvPr id="6" name="TextBox 5"/>
+          <p:cNvSpPr txBox="1"/>
+          <p:nvPr/>
+        </p:nvSpPr>
+        <p:spPr>
+          <a:xfrm>
+            <a:off x="365760" y="1143000"/>
+            <a:ext cx="11430000" cy="5212080"/>
+          </a:xfrm>
+          <a:prstGeom prst="rect">
+            <a:avLst/>
+          </a:prstGeom>
+          <a:noFill/>
+        </p:spPr>
+        <p:txBody>
+          <a:bodyPr wrap="square">
+            <a:spAutoFit/>
+          </a:bodyPr>
+          <a:lstStyle/>
+          <a:p>
+            <a:pPr>
+              <a:spcBef>
+                <a:spcPts val="500"/>
+              </a:spcBef>
+            </a:pPr>
+            <a:r>
+              <a:rPr sz="1500">
+                <a:solidFill>
+                  <a:srgbClr val="003DA5"/>
+                </a:solidFill>
+                <a:latin typeface="Arial"/>
+              </a:rPr>
+              <a:t>▪  </a:t>
+            </a:r>
+            <a:r>
+              <a:rPr sz="1700" b="1">
+                <a:solidFill>
+                  <a:srgbClr val="003DA5"/>
+                </a:solidFill>
+                <a:latin typeface="Arial"/>
+              </a:rPr>
+              <a:t>DZ BANK Corporate Finance: </a:t>
+            </a:r>
+            <a:r>
+              <a:rPr sz="1700">
+                <a:solidFill>
+                  <a:srgbClr val="1A1A1A"/>
+                </a:solidFill>
+                <a:latin typeface="Arial"/>
+              </a:rPr>
+              <a:t>Ansprechstelle für MBO-Finanzierungen und größere Unternehmenstransaktionen (&gt; 5 Mio. EUR Kaufpreis) – Kontakt über Firmenkundenleiter oder DZ BANK Regionalbetreuung -</a:t>
+            </a:r>
+          </a:p>
+          <a:p>
+            <a:pPr>
+              <a:spcBef>
+                <a:spcPts val="500"/>
+              </a:spcBef>
+            </a:pPr>
+            <a:r>
+              <a:rPr sz="1500">
+                <a:solidFill>
+                  <a:srgbClr val="003DA5"/>
+                </a:solidFill>
+                <a:latin typeface="Arial"/>
+              </a:rPr>
+              <a:t>▪  </a:t>
+            </a:r>
+            <a:r>
+              <a:rPr sz="1700" b="1">
+                <a:solidFill>
+                  <a:srgbClr val="003DA5"/>
+                </a:solidFill>
+                <a:latin typeface="Arial"/>
+              </a:rPr>
+              <a:t>BVR / GenoAkademie: </a:t>
+            </a:r>
+            <a:r>
+              <a:rPr sz="1700">
+                <a:solidFill>
+                  <a:srgbClr val="1A1A1A"/>
+                </a:solidFill>
+                <a:latin typeface="Arial"/>
+              </a:rPr>
+              <a:t>Unternehmer-Nachfolgeberatung; Coaching-Programme für Unternehmer; ggf. BVR-Nachfolge-Netzwerk anfragen -</a:t>
+            </a:r>
+          </a:p>
+          <a:p>
+            <a:pPr>
+              <a:spcBef>
+                <a:spcPts val="500"/>
+              </a:spcBef>
+            </a:pPr>
+            <a:r>
+              <a:rPr sz="1500">
+                <a:solidFill>
+                  <a:srgbClr val="003DA5"/>
+                </a:solidFill>
+                <a:latin typeface="Arial"/>
+              </a:rPr>
+              <a:t>▪  </a:t>
+            </a:r>
+            <a:r>
+              <a:rPr sz="1700" b="1">
+                <a:solidFill>
+                  <a:srgbClr val="003DA5"/>
+                </a:solidFill>
+                <a:latin typeface="Arial"/>
+              </a:rPr>
+              <a:t>MünchenerHyp: </a:t>
+            </a:r>
+            <a:r>
+              <a:rPr sz="1700">
+                <a:solidFill>
+                  <a:srgbClr val="1A1A1A"/>
+                </a:solidFill>
+                <a:latin typeface="Arial"/>
+              </a:rPr>
+              <a:t>Finanzierungsansätze bei immobilienbesicherter Übernahme -</a:t>
+            </a:r>
+          </a:p>
+          <a:p>
+            <a:pPr>
+              <a:spcBef>
+                <a:spcPts val="500"/>
+              </a:spcBef>
+            </a:pPr>
+            <a:r>
+              <a:rPr sz="1500">
+                <a:solidFill>
+                  <a:srgbClr val="003DA5"/>
+                </a:solidFill>
+                <a:latin typeface="Arial"/>
+              </a:rPr>
+              <a:t>▪  </a:t>
+            </a:r>
+            <a:r>
+              <a:rPr sz="1700" b="1">
+                <a:solidFill>
+                  <a:srgbClr val="003DA5"/>
+                </a:solidFill>
+                <a:latin typeface="Arial"/>
+              </a:rPr>
+              <a:t>Steuerberater &amp; Notar: </a:t>
+            </a:r>
+            <a:r>
+              <a:rPr sz="1700">
+                <a:solidFill>
+                  <a:srgbClr val="1A1A1A"/>
+                </a:solidFill>
+                <a:latin typeface="Arial"/>
+              </a:rPr>
+              <a:t>Zwingend ab Phase 2; Steuerberater frühzeitig einbinden – nicht erst bei Vertragsgestaltung -</a:t>
+            </a:r>
+          </a:p>
+          <a:p>
+            <a:pPr>
+              <a:spcBef>
+                <a:spcPts val="500"/>
+              </a:spcBef>
+            </a:pPr>
+            <a:r>
+              <a:rPr sz="1500">
+                <a:solidFill>
+                  <a:srgbClr val="003DA5"/>
+                </a:solidFill>
+                <a:latin typeface="Arial"/>
+              </a:rPr>
+              <a:t>▪  </a:t>
+            </a:r>
+            <a:r>
+              <a:rPr sz="1700" b="1">
+                <a:solidFill>
+                  <a:srgbClr val="003DA5"/>
+                </a:solidFill>
+                <a:latin typeface="Arial"/>
+              </a:rPr>
+              <a:t>Externer Coach: </a:t>
+            </a:r>
+            <a:r>
+              <a:rPr sz="1700">
+                <a:solidFill>
+                  <a:srgbClr val="1A1A1A"/>
+                </a:solidFill>
+                <a:latin typeface="Arial"/>
+              </a:rPr>
+              <a:t>Empfehlen, wenn emotionale Blockaden (Loslasswiderstand) überwiegen</a:t>
+            </a:r>
+          </a:p>
+        </p:txBody>
+      </p:sp>
+    </p:spTree>
+  </p:cSld>
+  <p:clrMapOvr>
+    <a:masterClrMapping/>
+  </p:clrMapOvr>
+</p:sld>
+</file>
+
+<file path=ppt/slides/slide29.xml><?xml version="1.0" encoding="utf-8"?>
+<p:sld xmlns:a="http://schemas.openxmlformats.org/drawingml/2006/main" xmlns:p="http://schemas.openxmlformats.org/presentationml/2006/main" xmlns:r="http://schemas.openxmlformats.org/officeDocument/2006/relationships">
+  <p:cSld>
+    <p:bg>
+      <p:bgPr>
+        <a:solidFill>
+          <a:srgbClr val="003DA5"/>
+        </a:solidFill>
+        <a:effectLst/>
+      </p:bgPr>
+    </p:bg>
+    <p:spTree>
+      <p:nvGrpSpPr>
+        <p:cNvPr id="1" name=""/>
+        <p:cNvGrpSpPr/>
+        <p:nvPr/>
+      </p:nvGrpSpPr>
+      <p:grpSpPr/>
+      <p:sp>
+        <p:nvSpPr>
+          <p:cNvPr id="2" name="Rectangle 1"/>
+          <p:cNvSpPr/>
+          <p:nvPr/>
+        </p:nvSpPr>
+        <p:spPr>
+          <a:xfrm>
+            <a:off x="0" y="0"/>
+            <a:ext cx="73152" cy="6858000"/>
+          </a:xfrm>
+          <a:prstGeom prst="rect">
+            <a:avLst/>
+          </a:prstGeom>
+          <a:solidFill>
+            <a:srgbClr val="E05B00"/>
+          </a:solidFill>
+          <a:ln>
+            <a:noFill/>
+          </a:ln>
+        </p:spPr>
+        <p:style>
+          <a:lnRef idx="1">
+            <a:schemeClr val="accent1"/>
+          </a:lnRef>
+          <a:fillRef idx="3">
+            <a:schemeClr val="accent1"/>
+          </a:fillRef>
+          <a:effectRef idx="2">
+            <a:schemeClr val="accent1"/>
+          </a:effectRef>
+          <a:fontRef idx="minor">
+            <a:schemeClr val="lt1"/>
+          </a:fontRef>
+        </p:style>
+        <p:txBody>
+          <a:bodyPr rtlCol="0" anchor="ctr"/>
+          <a:lstStyle/>
+          <a:p>
+            <a:pPr algn="ctr"/>
+          </a:p>
+        </p:txBody>
+      </p:sp>
+      <p:sp>
+        <p:nvSpPr>
+          <p:cNvPr id="3" name="TextBox 2"/>
+          <p:cNvSpPr txBox="1"/>
+          <p:nvPr/>
+        </p:nvSpPr>
+        <p:spPr>
+          <a:xfrm>
+            <a:off x="365760" y="347472"/>
+            <a:ext cx="7315200" cy="384048"/>
+          </a:xfrm>
+          <a:prstGeom prst="rect">
+            <a:avLst/>
+          </a:prstGeom>
+          <a:noFill/>
+        </p:spPr>
+        <p:txBody>
+          <a:bodyPr wrap="square">
+            <a:spAutoFit/>
+          </a:bodyPr>
+          <a:lstStyle/>
+          <a:p>
+            <a:pPr algn="l"/>
+            <a:r>
+              <a:rPr sz="900" b="1" i="0">
+                <a:solidFill>
+                  <a:srgbClr val="CCD6F0"/>
+                </a:solidFill>
+                <a:latin typeface="Arial"/>
+              </a:rPr>
+              <a:t>PRAXISTRANSFER &amp; NÄCHSTE SCHRITTE</a:t>
+            </a:r>
+          </a:p>
+        </p:txBody>
+      </p:sp>
+      <p:sp>
+        <p:nvSpPr>
+          <p:cNvPr id="4" name="Rectangle 3"/>
+          <p:cNvSpPr/>
+          <p:nvPr/>
+        </p:nvSpPr>
+        <p:spPr>
+          <a:xfrm>
+            <a:off x="365760" y="804672"/>
+            <a:ext cx="8229600" cy="22860"/>
+          </a:xfrm>
+          <a:prstGeom prst="rect">
+            <a:avLst/>
+          </a:prstGeom>
+          <a:solidFill>
+            <a:srgbClr val="335CC0"/>
+          </a:solidFill>
+          <a:ln>
+            <a:noFill/>
+          </a:ln>
+        </p:spPr>
+        <p:style>
+          <a:lnRef idx="1">
+            <a:schemeClr val="accent1"/>
+          </a:lnRef>
+          <a:fillRef idx="3">
+            <a:schemeClr val="accent1"/>
+          </a:fillRef>
+          <a:effectRef idx="2">
+            <a:schemeClr val="accent1"/>
+          </a:effectRef>
+          <a:fontRef idx="minor">
+            <a:schemeClr val="lt1"/>
+          </a:fontRef>
+        </p:style>
+        <p:txBody>
+          <a:bodyPr rtlCol="0" anchor="ctr"/>
+          <a:lstStyle/>
+          <a:p>
+            <a:pPr algn="ctr"/>
+          </a:p>
+        </p:txBody>
+      </p:sp>
+      <p:sp>
+        <p:nvSpPr>
+          <p:cNvPr id="5" name="TextBox 4"/>
+          <p:cNvSpPr txBox="1"/>
+          <p:nvPr/>
+        </p:nvSpPr>
+        <p:spPr>
+          <a:xfrm>
+            <a:off x="365760" y="960120"/>
+            <a:ext cx="9144000" cy="914400"/>
+          </a:xfrm>
+          <a:prstGeom prst="rect">
+            <a:avLst/>
+          </a:prstGeom>
+          <a:noFill/>
+        </p:spPr>
+        <p:txBody>
+          <a:bodyPr wrap="square">
+            <a:spAutoFit/>
+          </a:bodyPr>
+          <a:lstStyle/>
+          <a:p>
+            <a:pPr algn="l"/>
+            <a:r>
+              <a:rPr sz="3000" b="1" i="0">
+                <a:solidFill>
+                  <a:srgbClr val="FFFFFF"/>
+                </a:solidFill>
+                <a:latin typeface="Arial"/>
+              </a:rPr>
+              <a:t>Was nehmen Sie mit?</a:t>
+            </a:r>
+          </a:p>
+        </p:txBody>
+      </p:sp>
+      <p:sp>
+        <p:nvSpPr>
+          <p:cNvPr id="6" name="TextBox 5"/>
+          <p:cNvSpPr txBox="1"/>
+          <p:nvPr/>
+        </p:nvSpPr>
+        <p:spPr>
+          <a:xfrm>
+            <a:off x="365760" y="2103120"/>
+            <a:ext cx="11430000" cy="4114800"/>
+          </a:xfrm>
+          <a:prstGeom prst="rect">
+            <a:avLst/>
+          </a:prstGeom>
+          <a:noFill/>
+        </p:spPr>
+        <p:txBody>
+          <a:bodyPr wrap="square">
+            <a:spAutoFit/>
+          </a:bodyPr>
+          <a:lstStyle/>
+          <a:p>
+            <a:pPr>
+              <a:spcBef>
+                <a:spcPts val="500"/>
+              </a:spcBef>
+            </a:pPr>
+            <a:r>
+              <a:rPr sz="1600">
+                <a:solidFill>
+                  <a:srgbClr val="E05B00"/>
+                </a:solidFill>
+                <a:latin typeface="Arial"/>
+              </a:rPr>
+              <a:t>▪  </a:t>
+            </a:r>
+            <a:r>
+              <a:rPr sz="1800">
+                <a:solidFill>
+                  <a:srgbClr val="FFFFFF"/>
+                </a:solidFill>
+                <a:latin typeface="Arial"/>
+              </a:rPr>
+              <a:t>Transferaufgabe: Wenden Sie das Gelernte in den nächsten 14 Tagen bei einem konkreten Kunden an.</a:t>
+            </a:r>
+          </a:p>
+          <a:p>
+            <a:pPr>
+              <a:spcBef>
+                <a:spcPts val="500"/>
+              </a:spcBef>
+            </a:pPr>
+            <a:r>
+              <a:rPr sz="1600">
+                <a:solidFill>
+                  <a:srgbClr val="E05B00"/>
+                </a:solidFill>
+                <a:latin typeface="Arial"/>
+              </a:rPr>
+              <a:t>▪  </a:t>
+            </a:r>
+            <a:r>
+              <a:rPr sz="1800">
+                <a:solidFill>
+                  <a:srgbClr val="FFFFFF"/>
+                </a:solidFill>
+                <a:latin typeface="Arial"/>
+              </a:rPr>
+              <a:t>Selbstcheck nach 4 Wochen: Bewerten Sie Ihre Fortschritte ehrlich.</a:t>
+            </a:r>
+          </a:p>
+        </p:txBody>
+      </p:sp>
+      <p:sp>
+        <p:nvSpPr>
+          <p:cNvPr id="7" name="TextBox 6"/>
+          <p:cNvSpPr txBox="1"/>
+          <p:nvPr/>
+        </p:nvSpPr>
+        <p:spPr>
+          <a:xfrm>
+            <a:off x="365760" y="6309360"/>
+            <a:ext cx="11430000" cy="365760"/>
+          </a:xfrm>
+          <a:prstGeom prst="rect">
+            <a:avLst/>
+          </a:prstGeom>
+          <a:noFill/>
+        </p:spPr>
+        <p:txBody>
+          <a:bodyPr wrap="square">
+            <a:spAutoFit/>
+          </a:bodyPr>
+          <a:lstStyle/>
+          <a:p>
+            <a:pPr algn="l"/>
+            <a:r>
+              <a:rPr sz="900" b="0" i="0">
+                <a:solidFill>
+                  <a:srgbClr val="889ACC"/>
+                </a:solidFill>
+                <a:latin typeface="Arial"/>
+              </a:rPr>
+              <a:t>M12 · CEO-Dialog &amp; Nachfolge  ·  v0.3  ·  Benedikt Zoller Coaching</a:t>
+            </a:r>
+          </a:p>
+        </p:txBody>
+      </p:sp>
+    </p:spTree>
+  </p:cSld>
+  <p:clrMapOvr>
+    <a:masterClrMapping/>
+  </p:clrMapOvr>
+</p:sld>
+</file>
+
+<file path=ppt/slides/slide3.xml><?xml version="1.0" encoding="utf-8"?>
 <p:sld xmlns:a="http://schemas.openxmlformats.org/drawingml/2006/main" xmlns:p="http://schemas.openxmlformats.org/presentationml/2006/main" xmlns:r="http://schemas.openxmlformats.org/officeDocument/2006/relationships">
   <p:cSld>
     <p:bg>
@@ -7299,8 +10939,8 @@
         </p:nvSpPr>
         <p:spPr>
           <a:xfrm>
-            <a:off x="365760" y="2286000"/>
-            <a:ext cx="11430000" cy="1828800"/>
+            <a:off x="365760" y="2011680"/>
+            <a:ext cx="11430000" cy="2011680"/>
           </a:xfrm>
           <a:prstGeom prst="rect">
             <a:avLst/>
@@ -7315,583 +10955,13 @@
           <a:p>
             <a:pPr algn="l"/>
             <a:r>
-              <a:rPr sz="3600" b="1">
+              <a:rPr sz="3600" b="1" i="0">
                 <a:solidFill>
                   <a:srgbClr val="FFFFFF"/>
                 </a:solidFill>
                 <a:latin typeface="Arial"/>
               </a:rPr>
-              <a:t>Unternehmernachfolge &amp; Organisationspsychologie</a:t>
-            </a:r>
-          </a:p>
-        </p:txBody>
-      </p:sp>
-    </p:spTree>
-  </p:cSld>
-  <p:clrMapOvr>
-    <a:masterClrMapping/>
-  </p:clrMapOvr>
-</p:sld>
-</file>
-
-<file path=ppt/slides/slide26.xml><?xml version="1.0" encoding="utf-8"?>
-<p:sld xmlns:a="http://schemas.openxmlformats.org/drawingml/2006/main" xmlns:p="http://schemas.openxmlformats.org/presentationml/2006/main" xmlns:r="http://schemas.openxmlformats.org/officeDocument/2006/relationships">
-  <p:cSld>
-    <p:bg>
-      <p:bgPr>
-        <a:solidFill>
-          <a:srgbClr val="003DA5"/>
-        </a:solidFill>
-        <a:effectLst/>
-      </p:bgPr>
-    </p:bg>
-    <p:spTree>
-      <p:nvGrpSpPr>
-        <p:cNvPr id="1" name=""/>
-        <p:cNvGrpSpPr/>
-        <p:nvPr/>
-      </p:nvGrpSpPr>
-      <p:grpSpPr/>
-      <p:sp>
-        <p:nvSpPr>
-          <p:cNvPr id="2" name="Rectangle 1"/>
-          <p:cNvSpPr/>
-          <p:nvPr/>
-        </p:nvSpPr>
-        <p:spPr>
-          <a:xfrm>
-            <a:off x="0" y="0"/>
-            <a:ext cx="73152" cy="6858000"/>
-          </a:xfrm>
-          <a:prstGeom prst="rect">
-            <a:avLst/>
-          </a:prstGeom>
-          <a:solidFill>
-            <a:srgbClr val="E05B00"/>
-          </a:solidFill>
-          <a:ln>
-            <a:noFill/>
-          </a:ln>
-        </p:spPr>
-        <p:style>
-          <a:lnRef idx="1">
-            <a:schemeClr val="accent1"/>
-          </a:lnRef>
-          <a:fillRef idx="3">
-            <a:schemeClr val="accent1"/>
-          </a:fillRef>
-          <a:effectRef idx="2">
-            <a:schemeClr val="accent1"/>
-          </a:effectRef>
-          <a:fontRef idx="minor">
-            <a:schemeClr val="lt1"/>
-          </a:fontRef>
-        </p:style>
-        <p:txBody>
-          <a:bodyPr rtlCol="0" anchor="ctr"/>
-          <a:lstStyle/>
-          <a:p>
-            <a:pPr algn="ctr"/>
-          </a:p>
-        </p:txBody>
-      </p:sp>
-      <p:sp>
-        <p:nvSpPr>
-          <p:cNvPr id="3" name="TextBox 2"/>
-          <p:cNvSpPr txBox="1"/>
-          <p:nvPr/>
-        </p:nvSpPr>
-        <p:spPr>
-          <a:xfrm>
-            <a:off x="365760" y="365760"/>
-            <a:ext cx="5486400" cy="365760"/>
-          </a:xfrm>
-          <a:prstGeom prst="rect">
-            <a:avLst/>
-          </a:prstGeom>
-          <a:noFill/>
-        </p:spPr>
-        <p:txBody>
-          <a:bodyPr wrap="square">
-            <a:spAutoFit/>
-          </a:bodyPr>
-          <a:lstStyle/>
-          <a:p>
-            <a:pPr algn="l"/>
-            <a:r>
-              <a:rPr sz="1000" b="1">
-                <a:solidFill>
-                  <a:srgbClr val="CCD6F0"/>
-                </a:solidFill>
-                <a:latin typeface="Arial"/>
-              </a:rPr>
-              <a:t>PRAXISTRANSFER</a:t>
-            </a:r>
-          </a:p>
-        </p:txBody>
-      </p:sp>
-      <p:sp>
-        <p:nvSpPr>
-          <p:cNvPr id="4" name="TextBox 3"/>
-          <p:cNvSpPr txBox="1"/>
-          <p:nvPr/>
-        </p:nvSpPr>
-        <p:spPr>
-          <a:xfrm>
-            <a:off x="365760" y="640080"/>
-            <a:ext cx="9144000" cy="914400"/>
-          </a:xfrm>
-          <a:prstGeom prst="rect">
-            <a:avLst/>
-          </a:prstGeom>
-          <a:noFill/>
-        </p:spPr>
-        <p:txBody>
-          <a:bodyPr wrap="square">
-            <a:spAutoFit/>
-          </a:bodyPr>
-          <a:lstStyle/>
-          <a:p>
-            <a:pPr algn="l"/>
-            <a:r>
-              <a:rPr sz="2800" b="1">
-                <a:solidFill>
-                  <a:srgbClr val="FFFFFF"/>
-                </a:solidFill>
-                <a:latin typeface="Arial"/>
-              </a:rPr>
-              <a:t>Was nehmen Sie mit?</a:t>
-            </a:r>
-          </a:p>
-        </p:txBody>
-      </p:sp>
-      <p:sp>
-        <p:nvSpPr>
-          <p:cNvPr id="5" name="Rectangle 4"/>
-          <p:cNvSpPr/>
-          <p:nvPr/>
-        </p:nvSpPr>
-        <p:spPr>
-          <a:xfrm>
-            <a:off x="365760" y="1463040"/>
-            <a:ext cx="7315200" cy="27432"/>
-          </a:xfrm>
-          <a:prstGeom prst="rect">
-            <a:avLst/>
-          </a:prstGeom>
-          <a:solidFill>
-            <a:srgbClr val="335CC0"/>
-          </a:solidFill>
-          <a:ln>
-            <a:noFill/>
-          </a:ln>
-        </p:spPr>
-        <p:style>
-          <a:lnRef idx="1">
-            <a:schemeClr val="accent1"/>
-          </a:lnRef>
-          <a:fillRef idx="3">
-            <a:schemeClr val="accent1"/>
-          </a:fillRef>
-          <a:effectRef idx="2">
-            <a:schemeClr val="accent1"/>
-          </a:effectRef>
-          <a:fontRef idx="minor">
-            <a:schemeClr val="lt1"/>
-          </a:fontRef>
-        </p:style>
-        <p:txBody>
-          <a:bodyPr rtlCol="0" anchor="ctr"/>
-          <a:lstStyle/>
-          <a:p>
-            <a:pPr algn="ctr"/>
-          </a:p>
-        </p:txBody>
-      </p:sp>
-      <p:sp>
-        <p:nvSpPr>
-          <p:cNvPr id="6" name="TextBox 5"/>
-          <p:cNvSpPr txBox="1"/>
-          <p:nvPr/>
-        </p:nvSpPr>
-        <p:spPr>
-          <a:xfrm>
-            <a:off x="365760" y="1645920"/>
-            <a:ext cx="11430000" cy="4114800"/>
-          </a:xfrm>
-          <a:prstGeom prst="rect">
-            <a:avLst/>
-          </a:prstGeom>
-          <a:noFill/>
-        </p:spPr>
-        <p:txBody>
-          <a:bodyPr wrap="square">
-            <a:spAutoFit/>
-          </a:bodyPr>
-          <a:lstStyle/>
-          <a:p>
-            <a:pPr>
-              <a:spcBef>
-                <a:spcPts val="400"/>
-              </a:spcBef>
-            </a:pPr>
-            <a:r>
-              <a:rPr sz="1600">
-                <a:solidFill>
-                  <a:srgbClr val="E05B00"/>
-                </a:solidFill>
-                <a:latin typeface="Arial"/>
-              </a:rPr>
-              <a:t>▪  </a:t>
-            </a:r>
-            <a:r>
-              <a:rPr sz="1800">
-                <a:solidFill>
-                  <a:srgbClr val="FFFFFF"/>
-                </a:solidFill>
-                <a:latin typeface="Arial"/>
-              </a:rPr>
-              <a:t>Transferaufgabe: Wenden Sie das Gelernte in den nächsten 14 Tagen bei einem konkreten Kunden an.</a:t>
-            </a:r>
-          </a:p>
-          <a:p>
-            <a:pPr>
-              <a:spcBef>
-                <a:spcPts val="400"/>
-              </a:spcBef>
-            </a:pPr>
-            <a:r>
-              <a:rPr sz="1600">
-                <a:solidFill>
-                  <a:srgbClr val="E05B00"/>
-                </a:solidFill>
-                <a:latin typeface="Arial"/>
-              </a:rPr>
-              <a:t>▪  </a:t>
-            </a:r>
-            <a:r>
-              <a:rPr sz="1800">
-                <a:solidFill>
-                  <a:srgbClr val="FFFFFF"/>
-                </a:solidFill>
-                <a:latin typeface="Arial"/>
-              </a:rPr>
-              <a:t>Selbstcheck nach 4 Wochen: Was hat sich verändert?</a:t>
-            </a:r>
-          </a:p>
-        </p:txBody>
-      </p:sp>
-      <p:sp>
-        <p:nvSpPr>
-          <p:cNvPr id="7" name="TextBox 6"/>
-          <p:cNvSpPr txBox="1"/>
-          <p:nvPr/>
-        </p:nvSpPr>
-        <p:spPr>
-          <a:xfrm>
-            <a:off x="365760" y="6309360"/>
-            <a:ext cx="11430000" cy="365760"/>
-          </a:xfrm>
-          <a:prstGeom prst="rect">
-            <a:avLst/>
-          </a:prstGeom>
-          <a:noFill/>
-        </p:spPr>
-        <p:txBody>
-          <a:bodyPr wrap="square">
-            <a:spAutoFit/>
-          </a:bodyPr>
-          <a:lstStyle/>
-          <a:p>
-            <a:pPr algn="l"/>
-            <a:r>
-              <a:rPr sz="900" b="0">
-                <a:solidFill>
-                  <a:srgbClr val="99AACC"/>
-                </a:solidFill>
-                <a:latin typeface="Arial"/>
-              </a:rPr>
-              <a:t>M12 · CEO-Dialog &amp; Nachfolge  ·  v0.3  ·  Benedikt Zoller Coaching</a:t>
-            </a:r>
-          </a:p>
-        </p:txBody>
-      </p:sp>
-    </p:spTree>
-  </p:cSld>
-  <p:clrMapOvr>
-    <a:masterClrMapping/>
-  </p:clrMapOvr>
-</p:sld>
-</file>
-
-<file path=ppt/slides/slide3.xml><?xml version="1.0" encoding="utf-8"?>
-<p:sld xmlns:a="http://schemas.openxmlformats.org/drawingml/2006/main" xmlns:p="http://schemas.openxmlformats.org/presentationml/2006/main" xmlns:r="http://schemas.openxmlformats.org/officeDocument/2006/relationships">
-  <p:cSld>
-    <p:bg>
-      <p:bgPr>
-        <a:solidFill>
-          <a:srgbClr val="FFFFFF"/>
-        </a:solidFill>
-        <a:effectLst/>
-      </p:bgPr>
-    </p:bg>
-    <p:spTree>
-      <p:nvGrpSpPr>
-        <p:cNvPr id="1" name=""/>
-        <p:cNvGrpSpPr/>
-        <p:nvPr/>
-      </p:nvGrpSpPr>
-      <p:grpSpPr/>
-      <p:sp>
-        <p:nvSpPr>
-          <p:cNvPr id="2" name="Rectangle 1"/>
-          <p:cNvSpPr/>
-          <p:nvPr/>
-        </p:nvSpPr>
-        <p:spPr>
-          <a:xfrm>
-            <a:off x="0" y="0"/>
-            <a:ext cx="73152" cy="6858000"/>
-          </a:xfrm>
-          <a:prstGeom prst="rect">
-            <a:avLst/>
-          </a:prstGeom>
-          <a:solidFill>
-            <a:srgbClr val="003DA5"/>
-          </a:solidFill>
-          <a:ln>
-            <a:noFill/>
-          </a:ln>
-        </p:spPr>
-        <p:style>
-          <a:lnRef idx="1">
-            <a:schemeClr val="accent1"/>
-          </a:lnRef>
-          <a:fillRef idx="3">
-            <a:schemeClr val="accent1"/>
-          </a:fillRef>
-          <a:effectRef idx="2">
-            <a:schemeClr val="accent1"/>
-          </a:effectRef>
-          <a:fontRef idx="minor">
-            <a:schemeClr val="lt1"/>
-          </a:fontRef>
-        </p:style>
-        <p:txBody>
-          <a:bodyPr rtlCol="0" anchor="ctr"/>
-          <a:lstStyle/>
-          <a:p>
-            <a:pPr algn="ctr"/>
-          </a:p>
-        </p:txBody>
-      </p:sp>
-      <p:sp>
-        <p:nvSpPr>
-          <p:cNvPr id="3" name="TextBox 2"/>
-          <p:cNvSpPr txBox="1"/>
-          <p:nvPr/>
-        </p:nvSpPr>
-        <p:spPr>
-          <a:xfrm>
-            <a:off x="365760" y="274320"/>
-            <a:ext cx="11430000" cy="822960"/>
-          </a:xfrm>
-          <a:prstGeom prst="rect">
-            <a:avLst/>
-          </a:prstGeom>
-          <a:noFill/>
-        </p:spPr>
-        <p:txBody>
-          <a:bodyPr wrap="square">
-            <a:spAutoFit/>
-          </a:bodyPr>
-          <a:lstStyle/>
-          <a:p>
-            <a:pPr algn="l"/>
-            <a:r>
-              <a:rPr sz="2200" b="1">
-                <a:solidFill>
-                  <a:srgbClr val="003DA5"/>
-                </a:solidFill>
-                <a:latin typeface="Arial"/>
-              </a:rPr>
-              <a:t>Den ersten Schritt gehen: Wie initiiert man das CEO-Gespräch bei einem Bestandskunden?</a:t>
-            </a:r>
-          </a:p>
-        </p:txBody>
-      </p:sp>
-      <p:sp>
-        <p:nvSpPr>
-          <p:cNvPr id="4" name="Rectangle 3"/>
-          <p:cNvSpPr/>
-          <p:nvPr/>
-        </p:nvSpPr>
-        <p:spPr>
-          <a:xfrm>
-            <a:off x="365760" y="1051560"/>
-            <a:ext cx="11430000" cy="27432"/>
-          </a:xfrm>
-          <a:prstGeom prst="rect">
-            <a:avLst/>
-          </a:prstGeom>
-          <a:solidFill>
-            <a:srgbClr val="E5E7EB"/>
-          </a:solidFill>
-          <a:ln>
-            <a:noFill/>
-          </a:ln>
-        </p:spPr>
-        <p:style>
-          <a:lnRef idx="1">
-            <a:schemeClr val="accent1"/>
-          </a:lnRef>
-          <a:fillRef idx="3">
-            <a:schemeClr val="accent1"/>
-          </a:fillRef>
-          <a:effectRef idx="2">
-            <a:schemeClr val="accent1"/>
-          </a:effectRef>
-          <a:fontRef idx="minor">
-            <a:schemeClr val="lt1"/>
-          </a:fontRef>
-        </p:style>
-        <p:txBody>
-          <a:bodyPr rtlCol="0" anchor="ctr"/>
-          <a:lstStyle/>
-          <a:p>
-            <a:pPr algn="ctr"/>
-          </a:p>
-        </p:txBody>
-      </p:sp>
-      <p:sp>
-        <p:nvSpPr>
-          <p:cNvPr id="5" name="TextBox 4"/>
-          <p:cNvSpPr txBox="1"/>
-          <p:nvPr/>
-        </p:nvSpPr>
-        <p:spPr>
-          <a:xfrm>
-            <a:off x="365760" y="1234440"/>
-            <a:ext cx="11430000" cy="5212080"/>
-          </a:xfrm>
-          <a:prstGeom prst="rect">
-            <a:avLst/>
-          </a:prstGeom>
-          <a:noFill/>
-        </p:spPr>
-        <p:txBody>
-          <a:bodyPr wrap="square">
-            <a:spAutoFit/>
-          </a:bodyPr>
-          <a:lstStyle/>
-          <a:p>
-            <a:pPr>
-              <a:spcBef>
-                <a:spcPts val="400"/>
-              </a:spcBef>
-            </a:pPr>
-            <a:r>
-              <a:rPr sz="1500">
-                <a:solidFill>
-                  <a:srgbClr val="003DA5"/>
-                </a:solidFill>
-                <a:latin typeface="Arial"/>
-              </a:rPr>
-              <a:t>▪  </a:t>
-            </a:r>
-            <a:r>
-              <a:rPr sz="1700">
-                <a:solidFill>
-                  <a:srgbClr val="1A1A1A"/>
-                </a:solidFill>
-                <a:latin typeface="Arial"/>
-              </a:rPr>
-              <a:t>Die häufigste Hürde in der Praxis ist nicht das Handwerk, sondern die Überwindung: „Ich kenne den schon 10 Jahre – das…</a:t>
-            </a:r>
-          </a:p>
-          <a:p>
-            <a:pPr>
-              <a:spcBef>
-                <a:spcPts val="400"/>
-              </a:spcBef>
-            </a:pPr>
-            <a:r>
-              <a:rPr sz="1500">
-                <a:solidFill>
-                  <a:srgbClr val="003DA5"/>
-                </a:solidFill>
-                <a:latin typeface="Arial"/>
-              </a:rPr>
-              <a:t>▪  </a:t>
-            </a:r>
-            <a:r>
-              <a:rPr sz="1700">
-                <a:solidFill>
-                  <a:srgbClr val="1A1A1A"/>
-                </a:solidFill>
-                <a:latin typeface="Arial"/>
-              </a:rPr>
-              <a:t>Drei bewährte Einstiegs-Anlässe:</a:t>
-            </a:r>
-          </a:p>
-          <a:p>
-            <a:pPr>
-              <a:spcBef>
-                <a:spcPts val="400"/>
-              </a:spcBef>
-            </a:pPr>
-            <a:r>
-              <a:rPr sz="1500">
-                <a:solidFill>
-                  <a:srgbClr val="003DA5"/>
-                </a:solidFill>
-                <a:latin typeface="Arial"/>
-              </a:rPr>
-              <a:t>▪  </a:t>
-            </a:r>
-            <a:r>
-              <a:rPr sz="1700">
-                <a:solidFill>
-                  <a:srgbClr val="1A1A1A"/>
-                </a:solidFill>
-                <a:latin typeface="Arial"/>
-              </a:rPr>
-              <a:t>Kernprinzip: Der Einstieg ist keine Analyse und kein Angebot – er ist eine Einladung. Wer zu früh mit Nachfolge-Typen…</a:t>
-            </a:r>
-          </a:p>
-        </p:txBody>
-      </p:sp>
-      <p:sp>
-        <p:nvSpPr>
-          <p:cNvPr id="6" name="TextBox 5"/>
-          <p:cNvSpPr txBox="1"/>
-          <p:nvPr/>
-        </p:nvSpPr>
-        <p:spPr>
-          <a:xfrm>
-            <a:off x="11704320" y="6492240"/>
-            <a:ext cx="365760" cy="274320"/>
-          </a:xfrm>
-          <a:prstGeom prst="rect">
-            <a:avLst/>
-          </a:prstGeom>
-          <a:noFill/>
-        </p:spPr>
-        <p:txBody>
-          <a:bodyPr wrap="square">
-            <a:spAutoFit/>
-          </a:bodyPr>
-          <a:lstStyle/>
-          <a:p>
-            <a:pPr algn="r"/>
-            <a:r>
-              <a:rPr sz="1000" b="0">
-                <a:solidFill>
-                  <a:srgbClr val="6B7280"/>
-                </a:solidFill>
-                <a:latin typeface="Arial"/>
-              </a:rPr>
-              <a:t>1</a:t>
+              <a:t>4.1 Theorie-Input: Das CEO-Gespräch – Mindset und Vorbereitung</a:t>
             </a:r>
           </a:p>
         </p:txBody>
@@ -7973,8 +11043,8 @@
         </p:nvSpPr>
         <p:spPr>
           <a:xfrm>
-            <a:off x="365760" y="274320"/>
-            <a:ext cx="11430000" cy="822960"/>
+            <a:off x="228600" y="182880"/>
+            <a:ext cx="11430000" cy="320040"/>
           </a:xfrm>
           <a:prstGeom prst="rect">
             <a:avLst/>
@@ -7989,33 +11059,68 @@
           <a:p>
             <a:pPr algn="l"/>
             <a:r>
-              <a:rPr sz="2200" b="1">
+              <a:rPr sz="900" b="0" i="0">
+                <a:solidFill>
+                  <a:srgbClr val="556575"/>
+                </a:solidFill>
+                <a:latin typeface="Arial"/>
+              </a:rPr>
+              <a:t>M12 · Modulinhalte</a:t>
+            </a:r>
+          </a:p>
+        </p:txBody>
+      </p:sp>
+      <p:sp>
+        <p:nvSpPr>
+          <p:cNvPr id="4" name="TextBox 3"/>
+          <p:cNvSpPr txBox="1"/>
+          <p:nvPr/>
+        </p:nvSpPr>
+        <p:spPr>
+          <a:xfrm>
+            <a:off x="365760" y="274320"/>
+            <a:ext cx="11430000" cy="777240"/>
+          </a:xfrm>
+          <a:prstGeom prst="rect">
+            <a:avLst/>
+          </a:prstGeom>
+          <a:noFill/>
+        </p:spPr>
+        <p:txBody>
+          <a:bodyPr wrap="square">
+            <a:spAutoFit/>
+          </a:bodyPr>
+          <a:lstStyle/>
+          <a:p>
+            <a:pPr algn="l"/>
+            <a:r>
+              <a:rPr sz="2200" b="1" i="0">
                 <a:solidFill>
                   <a:srgbClr val="003DA5"/>
                 </a:solidFill>
                 <a:latin typeface="Arial"/>
               </a:rPr>
-              <a:t>Psychologische Sicherheit als Gesprächsgrundlage</a:t>
-            </a:r>
-          </a:p>
-        </p:txBody>
-      </p:sp>
-      <p:sp>
-        <p:nvSpPr>
-          <p:cNvPr id="4" name="Rectangle 3"/>
+              <a:t>Den ersten Schritt gehen: Wie initiiert man das CEO-Gespräch bei einem Bestandskunden?</a:t>
+            </a:r>
+          </a:p>
+        </p:txBody>
+      </p:sp>
+      <p:sp>
+        <p:nvSpPr>
+          <p:cNvPr id="5" name="Rectangle 4"/>
           <p:cNvSpPr/>
           <p:nvPr/>
         </p:nvSpPr>
         <p:spPr>
           <a:xfrm>
-            <a:off x="365760" y="1051560"/>
+            <a:off x="365760" y="1005840"/>
             <a:ext cx="11430000" cy="27432"/>
           </a:xfrm>
           <a:prstGeom prst="rect">
             <a:avLst/>
           </a:prstGeom>
           <a:solidFill>
-            <a:srgbClr val="E5E7EB"/>
+            <a:srgbClr val="D1D5DB"/>
           </a:solidFill>
           <a:ln>
             <a:noFill/>
@@ -8043,139 +11148,216 @@
           </a:p>
         </p:txBody>
       </p:sp>
-      <p:sp>
-        <p:nvSpPr>
-          <p:cNvPr id="5" name="TextBox 4"/>
-          <p:cNvSpPr txBox="1"/>
-          <p:nvPr/>
-        </p:nvSpPr>
-        <p:spPr>
-          <a:xfrm>
-            <a:off x="365760" y="1234440"/>
-            <a:ext cx="11430000" cy="5212080"/>
-          </a:xfrm>
-          <a:prstGeom prst="rect">
-            <a:avLst/>
-          </a:prstGeom>
-          <a:noFill/>
-        </p:spPr>
-        <p:txBody>
-          <a:bodyPr wrap="square">
-            <a:spAutoFit/>
-          </a:bodyPr>
-          <a:lstStyle/>
-          <a:p>
-            <a:pPr>
-              <a:spcBef>
-                <a:spcPts val="400"/>
-              </a:spcBef>
-            </a:pPr>
-            <a:r>
-              <a:rPr sz="1500">
-                <a:solidFill>
-                  <a:srgbClr val="003DA5"/>
-                </a:solidFill>
-                <a:latin typeface="Arial"/>
-              </a:rPr>
-              <a:t>▪  </a:t>
-            </a:r>
-            <a:r>
-              <a:rPr sz="1700">
-                <a:solidFill>
-                  <a:srgbClr val="1A1A1A"/>
-                </a:solidFill>
-                <a:latin typeface="Arial"/>
-              </a:rPr>
-              <a:t>Gleichwertigkeit: „Ich bin nicht hier, um Sie zu prüfen oder zu belehren, sondern um gemeinsam zu schauen, was für Ihre Zukunft sinnvoll ist."</a:t>
-            </a:r>
-          </a:p>
-          <a:p>
-            <a:pPr>
-              <a:spcBef>
-                <a:spcPts val="400"/>
-              </a:spcBef>
-            </a:pPr>
-            <a:r>
-              <a:rPr sz="1500">
-                <a:solidFill>
-                  <a:srgbClr val="003DA5"/>
-                </a:solidFill>
-                <a:latin typeface="Arial"/>
-              </a:rPr>
-              <a:t>▪  </a:t>
-            </a:r>
-            <a:r>
-              <a:rPr sz="1700">
-                <a:solidFill>
-                  <a:srgbClr val="1A1A1A"/>
-                </a:solidFill>
-                <a:latin typeface="Arial"/>
-              </a:rPr>
-              <a:t>Vertraulichkeit: „Was Sie mir anvertrauen, bleibt zwischen uns."</a:t>
-            </a:r>
-          </a:p>
-          <a:p>
-            <a:pPr>
-              <a:spcBef>
-                <a:spcPts val="400"/>
-              </a:spcBef>
-            </a:pPr>
-            <a:r>
-              <a:rPr sz="1500">
-                <a:solidFill>
-                  <a:srgbClr val="003DA5"/>
-                </a:solidFill>
-                <a:latin typeface="Arial"/>
-              </a:rPr>
-              <a:t>▪  </a:t>
-            </a:r>
-            <a:r>
-              <a:rPr sz="1700">
-                <a:solidFill>
-                  <a:srgbClr val="1A1A1A"/>
-                </a:solidFill>
-                <a:latin typeface="Arial"/>
-              </a:rPr>
-              <a:t>Kompetenz: Subtile Signale, dass der FK das Nachfolge-Thema ernst nimmt und Erfahrung hat.</a:t>
-            </a:r>
-          </a:p>
-        </p:txBody>
-      </p:sp>
-      <p:sp>
-        <p:nvSpPr>
-          <p:cNvPr id="6" name="TextBox 5"/>
-          <p:cNvSpPr txBox="1"/>
-          <p:nvPr/>
-        </p:nvSpPr>
-        <p:spPr>
-          <a:xfrm>
-            <a:off x="11704320" y="6492240"/>
-            <a:ext cx="365760" cy="274320"/>
-          </a:xfrm>
-          <a:prstGeom prst="rect">
-            <a:avLst/>
-          </a:prstGeom>
-          <a:noFill/>
-        </p:spPr>
-        <p:txBody>
-          <a:bodyPr wrap="square">
-            <a:spAutoFit/>
-          </a:bodyPr>
-          <a:lstStyle/>
-          <a:p>
-            <a:pPr algn="r"/>
-            <a:r>
-              <a:rPr sz="1000" b="0">
-                <a:solidFill>
-                  <a:srgbClr val="6B7280"/>
-                </a:solidFill>
-                <a:latin typeface="Arial"/>
-              </a:rPr>
-              <a:t>2</a:t>
-            </a:r>
-          </a:p>
-        </p:txBody>
-      </p:sp>
+      <p:graphicFrame>
+        <p:nvGraphicFramePr>
+          <p:cNvPr id="6" name="Table 5"/>
+          <p:cNvGraphicFramePr>
+            <a:graphicFrameLocks noGrp="1"/>
+          </p:cNvGraphicFramePr>
+          <p:nvPr/>
+        </p:nvGraphicFramePr>
+        <p:xfrm>
+          <a:off x="365760" y="1143000"/>
+          <a:ext cx="11430000" cy="1901952"/>
+        </p:xfrm>
+        <a:graphic>
+          <a:graphicData uri="http://schemas.openxmlformats.org/drawingml/2006/table">
+            <a:tbl>
+              <a:tblPr firstRow="1" bandRow="1">
+                <a:tableStyleId>{5C22544A-7EE6-4342-B048-85BDC9FD1C3A}</a:tableStyleId>
+              </a:tblPr>
+              <a:tblGrid>
+                <a:gridCol w="5715000"/>
+                <a:gridCol w="5715000"/>
+              </a:tblGrid>
+              <a:tr h="475488">
+                <a:tc>
+                  <a:txBody>
+                    <a:bodyPr wrap="square"/>
+                    <a:lstStyle/>
+                    <a:p>
+                      <a:r>
+                        <a:rPr sz="1100" b="1">
+                          <a:solidFill>
+                            <a:srgbClr val="FFFFFF"/>
+                          </a:solidFill>
+                          <a:latin typeface="Arial"/>
+                        </a:rPr>
+                        <a:t>Anlass</a:t>
+                      </a:r>
+                    </a:p>
+                  </a:txBody>
+                  <a:tcPr>
+                    <a:solidFill>
+                      <a:srgbClr val="003DA5"/>
+                    </a:solidFill>
+                  </a:tcPr>
+                </a:tc>
+                <a:tc>
+                  <a:txBody>
+                    <a:bodyPr wrap="square"/>
+                    <a:lstStyle/>
+                    <a:p>
+                      <a:r>
+                        <a:rPr sz="1100" b="1">
+                          <a:solidFill>
+                            <a:srgbClr val="FFFFFF"/>
+                          </a:solidFill>
+                          <a:latin typeface="Arial"/>
+                        </a:rPr>
+                        <a:t>Konkreter Einstieg</a:t>
+                      </a:r>
+                    </a:p>
+                  </a:txBody>
+                  <a:tcPr>
+                    <a:solidFill>
+                      <a:srgbClr val="003DA5"/>
+                    </a:solidFill>
+                  </a:tcPr>
+                </a:tc>
+              </a:tr>
+              <a:tr h="475488">
+                <a:tc>
+                  <a:txBody>
+                    <a:bodyPr wrap="square"/>
+                    <a:lstStyle/>
+                    <a:p>
+                      <a:r>
+                        <a:rPr sz="1100" b="0">
+                          <a:solidFill>
+                            <a:srgbClr val="1A1A1A"/>
+                          </a:solidFill>
+                          <a:latin typeface="Arial"/>
+                        </a:rPr>
+                        <a:t>Jahresgespräch (immer möglich)</a:t>
+                      </a:r>
+                    </a:p>
+                  </a:txBody>
+                  <a:tcPr>
+                    <a:solidFill>
+                      <a:srgbClr val="FFFFFF"/>
+                    </a:solidFill>
+                  </a:tcPr>
+                </a:tc>
+                <a:tc>
+                  <a:txBody>
+                    <a:bodyPr wrap="square"/>
+                    <a:lstStyle/>
+                    <a:p>
+                      <a:r>
+                        <a:rPr sz="1100" b="0">
+                          <a:solidFill>
+                            <a:srgbClr val="1A1A1A"/>
+                          </a:solidFill>
+                          <a:latin typeface="Arial"/>
+                        </a:rPr>
+                        <a:t>„Ich merke, dass wir in unseren Gesprächen vor allem über Zahlen und Produkte reden. Ich würde gerne einmal verstehen, wie Sie mittel- bis langfristig auf Ihr Unternehmen schauen – darf ich dazu ein paar andere Fragen stellen?"</a:t>
+                      </a:r>
+                    </a:p>
+                  </a:txBody>
+                  <a:tcPr>
+                    <a:solidFill>
+                      <a:srgbClr val="FFFFFF"/>
+                    </a:solidFill>
+                  </a:tcPr>
+                </a:tc>
+              </a:tr>
+              <a:tr h="475488">
+                <a:tc>
+                  <a:txBody>
+                    <a:bodyPr wrap="square"/>
+                    <a:lstStyle/>
+                    <a:p>
+                      <a:r>
+                        <a:rPr sz="1100" b="0">
+                          <a:solidFill>
+                            <a:srgbClr val="1A1A1A"/>
+                          </a:solidFill>
+                          <a:latin typeface="Arial"/>
+                        </a:rPr>
+                        <a:t>Nach einem Lebens-Event (Krankheit, runder Geburtstag, Familienereignis)</a:t>
+                      </a:r>
+                    </a:p>
+                  </a:txBody>
+                  <a:tcPr>
+                    <a:solidFill>
+                      <a:srgbClr val="F4F6FA"/>
+                    </a:solidFill>
+                  </a:tcPr>
+                </a:tc>
+                <a:tc>
+                  <a:txBody>
+                    <a:bodyPr wrap="square"/>
+                    <a:lstStyle/>
+                    <a:p>
+                      <a:r>
+                        <a:rPr sz="1100" b="0">
+                          <a:solidFill>
+                            <a:srgbClr val="1A1A1A"/>
+                          </a:solidFill>
+                          <a:latin typeface="Arial"/>
+                        </a:rPr>
+                        <a:t>„Sie hatten ja letztes Jahr [Krankheit / 60. Geburtstag / Hochzeit Kind]. Solche Momente bringen viele Unternehmer dazu, neu über die Zukunft nachzudenken. Wie ist das bei Ihnen?"</a:t>
+                      </a:r>
+                    </a:p>
+                  </a:txBody>
+                  <a:tcPr>
+                    <a:solidFill>
+                      <a:srgbClr val="F4F6FA"/>
+                    </a:solidFill>
+                  </a:tcPr>
+                </a:tc>
+              </a:tr>
+              <a:tr h="475488">
+                <a:tc>
+                  <a:txBody>
+                    <a:bodyPr wrap="square"/>
+                    <a:lstStyle/>
+                    <a:p>
+                      <a:r>
+                        <a:rPr sz="1100" b="0">
+                          <a:solidFill>
+                            <a:srgbClr val="1A1A1A"/>
+                          </a:solidFill>
+                          <a:latin typeface="Arial"/>
+                        </a:rPr>
+                        <a:t>Aus dem Marktgespräch heraus (Branchenveränderung, Mitbewerber-Nachfolge)</a:t>
+                      </a:r>
+                    </a:p>
+                  </a:txBody>
+                  <a:tcPr>
+                    <a:solidFill>
+                      <a:srgbClr val="FFFFFF"/>
+                    </a:solidFill>
+                  </a:tcPr>
+                </a:tc>
+                <a:tc>
+                  <a:txBody>
+                    <a:bodyPr wrap="square"/>
+                    <a:lstStyle/>
+                    <a:p>
+                      <a:r>
+                        <a:rPr sz="1100" b="0">
+                          <a:solidFill>
+                            <a:srgbClr val="1A1A1A"/>
+                          </a:solidFill>
+                          <a:latin typeface="Arial"/>
+                        </a:rPr>
+                        <a:t>„Ihr Mitbewerber Müller hat ja letztes Jahr den Betrieb verkauft – das hat in der Branche einige überrascht. Haben Sie selbst schon darüber nachgedacht, wie Ihre Nachfolge eines Tages aussehen könnte?"</a:t>
+                      </a:r>
+                    </a:p>
+                  </a:txBody>
+                  <a:tcPr>
+                    <a:solidFill>
+                      <a:srgbClr val="FFFFFF"/>
+                    </a:solidFill>
+                  </a:tcPr>
+                </a:tc>
+              </a:tr>
+            </a:tbl>
+          </a:graphicData>
+        </a:graphic>
+      </p:graphicFrame>
     </p:spTree>
   </p:cSld>
   <p:clrMapOvr>
@@ -8253,8 +11435,8 @@
         </p:nvSpPr>
         <p:spPr>
           <a:xfrm>
-            <a:off x="365760" y="274320"/>
-            <a:ext cx="11430000" cy="822960"/>
+            <a:off x="228600" y="182880"/>
+            <a:ext cx="11430000" cy="320040"/>
           </a:xfrm>
           <a:prstGeom prst="rect">
             <a:avLst/>
@@ -8269,33 +11451,68 @@
           <a:p>
             <a:pPr algn="l"/>
             <a:r>
-              <a:rPr sz="2200" b="1">
+              <a:rPr sz="900" b="0" i="0">
+                <a:solidFill>
+                  <a:srgbClr val="556575"/>
+                </a:solidFill>
+                <a:latin typeface="Arial"/>
+              </a:rPr>
+              <a:t>M12 · Modulinhalte</a:t>
+            </a:r>
+          </a:p>
+        </p:txBody>
+      </p:sp>
+      <p:sp>
+        <p:nvSpPr>
+          <p:cNvPr id="4" name="TextBox 3"/>
+          <p:cNvSpPr txBox="1"/>
+          <p:nvPr/>
+        </p:nvSpPr>
+        <p:spPr>
+          <a:xfrm>
+            <a:off x="365760" y="274320"/>
+            <a:ext cx="11430000" cy="777240"/>
+          </a:xfrm>
+          <a:prstGeom prst="rect">
+            <a:avLst/>
+          </a:prstGeom>
+          <a:noFill/>
+        </p:spPr>
+        <p:txBody>
+          <a:bodyPr wrap="square">
+            <a:spAutoFit/>
+          </a:bodyPr>
+          <a:lstStyle/>
+          <a:p>
+            <a:pPr algn="l"/>
+            <a:r>
+              <a:rPr sz="2200" b="1" i="0">
                 <a:solidFill>
                   <a:srgbClr val="003DA5"/>
                 </a:solidFill>
                 <a:latin typeface="Arial"/>
               </a:rPr>
-              <a:t>Das Board-Room-Mindset</a:t>
-            </a:r>
-          </a:p>
-        </p:txBody>
-      </p:sp>
-      <p:sp>
-        <p:nvSpPr>
-          <p:cNvPr id="4" name="Rectangle 3"/>
+              <a:t>Psychologische Sicherheit als Gesprächsgrundlage</a:t>
+            </a:r>
+          </a:p>
+        </p:txBody>
+      </p:sp>
+      <p:sp>
+        <p:nvSpPr>
+          <p:cNvPr id="5" name="Rectangle 4"/>
           <p:cNvSpPr/>
           <p:nvPr/>
         </p:nvSpPr>
         <p:spPr>
           <a:xfrm>
-            <a:off x="365760" y="1051560"/>
+            <a:off x="365760" y="1005840"/>
             <a:ext cx="11430000" cy="27432"/>
           </a:xfrm>
           <a:prstGeom prst="rect">
             <a:avLst/>
           </a:prstGeom>
           <a:solidFill>
-            <a:srgbClr val="E5E7EB"/>
+            <a:srgbClr val="D1D5DB"/>
           </a:solidFill>
           <a:ln>
             <a:noFill/>
@@ -8325,13 +11542,13 @@
       </p:sp>
       <p:sp>
         <p:nvSpPr>
-          <p:cNvPr id="5" name="TextBox 4"/>
+          <p:cNvPr id="6" name="TextBox 5"/>
           <p:cNvSpPr txBox="1"/>
           <p:nvPr/>
         </p:nvSpPr>
         <p:spPr>
           <a:xfrm>
-            <a:off x="365760" y="1234440"/>
+            <a:off x="365760" y="1143000"/>
             <a:ext cx="11430000" cy="5212080"/>
           </a:xfrm>
           <a:prstGeom prst="rect">
@@ -8347,7 +11564,7 @@
           <a:p>
             <a:pPr>
               <a:spcBef>
-                <a:spcPts val="400"/>
+                <a:spcPts val="500"/>
               </a:spcBef>
             </a:pPr>
             <a:r>
@@ -8360,19 +11577,28 @@
               <a:t>▪  </a:t>
             </a:r>
             <a:r>
+              <a:rPr sz="1700" b="1">
+                <a:solidFill>
+                  <a:srgbClr val="003DA5"/>
+                </a:solidFill>
+                <a:latin typeface="Arial"/>
+              </a:rPr>
+              <a:t>Gleichwertigkeit: </a:t>
+            </a:r>
+            <a:r>
               <a:rPr sz="1700">
                 <a:solidFill>
                   <a:srgbClr val="1A1A1A"/>
                 </a:solidFill>
                 <a:latin typeface="Arial"/>
               </a:rPr>
-              <a:t>Nicht unterordnend sprechen („Ich möchte ja nicht in Ihre Geschäfte reingrätschen, aber…") → stattdessen direkt: „Das habe ich in ähnlichen Fällen anders gesehen. Darf ich dazu eine Frage stellen?"</a:t>
+              <a:t>„Ich bin nicht hier, um Sie zu prüfen oder zu belehren, sondern um gemeinsam zu schauen, was für Ihre Zukunft sinnvoll ist." -</a:t>
             </a:r>
           </a:p>
           <a:p>
             <a:pPr>
               <a:spcBef>
-                <a:spcPts val="400"/>
+                <a:spcPts val="500"/>
               </a:spcBef>
             </a:pPr>
             <a:r>
@@ -8385,19 +11611,28 @@
               <a:t>▪  </a:t>
             </a:r>
             <a:r>
+              <a:rPr sz="1700" b="1">
+                <a:solidFill>
+                  <a:srgbClr val="003DA5"/>
+                </a:solidFill>
+                <a:latin typeface="Arial"/>
+              </a:rPr>
+              <a:t>Vertraulichkeit: </a:t>
+            </a:r>
+            <a:r>
               <a:rPr sz="1700">
                 <a:solidFill>
                   <a:srgbClr val="1A1A1A"/>
                 </a:solidFill>
                 <a:latin typeface="Arial"/>
               </a:rPr>
-              <a:t>Eigene Expertise einbringen ohne Demut: „Nachfolgen begleite ich seit Jahren. Wir sehen dabei Muster, die nicht sofort auffallen."</a:t>
+              <a:t>„Was Sie mir anvertrauen, bleibt zwischen uns." -</a:t>
             </a:r>
           </a:p>
           <a:p>
             <a:pPr>
               <a:spcBef>
-                <a:spcPts val="400"/>
+                <a:spcPts val="500"/>
               </a:spcBef>
             </a:pPr>
             <a:r>
@@ -8410,48 +11645,22 @@
               <a:t>▪  </a:t>
             </a:r>
             <a:r>
+              <a:rPr sz="1700" b="1">
+                <a:solidFill>
+                  <a:srgbClr val="003DA5"/>
+                </a:solidFill>
+                <a:latin typeface="Arial"/>
+              </a:rPr>
+              <a:t>Kompetenz: </a:t>
+            </a:r>
+            <a:r>
               <a:rPr sz="1700">
                 <a:solidFill>
                   <a:srgbClr val="1A1A1A"/>
                 </a:solidFill>
                 <a:latin typeface="Arial"/>
               </a:rPr>
-              <a:t>Produktiven Widerspruch anbringen, wenn nötig: „Das ergibt für mich weniger Sinn, weil … Was denken Sie dazu?"</a:t>
-            </a:r>
-          </a:p>
-        </p:txBody>
-      </p:sp>
-      <p:sp>
-        <p:nvSpPr>
-          <p:cNvPr id="6" name="TextBox 5"/>
-          <p:cNvSpPr txBox="1"/>
-          <p:nvPr/>
-        </p:nvSpPr>
-        <p:spPr>
-          <a:xfrm>
-            <a:off x="11704320" y="6492240"/>
-            <a:ext cx="365760" cy="274320"/>
-          </a:xfrm>
-          <a:prstGeom prst="rect">
-            <a:avLst/>
-          </a:prstGeom>
-          <a:noFill/>
-        </p:spPr>
-        <p:txBody>
-          <a:bodyPr wrap="square">
-            <a:spAutoFit/>
-          </a:bodyPr>
-          <a:lstStyle/>
-          <a:p>
-            <a:pPr algn="r"/>
-            <a:r>
-              <a:rPr sz="1000" b="0">
-                <a:solidFill>
-                  <a:srgbClr val="6B7280"/>
-                </a:solidFill>
-                <a:latin typeface="Arial"/>
-              </a:rPr>
-              <a:t>3</a:t>
+              <a:t>Subtile Signale, dass der FK das Nachfolge-Thema ernst nimmt und Erfahrung hat.</a:t>
             </a:r>
           </a:p>
         </p:txBody>
@@ -8533,8 +11742,8 @@
         </p:nvSpPr>
         <p:spPr>
           <a:xfrm>
-            <a:off x="365760" y="274320"/>
-            <a:ext cx="11430000" cy="822960"/>
+            <a:off x="228600" y="182880"/>
+            <a:ext cx="11430000" cy="320040"/>
           </a:xfrm>
           <a:prstGeom prst="rect">
             <a:avLst/>
@@ -8549,33 +11758,68 @@
           <a:p>
             <a:pPr algn="l"/>
             <a:r>
-              <a:rPr sz="2200" b="1">
+              <a:rPr sz="900" b="0" i="0">
+                <a:solidFill>
+                  <a:srgbClr val="556575"/>
+                </a:solidFill>
+                <a:latin typeface="Arial"/>
+              </a:rPr>
+              <a:t>M12 · Modulinhalte</a:t>
+            </a:r>
+          </a:p>
+        </p:txBody>
+      </p:sp>
+      <p:sp>
+        <p:nvSpPr>
+          <p:cNvPr id="4" name="TextBox 3"/>
+          <p:cNvSpPr txBox="1"/>
+          <p:nvPr/>
+        </p:nvSpPr>
+        <p:spPr>
+          <a:xfrm>
+            <a:off x="365760" y="274320"/>
+            <a:ext cx="11430000" cy="777240"/>
+          </a:xfrm>
+          <a:prstGeom prst="rect">
+            <a:avLst/>
+          </a:prstGeom>
+          <a:noFill/>
+        </p:spPr>
+        <p:txBody>
+          <a:bodyPr wrap="square">
+            <a:spAutoFit/>
+          </a:bodyPr>
+          <a:lstStyle/>
+          <a:p>
+            <a:pPr algn="l"/>
+            <a:r>
+              <a:rPr sz="2200" b="1" i="0">
                 <a:solidFill>
                   <a:srgbClr val="003DA5"/>
                 </a:solidFill>
                 <a:latin typeface="Arial"/>
               </a:rPr>
-              <a:t>Systemische Fragen (jenseits von SPIN)</a:t>
-            </a:r>
-          </a:p>
-        </p:txBody>
-      </p:sp>
-      <p:sp>
-        <p:nvSpPr>
-          <p:cNvPr id="4" name="Rectangle 3"/>
+              <a:t>Das Board-Room-Mindset</a:t>
+            </a:r>
+          </a:p>
+        </p:txBody>
+      </p:sp>
+      <p:sp>
+        <p:nvSpPr>
+          <p:cNvPr id="5" name="Rectangle 4"/>
           <p:cNvSpPr/>
           <p:nvPr/>
         </p:nvSpPr>
         <p:spPr>
           <a:xfrm>
-            <a:off x="365760" y="1051560"/>
+            <a:off x="365760" y="1005840"/>
             <a:ext cx="11430000" cy="27432"/>
           </a:xfrm>
           <a:prstGeom prst="rect">
             <a:avLst/>
           </a:prstGeom>
           <a:solidFill>
-            <a:srgbClr val="E5E7EB"/>
+            <a:srgbClr val="D1D5DB"/>
           </a:solidFill>
           <a:ln>
             <a:noFill/>
@@ -8605,13 +11849,13 @@
       </p:sp>
       <p:sp>
         <p:nvSpPr>
-          <p:cNvPr id="5" name="TextBox 4"/>
+          <p:cNvPr id="6" name="TextBox 5"/>
           <p:cNvSpPr txBox="1"/>
           <p:nvPr/>
         </p:nvSpPr>
         <p:spPr>
           <a:xfrm>
-            <a:off x="365760" y="1234440"/>
+            <a:off x="365760" y="1143000"/>
             <a:ext cx="11430000" cy="5212080"/>
           </a:xfrm>
           <a:prstGeom prst="rect">
@@ -8627,7 +11871,7 @@
           <a:p>
             <a:pPr>
               <a:spcBef>
-                <a:spcPts val="400"/>
+                <a:spcPts val="500"/>
               </a:spcBef>
             </a:pPr>
             <a:r>
@@ -8640,19 +11884,28 @@
               <a:t>▪  </a:t>
             </a:r>
             <a:r>
+              <a:rPr sz="1700" b="1">
+                <a:solidFill>
+                  <a:srgbClr val="003DA5"/>
+                </a:solidFill>
+                <a:latin typeface="Arial"/>
+              </a:rPr>
+              <a:t>Nicht unterordnend sprechen: </a:t>
+            </a:r>
+            <a:r>
               <a:rPr sz="1700">
                 <a:solidFill>
                   <a:srgbClr val="1A1A1A"/>
                 </a:solidFill>
                 <a:latin typeface="Arial"/>
               </a:rPr>
-              <a:t>„Wie hängt Ihre Nachfolgeplanung mit der Situation Ihrer Kinder zusammen?"</a:t>
+              <a:t>(„Ich möchte ja nicht in Ihre Geschäfte reingrätschen, aber…") → stattdessen direkt: „Das habe ich in ähnlichen Fällen anders gesehen. Darf ich dazu eine Frage stellen?" -</a:t>
             </a:r>
           </a:p>
           <a:p>
             <a:pPr>
               <a:spcBef>
-                <a:spcPts val="400"/>
+                <a:spcPts val="500"/>
               </a:spcBef>
             </a:pPr>
             <a:r>
@@ -8665,19 +11918,28 @@
               <a:t>▪  </a:t>
             </a:r>
             <a:r>
+              <a:rPr sz="1700" b="1">
+                <a:solidFill>
+                  <a:srgbClr val="003DA5"/>
+                </a:solidFill>
+                <a:latin typeface="Arial"/>
+              </a:rPr>
+              <a:t>Eigene Expertise einbringen: </a:t>
+            </a:r>
+            <a:r>
               <a:rPr sz="1700">
                 <a:solidFill>
                   <a:srgbClr val="1A1A1A"/>
                 </a:solidFill>
                 <a:latin typeface="Arial"/>
               </a:rPr>
-              <a:t>„Welche Rolle spielt Ihr Unternehmen in Ihrem Selbstverständnis – und was würde sich ändern, wenn Sie es übergeben?"</a:t>
+              <a:t>ohne Demut: „Nachfolgen begleite ich seit Jahren. Wir sehen dabei Muster, die nicht sofort auffallen." -</a:t>
             </a:r>
           </a:p>
           <a:p>
             <a:pPr>
               <a:spcBef>
-                <a:spcPts val="400"/>
+                <a:spcPts val="500"/>
               </a:spcBef>
             </a:pPr>
             <a:r>
@@ -8690,123 +11952,22 @@
               <a:t>▪  </a:t>
             </a:r>
             <a:r>
+              <a:rPr sz="1700" b="1">
+                <a:solidFill>
+                  <a:srgbClr val="003DA5"/>
+                </a:solidFill>
+                <a:latin typeface="Arial"/>
+              </a:rPr>
+              <a:t>Produktiven Widerspruch: </a:t>
+            </a:r>
+            <a:r>
               <a:rPr sz="1700">
                 <a:solidFill>
                   <a:srgbClr val="1A1A1A"/>
                 </a:solidFill>
                 <a:latin typeface="Arial"/>
               </a:rPr>
-              <a:t>„Welche Stakeholder (Mitarbeiter, Familie, Kunden, Bank) haben ein Interesse an einer Nachfolge – und wo könnte es Konflikte geben?"</a:t>
-            </a:r>
-          </a:p>
-          <a:p>
-            <a:pPr>
-              <a:spcBef>
-                <a:spcPts val="400"/>
-              </a:spcBef>
-            </a:pPr>
-            <a:r>
-              <a:rPr sz="1500">
-                <a:solidFill>
-                  <a:srgbClr val="003DA5"/>
-                </a:solidFill>
-                <a:latin typeface="Arial"/>
-              </a:rPr>
-              <a:t>▪  </a:t>
-            </a:r>
-            <a:r>
-              <a:rPr sz="1700">
-                <a:solidFill>
-                  <a:srgbClr val="1A1A1A"/>
-                </a:solidFill>
-                <a:latin typeface="Arial"/>
-              </a:rPr>
-              <a:t>„Wie würde Ihr ältester Sohn die aktuelle Situation beschreiben – denken Sie?"</a:t>
-            </a:r>
-          </a:p>
-          <a:p>
-            <a:pPr>
-              <a:spcBef>
-                <a:spcPts val="400"/>
-              </a:spcBef>
-            </a:pPr>
-            <a:r>
-              <a:rPr sz="1500">
-                <a:solidFill>
-                  <a:srgbClr val="003DA5"/>
-                </a:solidFill>
-                <a:latin typeface="Arial"/>
-              </a:rPr>
-              <a:t>▪  </a:t>
-            </a:r>
-            <a:r>
-              <a:rPr sz="1700">
-                <a:solidFill>
-                  <a:srgbClr val="1A1A1A"/>
-                </a:solidFill>
-                <a:latin typeface="Arial"/>
-              </a:rPr>
-              <a:t>„Was würde Ihr engster Mitarbeiter sagen, wenn ich ihn fragen würde, ob er eine Übergabe an Ihren Sohn für sinnvoll hält?"</a:t>
-            </a:r>
-          </a:p>
-          <a:p>
-            <a:pPr>
-              <a:spcBef>
-                <a:spcPts val="400"/>
-              </a:spcBef>
-            </a:pPr>
-            <a:r>
-              <a:rPr sz="1500">
-                <a:solidFill>
-                  <a:srgbClr val="003DA5"/>
-                </a:solidFill>
-                <a:latin typeface="Arial"/>
-              </a:rPr>
-              <a:t>▪  </a:t>
-            </a:r>
-            <a:r>
-              <a:rPr sz="1700">
-                <a:solidFill>
-                  <a:srgbClr val="1A1A1A"/>
-                </a:solidFill>
-                <a:latin typeface="Arial"/>
-              </a:rPr>
-              <a:t>„Wenn wir in fünf Jahren hier säßen und Sie hätten die Nachfolge geregelt: Wie hätte Ihr Ehepartner den Prozess erlebt?"</a:t>
-            </a:r>
-          </a:p>
-        </p:txBody>
-      </p:sp>
-      <p:sp>
-        <p:nvSpPr>
-          <p:cNvPr id="6" name="TextBox 5"/>
-          <p:cNvSpPr txBox="1"/>
-          <p:nvPr/>
-        </p:nvSpPr>
-        <p:spPr>
-          <a:xfrm>
-            <a:off x="11704320" y="6492240"/>
-            <a:ext cx="365760" cy="274320"/>
-          </a:xfrm>
-          <a:prstGeom prst="rect">
-            <a:avLst/>
-          </a:prstGeom>
-          <a:noFill/>
-        </p:spPr>
-        <p:txBody>
-          <a:bodyPr wrap="square">
-            <a:spAutoFit/>
-          </a:bodyPr>
-          <a:lstStyle/>
-          <a:p>
-            <a:pPr algn="r"/>
-            <a:r>
-              <a:rPr sz="1000" b="0">
-                <a:solidFill>
-                  <a:srgbClr val="6B7280"/>
-                </a:solidFill>
-                <a:latin typeface="Arial"/>
-              </a:rPr>
-              <a:t>4</a:t>
+              <a:t>anbringen, wenn nötig: „Das ergibt für mich weniger Sinn, weil … Was denken Sie dazu?"</a:t>
             </a:r>
           </a:p>
         </p:txBody>
@@ -8888,8 +12049,8 @@
         </p:nvSpPr>
         <p:spPr>
           <a:xfrm>
-            <a:off x="365760" y="274320"/>
-            <a:ext cx="11430000" cy="822960"/>
+            <a:off x="228600" y="182880"/>
+            <a:ext cx="11430000" cy="320040"/>
           </a:xfrm>
           <a:prstGeom prst="rect">
             <a:avLst/>
@@ -8904,33 +12065,68 @@
           <a:p>
             <a:pPr algn="l"/>
             <a:r>
-              <a:rPr sz="2200" b="1">
+              <a:rPr sz="900" b="0" i="0">
+                <a:solidFill>
+                  <a:srgbClr val="556575"/>
+                </a:solidFill>
+                <a:latin typeface="Arial"/>
+              </a:rPr>
+              <a:t>M12 · Modulinhalte</a:t>
+            </a:r>
+          </a:p>
+        </p:txBody>
+      </p:sp>
+      <p:sp>
+        <p:nvSpPr>
+          <p:cNvPr id="4" name="TextBox 3"/>
+          <p:cNvSpPr txBox="1"/>
+          <p:nvPr/>
+        </p:nvSpPr>
+        <p:spPr>
+          <a:xfrm>
+            <a:off x="365760" y="274320"/>
+            <a:ext cx="11430000" cy="777240"/>
+          </a:xfrm>
+          <a:prstGeom prst="rect">
+            <a:avLst/>
+          </a:prstGeom>
+          <a:noFill/>
+        </p:spPr>
+        <p:txBody>
+          <a:bodyPr wrap="square">
+            <a:spAutoFit/>
+          </a:bodyPr>
+          <a:lstStyle/>
+          <a:p>
+            <a:pPr algn="l"/>
+            <a:r>
+              <a:rPr sz="2200" b="1" i="0">
                 <a:solidFill>
                   <a:srgbClr val="003DA5"/>
                 </a:solidFill>
                 <a:latin typeface="Arial"/>
               </a:rPr>
-              <a:t>Lösungsorientierte Zukunftsfragen (de Shazer, 1985)</a:t>
-            </a:r>
-          </a:p>
-        </p:txBody>
-      </p:sp>
-      <p:sp>
-        <p:nvSpPr>
-          <p:cNvPr id="4" name="Rectangle 3"/>
+              <a:t>Vorbereitungs-Checkliste für den CEO-Dialog</a:t>
+            </a:r>
+          </a:p>
+        </p:txBody>
+      </p:sp>
+      <p:sp>
+        <p:nvSpPr>
+          <p:cNvPr id="5" name="Rectangle 4"/>
           <p:cNvSpPr/>
           <p:nvPr/>
         </p:nvSpPr>
         <p:spPr>
           <a:xfrm>
-            <a:off x="365760" y="1051560"/>
+            <a:off x="365760" y="1005840"/>
             <a:ext cx="11430000" cy="27432"/>
           </a:xfrm>
           <a:prstGeom prst="rect">
             <a:avLst/>
           </a:prstGeom>
           <a:solidFill>
-            <a:srgbClr val="E5E7EB"/>
+            <a:srgbClr val="D1D5DB"/>
           </a:solidFill>
           <a:ln>
             <a:noFill/>
@@ -8958,114 +12154,441 @@
           </a:p>
         </p:txBody>
       </p:sp>
-      <p:sp>
-        <p:nvSpPr>
-          <p:cNvPr id="5" name="TextBox 4"/>
-          <p:cNvSpPr txBox="1"/>
-          <p:nvPr/>
-        </p:nvSpPr>
-        <p:spPr>
-          <a:xfrm>
-            <a:off x="365760" y="1234440"/>
-            <a:ext cx="11430000" cy="5212080"/>
-          </a:xfrm>
-          <a:prstGeom prst="rect">
-            <a:avLst/>
-          </a:prstGeom>
-          <a:noFill/>
-        </p:spPr>
-        <p:txBody>
-          <a:bodyPr wrap="square">
-            <a:spAutoFit/>
-          </a:bodyPr>
-          <a:lstStyle/>
-          <a:p>
-            <a:pPr>
-              <a:spcBef>
-                <a:spcPts val="400"/>
-              </a:spcBef>
-            </a:pPr>
-            <a:r>
-              <a:rPr sz="1500">
-                <a:solidFill>
-                  <a:srgbClr val="003DA5"/>
-                </a:solidFill>
-                <a:latin typeface="Arial"/>
-              </a:rPr>
-              <a:t>▪  </a:t>
-            </a:r>
-            <a:r>
-              <a:rPr sz="1700">
-                <a:solidFill>
-                  <a:srgbClr val="1A1A1A"/>
-                </a:solidFill>
-                <a:latin typeface="Arial"/>
-              </a:rPr>
-              <a:t>Wunder-Frage: „Angenommen, über Nacht geschähe ein Wunder und Ihre Nachfolge wäre perfekt gelöst – wie würde das konkret aussehen? Was wäre anders?"</a:t>
-            </a:r>
-          </a:p>
-          <a:p>
-            <a:pPr>
-              <a:spcBef>
-                <a:spcPts val="400"/>
-              </a:spcBef>
-            </a:pPr>
-            <a:r>
-              <a:rPr sz="1500">
-                <a:solidFill>
-                  <a:srgbClr val="003DA5"/>
-                </a:solidFill>
-                <a:latin typeface="Arial"/>
-              </a:rPr>
-              <a:t>▪  </a:t>
-            </a:r>
-            <a:r>
-              <a:rPr sz="1700">
-                <a:solidFill>
-                  <a:srgbClr val="1A1A1A"/>
-                </a:solidFill>
-                <a:latin typeface="Arial"/>
-              </a:rPr>
-              <a:t>Rückblick-Frage: „Stellen Sie sich vor, Sie sind 75 Jahre alt und blicken zurück: Was müsste jetzt passiert sein, damit Sie mit Ihrer Entscheidung zur Nachfolge zufrieden sind?"</a:t>
-            </a:r>
-          </a:p>
-        </p:txBody>
-      </p:sp>
-      <p:sp>
-        <p:nvSpPr>
-          <p:cNvPr id="6" name="TextBox 5"/>
-          <p:cNvSpPr txBox="1"/>
-          <p:nvPr/>
-        </p:nvSpPr>
-        <p:spPr>
-          <a:xfrm>
-            <a:off x="11704320" y="6492240"/>
-            <a:ext cx="365760" cy="274320"/>
-          </a:xfrm>
-          <a:prstGeom prst="rect">
-            <a:avLst/>
-          </a:prstGeom>
-          <a:noFill/>
-        </p:spPr>
-        <p:txBody>
-          <a:bodyPr wrap="square">
-            <a:spAutoFit/>
-          </a:bodyPr>
-          <a:lstStyle/>
-          <a:p>
-            <a:pPr algn="r"/>
-            <a:r>
-              <a:rPr sz="1000" b="0">
-                <a:solidFill>
-                  <a:srgbClr val="6B7280"/>
-                </a:solidFill>
-                <a:latin typeface="Arial"/>
-              </a:rPr>
-              <a:t>5</a:t>
-            </a:r>
-          </a:p>
-        </p:txBody>
-      </p:sp>
+      <p:graphicFrame>
+        <p:nvGraphicFramePr>
+          <p:cNvPr id="6" name="Table 5"/>
+          <p:cNvGraphicFramePr>
+            <a:graphicFrameLocks noGrp="1"/>
+          </p:cNvGraphicFramePr>
+          <p:nvPr/>
+        </p:nvGraphicFramePr>
+        <p:xfrm>
+          <a:off x="365760" y="1143000"/>
+          <a:ext cx="11430000" cy="2852928"/>
+        </p:xfrm>
+        <a:graphic>
+          <a:graphicData uri="http://schemas.openxmlformats.org/drawingml/2006/table">
+            <a:tbl>
+              <a:tblPr firstRow="1" bandRow="1">
+                <a:tableStyleId>{5C22544A-7EE6-4342-B048-85BDC9FD1C3A}</a:tableStyleId>
+              </a:tblPr>
+              <a:tblGrid>
+                <a:gridCol w="3810000"/>
+                <a:gridCol w="3810000"/>
+                <a:gridCol w="3810000"/>
+              </a:tblGrid>
+              <a:tr h="475488">
+                <a:tc>
+                  <a:txBody>
+                    <a:bodyPr wrap="square"/>
+                    <a:lstStyle/>
+                    <a:p>
+                      <a:r>
+                        <a:rPr sz="1100" b="1">
+                          <a:solidFill>
+                            <a:srgbClr val="FFFFFF"/>
+                          </a:solidFill>
+                          <a:latin typeface="Arial"/>
+                        </a:rPr>
+                        <a:t>Dimension</a:t>
+                      </a:r>
+                    </a:p>
+                  </a:txBody>
+                  <a:tcPr>
+                    <a:solidFill>
+                      <a:srgbClr val="003DA5"/>
+                    </a:solidFill>
+                  </a:tcPr>
+                </a:tc>
+                <a:tc>
+                  <a:txBody>
+                    <a:bodyPr wrap="square"/>
+                    <a:lstStyle/>
+                    <a:p>
+                      <a:r>
+                        <a:rPr sz="1100" b="1">
+                          <a:solidFill>
+                            <a:srgbClr val="FFFFFF"/>
+                          </a:solidFill>
+                          <a:latin typeface="Arial"/>
+                        </a:rPr>
+                        <a:t>Informationsquellen</a:t>
+                      </a:r>
+                    </a:p>
+                  </a:txBody>
+                  <a:tcPr>
+                    <a:solidFill>
+                      <a:srgbClr val="003DA5"/>
+                    </a:solidFill>
+                  </a:tcPr>
+                </a:tc>
+                <a:tc>
+                  <a:txBody>
+                    <a:bodyPr wrap="square"/>
+                    <a:lstStyle/>
+                    <a:p>
+                      <a:r>
+                        <a:rPr sz="1100" b="1">
+                          <a:solidFill>
+                            <a:srgbClr val="FFFFFF"/>
+                          </a:solidFill>
+                          <a:latin typeface="Arial"/>
+                        </a:rPr>
+                        <a:t>Leitfragen</a:t>
+                      </a:r>
+                    </a:p>
+                  </a:txBody>
+                  <a:tcPr>
+                    <a:solidFill>
+                      <a:srgbClr val="003DA5"/>
+                    </a:solidFill>
+                  </a:tcPr>
+                </a:tc>
+              </a:tr>
+              <a:tr h="475488">
+                <a:tc>
+                  <a:txBody>
+                    <a:bodyPr wrap="square"/>
+                    <a:lstStyle/>
+                    <a:p>
+                      <a:r>
+                        <a:rPr sz="1100" b="0">
+                          <a:solidFill>
+                            <a:srgbClr val="1A1A1A"/>
+                          </a:solidFill>
+                          <a:latin typeface="Arial"/>
+                        </a:rPr>
+                        <a:t>Unternehmerdaten</a:t>
+                      </a:r>
+                    </a:p>
+                  </a:txBody>
+                  <a:tcPr>
+                    <a:solidFill>
+                      <a:srgbClr val="FFFFFF"/>
+                    </a:solidFill>
+                  </a:tcPr>
+                </a:tc>
+                <a:tc>
+                  <a:txBody>
+                    <a:bodyPr wrap="square"/>
+                    <a:lstStyle/>
+                    <a:p>
+                      <a:r>
+                        <a:rPr sz="1100" b="0">
+                          <a:solidFill>
+                            <a:srgbClr val="1A1A1A"/>
+                          </a:solidFill>
+                          <a:latin typeface="Arial"/>
+                        </a:rPr>
+                        <a:t>agree-Kundenstamm, Jahresgespräch-Notizen</a:t>
+                      </a:r>
+                    </a:p>
+                  </a:txBody>
+                  <a:tcPr>
+                    <a:solidFill>
+                      <a:srgbClr val="FFFFFF"/>
+                    </a:solidFill>
+                  </a:tcPr>
+                </a:tc>
+                <a:tc>
+                  <a:txBody>
+                    <a:bodyPr wrap="square"/>
+                    <a:lstStyle/>
+                    <a:p>
+                      <a:r>
+                        <a:rPr sz="1100" b="0">
+                          <a:solidFill>
+                            <a:srgbClr val="1A1A1A"/>
+                          </a:solidFill>
+                          <a:latin typeface="Arial"/>
+                        </a:rPr>
+                        <a:t>Alter, Gründungsjahr, aktuelle Lebenssituation</a:t>
+                      </a:r>
+                    </a:p>
+                  </a:txBody>
+                  <a:tcPr>
+                    <a:solidFill>
+                      <a:srgbClr val="FFFFFF"/>
+                    </a:solidFill>
+                  </a:tcPr>
+                </a:tc>
+              </a:tr>
+              <a:tr h="475488">
+                <a:tc>
+                  <a:txBody>
+                    <a:bodyPr wrap="square"/>
+                    <a:lstStyle/>
+                    <a:p>
+                      <a:r>
+                        <a:rPr sz="1100" b="0">
+                          <a:solidFill>
+                            <a:srgbClr val="1A1A1A"/>
+                          </a:solidFill>
+                          <a:latin typeface="Arial"/>
+                        </a:rPr>
+                        <a:t>Unternehmensdaten</a:t>
+                      </a:r>
+                    </a:p>
+                  </a:txBody>
+                  <a:tcPr>
+                    <a:solidFill>
+                      <a:srgbClr val="F4F6FA"/>
+                    </a:solidFill>
+                  </a:tcPr>
+                </a:tc>
+                <a:tc>
+                  <a:txBody>
+                    <a:bodyPr wrap="square"/>
+                    <a:lstStyle/>
+                    <a:p>
+                      <a:r>
+                        <a:rPr sz="1100" b="0">
+                          <a:solidFill>
+                            <a:srgbClr val="1A1A1A"/>
+                          </a:solidFill>
+                          <a:latin typeface="Arial"/>
+                        </a:rPr>
+                        <a:t>Jahresabschluss, BWA</a:t>
+                      </a:r>
+                    </a:p>
+                  </a:txBody>
+                  <a:tcPr>
+                    <a:solidFill>
+                      <a:srgbClr val="F4F6FA"/>
+                    </a:solidFill>
+                  </a:tcPr>
+                </a:tc>
+                <a:tc>
+                  <a:txBody>
+                    <a:bodyPr wrap="square"/>
+                    <a:lstStyle/>
+                    <a:p>
+                      <a:r>
+                        <a:rPr sz="1100" b="0">
+                          <a:solidFill>
+                            <a:srgbClr val="1A1A1A"/>
+                          </a:solidFill>
+                          <a:latin typeface="Arial"/>
+                        </a:rPr>
+                        <a:t>Umsatz, Marge, Mitarbeiterzahl, Branchentrend</a:t>
+                      </a:r>
+                    </a:p>
+                  </a:txBody>
+                  <a:tcPr>
+                    <a:solidFill>
+                      <a:srgbClr val="F4F6FA"/>
+                    </a:solidFill>
+                  </a:tcPr>
+                </a:tc>
+              </a:tr>
+              <a:tr h="475488">
+                <a:tc>
+                  <a:txBody>
+                    <a:bodyPr wrap="square"/>
+                    <a:lstStyle/>
+                    <a:p>
+                      <a:r>
+                        <a:rPr sz="1100" b="0">
+                          <a:solidFill>
+                            <a:srgbClr val="1A1A1A"/>
+                          </a:solidFill>
+                          <a:latin typeface="Arial"/>
+                        </a:rPr>
+                        <a:t>Familie / Potenzielle Nachfolger</a:t>
+                      </a:r>
+                    </a:p>
+                  </a:txBody>
+                  <a:tcPr>
+                    <a:solidFill>
+                      <a:srgbClr val="FFFFFF"/>
+                    </a:solidFill>
+                  </a:tcPr>
+                </a:tc>
+                <a:tc>
+                  <a:txBody>
+                    <a:bodyPr wrap="square"/>
+                    <a:lstStyle/>
+                    <a:p>
+                      <a:r>
+                        <a:rPr sz="1100" b="0">
+                          <a:solidFill>
+                            <a:srgbClr val="1A1A1A"/>
+                          </a:solidFill>
+                          <a:latin typeface="Arial"/>
+                        </a:rPr>
+                        <a:t>Gesprächsnotizen</a:t>
+                      </a:r>
+                    </a:p>
+                  </a:txBody>
+                  <a:tcPr>
+                    <a:solidFill>
+                      <a:srgbClr val="FFFFFF"/>
+                    </a:solidFill>
+                  </a:tcPr>
+                </a:tc>
+                <a:tc>
+                  <a:txBody>
+                    <a:bodyPr wrap="square"/>
+                    <a:lstStyle/>
+                    <a:p>
+                      <a:r>
+                        <a:rPr sz="1100" b="0">
+                          <a:solidFill>
+                            <a:srgbClr val="1A1A1A"/>
+                          </a:solidFill>
+                          <a:latin typeface="Arial"/>
+                        </a:rPr>
+                        <a:t>Namen, Alter, Ausbildung, bisheriges Interesse am Unternehmen</a:t>
+                      </a:r>
+                    </a:p>
+                  </a:txBody>
+                  <a:tcPr>
+                    <a:solidFill>
+                      <a:srgbClr val="FFFFFF"/>
+                    </a:solidFill>
+                  </a:tcPr>
+                </a:tc>
+              </a:tr>
+              <a:tr h="475488">
+                <a:tc>
+                  <a:txBody>
+                    <a:bodyPr wrap="square"/>
+                    <a:lstStyle/>
+                    <a:p>
+                      <a:r>
+                        <a:rPr sz="1100" b="0">
+                          <a:solidFill>
+                            <a:srgbClr val="1A1A1A"/>
+                          </a:solidFill>
+                          <a:latin typeface="Arial"/>
+                        </a:rPr>
+                        <a:t>Frühere Äußerungen</a:t>
+                      </a:r>
+                    </a:p>
+                  </a:txBody>
+                  <a:tcPr>
+                    <a:solidFill>
+                      <a:srgbClr val="F4F6FA"/>
+                    </a:solidFill>
+                  </a:tcPr>
+                </a:tc>
+                <a:tc>
+                  <a:txBody>
+                    <a:bodyPr wrap="square"/>
+                    <a:lstStyle/>
+                    <a:p>
+                      <a:r>
+                        <a:rPr sz="1100" b="0">
+                          <a:solidFill>
+                            <a:srgbClr val="1A1A1A"/>
+                          </a:solidFill>
+                          <a:latin typeface="Arial"/>
+                        </a:rPr>
+                        <a:t>Jahresgespräch-Protokolle (agree/VR-NetWorld) – primäre Quelle, CRM-Notizen</a:t>
+                      </a:r>
+                    </a:p>
+                  </a:txBody>
+                  <a:tcPr>
+                    <a:solidFill>
+                      <a:srgbClr val="F4F6FA"/>
+                    </a:solidFill>
+                  </a:tcPr>
+                </a:tc>
+                <a:tc>
+                  <a:txBody>
+                    <a:bodyPr wrap="square"/>
+                    <a:lstStyle/>
+                    <a:p>
+                      <a:r>
+                        <a:rPr sz="1100" b="0">
+                          <a:solidFill>
+                            <a:srgbClr val="1A1A1A"/>
+                          </a:solidFill>
+                          <a:latin typeface="Arial"/>
+                        </a:rPr>
+                        <a:t>Hat der Unternehmer schon mal Nachfolge erwähnt? Hinweise auf Gesundheit, Familienkonflikte, Planungsmüdigkeit? Gibt es eine Gesprächshistorie vom Vorgänger-Berater mit relevanten Informationen?</a:t>
+                      </a:r>
+                    </a:p>
+                  </a:txBody>
+                  <a:tcPr>
+                    <a:solidFill>
+                      <a:srgbClr val="F4F6FA"/>
+                    </a:solidFill>
+                  </a:tcPr>
+                </a:tc>
+              </a:tr>
+              <a:tr h="475488">
+                <a:tc>
+                  <a:txBody>
+                    <a:bodyPr wrap="square"/>
+                    <a:lstStyle/>
+                    <a:p>
+                      <a:r>
+                        <a:rPr sz="1100" b="0">
+                          <a:solidFill>
+                            <a:srgbClr val="1A1A1A"/>
+                          </a:solidFill>
+                          <a:latin typeface="Arial"/>
+                        </a:rPr>
+                        <a:t>Emotionales Register</a:t>
+                      </a:r>
+                    </a:p>
+                  </a:txBody>
+                  <a:tcPr>
+                    <a:solidFill>
+                      <a:srgbClr val="FFFFFF"/>
+                    </a:solidFill>
+                  </a:tcPr>
+                </a:tc>
+                <a:tc>
+                  <a:txBody>
+                    <a:bodyPr wrap="square"/>
+                    <a:lstStyle/>
+                    <a:p>
+                      <a:r>
+                        <a:rPr sz="1100" b="0">
+                          <a:solidFill>
+                            <a:srgbClr val="1A1A1A"/>
+                          </a:solidFill>
+                          <a:latin typeface="Arial"/>
+                        </a:rPr>
+                        <a:t>Persönliche Wahrnehmung</a:t>
+                      </a:r>
+                    </a:p>
+                  </a:txBody>
+                  <a:tcPr>
+                    <a:solidFill>
+                      <a:srgbClr val="FFFFFF"/>
+                    </a:solidFill>
+                  </a:tcPr>
+                </a:tc>
+                <a:tc>
+                  <a:txBody>
+                    <a:bodyPr wrap="square"/>
+                    <a:lstStyle/>
+                    <a:p>
+                      <a:r>
+                        <a:rPr sz="1100" b="0">
+                          <a:solidFill>
+                            <a:srgbClr val="1A1A1A"/>
+                          </a:solidFill>
+                          <a:latin typeface="Arial"/>
+                        </a:rPr>
+                        <a:t>Wirkt er gestresst, müde, euphorisch? Wie verändert das die Gesprächsführung?</a:t>
+                      </a:r>
+                    </a:p>
+                  </a:txBody>
+                  <a:tcPr>
+                    <a:solidFill>
+                      <a:srgbClr val="FFFFFF"/>
+                    </a:solidFill>
+                  </a:tcPr>
+                </a:tc>
+              </a:tr>
+            </a:tbl>
+          </a:graphicData>
+        </a:graphic>
+      </p:graphicFrame>
     </p:spTree>
   </p:cSld>
   <p:clrMapOvr>
@@ -9080,7 +12603,7 @@
     <p:bg>
       <p:bgPr>
         <a:solidFill>
-          <a:srgbClr val="FFFFFF"/>
+          <a:srgbClr val="1A1A1A"/>
         </a:solidFill>
         <a:effectLst/>
       </p:bgPr>
@@ -9107,7 +12630,7 @@
             <a:avLst/>
           </a:prstGeom>
           <a:solidFill>
-            <a:srgbClr val="003DA5"/>
+            <a:srgbClr val="E05B00"/>
           </a:solidFill>
           <a:ln>
             <a:noFill/>
@@ -9143,8 +12666,8 @@
         </p:nvSpPr>
         <p:spPr>
           <a:xfrm>
-            <a:off x="365760" y="274320"/>
-            <a:ext cx="11430000" cy="822960"/>
+            <a:off x="365760" y="2011680"/>
+            <a:ext cx="11430000" cy="2011680"/>
           </a:xfrm>
           <a:prstGeom prst="rect">
             <a:avLst/>
@@ -9159,189 +12682,13 @@
           <a:p>
             <a:pPr algn="l"/>
             <a:r>
-              <a:rPr sz="2200" b="1">
-                <a:solidFill>
-                  <a:srgbClr val="003DA5"/>
-                </a:solidFill>
-                <a:latin typeface="Arial"/>
-              </a:rPr>
-              <a:t>Haltung: Echte Neugier statt versteckter Agenda</a:t>
-            </a:r>
-          </a:p>
-        </p:txBody>
-      </p:sp>
-      <p:sp>
-        <p:nvSpPr>
-          <p:cNvPr id="4" name="Rectangle 3"/>
-          <p:cNvSpPr/>
-          <p:nvPr/>
-        </p:nvSpPr>
-        <p:spPr>
-          <a:xfrm>
-            <a:off x="365760" y="1051560"/>
-            <a:ext cx="11430000" cy="27432"/>
-          </a:xfrm>
-          <a:prstGeom prst="rect">
-            <a:avLst/>
-          </a:prstGeom>
-          <a:solidFill>
-            <a:srgbClr val="E5E7EB"/>
-          </a:solidFill>
-          <a:ln>
-            <a:noFill/>
-          </a:ln>
-        </p:spPr>
-        <p:style>
-          <a:lnRef idx="1">
-            <a:schemeClr val="accent1"/>
-          </a:lnRef>
-          <a:fillRef idx="3">
-            <a:schemeClr val="accent1"/>
-          </a:fillRef>
-          <a:effectRef idx="2">
-            <a:schemeClr val="accent1"/>
-          </a:effectRef>
-          <a:fontRef idx="minor">
-            <a:schemeClr val="lt1"/>
-          </a:fontRef>
-        </p:style>
-        <p:txBody>
-          <a:bodyPr rtlCol="0" anchor="ctr"/>
-          <a:lstStyle/>
-          <a:p>
-            <a:pPr algn="ctr"/>
-          </a:p>
-        </p:txBody>
-      </p:sp>
-      <p:sp>
-        <p:nvSpPr>
-          <p:cNvPr id="5" name="TextBox 4"/>
-          <p:cNvSpPr txBox="1"/>
-          <p:nvPr/>
-        </p:nvSpPr>
-        <p:spPr>
-          <a:xfrm>
-            <a:off x="365760" y="1234440"/>
-            <a:ext cx="11430000" cy="5212080"/>
-          </a:xfrm>
-          <a:prstGeom prst="rect">
-            <a:avLst/>
-          </a:prstGeom>
-          <a:noFill/>
-        </p:spPr>
-        <p:txBody>
-          <a:bodyPr wrap="square">
-            <a:spAutoFit/>
-          </a:bodyPr>
-          <a:lstStyle/>
-          <a:p>
-            <a:pPr>
-              <a:spcBef>
-                <a:spcPts val="400"/>
-              </a:spcBef>
-            </a:pPr>
-            <a:r>
-              <a:rPr sz="1500">
-                <a:solidFill>
-                  <a:srgbClr val="003DA5"/>
-                </a:solidFill>
-                <a:latin typeface="Arial"/>
-              </a:rPr>
-              <a:t>▪  </a:t>
-            </a:r>
-            <a:r>
-              <a:rPr sz="1700">
-                <a:solidFill>
-                  <a:srgbClr val="1A1A1A"/>
-                </a:solidFill>
-                <a:latin typeface="Arial"/>
-              </a:rPr>
-              <a:t>Fragen offen stellen, nicht suggestiv</a:t>
-            </a:r>
-          </a:p>
-          <a:p>
-            <a:pPr>
-              <a:spcBef>
-                <a:spcPts val="400"/>
-              </a:spcBef>
-            </a:pPr>
-            <a:r>
-              <a:rPr sz="1500">
-                <a:solidFill>
-                  <a:srgbClr val="003DA5"/>
-                </a:solidFill>
-                <a:latin typeface="Arial"/>
-              </a:rPr>
-              <a:t>▪  </a:t>
-            </a:r>
-            <a:r>
-              <a:rPr sz="1700">
-                <a:solidFill>
-                  <a:srgbClr val="1A1A1A"/>
-                </a:solidFill>
-                <a:latin typeface="Arial"/>
-              </a:rPr>
-              <a:t>Die Antwort wirklich hören, nicht bereits das nächste Ziel-Frame vorbereiten</a:t>
-            </a:r>
-          </a:p>
-          <a:p>
-            <a:pPr>
-              <a:spcBef>
-                <a:spcPts val="400"/>
-              </a:spcBef>
-            </a:pPr>
-            <a:r>
-              <a:rPr sz="1500">
-                <a:solidFill>
-                  <a:srgbClr val="003DA5"/>
-                </a:solidFill>
-                <a:latin typeface="Arial"/>
-              </a:rPr>
-              <a:t>▪  </a:t>
-            </a:r>
-            <a:r>
-              <a:rPr sz="1700">
-                <a:solidFill>
-                  <a:srgbClr val="1A1A1A"/>
-                </a:solidFill>
-                <a:latin typeface="Arial"/>
-              </a:rPr>
-              <a:t>Nachfragen zeigen: „Ich bin daran wirklich interessiert, nicht nur an der Diagnose"</a:t>
-            </a:r>
-          </a:p>
-        </p:txBody>
-      </p:sp>
-      <p:sp>
-        <p:nvSpPr>
-          <p:cNvPr id="6" name="TextBox 5"/>
-          <p:cNvSpPr txBox="1"/>
-          <p:nvPr/>
-        </p:nvSpPr>
-        <p:spPr>
-          <a:xfrm>
-            <a:off x="11704320" y="6492240"/>
-            <a:ext cx="365760" cy="274320"/>
-          </a:xfrm>
-          <a:prstGeom prst="rect">
-            <a:avLst/>
-          </a:prstGeom>
-          <a:noFill/>
-        </p:spPr>
-        <p:txBody>
-          <a:bodyPr wrap="square">
-            <a:spAutoFit/>
-          </a:bodyPr>
-          <a:lstStyle/>
-          <a:p>
-            <a:pPr algn="r"/>
-            <a:r>
-              <a:rPr sz="1000" b="0">
-                <a:solidFill>
-                  <a:srgbClr val="6B7280"/>
-                </a:solidFill>
-                <a:latin typeface="Arial"/>
-              </a:rPr>
-              <a:t>6</a:t>
+              <a:rPr sz="3600" b="1" i="0">
+                <a:solidFill>
+                  <a:srgbClr val="FFFFFF"/>
+                </a:solidFill>
+                <a:latin typeface="Arial"/>
+              </a:rPr>
+              <a:t>4.2 Theorie-Input: Fragetechniken auf Strategieebene</a:t>
             </a:r>
           </a:p>
         </p:txBody>
@@ -9423,8 +12770,8 @@
         </p:nvSpPr>
         <p:spPr>
           <a:xfrm>
-            <a:off x="365760" y="274320"/>
-            <a:ext cx="11430000" cy="822960"/>
+            <a:off x="228600" y="182880"/>
+            <a:ext cx="11430000" cy="320040"/>
           </a:xfrm>
           <a:prstGeom prst="rect">
             <a:avLst/>
@@ -9439,33 +12786,68 @@
           <a:p>
             <a:pPr algn="l"/>
             <a:r>
-              <a:rPr sz="2200" b="1">
+              <a:rPr sz="900" b="0" i="0">
+                <a:solidFill>
+                  <a:srgbClr val="556575"/>
+                </a:solidFill>
+                <a:latin typeface="Arial"/>
+              </a:rPr>
+              <a:t>M12 · Modulinhalte</a:t>
+            </a:r>
+          </a:p>
+        </p:txBody>
+      </p:sp>
+      <p:sp>
+        <p:nvSpPr>
+          <p:cNvPr id="4" name="TextBox 3"/>
+          <p:cNvSpPr txBox="1"/>
+          <p:nvPr/>
+        </p:nvSpPr>
+        <p:spPr>
+          <a:xfrm>
+            <a:off x="365760" y="274320"/>
+            <a:ext cx="11430000" cy="777240"/>
+          </a:xfrm>
+          <a:prstGeom prst="rect">
+            <a:avLst/>
+          </a:prstGeom>
+          <a:noFill/>
+        </p:spPr>
+        <p:txBody>
+          <a:bodyPr wrap="square">
+            <a:spAutoFit/>
+          </a:bodyPr>
+          <a:lstStyle/>
+          <a:p>
+            <a:pPr algn="l"/>
+            <a:r>
+              <a:rPr sz="2200" b="1" i="0">
                 <a:solidFill>
                   <a:srgbClr val="003DA5"/>
                 </a:solidFill>
                 <a:latin typeface="Arial"/>
               </a:rPr>
-              <a:t>Nachfolgeprozess – fünf Phasen</a:t>
-            </a:r>
-          </a:p>
-        </p:txBody>
-      </p:sp>
-      <p:sp>
-        <p:nvSpPr>
-          <p:cNvPr id="4" name="Rectangle 3"/>
+              <a:t>Systemische Fragen (jenseits von SPIN)</a:t>
+            </a:r>
+          </a:p>
+        </p:txBody>
+      </p:sp>
+      <p:sp>
+        <p:nvSpPr>
+          <p:cNvPr id="5" name="Rectangle 4"/>
           <p:cNvSpPr/>
           <p:nvPr/>
         </p:nvSpPr>
         <p:spPr>
           <a:xfrm>
-            <a:off x="365760" y="1051560"/>
+            <a:off x="365760" y="1005840"/>
             <a:ext cx="11430000" cy="27432"/>
           </a:xfrm>
           <a:prstGeom prst="rect">
             <a:avLst/>
           </a:prstGeom>
           <a:solidFill>
-            <a:srgbClr val="E5E7EB"/>
+            <a:srgbClr val="D1D5DB"/>
           </a:solidFill>
           <a:ln>
             <a:noFill/>
@@ -9495,14 +12877,57 @@
       </p:sp>
       <p:sp>
         <p:nvSpPr>
-          <p:cNvPr id="5" name="TextBox 4"/>
+          <p:cNvPr id="6" name="Rectangle 5"/>
+          <p:cNvSpPr/>
+          <p:nvPr/>
+        </p:nvSpPr>
+        <p:spPr>
+          <a:xfrm>
+            <a:off x="6217920" y="1188720"/>
+            <a:ext cx="27432" cy="5303520"/>
+          </a:xfrm>
+          <a:prstGeom prst="rect">
+            <a:avLst/>
+          </a:prstGeom>
+          <a:solidFill>
+            <a:srgbClr val="D1D5DB"/>
+          </a:solidFill>
+          <a:ln>
+            <a:noFill/>
+          </a:ln>
+        </p:spPr>
+        <p:style>
+          <a:lnRef idx="1">
+            <a:schemeClr val="accent1"/>
+          </a:lnRef>
+          <a:fillRef idx="3">
+            <a:schemeClr val="accent1"/>
+          </a:fillRef>
+          <a:effectRef idx="2">
+            <a:schemeClr val="accent1"/>
+          </a:effectRef>
+          <a:fontRef idx="minor">
+            <a:schemeClr val="lt1"/>
+          </a:fontRef>
+        </p:style>
+        <p:txBody>
+          <a:bodyPr rtlCol="0" anchor="ctr"/>
+          <a:lstStyle/>
+          <a:p>
+            <a:pPr algn="ctr"/>
+          </a:p>
+        </p:txBody>
+      </p:sp>
+      <p:sp>
+        <p:nvSpPr>
+          <p:cNvPr id="7" name="TextBox 6"/>
           <p:cNvSpPr txBox="1"/>
           <p:nvPr/>
         </p:nvSpPr>
         <p:spPr>
           <a:xfrm>
-            <a:off x="365760" y="1234440"/>
-            <a:ext cx="11430000" cy="5212080"/>
+            <a:off x="365760" y="1143000"/>
+            <a:ext cx="5669280" cy="5303520"/>
           </a:xfrm>
           <a:prstGeom prst="rect">
             <a:avLst/>
@@ -9517,11 +12942,11 @@
           <a:p>
             <a:pPr>
               <a:spcBef>
-                <a:spcPts val="400"/>
+                <a:spcPts val="500"/>
               </a:spcBef>
             </a:pPr>
             <a:r>
-              <a:rPr sz="1500">
+              <a:rPr sz="1400">
                 <a:solidFill>
                   <a:srgbClr val="003DA5"/>
                 </a:solidFill>
@@ -9530,27 +12955,77 @@
               <a:t>▪  </a:t>
             </a:r>
             <a:r>
-              <a:rPr sz="1700">
+              <a:rPr sz="1600">
                 <a:solidFill>
                   <a:srgbClr val="1A1A1A"/>
                 </a:solidFill>
                 <a:latin typeface="Arial"/>
               </a:rPr>
-              <a:t>Erfolgreiche Unternehmernachfolgen benötigen empirisch 3–7 Jahre Vorlaufzeit (IfM Bonn, 2016):</a:t>
-            </a:r>
-          </a:p>
-        </p:txBody>
-      </p:sp>
-      <p:sp>
-        <p:nvSpPr>
-          <p:cNvPr id="6" name="TextBox 5"/>
+              <a:t>Das SPIN-Modell (Rackham, 1988) eignet sich für Verkaufsgespräche, in denen ein Problem erkannt und gelöst wird. Nachfolge ist jedoch ein existenzielles Thema.…</a:t>
+            </a:r>
+          </a:p>
+          <a:p>
+            <a:pPr>
+              <a:spcBef>
+                <a:spcPts val="500"/>
+              </a:spcBef>
+            </a:pPr>
+            <a:r>
+              <a:rPr sz="1400">
+                <a:solidFill>
+                  <a:srgbClr val="003DA5"/>
+                </a:solidFill>
+                <a:latin typeface="Arial"/>
+              </a:rPr>
+              <a:t>▪  </a:t>
+            </a:r>
+            <a:r>
+              <a:rPr sz="1600">
+                <a:solidFill>
+                  <a:srgbClr val="1A1A1A"/>
+                </a:solidFill>
+                <a:latin typeface="Arial"/>
+              </a:rPr>
+              <a:t>Systemische Fragen machen die Vernetzung von Elementen sichtbar:</a:t>
+            </a:r>
+          </a:p>
+          <a:p>
+            <a:pPr>
+              <a:spcBef>
+                <a:spcPts val="500"/>
+              </a:spcBef>
+            </a:pPr>
+            <a:r>
+              <a:rPr sz="1400">
+                <a:solidFill>
+                  <a:srgbClr val="003DA5"/>
+                </a:solidFill>
+                <a:latin typeface="Arial"/>
+              </a:rPr>
+              <a:t>▪  </a:t>
+            </a:r>
+            <a:r>
+              <a:rPr sz="1600">
+                <a:solidFill>
+                  <a:srgbClr val="1A1A1A"/>
+                </a:solidFill>
+                <a:latin typeface="Arial"/>
+              </a:rPr>
+              <a:t>- „Wie hängt Ihre Nachfolgeplanung mit der Situation Ihrer Kinder zusammen?" - „Welche Rolle spielt Ihr Unternehmen in Ihrem Selbstverständnis – und was würde…</a:t>
+            </a:r>
+          </a:p>
+        </p:txBody>
+      </p:sp>
+      <p:sp>
+        <p:nvSpPr>
+          <p:cNvPr id="8" name="TextBox 7"/>
           <p:cNvSpPr txBox="1"/>
           <p:nvPr/>
         </p:nvSpPr>
         <p:spPr>
           <a:xfrm>
-            <a:off x="11704320" y="6492240"/>
-            <a:ext cx="365760" cy="274320"/>
+            <a:off x="6400800" y="1143000"/>
+            <a:ext cx="5486400" cy="5303520"/>
           </a:xfrm>
           <a:prstGeom prst="rect">
             <a:avLst/>
@@ -9563,15 +13038,78 @@
           </a:bodyPr>
           <a:lstStyle/>
           <a:p>
-            <a:pPr algn="r"/>
-            <a:r>
-              <a:rPr sz="1000" b="0">
-                <a:solidFill>
-                  <a:srgbClr val="6B7280"/>
-                </a:solidFill>
-                <a:latin typeface="Arial"/>
-              </a:rPr>
-              <a:t>7</a:t>
+            <a:pPr>
+              <a:spcBef>
+                <a:spcPts val="500"/>
+              </a:spcBef>
+            </a:pPr>
+            <a:r>
+              <a:rPr sz="1400">
+                <a:solidFill>
+                  <a:srgbClr val="003DA5"/>
+                </a:solidFill>
+                <a:latin typeface="Arial"/>
+              </a:rPr>
+              <a:t>▪  </a:t>
+            </a:r>
+            <a:r>
+              <a:rPr sz="1600">
+                <a:solidFill>
+                  <a:srgbClr val="1A1A1A"/>
+                </a:solidFill>
+                <a:latin typeface="Arial"/>
+              </a:rPr>
+              <a:t>Zirkuläre Fragen (Penn, 1982) erforschen, wie andere den Unternehmer und sein Dilemma wahrnehmen:</a:t>
+            </a:r>
+          </a:p>
+          <a:p>
+            <a:pPr>
+              <a:spcBef>
+                <a:spcPts val="500"/>
+              </a:spcBef>
+            </a:pPr>
+            <a:r>
+              <a:rPr sz="1400">
+                <a:solidFill>
+                  <a:srgbClr val="003DA5"/>
+                </a:solidFill>
+                <a:latin typeface="Arial"/>
+              </a:rPr>
+              <a:t>▪  </a:t>
+            </a:r>
+            <a:r>
+              <a:rPr sz="1600">
+                <a:solidFill>
+                  <a:srgbClr val="1A1A1A"/>
+                </a:solidFill>
+                <a:latin typeface="Arial"/>
+              </a:rPr>
+              <a:t>- „Wie würde Ihr ältester Sohn die aktuelle Situation beschreiben – denken Sie?" - „Was würde Ihr engster Mitarbeiter sagen, wenn ich ihn fragen würde, ob er…</a:t>
+            </a:r>
+          </a:p>
+          <a:p>
+            <a:pPr>
+              <a:spcBef>
+                <a:spcPts val="500"/>
+              </a:spcBef>
+            </a:pPr>
+            <a:r>
+              <a:rPr sz="1400">
+                <a:solidFill>
+                  <a:srgbClr val="003DA5"/>
+                </a:solidFill>
+                <a:latin typeface="Arial"/>
+              </a:rPr>
+              <a:t>▪  </a:t>
+            </a:r>
+            <a:r>
+              <a:rPr sz="1600">
+                <a:solidFill>
+                  <a:srgbClr val="1A1A1A"/>
+                </a:solidFill>
+                <a:latin typeface="Arial"/>
+              </a:rPr>
+              <a:t>Zirkuläre Fragen decken implizite Ängste und Blockaden auf, ohne direkt zu fragen: „Haben Sie Angst vor Kontrollverlust?"</a:t>
             </a:r>
           </a:p>
         </p:txBody>

--- a/public/downloads/praesentation/M12.pptx
+++ b/public/downloads/praesentation/M12.pptx
@@ -37,6 +37,7 @@
     <p:sldId id="285" r:id="rId36"/>
     <p:sldId id="286" r:id="rId37"/>
     <p:sldId id="287" r:id="rId38"/>
+    <p:sldId id="288" r:id="rId39"/>
   </p:sldIdLst>
   <p:sldSz cx="12191695" cy="6858000" type="screen4x3"/>
   <p:notesSz cx="6858000" cy="9144000"/>
@@ -4806,7 +4807,7 @@
                   </a:txBody>
                   <a:tcPr>
                     <a:solidFill>
-                      <a:srgbClr val="191D2E"/>
+                      <a:srgbClr val="1F2B56"/>
                     </a:solidFill>
                   </a:tcPr>
                 </a:tc>
@@ -4828,7 +4829,7 @@
                   </a:txBody>
                   <a:tcPr>
                     <a:solidFill>
-                      <a:srgbClr val="191D2E"/>
+                      <a:srgbClr val="1F2B56"/>
                     </a:solidFill>
                   </a:tcPr>
                 </a:tc>
@@ -4850,7 +4851,7 @@
                   </a:txBody>
                   <a:tcPr>
                     <a:solidFill>
-                      <a:srgbClr val="191D2E"/>
+                      <a:srgbClr val="1F2B56"/>
                     </a:solidFill>
                   </a:tcPr>
                 </a:tc>
@@ -4872,7 +4873,7 @@
                   </a:txBody>
                   <a:tcPr>
                     <a:solidFill>
-                      <a:srgbClr val="191D2E"/>
+                      <a:srgbClr val="1F2B56"/>
                     </a:solidFill>
                   </a:tcPr>
                 </a:tc>
@@ -7225,7 +7226,7 @@
                   </a:txBody>
                   <a:tcPr>
                     <a:solidFill>
-                      <a:srgbClr val="191D2E"/>
+                      <a:srgbClr val="1F2B56"/>
                     </a:solidFill>
                   </a:tcPr>
                 </a:tc>
@@ -7247,7 +7248,7 @@
                   </a:txBody>
                   <a:tcPr>
                     <a:solidFill>
-                      <a:srgbClr val="191D2E"/>
+                      <a:srgbClr val="1F2B56"/>
                     </a:solidFill>
                   </a:tcPr>
                 </a:tc>
@@ -11458,7 +11459,7 @@
         <p:spPr>
           <a:xfrm>
             <a:off x="4826000" y="2984500"/>
-            <a:ext cx="6731000" cy="3048000"/>
+            <a:ext cx="6731000" cy="3429000"/>
           </a:xfrm>
           <a:prstGeom prst="rect">
             <a:avLst/>
@@ -12031,29 +12032,29 @@
         </p:nvSpPr>
         <p:spPr>
           <a:xfrm>
-            <a:off x="4064000" y="927100"/>
-            <a:ext cx="508000" cy="647700"/>
-          </a:xfrm>
-          <a:prstGeom prst="rect">
-            <a:avLst/>
-          </a:prstGeom>
-          <a:noFill/>
-        </p:spPr>
-        <p:txBody>
-          <a:bodyPr wrap="square">
+            <a:off x="4064000" y="939799"/>
+            <a:ext cx="762000" cy="647700"/>
+          </a:xfrm>
+          <a:prstGeom prst="rect">
+            <a:avLst/>
+          </a:prstGeom>
+          <a:noFill/>
+        </p:spPr>
+        <p:txBody>
+          <a:bodyPr wrap="none">
             <a:normAutofit/>
           </a:bodyPr>
           <a:lstStyle/>
           <a:p>
             <a:pPr algn="l"/>
             <a:r>
-              <a:rPr sz="2600" b="0" i="1">
+              <a:rPr sz="2400" b="0" i="1">
                 <a:solidFill>
                   <a:srgbClr val="1F2B56"/>
                 </a:solidFill>
                 <a:latin typeface="Georgia"/>
               </a:rPr>
-              <a:t>I.</a:t>
+              <a:t>I</a:t>
             </a:r>
           </a:p>
         </p:txBody>
@@ -12066,8 +12067,8 @@
         </p:nvSpPr>
         <p:spPr>
           <a:xfrm>
-            <a:off x="4699000" y="952500"/>
-            <a:ext cx="6858000" cy="622300"/>
+            <a:off x="4953000" y="952500"/>
+            <a:ext cx="6629400" cy="635000"/>
           </a:xfrm>
           <a:prstGeom prst="rect">
             <a:avLst/>
@@ -12101,7 +12102,7 @@
         </p:nvSpPr>
         <p:spPr>
           <a:xfrm>
-            <a:off x="4064000" y="1574800"/>
+            <a:off x="4064000" y="1587500"/>
             <a:ext cx="7518399" cy="6350"/>
           </a:xfrm>
           <a:prstGeom prst="rect">
@@ -12144,29 +12145,29 @@
         </p:nvSpPr>
         <p:spPr>
           <a:xfrm>
-            <a:off x="4064000" y="1612900"/>
-            <a:ext cx="508000" cy="647700"/>
-          </a:xfrm>
-          <a:prstGeom prst="rect">
-            <a:avLst/>
-          </a:prstGeom>
-          <a:noFill/>
-        </p:spPr>
-        <p:txBody>
-          <a:bodyPr wrap="square">
+            <a:off x="4064000" y="1638300"/>
+            <a:ext cx="762000" cy="647700"/>
+          </a:xfrm>
+          <a:prstGeom prst="rect">
+            <a:avLst/>
+          </a:prstGeom>
+          <a:noFill/>
+        </p:spPr>
+        <p:txBody>
+          <a:bodyPr wrap="none">
             <a:normAutofit/>
           </a:bodyPr>
           <a:lstStyle/>
           <a:p>
             <a:pPr algn="l"/>
             <a:r>
-              <a:rPr sz="2600" b="0" i="1">
+              <a:rPr sz="2400" b="0" i="1">
                 <a:solidFill>
                   <a:srgbClr val="1F2B56"/>
                 </a:solidFill>
                 <a:latin typeface="Georgia"/>
               </a:rPr>
-              <a:t>II.</a:t>
+              <a:t>II</a:t>
             </a:r>
           </a:p>
         </p:txBody>
@@ -12179,8 +12180,8 @@
         </p:nvSpPr>
         <p:spPr>
           <a:xfrm>
-            <a:off x="4699000" y="1638300"/>
-            <a:ext cx="6858000" cy="622300"/>
+            <a:off x="4953000" y="1651000"/>
+            <a:ext cx="6629400" cy="635000"/>
           </a:xfrm>
           <a:prstGeom prst="rect">
             <a:avLst/>
@@ -12214,7 +12215,7 @@
         </p:nvSpPr>
         <p:spPr>
           <a:xfrm>
-            <a:off x="4064000" y="2260600"/>
+            <a:off x="4064000" y="2286000"/>
             <a:ext cx="7518399" cy="6350"/>
           </a:xfrm>
           <a:prstGeom prst="rect">
@@ -12257,29 +12258,29 @@
         </p:nvSpPr>
         <p:spPr>
           <a:xfrm>
-            <a:off x="4064000" y="2298700"/>
-            <a:ext cx="508000" cy="647700"/>
-          </a:xfrm>
-          <a:prstGeom prst="rect">
-            <a:avLst/>
-          </a:prstGeom>
-          <a:noFill/>
-        </p:spPr>
-        <p:txBody>
-          <a:bodyPr wrap="square">
+            <a:off x="4064000" y="2336800"/>
+            <a:ext cx="762000" cy="647700"/>
+          </a:xfrm>
+          <a:prstGeom prst="rect">
+            <a:avLst/>
+          </a:prstGeom>
+          <a:noFill/>
+        </p:spPr>
+        <p:txBody>
+          <a:bodyPr wrap="none">
             <a:normAutofit/>
           </a:bodyPr>
           <a:lstStyle/>
           <a:p>
             <a:pPr algn="l"/>
             <a:r>
-              <a:rPr sz="2600" b="0" i="1">
+              <a:rPr sz="2400" b="0" i="1">
                 <a:solidFill>
                   <a:srgbClr val="1F2B56"/>
                 </a:solidFill>
                 <a:latin typeface="Georgia"/>
               </a:rPr>
-              <a:t>III.</a:t>
+              <a:t>III</a:t>
             </a:r>
           </a:p>
         </p:txBody>
@@ -12292,8 +12293,8 @@
         </p:nvSpPr>
         <p:spPr>
           <a:xfrm>
-            <a:off x="4699000" y="2324100"/>
-            <a:ext cx="6858000" cy="622300"/>
+            <a:off x="4953000" y="2349500"/>
+            <a:ext cx="6629400" cy="635000"/>
           </a:xfrm>
           <a:prstGeom prst="rect">
             <a:avLst/>
@@ -12327,7 +12328,7 @@
         </p:nvSpPr>
         <p:spPr>
           <a:xfrm>
-            <a:off x="4064000" y="2946400"/>
+            <a:off x="4064000" y="2984500"/>
             <a:ext cx="7518399" cy="6350"/>
           </a:xfrm>
           <a:prstGeom prst="rect">
@@ -12370,29 +12371,29 @@
         </p:nvSpPr>
         <p:spPr>
           <a:xfrm>
-            <a:off x="4064000" y="2984500"/>
-            <a:ext cx="508000" cy="647700"/>
-          </a:xfrm>
-          <a:prstGeom prst="rect">
-            <a:avLst/>
-          </a:prstGeom>
-          <a:noFill/>
-        </p:spPr>
-        <p:txBody>
-          <a:bodyPr wrap="square">
+            <a:off x="4064000" y="3035300"/>
+            <a:ext cx="762000" cy="647700"/>
+          </a:xfrm>
+          <a:prstGeom prst="rect">
+            <a:avLst/>
+          </a:prstGeom>
+          <a:noFill/>
+        </p:spPr>
+        <p:txBody>
+          <a:bodyPr wrap="none">
             <a:normAutofit/>
           </a:bodyPr>
           <a:lstStyle/>
           <a:p>
             <a:pPr algn="l"/>
             <a:r>
-              <a:rPr sz="2600" b="0" i="1">
+              <a:rPr sz="2400" b="0" i="1">
                 <a:solidFill>
                   <a:srgbClr val="1F2B56"/>
                 </a:solidFill>
                 <a:latin typeface="Georgia"/>
               </a:rPr>
-              <a:t>IV.</a:t>
+              <a:t>IV</a:t>
             </a:r>
           </a:p>
         </p:txBody>
@@ -12405,8 +12406,8 @@
         </p:nvSpPr>
         <p:spPr>
           <a:xfrm>
-            <a:off x="4699000" y="3009900"/>
-            <a:ext cx="6858000" cy="622300"/>
+            <a:off x="4953000" y="3048000"/>
+            <a:ext cx="6629400" cy="635000"/>
           </a:xfrm>
           <a:prstGeom prst="rect">
             <a:avLst/>
@@ -12440,7 +12441,7 @@
         </p:nvSpPr>
         <p:spPr>
           <a:xfrm>
-            <a:off x="4064000" y="3632200"/>
+            <a:off x="4064000" y="3683000"/>
             <a:ext cx="7518399" cy="6350"/>
           </a:xfrm>
           <a:prstGeom prst="rect">
@@ -12483,29 +12484,29 @@
         </p:nvSpPr>
         <p:spPr>
           <a:xfrm>
-            <a:off x="4064000" y="3670300"/>
-            <a:ext cx="508000" cy="647700"/>
-          </a:xfrm>
-          <a:prstGeom prst="rect">
-            <a:avLst/>
-          </a:prstGeom>
-          <a:noFill/>
-        </p:spPr>
-        <p:txBody>
-          <a:bodyPr wrap="square">
+            <a:off x="4064000" y="3733799"/>
+            <a:ext cx="762000" cy="647700"/>
+          </a:xfrm>
+          <a:prstGeom prst="rect">
+            <a:avLst/>
+          </a:prstGeom>
+          <a:noFill/>
+        </p:spPr>
+        <p:txBody>
+          <a:bodyPr wrap="none">
             <a:normAutofit/>
           </a:bodyPr>
           <a:lstStyle/>
           <a:p>
             <a:pPr algn="l"/>
             <a:r>
-              <a:rPr sz="2600" b="0" i="1">
+              <a:rPr sz="2400" b="0" i="1">
                 <a:solidFill>
                   <a:srgbClr val="1F2B56"/>
                 </a:solidFill>
                 <a:latin typeface="Georgia"/>
               </a:rPr>
-              <a:t>V.</a:t>
+              <a:t>V</a:t>
             </a:r>
           </a:p>
         </p:txBody>
@@ -12518,8 +12519,8 @@
         </p:nvSpPr>
         <p:spPr>
           <a:xfrm>
-            <a:off x="4699000" y="3695700"/>
-            <a:ext cx="6858000" cy="622300"/>
+            <a:off x="4953000" y="3746500"/>
+            <a:ext cx="6629400" cy="635000"/>
           </a:xfrm>
           <a:prstGeom prst="rect">
             <a:avLst/>
@@ -15714,7 +15715,7 @@
     <p:bg>
       <p:bgPr>
         <a:solidFill>
-          <a:srgbClr val="191D2E"/>
+          <a:srgbClr val="1F2B56"/>
         </a:solidFill>
         <a:effectLst/>
       </p:bgPr>
@@ -17049,7 +17050,7 @@
         <p:spPr>
           <a:xfrm>
             <a:off x="609600" y="920750"/>
-            <a:ext cx="10972800" cy="1270000"/>
+            <a:ext cx="4826000" cy="1778000"/>
           </a:xfrm>
           <a:prstGeom prst="rect">
             <a:avLst/>
@@ -17070,619 +17071,669 @@
                 </a:solidFill>
                 <a:latin typeface="Georgia"/>
               </a:rPr>
-              <a:t>5.3 Vertiefungsliteratur</a:t>
-            </a:r>
-          </a:p>
-        </p:txBody>
-      </p:sp>
-      <p:sp>
-        <p:nvSpPr>
-          <p:cNvPr id="7" name="Rectangle 6"/>
-          <p:cNvSpPr/>
-          <p:nvPr/>
-        </p:nvSpPr>
-        <p:spPr>
-          <a:xfrm>
-            <a:off x="609600" y="2254250"/>
-            <a:ext cx="10972800" cy="6350"/>
-          </a:xfrm>
-          <a:prstGeom prst="rect">
-            <a:avLst/>
-          </a:prstGeom>
-          <a:solidFill>
-            <a:srgbClr val="191D2E"/>
-          </a:solidFill>
-          <a:ln>
-            <a:noFill/>
-          </a:ln>
-        </p:spPr>
-        <p:style>
-          <a:lnRef idx="1">
-            <a:schemeClr val="accent1"/>
-          </a:lnRef>
-          <a:fillRef idx="3">
-            <a:schemeClr val="accent1"/>
-          </a:fillRef>
-          <a:effectRef idx="2">
-            <a:schemeClr val="accent1"/>
-          </a:effectRef>
-          <a:fontRef idx="minor">
-            <a:schemeClr val="lt1"/>
-          </a:fontRef>
-        </p:style>
-        <p:txBody>
-          <a:bodyPr rtlCol="0" anchor="ctr"/>
-          <a:lstStyle/>
-          <a:p>
-            <a:pPr algn="ctr"/>
-          </a:p>
-        </p:txBody>
-      </p:sp>
-      <p:sp>
-        <p:nvSpPr>
-          <p:cNvPr id="8" name="TextBox 7"/>
-          <p:cNvSpPr txBox="1"/>
-          <p:nvPr/>
-        </p:nvSpPr>
-        <p:spPr>
-          <a:xfrm>
-            <a:off x="609600" y="2343150"/>
-            <a:ext cx="304800" cy="254000"/>
-          </a:xfrm>
-          <a:prstGeom prst="rect">
-            <a:avLst/>
-          </a:prstGeom>
-          <a:noFill/>
-        </p:spPr>
-        <p:txBody>
-          <a:bodyPr wrap="square">
-            <a:normAutofit/>
-          </a:bodyPr>
-          <a:lstStyle/>
-          <a:p>
-            <a:pPr algn="l"/>
-            <a:r>
-              <a:rPr sz="1000" b="0" i="0">
-                <a:solidFill>
-                  <a:srgbClr val="1F2B56"/>
-                </a:solidFill>
-                <a:latin typeface="Courier New"/>
-              </a:rPr>
-              <a:t>01</a:t>
-            </a:r>
-          </a:p>
-        </p:txBody>
-      </p:sp>
-      <p:sp>
-        <p:nvSpPr>
-          <p:cNvPr id="9" name="TextBox 8"/>
-          <p:cNvSpPr txBox="1"/>
-          <p:nvPr/>
-        </p:nvSpPr>
-        <p:spPr>
-          <a:xfrm>
-            <a:off x="990599" y="2317750"/>
-            <a:ext cx="4699000" cy="558800"/>
-          </a:xfrm>
-          <a:prstGeom prst="rect">
-            <a:avLst/>
-          </a:prstGeom>
-          <a:noFill/>
-        </p:spPr>
-        <p:txBody>
-          <a:bodyPr wrap="square">
-            <a:normAutofit/>
-          </a:bodyPr>
-          <a:lstStyle/>
-          <a:p>
-            <a:pPr algn="l"/>
-            <a:r>
-              <a:rPr sz="1400" b="0" i="0">
-                <a:solidFill>
-                  <a:srgbClr val="191D2E"/>
-                </a:solidFill>
-                <a:latin typeface="Georgia"/>
-              </a:rPr>
-              <a:t>Penn, P. (1982). Circular questioning. Family Process, 21(3), 267–280. [Klassiker der zirkulären Fragetechnik]</a:t>
-            </a:r>
-          </a:p>
-        </p:txBody>
-      </p:sp>
-      <p:sp>
-        <p:nvSpPr>
-          <p:cNvPr id="10" name="Rectangle 9"/>
-          <p:cNvSpPr/>
-          <p:nvPr/>
-        </p:nvSpPr>
-        <p:spPr>
-          <a:xfrm>
-            <a:off x="609600" y="2889250"/>
-            <a:ext cx="5080000" cy="6350"/>
-          </a:xfrm>
-          <a:prstGeom prst="rect">
-            <a:avLst/>
-          </a:prstGeom>
-          <a:solidFill>
-            <a:srgbClr val="E0E0E8"/>
-          </a:solidFill>
-          <a:ln>
-            <a:noFill/>
-          </a:ln>
-        </p:spPr>
-        <p:style>
-          <a:lnRef idx="1">
-            <a:schemeClr val="accent1"/>
-          </a:lnRef>
-          <a:fillRef idx="3">
-            <a:schemeClr val="accent1"/>
-          </a:fillRef>
-          <a:effectRef idx="2">
-            <a:schemeClr val="accent1"/>
-          </a:effectRef>
-          <a:fontRef idx="minor">
-            <a:schemeClr val="lt1"/>
-          </a:fontRef>
-        </p:style>
-        <p:txBody>
-          <a:bodyPr rtlCol="0" anchor="ctr"/>
-          <a:lstStyle/>
-          <a:p>
-            <a:pPr algn="ctr"/>
-          </a:p>
-        </p:txBody>
-      </p:sp>
-      <p:sp>
-        <p:nvSpPr>
-          <p:cNvPr id="11" name="TextBox 10"/>
-          <p:cNvSpPr txBox="1"/>
-          <p:nvPr/>
-        </p:nvSpPr>
-        <p:spPr>
-          <a:xfrm>
-            <a:off x="609600" y="2952750"/>
-            <a:ext cx="304800" cy="254000"/>
-          </a:xfrm>
-          <a:prstGeom prst="rect">
-            <a:avLst/>
-          </a:prstGeom>
-          <a:noFill/>
-        </p:spPr>
-        <p:txBody>
-          <a:bodyPr wrap="square">
-            <a:normAutofit/>
-          </a:bodyPr>
-          <a:lstStyle/>
-          <a:p>
-            <a:pPr algn="l"/>
-            <a:r>
-              <a:rPr sz="1000" b="0" i="0">
-                <a:solidFill>
-                  <a:srgbClr val="1F2B56"/>
-                </a:solidFill>
-                <a:latin typeface="Courier New"/>
-              </a:rPr>
-              <a:t>02</a:t>
-            </a:r>
-          </a:p>
-        </p:txBody>
-      </p:sp>
-      <p:sp>
-        <p:nvSpPr>
-          <p:cNvPr id="12" name="TextBox 11"/>
-          <p:cNvSpPr txBox="1"/>
-          <p:nvPr/>
-        </p:nvSpPr>
-        <p:spPr>
-          <a:xfrm>
-            <a:off x="990599" y="2927350"/>
-            <a:ext cx="4699000" cy="558800"/>
-          </a:xfrm>
-          <a:prstGeom prst="rect">
-            <a:avLst/>
-          </a:prstGeom>
-          <a:noFill/>
-        </p:spPr>
-        <p:txBody>
-          <a:bodyPr wrap="square">
-            <a:normAutofit/>
-          </a:bodyPr>
-          <a:lstStyle/>
-          <a:p>
-            <a:pPr algn="l"/>
-            <a:r>
-              <a:rPr sz="1400" b="0" i="0">
-                <a:solidFill>
-                  <a:srgbClr val="191D2E"/>
-                </a:solidFill>
-                <a:latin typeface="Georgia"/>
-              </a:rPr>
-              <a:t>de Shazer, S. (1985). Keys to solution in brief therapy. W. W. Norton &amp; Company. [Primärquelle der Wunder-Frage; Grundlage lösungsorientierter Beratung]</a:t>
-            </a:r>
-          </a:p>
-        </p:txBody>
-      </p:sp>
-      <p:sp>
-        <p:nvSpPr>
-          <p:cNvPr id="13" name="Rectangle 12"/>
-          <p:cNvSpPr/>
-          <p:nvPr/>
-        </p:nvSpPr>
-        <p:spPr>
-          <a:xfrm>
-            <a:off x="609600" y="3498850"/>
-            <a:ext cx="5080000" cy="6350"/>
-          </a:xfrm>
-          <a:prstGeom prst="rect">
-            <a:avLst/>
-          </a:prstGeom>
-          <a:solidFill>
-            <a:srgbClr val="E0E0E8"/>
-          </a:solidFill>
-          <a:ln>
-            <a:noFill/>
-          </a:ln>
-        </p:spPr>
-        <p:style>
-          <a:lnRef idx="1">
-            <a:schemeClr val="accent1"/>
-          </a:lnRef>
-          <a:fillRef idx="3">
-            <a:schemeClr val="accent1"/>
-          </a:fillRef>
-          <a:effectRef idx="2">
-            <a:schemeClr val="accent1"/>
-          </a:effectRef>
-          <a:fontRef idx="minor">
-            <a:schemeClr val="lt1"/>
-          </a:fontRef>
-        </p:style>
-        <p:txBody>
-          <a:bodyPr rtlCol="0" anchor="ctr"/>
-          <a:lstStyle/>
-          <a:p>
-            <a:pPr algn="ctr"/>
-          </a:p>
-        </p:txBody>
-      </p:sp>
-      <p:sp>
-        <p:nvSpPr>
-          <p:cNvPr id="14" name="TextBox 13"/>
-          <p:cNvSpPr txBox="1"/>
-          <p:nvPr/>
-        </p:nvSpPr>
-        <p:spPr>
-          <a:xfrm>
-            <a:off x="6502400" y="2343150"/>
-            <a:ext cx="304800" cy="254000"/>
-          </a:xfrm>
-          <a:prstGeom prst="rect">
-            <a:avLst/>
-          </a:prstGeom>
-          <a:noFill/>
-        </p:spPr>
-        <p:txBody>
-          <a:bodyPr wrap="square">
-            <a:normAutofit/>
-          </a:bodyPr>
-          <a:lstStyle/>
-          <a:p>
-            <a:pPr algn="l"/>
-            <a:r>
-              <a:rPr sz="1000" b="0" i="0">
-                <a:solidFill>
-                  <a:srgbClr val="1F2B56"/>
-                </a:solidFill>
-                <a:latin typeface="Courier New"/>
-              </a:rPr>
-              <a:t>01</a:t>
-            </a:r>
-          </a:p>
-        </p:txBody>
-      </p:sp>
-      <p:sp>
-        <p:nvSpPr>
-          <p:cNvPr id="15" name="TextBox 14"/>
-          <p:cNvSpPr txBox="1"/>
-          <p:nvPr/>
-        </p:nvSpPr>
-        <p:spPr>
-          <a:xfrm>
-            <a:off x="6883400" y="2317750"/>
-            <a:ext cx="4699000" cy="558800"/>
-          </a:xfrm>
-          <a:prstGeom prst="rect">
-            <a:avLst/>
-          </a:prstGeom>
-          <a:noFill/>
-        </p:spPr>
-        <p:txBody>
-          <a:bodyPr wrap="square">
-            <a:normAutofit/>
-          </a:bodyPr>
-          <a:lstStyle/>
-          <a:p>
-            <a:pPr algn="l"/>
-            <a:r>
-              <a:rPr sz="1400" b="0" i="0">
-                <a:solidFill>
-                  <a:srgbClr val="191D2E"/>
-                </a:solidFill>
-                <a:latin typeface="Georgia"/>
-              </a:rPr>
-              <a:t>Institut für Mittelstandsforschung Bonn. (2016). Unternehmernachfolgen in Deutschland. IfM Bonn. [Empirische Daten zu Nachfolgeprozessen]</a:t>
-            </a:r>
-          </a:p>
-        </p:txBody>
-      </p:sp>
-      <p:sp>
-        <p:nvSpPr>
-          <p:cNvPr id="16" name="Rectangle 15"/>
-          <p:cNvSpPr/>
-          <p:nvPr/>
-        </p:nvSpPr>
-        <p:spPr>
-          <a:xfrm>
-            <a:off x="6502400" y="2889250"/>
-            <a:ext cx="5080000" cy="6350"/>
-          </a:xfrm>
-          <a:prstGeom prst="rect">
-            <a:avLst/>
-          </a:prstGeom>
-          <a:solidFill>
-            <a:srgbClr val="E0E0E8"/>
-          </a:solidFill>
-          <a:ln>
-            <a:noFill/>
-          </a:ln>
-        </p:spPr>
-        <p:style>
-          <a:lnRef idx="1">
-            <a:schemeClr val="accent1"/>
-          </a:lnRef>
-          <a:fillRef idx="3">
-            <a:schemeClr val="accent1"/>
-          </a:fillRef>
-          <a:effectRef idx="2">
-            <a:schemeClr val="accent1"/>
-          </a:effectRef>
-          <a:fontRef idx="minor">
-            <a:schemeClr val="lt1"/>
-          </a:fontRef>
-        </p:style>
-        <p:txBody>
-          <a:bodyPr rtlCol="0" anchor="ctr"/>
-          <a:lstStyle/>
-          <a:p>
-            <a:pPr algn="ctr"/>
-          </a:p>
-        </p:txBody>
-      </p:sp>
-      <p:sp>
-        <p:nvSpPr>
-          <p:cNvPr id="17" name="TextBox 16"/>
-          <p:cNvSpPr txBox="1"/>
-          <p:nvPr/>
-        </p:nvSpPr>
-        <p:spPr>
-          <a:xfrm>
-            <a:off x="6502400" y="2952750"/>
-            <a:ext cx="304800" cy="254000"/>
-          </a:xfrm>
-          <a:prstGeom prst="rect">
-            <a:avLst/>
-          </a:prstGeom>
-          <a:noFill/>
-        </p:spPr>
-        <p:txBody>
-          <a:bodyPr wrap="square">
-            <a:normAutofit/>
-          </a:bodyPr>
-          <a:lstStyle/>
-          <a:p>
-            <a:pPr algn="l"/>
-            <a:r>
-              <a:rPr sz="1000" b="0" i="0">
-                <a:solidFill>
-                  <a:srgbClr val="1F2B56"/>
-                </a:solidFill>
-                <a:latin typeface="Courier New"/>
-              </a:rPr>
-              <a:t>02</a:t>
-            </a:r>
-          </a:p>
-        </p:txBody>
-      </p:sp>
-      <p:sp>
-        <p:nvSpPr>
-          <p:cNvPr id="18" name="TextBox 17"/>
-          <p:cNvSpPr txBox="1"/>
-          <p:nvPr/>
-        </p:nvSpPr>
-        <p:spPr>
-          <a:xfrm>
-            <a:off x="6883400" y="2927350"/>
-            <a:ext cx="4699000" cy="558800"/>
-          </a:xfrm>
-          <a:prstGeom prst="rect">
-            <a:avLst/>
-          </a:prstGeom>
-          <a:noFill/>
-        </p:spPr>
-        <p:txBody>
-          <a:bodyPr wrap="square">
-            <a:normAutofit/>
-          </a:bodyPr>
-          <a:lstStyle/>
-          <a:p>
-            <a:pPr algn="l"/>
-            <a:r>
-              <a:rPr sz="1400" b="0" i="0">
-                <a:solidFill>
-                  <a:srgbClr val="191D2E"/>
-                </a:solidFill>
-                <a:latin typeface="Georgia"/>
-              </a:rPr>
-              <a:t>McClelland, D. C. &amp; Burnham, D. H. (1976). Power is the great motivator. Harvard Business Review, 54(2), 100–110. [Unternehmerpersönlichkeit]</a:t>
-            </a:r>
-          </a:p>
-        </p:txBody>
-      </p:sp>
-      <p:sp>
-        <p:nvSpPr>
-          <p:cNvPr id="19" name="Rectangle 18"/>
-          <p:cNvSpPr/>
-          <p:nvPr/>
-        </p:nvSpPr>
-        <p:spPr>
-          <a:xfrm>
-            <a:off x="6502400" y="3498850"/>
-            <a:ext cx="5080000" cy="6350"/>
-          </a:xfrm>
-          <a:prstGeom prst="rect">
-            <a:avLst/>
-          </a:prstGeom>
-          <a:solidFill>
-            <a:srgbClr val="E0E0E8"/>
-          </a:solidFill>
-          <a:ln>
-            <a:noFill/>
-          </a:ln>
-        </p:spPr>
-        <p:style>
-          <a:lnRef idx="1">
-            <a:schemeClr val="accent1"/>
-          </a:lnRef>
-          <a:fillRef idx="3">
-            <a:schemeClr val="accent1"/>
-          </a:fillRef>
-          <a:effectRef idx="2">
-            <a:schemeClr val="accent1"/>
-          </a:effectRef>
-          <a:fontRef idx="minor">
-            <a:schemeClr val="lt1"/>
-          </a:fontRef>
-        </p:style>
-        <p:txBody>
-          <a:bodyPr rtlCol="0" anchor="ctr"/>
-          <a:lstStyle/>
-          <a:p>
-            <a:pPr algn="ctr"/>
-          </a:p>
-        </p:txBody>
-      </p:sp>
-      <p:sp>
-        <p:nvSpPr>
-          <p:cNvPr id="20" name="TextBox 19"/>
-          <p:cNvSpPr txBox="1"/>
-          <p:nvPr/>
-        </p:nvSpPr>
-        <p:spPr>
-          <a:xfrm>
-            <a:off x="6502400" y="3562350"/>
-            <a:ext cx="304800" cy="254000"/>
-          </a:xfrm>
-          <a:prstGeom prst="rect">
-            <a:avLst/>
-          </a:prstGeom>
-          <a:noFill/>
-        </p:spPr>
-        <p:txBody>
-          <a:bodyPr wrap="square">
-            <a:normAutofit/>
-          </a:bodyPr>
-          <a:lstStyle/>
-          <a:p>
-            <a:pPr algn="l"/>
-            <a:r>
-              <a:rPr sz="1000" b="0" i="0">
-                <a:solidFill>
-                  <a:srgbClr val="1F2B56"/>
-                </a:solidFill>
-                <a:latin typeface="Courier New"/>
-              </a:rPr>
-              <a:t>03</a:t>
-            </a:r>
-          </a:p>
-        </p:txBody>
-      </p:sp>
-      <p:sp>
-        <p:nvSpPr>
-          <p:cNvPr id="21" name="TextBox 20"/>
-          <p:cNvSpPr txBox="1"/>
-          <p:nvPr/>
-        </p:nvSpPr>
-        <p:spPr>
-          <a:xfrm>
-            <a:off x="6883400" y="3536950"/>
-            <a:ext cx="4699000" cy="558800"/>
-          </a:xfrm>
-          <a:prstGeom prst="rect">
-            <a:avLst/>
-          </a:prstGeom>
-          <a:noFill/>
-        </p:spPr>
-        <p:txBody>
-          <a:bodyPr wrap="square">
-            <a:normAutofit/>
-          </a:bodyPr>
-          <a:lstStyle/>
-          <a:p>
-            <a:pPr algn="l"/>
-            <a:r>
-              <a:rPr sz="1400" b="0" i="0">
-                <a:solidFill>
-                  <a:srgbClr val="191D2E"/>
-                </a:solidFill>
-                <a:latin typeface="Georgia"/>
-              </a:rPr>
-              <a:t>Brown, B. (2018). Dare to lead: Brave work. Tough conversations. Whole hearts. Random House. [Vulnerable Leadership; Kontrollverlust-Bewältigung]</a:t>
-            </a:r>
-          </a:p>
-        </p:txBody>
-      </p:sp>
-      <p:sp>
-        <p:nvSpPr>
-          <p:cNvPr id="22" name="Rectangle 21"/>
-          <p:cNvSpPr/>
-          <p:nvPr/>
-        </p:nvSpPr>
-        <p:spPr>
-          <a:xfrm>
-            <a:off x="6502400" y="4108450"/>
-            <a:ext cx="5080000" cy="6350"/>
-          </a:xfrm>
-          <a:prstGeom prst="rect">
-            <a:avLst/>
-          </a:prstGeom>
-          <a:solidFill>
-            <a:srgbClr val="E0E0E8"/>
-          </a:solidFill>
-          <a:ln>
-            <a:noFill/>
-          </a:ln>
-        </p:spPr>
-        <p:style>
-          <a:lnRef idx="1">
-            <a:schemeClr val="accent1"/>
-          </a:lnRef>
-          <a:fillRef idx="3">
-            <a:schemeClr val="accent1"/>
-          </a:fillRef>
-          <a:effectRef idx="2">
-            <a:schemeClr val="accent1"/>
-          </a:effectRef>
-          <a:fontRef idx="minor">
-            <a:schemeClr val="lt1"/>
-          </a:fontRef>
-        </p:style>
-        <p:txBody>
-          <a:bodyPr rtlCol="0" anchor="ctr"/>
-          <a:lstStyle/>
-          <a:p>
-            <a:pPr algn="ctr"/>
-          </a:p>
-        </p:txBody>
-      </p:sp>
+              <a:t>5.2 Selbstcheck nach 4 Wochen</a:t>
+            </a:r>
+          </a:p>
+        </p:txBody>
+      </p:sp>
+      <p:graphicFrame>
+        <p:nvGraphicFramePr>
+          <p:cNvPr id="7" name="Table 6"/>
+          <p:cNvGraphicFramePr>
+            <a:graphicFrameLocks noGrp="1"/>
+          </p:cNvGraphicFramePr>
+          <p:nvPr/>
+        </p:nvGraphicFramePr>
+        <p:xfrm>
+          <a:off x="5715000" y="920750"/>
+          <a:ext cx="5867400" cy="2667000"/>
+        </p:xfrm>
+        <a:graphic>
+          <a:graphicData uri="http://schemas.openxmlformats.org/drawingml/2006/table">
+            <a:tbl>
+              <a:tblPr firstRow="1" bandRow="1">
+                <a:tableStyleId>{5C22544A-7EE6-4342-B048-85BDC9FD1C3A}</a:tableStyleId>
+              </a:tblPr>
+              <a:tblGrid>
+                <a:gridCol w="1466850"/>
+                <a:gridCol w="1466850"/>
+                <a:gridCol w="1466850"/>
+                <a:gridCol w="1466850"/>
+              </a:tblGrid>
+              <a:tr h="381000">
+                <a:tc>
+                  <a:txBody>
+                    <a:bodyPr wrap="square"/>
+                    <a:lstStyle/>
+                    <a:p>
+                      <a:r>
+                        <a:rPr sz="1000" b="1">
+                          <a:solidFill>
+                            <a:srgbClr val="F8F8FA"/>
+                          </a:solidFill>
+                          <a:latin typeface="Courier New"/>
+                        </a:rPr>
+                        <a:t>Aussage</a:t>
+                      </a:r>
+                    </a:p>
+                  </a:txBody>
+                  <a:tcPr>
+                    <a:solidFill>
+                      <a:srgbClr val="1F2B56"/>
+                    </a:solidFill>
+                  </a:tcPr>
+                </a:tc>
+                <a:tc>
+                  <a:txBody>
+                    <a:bodyPr wrap="square"/>
+                    <a:lstStyle/>
+                    <a:p>
+                      <a:r>
+                        <a:rPr sz="1000" b="1">
+                          <a:solidFill>
+                            <a:srgbClr val="F8F8FA"/>
+                          </a:solidFill>
+                          <a:latin typeface="Courier New"/>
+                        </a:rPr>
+                        <a:t>Ja</a:t>
+                      </a:r>
+                    </a:p>
+                  </a:txBody>
+                  <a:tcPr>
+                    <a:solidFill>
+                      <a:srgbClr val="1F2B56"/>
+                    </a:solidFill>
+                  </a:tcPr>
+                </a:tc>
+                <a:tc>
+                  <a:txBody>
+                    <a:bodyPr wrap="square"/>
+                    <a:lstStyle/>
+                    <a:p>
+                      <a:r>
+                        <a:rPr sz="1000" b="1">
+                          <a:solidFill>
+                            <a:srgbClr val="F8F8FA"/>
+                          </a:solidFill>
+                          <a:latin typeface="Courier New"/>
+                        </a:rPr>
+                        <a:t>Teilweise</a:t>
+                      </a:r>
+                    </a:p>
+                  </a:txBody>
+                  <a:tcPr>
+                    <a:solidFill>
+                      <a:srgbClr val="1F2B56"/>
+                    </a:solidFill>
+                  </a:tcPr>
+                </a:tc>
+                <a:tc>
+                  <a:txBody>
+                    <a:bodyPr wrap="square"/>
+                    <a:lstStyle/>
+                    <a:p>
+                      <a:r>
+                        <a:rPr sz="1000" b="1">
+                          <a:solidFill>
+                            <a:srgbClr val="F8F8FA"/>
+                          </a:solidFill>
+                          <a:latin typeface="Courier New"/>
+                        </a:rPr>
+                        <a:t>Nein</a:t>
+                      </a:r>
+                    </a:p>
+                  </a:txBody>
+                  <a:tcPr>
+                    <a:solidFill>
+                      <a:srgbClr val="1F2B56"/>
+                    </a:solidFill>
+                  </a:tcPr>
+                </a:tc>
+              </a:tr>
+              <a:tr h="381000">
+                <a:tc>
+                  <a:txBody>
+                    <a:bodyPr wrap="square"/>
+                    <a:lstStyle/>
+                    <a:p>
+                      <a:r>
+                        <a:rPr sz="1000" b="0">
+                          <a:solidFill>
+                            <a:srgbClr val="191D2E"/>
+                          </a:solidFill>
+                          <a:latin typeface="Courier New"/>
+                        </a:rPr>
+                        <a:t>Ich bin mir bewusst, dass CEO-Dialoge eine andere Ebene erfordern als Standard-Kundenberatung.</a:t>
+                      </a:r>
+                    </a:p>
+                  </a:txBody>
+                  <a:tcPr>
+                    <a:solidFill>
+                      <a:srgbClr val="F8F8FA"/>
+                    </a:solidFill>
+                  </a:tcPr>
+                </a:tc>
+                <a:tc>
+                  <a:txBody>
+                    <a:bodyPr wrap="square"/>
+                    <a:lstStyle/>
+                    <a:p>
+                      <a:r>
+                        <a:rPr sz="1000" b="0">
+                          <a:solidFill>
+                            <a:srgbClr val="191D2E"/>
+                          </a:solidFill>
+                          <a:latin typeface="Courier New"/>
+                        </a:rPr>
+                        <a:t>☐</a:t>
+                      </a:r>
+                    </a:p>
+                  </a:txBody>
+                  <a:tcPr>
+                    <a:solidFill>
+                      <a:srgbClr val="F8F8FA"/>
+                    </a:solidFill>
+                  </a:tcPr>
+                </a:tc>
+                <a:tc>
+                  <a:txBody>
+                    <a:bodyPr wrap="square"/>
+                    <a:lstStyle/>
+                    <a:p>
+                      <a:r>
+                        <a:rPr sz="1000" b="0">
+                          <a:solidFill>
+                            <a:srgbClr val="191D2E"/>
+                          </a:solidFill>
+                          <a:latin typeface="Courier New"/>
+                        </a:rPr>
+                        <a:t>☐</a:t>
+                      </a:r>
+                    </a:p>
+                  </a:txBody>
+                  <a:tcPr>
+                    <a:solidFill>
+                      <a:srgbClr val="F8F8FA"/>
+                    </a:solidFill>
+                  </a:tcPr>
+                </a:tc>
+                <a:tc>
+                  <a:txBody>
+                    <a:bodyPr wrap="square"/>
+                    <a:lstStyle/>
+                    <a:p>
+                      <a:r>
+                        <a:rPr sz="1000" b="0">
+                          <a:solidFill>
+                            <a:srgbClr val="191D2E"/>
+                          </a:solidFill>
+                          <a:latin typeface="Courier New"/>
+                        </a:rPr>
+                        <a:t>☐</a:t>
+                      </a:r>
+                    </a:p>
+                  </a:txBody>
+                  <a:tcPr>
+                    <a:solidFill>
+                      <a:srgbClr val="F8F8FA"/>
+                    </a:solidFill>
+                  </a:tcPr>
+                </a:tc>
+              </a:tr>
+              <a:tr h="381000">
+                <a:tc>
+                  <a:txBody>
+                    <a:bodyPr wrap="square"/>
+                    <a:lstStyle/>
+                    <a:p>
+                      <a:r>
+                        <a:rPr sz="1000" b="0">
+                          <a:solidFill>
+                            <a:srgbClr val="191D2E"/>
+                          </a:solidFill>
+                          <a:latin typeface="Courier New"/>
+                        </a:rPr>
+                        <a:t>Ich kann systemische Fragen spontan im Gespräch einsetzen (ohne Skript).</a:t>
+                      </a:r>
+                    </a:p>
+                  </a:txBody>
+                  <a:tcPr>
+                    <a:solidFill>
+                      <a:srgbClr val="F0F0F5"/>
+                    </a:solidFill>
+                  </a:tcPr>
+                </a:tc>
+                <a:tc>
+                  <a:txBody>
+                    <a:bodyPr wrap="square"/>
+                    <a:lstStyle/>
+                    <a:p>
+                      <a:r>
+                        <a:rPr sz="1000" b="0">
+                          <a:solidFill>
+                            <a:srgbClr val="191D2E"/>
+                          </a:solidFill>
+                          <a:latin typeface="Courier New"/>
+                        </a:rPr>
+                        <a:t>☐</a:t>
+                      </a:r>
+                    </a:p>
+                  </a:txBody>
+                  <a:tcPr>
+                    <a:solidFill>
+                      <a:srgbClr val="F0F0F5"/>
+                    </a:solidFill>
+                  </a:tcPr>
+                </a:tc>
+                <a:tc>
+                  <a:txBody>
+                    <a:bodyPr wrap="square"/>
+                    <a:lstStyle/>
+                    <a:p>
+                      <a:r>
+                        <a:rPr sz="1000" b="0">
+                          <a:solidFill>
+                            <a:srgbClr val="191D2E"/>
+                          </a:solidFill>
+                          <a:latin typeface="Courier New"/>
+                        </a:rPr>
+                        <a:t>☐</a:t>
+                      </a:r>
+                    </a:p>
+                  </a:txBody>
+                  <a:tcPr>
+                    <a:solidFill>
+                      <a:srgbClr val="F0F0F5"/>
+                    </a:solidFill>
+                  </a:tcPr>
+                </a:tc>
+                <a:tc>
+                  <a:txBody>
+                    <a:bodyPr wrap="square"/>
+                    <a:lstStyle/>
+                    <a:p>
+                      <a:r>
+                        <a:rPr sz="1000" b="0">
+                          <a:solidFill>
+                            <a:srgbClr val="191D2E"/>
+                          </a:solidFill>
+                          <a:latin typeface="Courier New"/>
+                        </a:rPr>
+                        <a:t>☐</a:t>
+                      </a:r>
+                    </a:p>
+                  </a:txBody>
+                  <a:tcPr>
+                    <a:solidFill>
+                      <a:srgbClr val="F0F0F5"/>
+                    </a:solidFill>
+                  </a:tcPr>
+                </a:tc>
+              </a:tr>
+              <a:tr h="381000">
+                <a:tc>
+                  <a:txBody>
+                    <a:bodyPr wrap="square"/>
+                    <a:lstStyle/>
+                    <a:p>
+                      <a:r>
+                        <a:rPr sz="1000" b="0">
+                          <a:solidFill>
+                            <a:srgbClr val="191D2E"/>
+                          </a:solidFill>
+                          <a:latin typeface="Courier New"/>
+                        </a:rPr>
+                        <a:t>Ich erkenne emotionale Blockaden (Kontrollverlust-Angst, Identitätsverlust) und spreche sie an.</a:t>
+                      </a:r>
+                    </a:p>
+                  </a:txBody>
+                  <a:tcPr>
+                    <a:solidFill>
+                      <a:srgbClr val="F8F8FA"/>
+                    </a:solidFill>
+                  </a:tcPr>
+                </a:tc>
+                <a:tc>
+                  <a:txBody>
+                    <a:bodyPr wrap="square"/>
+                    <a:lstStyle/>
+                    <a:p>
+                      <a:r>
+                        <a:rPr sz="1000" b="0">
+                          <a:solidFill>
+                            <a:srgbClr val="191D2E"/>
+                          </a:solidFill>
+                          <a:latin typeface="Courier New"/>
+                        </a:rPr>
+                        <a:t>☐</a:t>
+                      </a:r>
+                    </a:p>
+                  </a:txBody>
+                  <a:tcPr>
+                    <a:solidFill>
+                      <a:srgbClr val="F8F8FA"/>
+                    </a:solidFill>
+                  </a:tcPr>
+                </a:tc>
+                <a:tc>
+                  <a:txBody>
+                    <a:bodyPr wrap="square"/>
+                    <a:lstStyle/>
+                    <a:p>
+                      <a:r>
+                        <a:rPr sz="1000" b="0">
+                          <a:solidFill>
+                            <a:srgbClr val="191D2E"/>
+                          </a:solidFill>
+                          <a:latin typeface="Courier New"/>
+                        </a:rPr>
+                        <a:t>☐</a:t>
+                      </a:r>
+                    </a:p>
+                  </a:txBody>
+                  <a:tcPr>
+                    <a:solidFill>
+                      <a:srgbClr val="F8F8FA"/>
+                    </a:solidFill>
+                  </a:tcPr>
+                </a:tc>
+                <a:tc>
+                  <a:txBody>
+                    <a:bodyPr wrap="square"/>
+                    <a:lstStyle/>
+                    <a:p>
+                      <a:r>
+                        <a:rPr sz="1000" b="0">
+                          <a:solidFill>
+                            <a:srgbClr val="191D2E"/>
+                          </a:solidFill>
+                          <a:latin typeface="Courier New"/>
+                        </a:rPr>
+                        <a:t>☐</a:t>
+                      </a:r>
+                    </a:p>
+                  </a:txBody>
+                  <a:tcPr>
+                    <a:solidFill>
+                      <a:srgbClr val="F8F8FA"/>
+                    </a:solidFill>
+                  </a:tcPr>
+                </a:tc>
+              </a:tr>
+              <a:tr h="381000">
+                <a:tc>
+                  <a:txBody>
+                    <a:bodyPr wrap="square"/>
+                    <a:lstStyle/>
+                    <a:p>
+                      <a:r>
+                        <a:rPr sz="1000" b="0">
+                          <a:solidFill>
+                            <a:srgbClr val="191D2E"/>
+                          </a:solidFill>
+                          <a:latin typeface="Courier New"/>
+                        </a:rPr>
+                        <a:t>Ich kenne die vier Nachfolgearten und kann für einen konkreten Fall die sinnvollste empfehlen.</a:t>
+                      </a:r>
+                    </a:p>
+                  </a:txBody>
+                  <a:tcPr>
+                    <a:solidFill>
+                      <a:srgbClr val="F0F0F5"/>
+                    </a:solidFill>
+                  </a:tcPr>
+                </a:tc>
+                <a:tc>
+                  <a:txBody>
+                    <a:bodyPr wrap="square"/>
+                    <a:lstStyle/>
+                    <a:p>
+                      <a:r>
+                        <a:rPr sz="1000" b="0">
+                          <a:solidFill>
+                            <a:srgbClr val="191D2E"/>
+                          </a:solidFill>
+                          <a:latin typeface="Courier New"/>
+                        </a:rPr>
+                        <a:t>☐</a:t>
+                      </a:r>
+                    </a:p>
+                  </a:txBody>
+                  <a:tcPr>
+                    <a:solidFill>
+                      <a:srgbClr val="F0F0F5"/>
+                    </a:solidFill>
+                  </a:tcPr>
+                </a:tc>
+                <a:tc>
+                  <a:txBody>
+                    <a:bodyPr wrap="square"/>
+                    <a:lstStyle/>
+                    <a:p>
+                      <a:r>
+                        <a:rPr sz="1000" b="0">
+                          <a:solidFill>
+                            <a:srgbClr val="191D2E"/>
+                          </a:solidFill>
+                          <a:latin typeface="Courier New"/>
+                        </a:rPr>
+                        <a:t>☐</a:t>
+                      </a:r>
+                    </a:p>
+                  </a:txBody>
+                  <a:tcPr>
+                    <a:solidFill>
+                      <a:srgbClr val="F0F0F5"/>
+                    </a:solidFill>
+                  </a:tcPr>
+                </a:tc>
+                <a:tc>
+                  <a:txBody>
+                    <a:bodyPr wrap="square"/>
+                    <a:lstStyle/>
+                    <a:p>
+                      <a:r>
+                        <a:rPr sz="1000" b="0">
+                          <a:solidFill>
+                            <a:srgbClr val="191D2E"/>
+                          </a:solidFill>
+                          <a:latin typeface="Courier New"/>
+                        </a:rPr>
+                        <a:t>☐</a:t>
+                      </a:r>
+                    </a:p>
+                  </a:txBody>
+                  <a:tcPr>
+                    <a:solidFill>
+                      <a:srgbClr val="F0F0F5"/>
+                    </a:solidFill>
+                  </a:tcPr>
+                </a:tc>
+              </a:tr>
+              <a:tr h="381000">
+                <a:tc>
+                  <a:txBody>
+                    <a:bodyPr wrap="square"/>
+                    <a:lstStyle/>
+                    <a:p>
+                      <a:r>
+                        <a:rPr sz="1000" b="0">
+                          <a:solidFill>
+                            <a:srgbClr val="191D2E"/>
+                          </a:solidFill>
+                          <a:latin typeface="Courier New"/>
+                        </a:rPr>
+                        <a:t>Ich habe mit einem realen Kunden ein Nachfolge-Erstgespräch geführt und dokumentiert.</a:t>
+                      </a:r>
+                    </a:p>
+                  </a:txBody>
+                  <a:tcPr>
+                    <a:solidFill>
+                      <a:srgbClr val="F8F8FA"/>
+                    </a:solidFill>
+                  </a:tcPr>
+                </a:tc>
+                <a:tc>
+                  <a:txBody>
+                    <a:bodyPr wrap="square"/>
+                    <a:lstStyle/>
+                    <a:p>
+                      <a:r>
+                        <a:rPr sz="1000" b="0">
+                          <a:solidFill>
+                            <a:srgbClr val="191D2E"/>
+                          </a:solidFill>
+                          <a:latin typeface="Courier New"/>
+                        </a:rPr>
+                        <a:t>☐</a:t>
+                      </a:r>
+                    </a:p>
+                  </a:txBody>
+                  <a:tcPr>
+                    <a:solidFill>
+                      <a:srgbClr val="F8F8FA"/>
+                    </a:solidFill>
+                  </a:tcPr>
+                </a:tc>
+                <a:tc>
+                  <a:txBody>
+                    <a:bodyPr wrap="square"/>
+                    <a:lstStyle/>
+                    <a:p>
+                      <a:r>
+                        <a:rPr sz="1000" b="0">
+                          <a:solidFill>
+                            <a:srgbClr val="191D2E"/>
+                          </a:solidFill>
+                          <a:latin typeface="Courier New"/>
+                        </a:rPr>
+                        <a:t>☐</a:t>
+                      </a:r>
+                    </a:p>
+                  </a:txBody>
+                  <a:tcPr>
+                    <a:solidFill>
+                      <a:srgbClr val="F8F8FA"/>
+                    </a:solidFill>
+                  </a:tcPr>
+                </a:tc>
+                <a:tc>
+                  <a:txBody>
+                    <a:bodyPr wrap="square"/>
+                    <a:lstStyle/>
+                    <a:p>
+                      <a:r>
+                        <a:rPr sz="1000" b="0">
+                          <a:solidFill>
+                            <a:srgbClr val="191D2E"/>
+                          </a:solidFill>
+                          <a:latin typeface="Courier New"/>
+                        </a:rPr>
+                        <a:t>☐</a:t>
+                      </a:r>
+                    </a:p>
+                  </a:txBody>
+                  <a:tcPr>
+                    <a:solidFill>
+                      <a:srgbClr val="F8F8FA"/>
+                    </a:solidFill>
+                  </a:tcPr>
+                </a:tc>
+              </a:tr>
+              <a:tr h="381000">
+                <a:tc>
+                  <a:txBody>
+                    <a:bodyPr wrap="square"/>
+                    <a:lstStyle/>
+                    <a:p>
+                      <a:r>
+                        <a:rPr sz="1000" b="0">
+                          <a:solidFill>
+                            <a:srgbClr val="191D2E"/>
+                          </a:solidFill>
+                          <a:latin typeface="Courier New"/>
+                        </a:rPr>
+                        <a:t>Ich weiß, wann ich einen externen Coach für die emotionale Begleitung empfehlen sollte.</a:t>
+                      </a:r>
+                    </a:p>
+                  </a:txBody>
+                  <a:tcPr>
+                    <a:solidFill>
+                      <a:srgbClr val="F0F0F5"/>
+                    </a:solidFill>
+                  </a:tcPr>
+                </a:tc>
+                <a:tc>
+                  <a:txBody>
+                    <a:bodyPr wrap="square"/>
+                    <a:lstStyle/>
+                    <a:p>
+                      <a:r>
+                        <a:rPr sz="1000" b="0">
+                          <a:solidFill>
+                            <a:srgbClr val="191D2E"/>
+                          </a:solidFill>
+                          <a:latin typeface="Courier New"/>
+                        </a:rPr>
+                        <a:t>☐</a:t>
+                      </a:r>
+                    </a:p>
+                  </a:txBody>
+                  <a:tcPr>
+                    <a:solidFill>
+                      <a:srgbClr val="F0F0F5"/>
+                    </a:solidFill>
+                  </a:tcPr>
+                </a:tc>
+                <a:tc>
+                  <a:txBody>
+                    <a:bodyPr wrap="square"/>
+                    <a:lstStyle/>
+                    <a:p>
+                      <a:r>
+                        <a:rPr sz="1000" b="0">
+                          <a:solidFill>
+                            <a:srgbClr val="191D2E"/>
+                          </a:solidFill>
+                          <a:latin typeface="Courier New"/>
+                        </a:rPr>
+                        <a:t>☐</a:t>
+                      </a:r>
+                    </a:p>
+                  </a:txBody>
+                  <a:tcPr>
+                    <a:solidFill>
+                      <a:srgbClr val="F0F0F5"/>
+                    </a:solidFill>
+                  </a:tcPr>
+                </a:tc>
+                <a:tc>
+                  <a:txBody>
+                    <a:bodyPr wrap="square"/>
+                    <a:lstStyle/>
+                    <a:p>
+                      <a:r>
+                        <a:rPr sz="1000" b="0">
+                          <a:solidFill>
+                            <a:srgbClr val="191D2E"/>
+                          </a:solidFill>
+                          <a:latin typeface="Courier New"/>
+                        </a:rPr>
+                        <a:t>☐</a:t>
+                      </a:r>
+                    </a:p>
+                  </a:txBody>
+                  <a:tcPr>
+                    <a:solidFill>
+                      <a:srgbClr val="F0F0F5"/>
+                    </a:solidFill>
+                  </a:tcPr>
+                </a:tc>
+              </a:tr>
+            </a:tbl>
+          </a:graphicData>
+        </a:graphic>
+      </p:graphicFrame>
     </p:spTree>
   </p:cSld>
   <p:clrMapOvr>
@@ -17692,242 +17743,6 @@
 </file>
 
 <file path=ppt/slides/slide27.xml><?xml version="1.0" encoding="utf-8"?>
-<p:sld xmlns:a="http://schemas.openxmlformats.org/drawingml/2006/main" xmlns:p="http://schemas.openxmlformats.org/presentationml/2006/main" xmlns:r="http://schemas.openxmlformats.org/officeDocument/2006/relationships">
-  <p:cSld>
-    <p:bg>
-      <p:bgPr>
-        <a:solidFill>
-          <a:srgbClr val="191D2E"/>
-        </a:solidFill>
-        <a:effectLst/>
-      </p:bgPr>
-    </p:bg>
-    <p:spTree>
-      <p:nvGrpSpPr>
-        <p:cNvPr id="1" name=""/>
-        <p:cNvGrpSpPr/>
-        <p:nvPr/>
-      </p:nvGrpSpPr>
-      <p:grpSpPr/>
-      <p:sp>
-        <p:nvSpPr>
-          <p:cNvPr id="2" name="TextBox 1"/>
-          <p:cNvSpPr txBox="1"/>
-          <p:nvPr/>
-        </p:nvSpPr>
-        <p:spPr>
-          <a:xfrm>
-            <a:off x="609600" y="279400"/>
-            <a:ext cx="2540000" cy="279400"/>
-          </a:xfrm>
-          <a:prstGeom prst="rect">
-            <a:avLst/>
-          </a:prstGeom>
-          <a:noFill/>
-        </p:spPr>
-        <p:txBody>
-          <a:bodyPr wrap="square">
-            <a:normAutofit/>
-          </a:bodyPr>
-          <a:lstStyle/>
-          <a:p>
-            <a:pPr algn="l"/>
-            <a:r>
-              <a:rPr sz="1000" b="1" i="0">
-                <a:solidFill>
-                  <a:srgbClr val="F8F8FA"/>
-                </a:solidFill>
-                <a:latin typeface="Arial"/>
-              </a:rPr>
-              <a:t>FKB  Campus</a:t>
-            </a:r>
-          </a:p>
-        </p:txBody>
-      </p:sp>
-      <p:sp>
-        <p:nvSpPr>
-          <p:cNvPr id="3" name="TextBox 2"/>
-          <p:cNvSpPr txBox="1"/>
-          <p:nvPr/>
-        </p:nvSpPr>
-        <p:spPr>
-          <a:xfrm>
-            <a:off x="609600" y="279400"/>
-            <a:ext cx="10972800" cy="279400"/>
-          </a:xfrm>
-          <a:prstGeom prst="rect">
-            <a:avLst/>
-          </a:prstGeom>
-          <a:noFill/>
-        </p:spPr>
-        <p:txBody>
-          <a:bodyPr wrap="square">
-            <a:normAutofit/>
-          </a:bodyPr>
-          <a:lstStyle/>
-          <a:p>
-            <a:pPr algn="r"/>
-            <a:r>
-              <a:rPr sz="900" b="0" i="0">
-                <a:solidFill>
-                  <a:srgbClr val="7B7FA0"/>
-                </a:solidFill>
-                <a:latin typeface="Courier New"/>
-              </a:rPr>
-              <a:t>QUELLEN</a:t>
-            </a:r>
-          </a:p>
-        </p:txBody>
-      </p:sp>
-      <p:sp>
-        <p:nvSpPr>
-          <p:cNvPr id="4" name="TextBox 3"/>
-          <p:cNvSpPr txBox="1"/>
-          <p:nvPr/>
-        </p:nvSpPr>
-        <p:spPr>
-          <a:xfrm>
-            <a:off x="609600" y="6426200"/>
-            <a:ext cx="10972800" cy="228600"/>
-          </a:xfrm>
-          <a:prstGeom prst="rect">
-            <a:avLst/>
-          </a:prstGeom>
-          <a:noFill/>
-        </p:spPr>
-        <p:txBody>
-          <a:bodyPr wrap="square">
-            <a:normAutofit/>
-          </a:bodyPr>
-          <a:lstStyle/>
-          <a:p>
-            <a:pPr algn="r"/>
-            <a:r>
-              <a:rPr sz="900" b="0" i="0">
-                <a:solidFill>
-                  <a:srgbClr val="7B7FA0"/>
-                </a:solidFill>
-                <a:latin typeface="Courier New"/>
-              </a:rPr>
-              <a:t>27</a:t>
-            </a:r>
-          </a:p>
-        </p:txBody>
-      </p:sp>
-      <p:sp>
-        <p:nvSpPr>
-          <p:cNvPr id="5" name="TextBox 4"/>
-          <p:cNvSpPr txBox="1"/>
-          <p:nvPr/>
-        </p:nvSpPr>
-        <p:spPr>
-          <a:xfrm>
-            <a:off x="609600" y="635000"/>
-            <a:ext cx="5461000" cy="5461000"/>
-          </a:xfrm>
-          <a:prstGeom prst="rect">
-            <a:avLst/>
-          </a:prstGeom>
-          <a:noFill/>
-        </p:spPr>
-        <p:txBody>
-          <a:bodyPr wrap="square">
-            <a:normAutofit/>
-          </a:bodyPr>
-          <a:lstStyle/>
-          <a:p>
-            <a:pPr algn="l"/>
-            <a:r>
-              <a:rPr sz="28000" b="0" i="1">
-                <a:solidFill>
-                  <a:srgbClr val="D9BF7A"/>
-                </a:solidFill>
-                <a:latin typeface="Georgia"/>
-              </a:rPr>
-              <a:t>III.</a:t>
-            </a:r>
-          </a:p>
-        </p:txBody>
-      </p:sp>
-      <p:sp>
-        <p:nvSpPr>
-          <p:cNvPr id="6" name="TextBox 5"/>
-          <p:cNvSpPr txBox="1"/>
-          <p:nvPr/>
-        </p:nvSpPr>
-        <p:spPr>
-          <a:xfrm>
-            <a:off x="6731000" y="4064000"/>
-            <a:ext cx="4851400" cy="1778000"/>
-          </a:xfrm>
-          <a:prstGeom prst="rect">
-            <a:avLst/>
-          </a:prstGeom>
-          <a:noFill/>
-        </p:spPr>
-        <p:txBody>
-          <a:bodyPr wrap="square">
-            <a:normAutofit/>
-          </a:bodyPr>
-          <a:lstStyle/>
-          <a:p>
-            <a:pPr algn="r"/>
-            <a:r>
-              <a:rPr sz="3800" b="0" i="0">
-                <a:solidFill>
-                  <a:srgbClr val="F8F8FA"/>
-                </a:solidFill>
-                <a:latin typeface="Georgia"/>
-              </a:rPr>
-              <a:t>Quellen</a:t>
-            </a:r>
-          </a:p>
-        </p:txBody>
-      </p:sp>
-      <p:sp>
-        <p:nvSpPr>
-          <p:cNvPr id="7" name="TextBox 6"/>
-          <p:cNvSpPr txBox="1"/>
-          <p:nvPr/>
-        </p:nvSpPr>
-        <p:spPr>
-          <a:xfrm>
-            <a:off x="6731000" y="5842000"/>
-            <a:ext cx="4851400" cy="635000"/>
-          </a:xfrm>
-          <a:prstGeom prst="rect">
-            <a:avLst/>
-          </a:prstGeom>
-          <a:noFill/>
-        </p:spPr>
-        <p:txBody>
-          <a:bodyPr wrap="square">
-            <a:normAutofit/>
-          </a:bodyPr>
-          <a:lstStyle/>
-          <a:p>
-            <a:pPr algn="r"/>
-            <a:r>
-              <a:rPr sz="1400" b="0" i="1">
-                <a:solidFill>
-                  <a:srgbClr val="7B7FA0"/>
-                </a:solidFill>
-                <a:latin typeface="Georgia"/>
-              </a:rPr>
-              <a:t>Didaktik &amp; Kompetenzmodell</a:t>
-            </a:r>
-          </a:p>
-        </p:txBody>
-      </p:sp>
-    </p:spTree>
-  </p:cSld>
-  <p:clrMapOvr>
-    <a:masterClrMapping/>
-  </p:clrMapOvr>
-</p:sld>
-</file>
-
-<file path=ppt/slides/slide28.xml><?xml version="1.0" encoding="utf-8"?>
 <p:sld xmlns:a="http://schemas.openxmlformats.org/drawingml/2006/main" xmlns:p="http://schemas.openxmlformats.org/presentationml/2006/main" xmlns:r="http://schemas.openxmlformats.org/officeDocument/2006/relationships">
   <p:cSld>
     <p:bg>
@@ -18010,7 +17825,7 @@
                 </a:solidFill>
                 <a:latin typeface="Courier New"/>
               </a:rPr>
-              <a:t>§ III · QUELLEN</a:t>
+              <a:t>§ II · PRAXISTRANSFER</a:t>
             </a:r>
           </a:p>
         </p:txBody>
@@ -18045,7 +17860,7 @@
                 </a:solidFill>
                 <a:latin typeface="Courier New"/>
               </a:rPr>
-              <a:t>28</a:t>
+              <a:t>27</a:t>
             </a:r>
           </a:p>
         </p:txBody>
@@ -18102,7 +17917,7 @@
         <p:spPr>
           <a:xfrm>
             <a:off x="609600" y="920750"/>
-            <a:ext cx="10972800" cy="1778000"/>
+            <a:ext cx="10972800" cy="1270000"/>
           </a:xfrm>
           <a:prstGeom prst="rect">
             <a:avLst/>
@@ -18123,7 +17938,7 @@
                 </a:solidFill>
                 <a:latin typeface="Georgia"/>
               </a:rPr>
-              <a:t>Didaktik &amp; Kompetenzmodell</a:t>
+              <a:t>5.3 Vertiefungsliteratur</a:t>
             </a:r>
           </a:p>
         </p:txBody>
@@ -18136,8 +17951,121 @@
         </p:nvSpPr>
         <p:spPr>
           <a:xfrm>
-            <a:off x="609600" y="2762250"/>
+            <a:off x="609600" y="2254250"/>
             <a:ext cx="10972800" cy="6350"/>
+          </a:xfrm>
+          <a:prstGeom prst="rect">
+            <a:avLst/>
+          </a:prstGeom>
+          <a:solidFill>
+            <a:srgbClr val="191D2E"/>
+          </a:solidFill>
+          <a:ln>
+            <a:noFill/>
+          </a:ln>
+        </p:spPr>
+        <p:style>
+          <a:lnRef idx="1">
+            <a:schemeClr val="accent1"/>
+          </a:lnRef>
+          <a:fillRef idx="3">
+            <a:schemeClr val="accent1"/>
+          </a:fillRef>
+          <a:effectRef idx="2">
+            <a:schemeClr val="accent1"/>
+          </a:effectRef>
+          <a:fontRef idx="minor">
+            <a:schemeClr val="lt1"/>
+          </a:fontRef>
+        </p:style>
+        <p:txBody>
+          <a:bodyPr rtlCol="0" anchor="ctr"/>
+          <a:lstStyle/>
+          <a:p>
+            <a:pPr algn="ctr"/>
+          </a:p>
+        </p:txBody>
+      </p:sp>
+      <p:sp>
+        <p:nvSpPr>
+          <p:cNvPr id="8" name="TextBox 7"/>
+          <p:cNvSpPr txBox="1"/>
+          <p:nvPr/>
+        </p:nvSpPr>
+        <p:spPr>
+          <a:xfrm>
+            <a:off x="609600" y="2343150"/>
+            <a:ext cx="304800" cy="254000"/>
+          </a:xfrm>
+          <a:prstGeom prst="rect">
+            <a:avLst/>
+          </a:prstGeom>
+          <a:noFill/>
+        </p:spPr>
+        <p:txBody>
+          <a:bodyPr wrap="square">
+            <a:normAutofit/>
+          </a:bodyPr>
+          <a:lstStyle/>
+          <a:p>
+            <a:pPr algn="l"/>
+            <a:r>
+              <a:rPr sz="1000" b="0" i="0">
+                <a:solidFill>
+                  <a:srgbClr val="1F2B56"/>
+                </a:solidFill>
+                <a:latin typeface="Courier New"/>
+              </a:rPr>
+              <a:t>01</a:t>
+            </a:r>
+          </a:p>
+        </p:txBody>
+      </p:sp>
+      <p:sp>
+        <p:nvSpPr>
+          <p:cNvPr id="9" name="TextBox 8"/>
+          <p:cNvSpPr txBox="1"/>
+          <p:nvPr/>
+        </p:nvSpPr>
+        <p:spPr>
+          <a:xfrm>
+            <a:off x="990599" y="2317750"/>
+            <a:ext cx="4699000" cy="558800"/>
+          </a:xfrm>
+          <a:prstGeom prst="rect">
+            <a:avLst/>
+          </a:prstGeom>
+          <a:noFill/>
+        </p:spPr>
+        <p:txBody>
+          <a:bodyPr wrap="square">
+            <a:normAutofit/>
+          </a:bodyPr>
+          <a:lstStyle/>
+          <a:p>
+            <a:pPr algn="l"/>
+            <a:r>
+              <a:rPr sz="1400" b="0" i="0">
+                <a:solidFill>
+                  <a:srgbClr val="191D2E"/>
+                </a:solidFill>
+                <a:latin typeface="Georgia"/>
+              </a:rPr>
+              <a:t>Penn, P. (1982). Circular questioning. Family Process, 21(3), 267–280. [Klassiker der zirkulären Fragetechnik]</a:t>
+            </a:r>
+          </a:p>
+        </p:txBody>
+      </p:sp>
+      <p:sp>
+        <p:nvSpPr>
+          <p:cNvPr id="10" name="Rectangle 9"/>
+          <p:cNvSpPr/>
+          <p:nvPr/>
+        </p:nvSpPr>
+        <p:spPr>
+          <a:xfrm>
+            <a:off x="609600" y="2889250"/>
+            <a:ext cx="5080000" cy="6350"/>
           </a:xfrm>
           <a:prstGeom prst="rect">
             <a:avLst/>
@@ -18173,14 +18101,14 @@
       </p:sp>
       <p:sp>
         <p:nvSpPr>
-          <p:cNvPr id="8" name="TextBox 7"/>
-          <p:cNvSpPr txBox="1"/>
-          <p:nvPr/>
-        </p:nvSpPr>
-        <p:spPr>
-          <a:xfrm>
-            <a:off x="609600" y="2876550"/>
-            <a:ext cx="254000" cy="355600"/>
+          <p:cNvPr id="11" name="TextBox 10"/>
+          <p:cNvSpPr txBox="1"/>
+          <p:nvPr/>
+        </p:nvSpPr>
+        <p:spPr>
+          <a:xfrm>
+            <a:off x="609600" y="2952750"/>
+            <a:ext cx="304800" cy="254000"/>
           </a:xfrm>
           <a:prstGeom prst="rect">
             <a:avLst/>
@@ -18195,62 +18123,62 @@
           <a:p>
             <a:pPr algn="l"/>
             <a:r>
-              <a:rPr sz="2200" b="0" i="0">
+              <a:rPr sz="1000" b="0" i="0">
                 <a:solidFill>
                   <a:srgbClr val="1F2B56"/>
                 </a:solidFill>
+                <a:latin typeface="Courier New"/>
+              </a:rPr>
+              <a:t>02</a:t>
+            </a:r>
+          </a:p>
+        </p:txBody>
+      </p:sp>
+      <p:sp>
+        <p:nvSpPr>
+          <p:cNvPr id="12" name="TextBox 11"/>
+          <p:cNvSpPr txBox="1"/>
+          <p:nvPr/>
+        </p:nvSpPr>
+        <p:spPr>
+          <a:xfrm>
+            <a:off x="990599" y="2927350"/>
+            <a:ext cx="4699000" cy="558800"/>
+          </a:xfrm>
+          <a:prstGeom prst="rect">
+            <a:avLst/>
+          </a:prstGeom>
+          <a:noFill/>
+        </p:spPr>
+        <p:txBody>
+          <a:bodyPr wrap="square">
+            <a:normAutofit/>
+          </a:bodyPr>
+          <a:lstStyle/>
+          <a:p>
+            <a:pPr algn="l"/>
+            <a:r>
+              <a:rPr sz="1400" b="0" i="0">
+                <a:solidFill>
+                  <a:srgbClr val="191D2E"/>
+                </a:solidFill>
                 <a:latin typeface="Georgia"/>
               </a:rPr>
-              <a:t>–</a:t>
-            </a:r>
-          </a:p>
-        </p:txBody>
-      </p:sp>
-      <p:sp>
-        <p:nvSpPr>
-          <p:cNvPr id="9" name="TextBox 8"/>
-          <p:cNvSpPr txBox="1"/>
-          <p:nvPr/>
-        </p:nvSpPr>
-        <p:spPr>
-          <a:xfrm>
-            <a:off x="939799" y="2851150"/>
-            <a:ext cx="10642600" cy="508000"/>
-          </a:xfrm>
-          <a:prstGeom prst="rect">
-            <a:avLst/>
-          </a:prstGeom>
-          <a:noFill/>
-        </p:spPr>
-        <p:txBody>
-          <a:bodyPr wrap="square">
-            <a:normAutofit/>
-          </a:bodyPr>
-          <a:lstStyle/>
-          <a:p>
-            <a:pPr algn="l"/>
-            <a:r>
-              <a:rPr sz="1400" b="0" i="0">
-                <a:solidFill>
-                  <a:srgbClr val="191D2E"/>
-                </a:solidFill>
-                <a:latin typeface="Georgia"/>
-              </a:rPr>
-              <a:t>Anderson, L. W. &amp; Krathwohl, D. R. (Hrsg.). (2001). A Taxonomy for Learning, Teaching, and Assessing: A Revision of Bloom's Taxonomy of Educational Objectives. Longman.</a:t>
-            </a:r>
-          </a:p>
-        </p:txBody>
-      </p:sp>
-      <p:sp>
-        <p:nvSpPr>
-          <p:cNvPr id="10" name="Rectangle 9"/>
+              <a:t>de Shazer, S. (1985). Keys to solution in brief therapy. W. W. Norton &amp; Company. [Primärquelle der Wunder-Frage; Grundlage lösungsorientierter Beratung]</a:t>
+            </a:r>
+          </a:p>
+        </p:txBody>
+      </p:sp>
+      <p:sp>
+        <p:nvSpPr>
+          <p:cNvPr id="13" name="Rectangle 12"/>
           <p:cNvSpPr/>
           <p:nvPr/>
         </p:nvSpPr>
         <p:spPr>
           <a:xfrm>
-            <a:off x="939799" y="3333750"/>
-            <a:ext cx="10642600" cy="6350"/>
+            <a:off x="609600" y="3498850"/>
+            <a:ext cx="5080000" cy="6350"/>
           </a:xfrm>
           <a:prstGeom prst="rect">
             <a:avLst/>
@@ -18286,14 +18214,14 @@
       </p:sp>
       <p:sp>
         <p:nvSpPr>
-          <p:cNvPr id="11" name="TextBox 10"/>
-          <p:cNvSpPr txBox="1"/>
-          <p:nvPr/>
-        </p:nvSpPr>
-        <p:spPr>
-          <a:xfrm>
-            <a:off x="609600" y="3409950"/>
-            <a:ext cx="254000" cy="355600"/>
+          <p:cNvPr id="14" name="TextBox 13"/>
+          <p:cNvSpPr txBox="1"/>
+          <p:nvPr/>
+        </p:nvSpPr>
+        <p:spPr>
+          <a:xfrm>
+            <a:off x="6502400" y="2343150"/>
+            <a:ext cx="304800" cy="254000"/>
           </a:xfrm>
           <a:prstGeom prst="rect">
             <a:avLst/>
@@ -18308,62 +18236,62 @@
           <a:p>
             <a:pPr algn="l"/>
             <a:r>
-              <a:rPr sz="2200" b="0" i="0">
+              <a:rPr sz="1000" b="0" i="0">
                 <a:solidFill>
                   <a:srgbClr val="1F2B56"/>
                 </a:solidFill>
+                <a:latin typeface="Courier New"/>
+              </a:rPr>
+              <a:t>01</a:t>
+            </a:r>
+          </a:p>
+        </p:txBody>
+      </p:sp>
+      <p:sp>
+        <p:nvSpPr>
+          <p:cNvPr id="15" name="TextBox 14"/>
+          <p:cNvSpPr txBox="1"/>
+          <p:nvPr/>
+        </p:nvSpPr>
+        <p:spPr>
+          <a:xfrm>
+            <a:off x="6883400" y="2317750"/>
+            <a:ext cx="4699000" cy="558800"/>
+          </a:xfrm>
+          <a:prstGeom prst="rect">
+            <a:avLst/>
+          </a:prstGeom>
+          <a:noFill/>
+        </p:spPr>
+        <p:txBody>
+          <a:bodyPr wrap="square">
+            <a:normAutofit/>
+          </a:bodyPr>
+          <a:lstStyle/>
+          <a:p>
+            <a:pPr algn="l"/>
+            <a:r>
+              <a:rPr sz="1400" b="0" i="0">
+                <a:solidFill>
+                  <a:srgbClr val="191D2E"/>
+                </a:solidFill>
                 <a:latin typeface="Georgia"/>
               </a:rPr>
-              <a:t>–</a:t>
-            </a:r>
-          </a:p>
-        </p:txBody>
-      </p:sp>
-      <p:sp>
-        <p:nvSpPr>
-          <p:cNvPr id="12" name="TextBox 11"/>
-          <p:cNvSpPr txBox="1"/>
-          <p:nvPr/>
-        </p:nvSpPr>
-        <p:spPr>
-          <a:xfrm>
-            <a:off x="939799" y="3384550"/>
-            <a:ext cx="10642600" cy="508000"/>
-          </a:xfrm>
-          <a:prstGeom prst="rect">
-            <a:avLst/>
-          </a:prstGeom>
-          <a:noFill/>
-        </p:spPr>
-        <p:txBody>
-          <a:bodyPr wrap="square">
-            <a:normAutofit/>
-          </a:bodyPr>
-          <a:lstStyle/>
-          <a:p>
-            <a:pPr algn="l"/>
-            <a:r>
-              <a:rPr sz="1400" b="0" i="0">
-                <a:solidFill>
-                  <a:srgbClr val="191D2E"/>
-                </a:solidFill>
-                <a:latin typeface="Georgia"/>
-              </a:rPr>
-              <a:t>Dreyfus, H. L. &amp; Dreyfus, S. E. (1986). Mind over Machine: The Power of Human Intuition and Expertise in the Era of the Computer. Free Press.</a:t>
-            </a:r>
-          </a:p>
-        </p:txBody>
-      </p:sp>
-      <p:sp>
-        <p:nvSpPr>
-          <p:cNvPr id="13" name="Rectangle 12"/>
+              <a:t>Institut für Mittelstandsforschung Bonn. (2016). Unternehmernachfolgen in Deutschland. IfM Bonn. [Empirische Daten zu Nachfolgeprozessen]</a:t>
+            </a:r>
+          </a:p>
+        </p:txBody>
+      </p:sp>
+      <p:sp>
+        <p:nvSpPr>
+          <p:cNvPr id="16" name="Rectangle 15"/>
           <p:cNvSpPr/>
           <p:nvPr/>
         </p:nvSpPr>
         <p:spPr>
           <a:xfrm>
-            <a:off x="939799" y="3867150"/>
-            <a:ext cx="10642600" cy="6350"/>
+            <a:off x="6502400" y="2889250"/>
+            <a:ext cx="5080000" cy="6350"/>
           </a:xfrm>
           <a:prstGeom prst="rect">
             <a:avLst/>
@@ -18399,14 +18327,14 @@
       </p:sp>
       <p:sp>
         <p:nvSpPr>
-          <p:cNvPr id="14" name="TextBox 13"/>
-          <p:cNvSpPr txBox="1"/>
-          <p:nvPr/>
-        </p:nvSpPr>
-        <p:spPr>
-          <a:xfrm>
-            <a:off x="609600" y="3943350"/>
-            <a:ext cx="254000" cy="355600"/>
+          <p:cNvPr id="17" name="TextBox 16"/>
+          <p:cNvSpPr txBox="1"/>
+          <p:nvPr/>
+        </p:nvSpPr>
+        <p:spPr>
+          <a:xfrm>
+            <a:off x="6502400" y="2952750"/>
+            <a:ext cx="304800" cy="254000"/>
           </a:xfrm>
           <a:prstGeom prst="rect">
             <a:avLst/>
@@ -18421,62 +18349,62 @@
           <a:p>
             <a:pPr algn="l"/>
             <a:r>
-              <a:rPr sz="2200" b="0" i="0">
+              <a:rPr sz="1000" b="0" i="0">
                 <a:solidFill>
                   <a:srgbClr val="1F2B56"/>
                 </a:solidFill>
+                <a:latin typeface="Courier New"/>
+              </a:rPr>
+              <a:t>02</a:t>
+            </a:r>
+          </a:p>
+        </p:txBody>
+      </p:sp>
+      <p:sp>
+        <p:nvSpPr>
+          <p:cNvPr id="18" name="TextBox 17"/>
+          <p:cNvSpPr txBox="1"/>
+          <p:nvPr/>
+        </p:nvSpPr>
+        <p:spPr>
+          <a:xfrm>
+            <a:off x="6883400" y="2927350"/>
+            <a:ext cx="4699000" cy="558800"/>
+          </a:xfrm>
+          <a:prstGeom prst="rect">
+            <a:avLst/>
+          </a:prstGeom>
+          <a:noFill/>
+        </p:spPr>
+        <p:txBody>
+          <a:bodyPr wrap="square">
+            <a:normAutofit/>
+          </a:bodyPr>
+          <a:lstStyle/>
+          <a:p>
+            <a:pPr algn="l"/>
+            <a:r>
+              <a:rPr sz="1400" b="0" i="0">
+                <a:solidFill>
+                  <a:srgbClr val="191D2E"/>
+                </a:solidFill>
                 <a:latin typeface="Georgia"/>
               </a:rPr>
-              <a:t>–</a:t>
-            </a:r>
-          </a:p>
-        </p:txBody>
-      </p:sp>
-      <p:sp>
-        <p:nvSpPr>
-          <p:cNvPr id="15" name="TextBox 14"/>
-          <p:cNvSpPr txBox="1"/>
-          <p:nvPr/>
-        </p:nvSpPr>
-        <p:spPr>
-          <a:xfrm>
-            <a:off x="939799" y="3917950"/>
-            <a:ext cx="10642600" cy="508000"/>
-          </a:xfrm>
-          <a:prstGeom prst="rect">
-            <a:avLst/>
-          </a:prstGeom>
-          <a:noFill/>
-        </p:spPr>
-        <p:txBody>
-          <a:bodyPr wrap="square">
-            <a:normAutofit/>
-          </a:bodyPr>
-          <a:lstStyle/>
-          <a:p>
-            <a:pPr algn="l"/>
-            <a:r>
-              <a:rPr sz="1400" b="0" i="0">
-                <a:solidFill>
-                  <a:srgbClr val="191D2E"/>
-                </a:solidFill>
-                <a:latin typeface="Georgia"/>
-              </a:rPr>
-              <a:t>Kirkpatrick, D. L. (1994). Evaluating Training Programs: The Four Levels. Berrett-Koehler.</a:t>
-            </a:r>
-          </a:p>
-        </p:txBody>
-      </p:sp>
-      <p:sp>
-        <p:nvSpPr>
-          <p:cNvPr id="16" name="Rectangle 15"/>
+              <a:t>McClelland, D. C. &amp; Burnham, D. H. (1976). Power is the great motivator. Harvard Business Review, 54(2), 100–110. [Unternehmerpersönlichkeit]</a:t>
+            </a:r>
+          </a:p>
+        </p:txBody>
+      </p:sp>
+      <p:sp>
+        <p:nvSpPr>
+          <p:cNvPr id="19" name="Rectangle 18"/>
           <p:cNvSpPr/>
           <p:nvPr/>
         </p:nvSpPr>
         <p:spPr>
           <a:xfrm>
-            <a:off x="939799" y="4400550"/>
-            <a:ext cx="10642600" cy="6350"/>
+            <a:off x="6502400" y="3498850"/>
+            <a:ext cx="5080000" cy="6350"/>
           </a:xfrm>
           <a:prstGeom prst="rect">
             <a:avLst/>
@@ -18507,6 +18435,355 @@
           <a:lstStyle/>
           <a:p>
             <a:pPr algn="ctr"/>
+          </a:p>
+        </p:txBody>
+      </p:sp>
+      <p:sp>
+        <p:nvSpPr>
+          <p:cNvPr id="20" name="TextBox 19"/>
+          <p:cNvSpPr txBox="1"/>
+          <p:nvPr/>
+        </p:nvSpPr>
+        <p:spPr>
+          <a:xfrm>
+            <a:off x="6502400" y="3562350"/>
+            <a:ext cx="304800" cy="254000"/>
+          </a:xfrm>
+          <a:prstGeom prst="rect">
+            <a:avLst/>
+          </a:prstGeom>
+          <a:noFill/>
+        </p:spPr>
+        <p:txBody>
+          <a:bodyPr wrap="square">
+            <a:normAutofit/>
+          </a:bodyPr>
+          <a:lstStyle/>
+          <a:p>
+            <a:pPr algn="l"/>
+            <a:r>
+              <a:rPr sz="1000" b="0" i="0">
+                <a:solidFill>
+                  <a:srgbClr val="1F2B56"/>
+                </a:solidFill>
+                <a:latin typeface="Courier New"/>
+              </a:rPr>
+              <a:t>03</a:t>
+            </a:r>
+          </a:p>
+        </p:txBody>
+      </p:sp>
+      <p:sp>
+        <p:nvSpPr>
+          <p:cNvPr id="21" name="TextBox 20"/>
+          <p:cNvSpPr txBox="1"/>
+          <p:nvPr/>
+        </p:nvSpPr>
+        <p:spPr>
+          <a:xfrm>
+            <a:off x="6883400" y="3536950"/>
+            <a:ext cx="4699000" cy="558800"/>
+          </a:xfrm>
+          <a:prstGeom prst="rect">
+            <a:avLst/>
+          </a:prstGeom>
+          <a:noFill/>
+        </p:spPr>
+        <p:txBody>
+          <a:bodyPr wrap="square">
+            <a:normAutofit/>
+          </a:bodyPr>
+          <a:lstStyle/>
+          <a:p>
+            <a:pPr algn="l"/>
+            <a:r>
+              <a:rPr sz="1400" b="0" i="0">
+                <a:solidFill>
+                  <a:srgbClr val="191D2E"/>
+                </a:solidFill>
+                <a:latin typeface="Georgia"/>
+              </a:rPr>
+              <a:t>Brown, B. (2018). Dare to lead: Brave work. Tough conversations. Whole hearts. Random House. [Vulnerable Leadership; Kontrollverlust-Bewältigung]</a:t>
+            </a:r>
+          </a:p>
+        </p:txBody>
+      </p:sp>
+      <p:sp>
+        <p:nvSpPr>
+          <p:cNvPr id="22" name="Rectangle 21"/>
+          <p:cNvSpPr/>
+          <p:nvPr/>
+        </p:nvSpPr>
+        <p:spPr>
+          <a:xfrm>
+            <a:off x="6502400" y="4108450"/>
+            <a:ext cx="5080000" cy="6350"/>
+          </a:xfrm>
+          <a:prstGeom prst="rect">
+            <a:avLst/>
+          </a:prstGeom>
+          <a:solidFill>
+            <a:srgbClr val="E0E0E8"/>
+          </a:solidFill>
+          <a:ln>
+            <a:noFill/>
+          </a:ln>
+        </p:spPr>
+        <p:style>
+          <a:lnRef idx="1">
+            <a:schemeClr val="accent1"/>
+          </a:lnRef>
+          <a:fillRef idx="3">
+            <a:schemeClr val="accent1"/>
+          </a:fillRef>
+          <a:effectRef idx="2">
+            <a:schemeClr val="accent1"/>
+          </a:effectRef>
+          <a:fontRef idx="minor">
+            <a:schemeClr val="lt1"/>
+          </a:fontRef>
+        </p:style>
+        <p:txBody>
+          <a:bodyPr rtlCol="0" anchor="ctr"/>
+          <a:lstStyle/>
+          <a:p>
+            <a:pPr algn="ctr"/>
+          </a:p>
+        </p:txBody>
+      </p:sp>
+    </p:spTree>
+  </p:cSld>
+  <p:clrMapOvr>
+    <a:masterClrMapping/>
+  </p:clrMapOvr>
+</p:sld>
+</file>
+
+<file path=ppt/slides/slide28.xml><?xml version="1.0" encoding="utf-8"?>
+<p:sld xmlns:a="http://schemas.openxmlformats.org/drawingml/2006/main" xmlns:p="http://schemas.openxmlformats.org/presentationml/2006/main" xmlns:r="http://schemas.openxmlformats.org/officeDocument/2006/relationships">
+  <p:cSld>
+    <p:bg>
+      <p:bgPr>
+        <a:solidFill>
+          <a:srgbClr val="1F2B56"/>
+        </a:solidFill>
+        <a:effectLst/>
+      </p:bgPr>
+    </p:bg>
+    <p:spTree>
+      <p:nvGrpSpPr>
+        <p:cNvPr id="1" name=""/>
+        <p:cNvGrpSpPr/>
+        <p:nvPr/>
+      </p:nvGrpSpPr>
+      <p:grpSpPr/>
+      <p:sp>
+        <p:nvSpPr>
+          <p:cNvPr id="2" name="TextBox 1"/>
+          <p:cNvSpPr txBox="1"/>
+          <p:nvPr/>
+        </p:nvSpPr>
+        <p:spPr>
+          <a:xfrm>
+            <a:off x="609600" y="279400"/>
+            <a:ext cx="2540000" cy="279400"/>
+          </a:xfrm>
+          <a:prstGeom prst="rect">
+            <a:avLst/>
+          </a:prstGeom>
+          <a:noFill/>
+        </p:spPr>
+        <p:txBody>
+          <a:bodyPr wrap="square">
+            <a:normAutofit/>
+          </a:bodyPr>
+          <a:lstStyle/>
+          <a:p>
+            <a:pPr algn="l"/>
+            <a:r>
+              <a:rPr sz="1000" b="1" i="0">
+                <a:solidFill>
+                  <a:srgbClr val="F8F8FA"/>
+                </a:solidFill>
+                <a:latin typeface="Arial"/>
+              </a:rPr>
+              <a:t>FKB  Campus</a:t>
+            </a:r>
+          </a:p>
+        </p:txBody>
+      </p:sp>
+      <p:sp>
+        <p:nvSpPr>
+          <p:cNvPr id="3" name="TextBox 2"/>
+          <p:cNvSpPr txBox="1"/>
+          <p:nvPr/>
+        </p:nvSpPr>
+        <p:spPr>
+          <a:xfrm>
+            <a:off x="609600" y="279400"/>
+            <a:ext cx="10972800" cy="279400"/>
+          </a:xfrm>
+          <a:prstGeom prst="rect">
+            <a:avLst/>
+          </a:prstGeom>
+          <a:noFill/>
+        </p:spPr>
+        <p:txBody>
+          <a:bodyPr wrap="square">
+            <a:normAutofit/>
+          </a:bodyPr>
+          <a:lstStyle/>
+          <a:p>
+            <a:pPr algn="r"/>
+            <a:r>
+              <a:rPr sz="900" b="0" i="0">
+                <a:solidFill>
+                  <a:srgbClr val="7B7FA0"/>
+                </a:solidFill>
+                <a:latin typeface="Courier New"/>
+              </a:rPr>
+              <a:t>QUELLEN</a:t>
+            </a:r>
+          </a:p>
+        </p:txBody>
+      </p:sp>
+      <p:sp>
+        <p:nvSpPr>
+          <p:cNvPr id="4" name="TextBox 3"/>
+          <p:cNvSpPr txBox="1"/>
+          <p:nvPr/>
+        </p:nvSpPr>
+        <p:spPr>
+          <a:xfrm>
+            <a:off x="609600" y="6426200"/>
+            <a:ext cx="10972800" cy="228600"/>
+          </a:xfrm>
+          <a:prstGeom prst="rect">
+            <a:avLst/>
+          </a:prstGeom>
+          <a:noFill/>
+        </p:spPr>
+        <p:txBody>
+          <a:bodyPr wrap="square">
+            <a:normAutofit/>
+          </a:bodyPr>
+          <a:lstStyle/>
+          <a:p>
+            <a:pPr algn="r"/>
+            <a:r>
+              <a:rPr sz="900" b="0" i="0">
+                <a:solidFill>
+                  <a:srgbClr val="7B7FA0"/>
+                </a:solidFill>
+                <a:latin typeface="Courier New"/>
+              </a:rPr>
+              <a:t>28</a:t>
+            </a:r>
+          </a:p>
+        </p:txBody>
+      </p:sp>
+      <p:sp>
+        <p:nvSpPr>
+          <p:cNvPr id="5" name="TextBox 4"/>
+          <p:cNvSpPr txBox="1"/>
+          <p:nvPr/>
+        </p:nvSpPr>
+        <p:spPr>
+          <a:xfrm>
+            <a:off x="609600" y="635000"/>
+            <a:ext cx="5461000" cy="5461000"/>
+          </a:xfrm>
+          <a:prstGeom prst="rect">
+            <a:avLst/>
+          </a:prstGeom>
+          <a:noFill/>
+        </p:spPr>
+        <p:txBody>
+          <a:bodyPr wrap="square">
+            <a:normAutofit/>
+          </a:bodyPr>
+          <a:lstStyle/>
+          <a:p>
+            <a:pPr algn="l"/>
+            <a:r>
+              <a:rPr sz="28000" b="0" i="1">
+                <a:solidFill>
+                  <a:srgbClr val="D9BF7A"/>
+                </a:solidFill>
+                <a:latin typeface="Georgia"/>
+              </a:rPr>
+              <a:t>III.</a:t>
+            </a:r>
+          </a:p>
+        </p:txBody>
+      </p:sp>
+      <p:sp>
+        <p:nvSpPr>
+          <p:cNvPr id="6" name="TextBox 5"/>
+          <p:cNvSpPr txBox="1"/>
+          <p:nvPr/>
+        </p:nvSpPr>
+        <p:spPr>
+          <a:xfrm>
+            <a:off x="6731000" y="4064000"/>
+            <a:ext cx="4851400" cy="1778000"/>
+          </a:xfrm>
+          <a:prstGeom prst="rect">
+            <a:avLst/>
+          </a:prstGeom>
+          <a:noFill/>
+        </p:spPr>
+        <p:txBody>
+          <a:bodyPr wrap="square">
+            <a:normAutofit/>
+          </a:bodyPr>
+          <a:lstStyle/>
+          <a:p>
+            <a:pPr algn="r"/>
+            <a:r>
+              <a:rPr sz="3800" b="0" i="0">
+                <a:solidFill>
+                  <a:srgbClr val="F8F8FA"/>
+                </a:solidFill>
+                <a:latin typeface="Georgia"/>
+              </a:rPr>
+              <a:t>Quellen</a:t>
+            </a:r>
+          </a:p>
+        </p:txBody>
+      </p:sp>
+      <p:sp>
+        <p:nvSpPr>
+          <p:cNvPr id="7" name="TextBox 6"/>
+          <p:cNvSpPr txBox="1"/>
+          <p:nvPr/>
+        </p:nvSpPr>
+        <p:spPr>
+          <a:xfrm>
+            <a:off x="6731000" y="5842000"/>
+            <a:ext cx="4851400" cy="635000"/>
+          </a:xfrm>
+          <a:prstGeom prst="rect">
+            <a:avLst/>
+          </a:prstGeom>
+          <a:noFill/>
+        </p:spPr>
+        <p:txBody>
+          <a:bodyPr wrap="square">
+            <a:normAutofit/>
+          </a:bodyPr>
+          <a:lstStyle/>
+          <a:p>
+            <a:pPr algn="r"/>
+            <a:r>
+              <a:rPr sz="1400" b="0" i="1">
+                <a:solidFill>
+                  <a:srgbClr val="7B7FA0"/>
+                </a:solidFill>
+                <a:latin typeface="Georgia"/>
+              </a:rPr>
+              <a:t>Didaktik &amp; Kompetenzmodell</a:t>
+            </a:r>
           </a:p>
         </p:txBody>
       </p:sp>
@@ -18714,7 +18991,7 @@
                 </a:solidFill>
                 <a:latin typeface="Georgia"/>
               </a:rPr>
-              <a:t>Systemische Beratung &amp; Fragetechniken</a:t>
+              <a:t>Didaktik &amp; Kompetenzmodell</a:t>
             </a:r>
           </a:p>
         </p:txBody>
@@ -18827,7 +19104,7 @@
                 </a:solidFill>
                 <a:latin typeface="Georgia"/>
               </a:rPr>
-              <a:t>de Shazer, S. (1985). Keys to solution in brief therapy. W. W. Norton &amp; Company.</a:t>
+              <a:t>Anderson, L. W. &amp; Krathwohl, D. R. (Hrsg.). (2001). A Taxonomy for Learning, Teaching, and Assessing: A Revision of Bloom's Taxonomy of Educational Objectives. Longman.</a:t>
             </a:r>
           </a:p>
         </p:txBody>
@@ -18940,7 +19217,7 @@
                 </a:solidFill>
                 <a:latin typeface="Georgia"/>
               </a:rPr>
-              <a:t>Penn, P. (1982). Circular questioning. Family Process, 21(3), 267–280.</a:t>
+              <a:t>Dreyfus, H. L. &amp; Dreyfus, S. E. (1986). Mind over Machine: The Power of Human Intuition and Expertise in the Era of the Computer. Free Press.</a:t>
             </a:r>
           </a:p>
         </p:txBody>
@@ -19053,7 +19330,7 @@
                 </a:solidFill>
                 <a:latin typeface="Georgia"/>
               </a:rPr>
-              <a:t>Tomm, K. (1987). Interventive interviewing: Part I. Strategizing as a fourth guideline for the therapist. Family Process, 26(1), 3–13.</a:t>
+              <a:t>Kirkpatrick, D. L. (1994). Evaluating Training Programs: The Four Levels. Berrett-Koehler.</a:t>
             </a:r>
           </a:p>
         </p:txBody>
@@ -19115,7 +19392,7 @@
     <p:bg>
       <p:bgPr>
         <a:solidFill>
-          <a:srgbClr val="191D2E"/>
+          <a:srgbClr val="1F2B56"/>
         </a:solidFill>
         <a:effectLst/>
       </p:bgPr>
@@ -19541,7 +19818,7 @@
                 </a:solidFill>
                 <a:latin typeface="Georgia"/>
               </a:rPr>
-              <a:t>Bedarfsanalyse &amp; Gesprächsführung</a:t>
+              <a:t>Systemische Beratung &amp; Fragetechniken</a:t>
             </a:r>
           </a:p>
         </p:txBody>
@@ -19654,7 +19931,7 @@
                 </a:solidFill>
                 <a:latin typeface="Georgia"/>
               </a:rPr>
-              <a:t>Rackham, N. (1988). SPIN Selling. McGraw-Hill.</a:t>
+              <a:t>de Shazer, S. (1985). Keys to solution in brief therapy. W. W. Norton &amp; Company.</a:t>
             </a:r>
           </a:p>
         </p:txBody>
@@ -19668,6 +19945,232 @@
         <p:spPr>
           <a:xfrm>
             <a:off x="939799" y="3333750"/>
+            <a:ext cx="10642600" cy="6350"/>
+          </a:xfrm>
+          <a:prstGeom prst="rect">
+            <a:avLst/>
+          </a:prstGeom>
+          <a:solidFill>
+            <a:srgbClr val="E0E0E8"/>
+          </a:solidFill>
+          <a:ln>
+            <a:noFill/>
+          </a:ln>
+        </p:spPr>
+        <p:style>
+          <a:lnRef idx="1">
+            <a:schemeClr val="accent1"/>
+          </a:lnRef>
+          <a:fillRef idx="3">
+            <a:schemeClr val="accent1"/>
+          </a:fillRef>
+          <a:effectRef idx="2">
+            <a:schemeClr val="accent1"/>
+          </a:effectRef>
+          <a:fontRef idx="minor">
+            <a:schemeClr val="lt1"/>
+          </a:fontRef>
+        </p:style>
+        <p:txBody>
+          <a:bodyPr rtlCol="0" anchor="ctr"/>
+          <a:lstStyle/>
+          <a:p>
+            <a:pPr algn="ctr"/>
+          </a:p>
+        </p:txBody>
+      </p:sp>
+      <p:sp>
+        <p:nvSpPr>
+          <p:cNvPr id="11" name="TextBox 10"/>
+          <p:cNvSpPr txBox="1"/>
+          <p:nvPr/>
+        </p:nvSpPr>
+        <p:spPr>
+          <a:xfrm>
+            <a:off x="609600" y="3409950"/>
+            <a:ext cx="254000" cy="355600"/>
+          </a:xfrm>
+          <a:prstGeom prst="rect">
+            <a:avLst/>
+          </a:prstGeom>
+          <a:noFill/>
+        </p:spPr>
+        <p:txBody>
+          <a:bodyPr wrap="square">
+            <a:normAutofit/>
+          </a:bodyPr>
+          <a:lstStyle/>
+          <a:p>
+            <a:pPr algn="l"/>
+            <a:r>
+              <a:rPr sz="2200" b="0" i="0">
+                <a:solidFill>
+                  <a:srgbClr val="1F2B56"/>
+                </a:solidFill>
+                <a:latin typeface="Georgia"/>
+              </a:rPr>
+              <a:t>–</a:t>
+            </a:r>
+          </a:p>
+        </p:txBody>
+      </p:sp>
+      <p:sp>
+        <p:nvSpPr>
+          <p:cNvPr id="12" name="TextBox 11"/>
+          <p:cNvSpPr txBox="1"/>
+          <p:nvPr/>
+        </p:nvSpPr>
+        <p:spPr>
+          <a:xfrm>
+            <a:off x="939799" y="3384550"/>
+            <a:ext cx="10642600" cy="508000"/>
+          </a:xfrm>
+          <a:prstGeom prst="rect">
+            <a:avLst/>
+          </a:prstGeom>
+          <a:noFill/>
+        </p:spPr>
+        <p:txBody>
+          <a:bodyPr wrap="square">
+            <a:normAutofit/>
+          </a:bodyPr>
+          <a:lstStyle/>
+          <a:p>
+            <a:pPr algn="l"/>
+            <a:r>
+              <a:rPr sz="1400" b="0" i="0">
+                <a:solidFill>
+                  <a:srgbClr val="191D2E"/>
+                </a:solidFill>
+                <a:latin typeface="Georgia"/>
+              </a:rPr>
+              <a:t>Penn, P. (1982). Circular questioning. Family Process, 21(3), 267–280.</a:t>
+            </a:r>
+          </a:p>
+        </p:txBody>
+      </p:sp>
+      <p:sp>
+        <p:nvSpPr>
+          <p:cNvPr id="13" name="Rectangle 12"/>
+          <p:cNvSpPr/>
+          <p:nvPr/>
+        </p:nvSpPr>
+        <p:spPr>
+          <a:xfrm>
+            <a:off x="939799" y="3867150"/>
+            <a:ext cx="10642600" cy="6350"/>
+          </a:xfrm>
+          <a:prstGeom prst="rect">
+            <a:avLst/>
+          </a:prstGeom>
+          <a:solidFill>
+            <a:srgbClr val="E0E0E8"/>
+          </a:solidFill>
+          <a:ln>
+            <a:noFill/>
+          </a:ln>
+        </p:spPr>
+        <p:style>
+          <a:lnRef idx="1">
+            <a:schemeClr val="accent1"/>
+          </a:lnRef>
+          <a:fillRef idx="3">
+            <a:schemeClr val="accent1"/>
+          </a:fillRef>
+          <a:effectRef idx="2">
+            <a:schemeClr val="accent1"/>
+          </a:effectRef>
+          <a:fontRef idx="minor">
+            <a:schemeClr val="lt1"/>
+          </a:fontRef>
+        </p:style>
+        <p:txBody>
+          <a:bodyPr rtlCol="0" anchor="ctr"/>
+          <a:lstStyle/>
+          <a:p>
+            <a:pPr algn="ctr"/>
+          </a:p>
+        </p:txBody>
+      </p:sp>
+      <p:sp>
+        <p:nvSpPr>
+          <p:cNvPr id="14" name="TextBox 13"/>
+          <p:cNvSpPr txBox="1"/>
+          <p:nvPr/>
+        </p:nvSpPr>
+        <p:spPr>
+          <a:xfrm>
+            <a:off x="609600" y="3943350"/>
+            <a:ext cx="254000" cy="355600"/>
+          </a:xfrm>
+          <a:prstGeom prst="rect">
+            <a:avLst/>
+          </a:prstGeom>
+          <a:noFill/>
+        </p:spPr>
+        <p:txBody>
+          <a:bodyPr wrap="square">
+            <a:normAutofit/>
+          </a:bodyPr>
+          <a:lstStyle/>
+          <a:p>
+            <a:pPr algn="l"/>
+            <a:r>
+              <a:rPr sz="2200" b="0" i="0">
+                <a:solidFill>
+                  <a:srgbClr val="1F2B56"/>
+                </a:solidFill>
+                <a:latin typeface="Georgia"/>
+              </a:rPr>
+              <a:t>–</a:t>
+            </a:r>
+          </a:p>
+        </p:txBody>
+      </p:sp>
+      <p:sp>
+        <p:nvSpPr>
+          <p:cNvPr id="15" name="TextBox 14"/>
+          <p:cNvSpPr txBox="1"/>
+          <p:nvPr/>
+        </p:nvSpPr>
+        <p:spPr>
+          <a:xfrm>
+            <a:off x="939799" y="3917950"/>
+            <a:ext cx="10642600" cy="508000"/>
+          </a:xfrm>
+          <a:prstGeom prst="rect">
+            <a:avLst/>
+          </a:prstGeom>
+          <a:noFill/>
+        </p:spPr>
+        <p:txBody>
+          <a:bodyPr wrap="square">
+            <a:normAutofit/>
+          </a:bodyPr>
+          <a:lstStyle/>
+          <a:p>
+            <a:pPr algn="l"/>
+            <a:r>
+              <a:rPr sz="1400" b="0" i="0">
+                <a:solidFill>
+                  <a:srgbClr val="191D2E"/>
+                </a:solidFill>
+                <a:latin typeface="Georgia"/>
+              </a:rPr>
+              <a:t>Tomm, K. (1987). Interventive interviewing: Part I. Strategizing as a fourth guideline for the therapist. Family Process, 26(1), 3–13.</a:t>
+            </a:r>
+          </a:p>
+        </p:txBody>
+      </p:sp>
+      <p:sp>
+        <p:nvSpPr>
+          <p:cNvPr id="16" name="Rectangle 15"/>
+          <p:cNvSpPr/>
+          <p:nvPr/>
+        </p:nvSpPr>
+        <p:spPr>
+          <a:xfrm>
+            <a:off x="939799" y="4400550"/>
             <a:ext cx="10642600" cy="6350"/>
           </a:xfrm>
           <a:prstGeom prst="rect">
@@ -19885,7 +20388,7 @@
         <p:spPr>
           <a:xfrm>
             <a:off x="609600" y="920750"/>
-            <a:ext cx="10972800" cy="1270000"/>
+            <a:ext cx="10972800" cy="1778000"/>
           </a:xfrm>
           <a:prstGeom prst="rect">
             <a:avLst/>
@@ -19906,7 +20409,7 @@
                 </a:solidFill>
                 <a:latin typeface="Georgia"/>
               </a:rPr>
-              <a:t>Unternehmernachfolge &amp; Organisationspsychologie</a:t>
+              <a:t>Bedarfsanalyse &amp; Gesprächsführung</a:t>
             </a:r>
           </a:p>
         </p:txBody>
@@ -19919,121 +20422,8 @@
         </p:nvSpPr>
         <p:spPr>
           <a:xfrm>
-            <a:off x="609600" y="2254250"/>
+            <a:off x="609600" y="2762250"/>
             <a:ext cx="10972800" cy="6350"/>
-          </a:xfrm>
-          <a:prstGeom prst="rect">
-            <a:avLst/>
-          </a:prstGeom>
-          <a:solidFill>
-            <a:srgbClr val="191D2E"/>
-          </a:solidFill>
-          <a:ln>
-            <a:noFill/>
-          </a:ln>
-        </p:spPr>
-        <p:style>
-          <a:lnRef idx="1">
-            <a:schemeClr val="accent1"/>
-          </a:lnRef>
-          <a:fillRef idx="3">
-            <a:schemeClr val="accent1"/>
-          </a:fillRef>
-          <a:effectRef idx="2">
-            <a:schemeClr val="accent1"/>
-          </a:effectRef>
-          <a:fontRef idx="minor">
-            <a:schemeClr val="lt1"/>
-          </a:fontRef>
-        </p:style>
-        <p:txBody>
-          <a:bodyPr rtlCol="0" anchor="ctr"/>
-          <a:lstStyle/>
-          <a:p>
-            <a:pPr algn="ctr"/>
-          </a:p>
-        </p:txBody>
-      </p:sp>
-      <p:sp>
-        <p:nvSpPr>
-          <p:cNvPr id="8" name="TextBox 7"/>
-          <p:cNvSpPr txBox="1"/>
-          <p:nvPr/>
-        </p:nvSpPr>
-        <p:spPr>
-          <a:xfrm>
-            <a:off x="609600" y="2343150"/>
-            <a:ext cx="304800" cy="254000"/>
-          </a:xfrm>
-          <a:prstGeom prst="rect">
-            <a:avLst/>
-          </a:prstGeom>
-          <a:noFill/>
-        </p:spPr>
-        <p:txBody>
-          <a:bodyPr wrap="square">
-            <a:normAutofit/>
-          </a:bodyPr>
-          <a:lstStyle/>
-          <a:p>
-            <a:pPr algn="l"/>
-            <a:r>
-              <a:rPr sz="1000" b="0" i="0">
-                <a:solidFill>
-                  <a:srgbClr val="1F2B56"/>
-                </a:solidFill>
-                <a:latin typeface="Courier New"/>
-              </a:rPr>
-              <a:t>01</a:t>
-            </a:r>
-          </a:p>
-        </p:txBody>
-      </p:sp>
-      <p:sp>
-        <p:nvSpPr>
-          <p:cNvPr id="9" name="TextBox 8"/>
-          <p:cNvSpPr txBox="1"/>
-          <p:nvPr/>
-        </p:nvSpPr>
-        <p:spPr>
-          <a:xfrm>
-            <a:off x="990599" y="2317750"/>
-            <a:ext cx="4699000" cy="558800"/>
-          </a:xfrm>
-          <a:prstGeom prst="rect">
-            <a:avLst/>
-          </a:prstGeom>
-          <a:noFill/>
-        </p:spPr>
-        <p:txBody>
-          <a:bodyPr wrap="square">
-            <a:normAutofit/>
-          </a:bodyPr>
-          <a:lstStyle/>
-          <a:p>
-            <a:pPr algn="l"/>
-            <a:r>
-              <a:rPr sz="1400" b="0" i="0">
-                <a:solidFill>
-                  <a:srgbClr val="191D2E"/>
-                </a:solidFill>
-                <a:latin typeface="Georgia"/>
-              </a:rPr>
-              <a:t>Brown, B. (2018). Dare to lead: Brave work. Tough conversations. Whole hearts. Random House.</a:t>
-            </a:r>
-          </a:p>
-        </p:txBody>
-      </p:sp>
-      <p:sp>
-        <p:nvSpPr>
-          <p:cNvPr id="10" name="Rectangle 9"/>
-          <p:cNvSpPr/>
-          <p:nvPr/>
-        </p:nvSpPr>
-        <p:spPr>
-          <a:xfrm>
-            <a:off x="609600" y="2889250"/>
-            <a:ext cx="5080000" cy="6350"/>
           </a:xfrm>
           <a:prstGeom prst="rect">
             <a:avLst/>
@@ -20069,14 +20459,14 @@
       </p:sp>
       <p:sp>
         <p:nvSpPr>
-          <p:cNvPr id="11" name="TextBox 10"/>
-          <p:cNvSpPr txBox="1"/>
-          <p:nvPr/>
-        </p:nvSpPr>
-        <p:spPr>
-          <a:xfrm>
-            <a:off x="609600" y="2952750"/>
-            <a:ext cx="304800" cy="254000"/>
+          <p:cNvPr id="8" name="TextBox 7"/>
+          <p:cNvSpPr txBox="1"/>
+          <p:nvPr/>
+        </p:nvSpPr>
+        <p:spPr>
+          <a:xfrm>
+            <a:off x="609600" y="2876550"/>
+            <a:ext cx="254000" cy="355600"/>
           </a:xfrm>
           <a:prstGeom prst="rect">
             <a:avLst/>
@@ -20091,27 +20481,27 @@
           <a:p>
             <a:pPr algn="l"/>
             <a:r>
-              <a:rPr sz="1000" b="0" i="0">
+              <a:rPr sz="2200" b="0" i="0">
                 <a:solidFill>
                   <a:srgbClr val="1F2B56"/>
                 </a:solidFill>
-                <a:latin typeface="Courier New"/>
-              </a:rPr>
-              <a:t>02</a:t>
-            </a:r>
-          </a:p>
-        </p:txBody>
-      </p:sp>
-      <p:sp>
-        <p:nvSpPr>
-          <p:cNvPr id="12" name="TextBox 11"/>
-          <p:cNvSpPr txBox="1"/>
-          <p:nvPr/>
-        </p:nvSpPr>
-        <p:spPr>
-          <a:xfrm>
-            <a:off x="990599" y="2927350"/>
-            <a:ext cx="4699000" cy="558800"/>
+                <a:latin typeface="Georgia"/>
+              </a:rPr>
+              <a:t>–</a:t>
+            </a:r>
+          </a:p>
+        </p:txBody>
+      </p:sp>
+      <p:sp>
+        <p:nvSpPr>
+          <p:cNvPr id="9" name="TextBox 8"/>
+          <p:cNvSpPr txBox="1"/>
+          <p:nvPr/>
+        </p:nvSpPr>
+        <p:spPr>
+          <a:xfrm>
+            <a:off x="939799" y="2851150"/>
+            <a:ext cx="10642600" cy="508000"/>
           </a:xfrm>
           <a:prstGeom prst="rect">
             <a:avLst/>
@@ -20132,473 +20522,21 @@
                 </a:solidFill>
                 <a:latin typeface="Georgia"/>
               </a:rPr>
-              <a:t>Edmondson, A. C. (1999). Psychological safety and learning behavior in work teams. Administrative Science Quarterly, 44(2), 350–383.</a:t>
-            </a:r>
-          </a:p>
-        </p:txBody>
-      </p:sp>
-      <p:sp>
-        <p:nvSpPr>
-          <p:cNvPr id="13" name="Rectangle 12"/>
+              <a:t>Rackham, N. (1988). SPIN Selling. McGraw-Hill.</a:t>
+            </a:r>
+          </a:p>
+        </p:txBody>
+      </p:sp>
+      <p:sp>
+        <p:nvSpPr>
+          <p:cNvPr id="10" name="Rectangle 9"/>
           <p:cNvSpPr/>
           <p:nvPr/>
         </p:nvSpPr>
         <p:spPr>
           <a:xfrm>
-            <a:off x="609600" y="3498850"/>
-            <a:ext cx="5080000" cy="6350"/>
-          </a:xfrm>
-          <a:prstGeom prst="rect">
-            <a:avLst/>
-          </a:prstGeom>
-          <a:solidFill>
-            <a:srgbClr val="E0E0E8"/>
-          </a:solidFill>
-          <a:ln>
-            <a:noFill/>
-          </a:ln>
-        </p:spPr>
-        <p:style>
-          <a:lnRef idx="1">
-            <a:schemeClr val="accent1"/>
-          </a:lnRef>
-          <a:fillRef idx="3">
-            <a:schemeClr val="accent1"/>
-          </a:fillRef>
-          <a:effectRef idx="2">
-            <a:schemeClr val="accent1"/>
-          </a:effectRef>
-          <a:fontRef idx="minor">
-            <a:schemeClr val="lt1"/>
-          </a:fontRef>
-        </p:style>
-        <p:txBody>
-          <a:bodyPr rtlCol="0" anchor="ctr"/>
-          <a:lstStyle/>
-          <a:p>
-            <a:pPr algn="ctr"/>
-          </a:p>
-        </p:txBody>
-      </p:sp>
-      <p:sp>
-        <p:nvSpPr>
-          <p:cNvPr id="14" name="TextBox 13"/>
-          <p:cNvSpPr txBox="1"/>
-          <p:nvPr/>
-        </p:nvSpPr>
-        <p:spPr>
-          <a:xfrm>
-            <a:off x="609600" y="3562350"/>
-            <a:ext cx="304800" cy="254000"/>
-          </a:xfrm>
-          <a:prstGeom prst="rect">
-            <a:avLst/>
-          </a:prstGeom>
-          <a:noFill/>
-        </p:spPr>
-        <p:txBody>
-          <a:bodyPr wrap="square">
-            <a:normAutofit/>
-          </a:bodyPr>
-          <a:lstStyle/>
-          <a:p>
-            <a:pPr algn="l"/>
-            <a:r>
-              <a:rPr sz="1000" b="0" i="0">
-                <a:solidFill>
-                  <a:srgbClr val="1F2B56"/>
-                </a:solidFill>
-                <a:latin typeface="Courier New"/>
-              </a:rPr>
-              <a:t>03</a:t>
-            </a:r>
-          </a:p>
-        </p:txBody>
-      </p:sp>
-      <p:sp>
-        <p:nvSpPr>
-          <p:cNvPr id="15" name="TextBox 14"/>
-          <p:cNvSpPr txBox="1"/>
-          <p:nvPr/>
-        </p:nvSpPr>
-        <p:spPr>
-          <a:xfrm>
-            <a:off x="990599" y="3536950"/>
-            <a:ext cx="4699000" cy="558800"/>
-          </a:xfrm>
-          <a:prstGeom prst="rect">
-            <a:avLst/>
-          </a:prstGeom>
-          <a:noFill/>
-        </p:spPr>
-        <p:txBody>
-          <a:bodyPr wrap="square">
-            <a:normAutofit/>
-          </a:bodyPr>
-          <a:lstStyle/>
-          <a:p>
-            <a:pPr algn="l"/>
-            <a:r>
-              <a:rPr sz="1400" b="0" i="0">
-                <a:solidFill>
-                  <a:srgbClr val="191D2E"/>
-                </a:solidFill>
-                <a:latin typeface="Georgia"/>
-              </a:rPr>
-              <a:t>Institut für Mittelstandsforschung Bonn [IfM Bonn]. (2016). Unternehmernachfolgen in Deutschland 2016: Umfang, Anforderungen, Trends und Perspektiven. IfM Bonn.</a:t>
-            </a:r>
-          </a:p>
-        </p:txBody>
-      </p:sp>
-      <p:sp>
-        <p:nvSpPr>
-          <p:cNvPr id="16" name="Rectangle 15"/>
-          <p:cNvSpPr/>
-          <p:nvPr/>
-        </p:nvSpPr>
-        <p:spPr>
-          <a:xfrm>
-            <a:off x="609600" y="4108450"/>
-            <a:ext cx="5080000" cy="6350"/>
-          </a:xfrm>
-          <a:prstGeom prst="rect">
-            <a:avLst/>
-          </a:prstGeom>
-          <a:solidFill>
-            <a:srgbClr val="E0E0E8"/>
-          </a:solidFill>
-          <a:ln>
-            <a:noFill/>
-          </a:ln>
-        </p:spPr>
-        <p:style>
-          <a:lnRef idx="1">
-            <a:schemeClr val="accent1"/>
-          </a:lnRef>
-          <a:fillRef idx="3">
-            <a:schemeClr val="accent1"/>
-          </a:fillRef>
-          <a:effectRef idx="2">
-            <a:schemeClr val="accent1"/>
-          </a:effectRef>
-          <a:fontRef idx="minor">
-            <a:schemeClr val="lt1"/>
-          </a:fontRef>
-        </p:style>
-        <p:txBody>
-          <a:bodyPr rtlCol="0" anchor="ctr"/>
-          <a:lstStyle/>
-          <a:p>
-            <a:pPr algn="ctr"/>
-          </a:p>
-        </p:txBody>
-      </p:sp>
-      <p:sp>
-        <p:nvSpPr>
-          <p:cNvPr id="17" name="TextBox 16"/>
-          <p:cNvSpPr txBox="1"/>
-          <p:nvPr/>
-        </p:nvSpPr>
-        <p:spPr>
-          <a:xfrm>
-            <a:off x="6502400" y="2343150"/>
-            <a:ext cx="304800" cy="254000"/>
-          </a:xfrm>
-          <a:prstGeom prst="rect">
-            <a:avLst/>
-          </a:prstGeom>
-          <a:noFill/>
-        </p:spPr>
-        <p:txBody>
-          <a:bodyPr wrap="square">
-            <a:normAutofit/>
-          </a:bodyPr>
-          <a:lstStyle/>
-          <a:p>
-            <a:pPr algn="l"/>
-            <a:r>
-              <a:rPr sz="1000" b="0" i="0">
-                <a:solidFill>
-                  <a:srgbClr val="1F2B56"/>
-                </a:solidFill>
-                <a:latin typeface="Courier New"/>
-              </a:rPr>
-              <a:t>01</a:t>
-            </a:r>
-          </a:p>
-        </p:txBody>
-      </p:sp>
-      <p:sp>
-        <p:nvSpPr>
-          <p:cNvPr id="18" name="TextBox 17"/>
-          <p:cNvSpPr txBox="1"/>
-          <p:nvPr/>
-        </p:nvSpPr>
-        <p:spPr>
-          <a:xfrm>
-            <a:off x="6883400" y="2317750"/>
-            <a:ext cx="4699000" cy="558800"/>
-          </a:xfrm>
-          <a:prstGeom prst="rect">
-            <a:avLst/>
-          </a:prstGeom>
-          <a:noFill/>
-        </p:spPr>
-        <p:txBody>
-          <a:bodyPr wrap="square">
-            <a:normAutofit/>
-          </a:bodyPr>
-          <a:lstStyle/>
-          <a:p>
-            <a:pPr algn="l"/>
-            <a:r>
-              <a:rPr sz="1400" b="0" i="0">
-                <a:solidFill>
-                  <a:srgbClr val="191D2E"/>
-                </a:solidFill>
-                <a:latin typeface="Georgia"/>
-              </a:rPr>
-              <a:t>Kübler-Ross, E. (1969). On death and dying. Macmillan.</a:t>
-            </a:r>
-          </a:p>
-        </p:txBody>
-      </p:sp>
-      <p:sp>
-        <p:nvSpPr>
-          <p:cNvPr id="19" name="Rectangle 18"/>
-          <p:cNvSpPr/>
-          <p:nvPr/>
-        </p:nvSpPr>
-        <p:spPr>
-          <a:xfrm>
-            <a:off x="6502400" y="2889250"/>
-            <a:ext cx="5080000" cy="6350"/>
-          </a:xfrm>
-          <a:prstGeom prst="rect">
-            <a:avLst/>
-          </a:prstGeom>
-          <a:solidFill>
-            <a:srgbClr val="E0E0E8"/>
-          </a:solidFill>
-          <a:ln>
-            <a:noFill/>
-          </a:ln>
-        </p:spPr>
-        <p:style>
-          <a:lnRef idx="1">
-            <a:schemeClr val="accent1"/>
-          </a:lnRef>
-          <a:fillRef idx="3">
-            <a:schemeClr val="accent1"/>
-          </a:fillRef>
-          <a:effectRef idx="2">
-            <a:schemeClr val="accent1"/>
-          </a:effectRef>
-          <a:fontRef idx="minor">
-            <a:schemeClr val="lt1"/>
-          </a:fontRef>
-        </p:style>
-        <p:txBody>
-          <a:bodyPr rtlCol="0" anchor="ctr"/>
-          <a:lstStyle/>
-          <a:p>
-            <a:pPr algn="ctr"/>
-          </a:p>
-        </p:txBody>
-      </p:sp>
-      <p:sp>
-        <p:nvSpPr>
-          <p:cNvPr id="20" name="TextBox 19"/>
-          <p:cNvSpPr txBox="1"/>
-          <p:nvPr/>
-        </p:nvSpPr>
-        <p:spPr>
-          <a:xfrm>
-            <a:off x="6502400" y="2952750"/>
-            <a:ext cx="304800" cy="254000"/>
-          </a:xfrm>
-          <a:prstGeom prst="rect">
-            <a:avLst/>
-          </a:prstGeom>
-          <a:noFill/>
-        </p:spPr>
-        <p:txBody>
-          <a:bodyPr wrap="square">
-            <a:normAutofit/>
-          </a:bodyPr>
-          <a:lstStyle/>
-          <a:p>
-            <a:pPr algn="l"/>
-            <a:r>
-              <a:rPr sz="1000" b="0" i="0">
-                <a:solidFill>
-                  <a:srgbClr val="1F2B56"/>
-                </a:solidFill>
-                <a:latin typeface="Courier New"/>
-              </a:rPr>
-              <a:t>02</a:t>
-            </a:r>
-          </a:p>
-        </p:txBody>
-      </p:sp>
-      <p:sp>
-        <p:nvSpPr>
-          <p:cNvPr id="21" name="TextBox 20"/>
-          <p:cNvSpPr txBox="1"/>
-          <p:nvPr/>
-        </p:nvSpPr>
-        <p:spPr>
-          <a:xfrm>
-            <a:off x="6883400" y="2927350"/>
-            <a:ext cx="4699000" cy="558800"/>
-          </a:xfrm>
-          <a:prstGeom prst="rect">
-            <a:avLst/>
-          </a:prstGeom>
-          <a:noFill/>
-        </p:spPr>
-        <p:txBody>
-          <a:bodyPr wrap="square">
-            <a:normAutofit/>
-          </a:bodyPr>
-          <a:lstStyle/>
-          <a:p>
-            <a:pPr algn="l"/>
-            <a:r>
-              <a:rPr sz="1400" b="0" i="0">
-                <a:solidFill>
-                  <a:srgbClr val="191D2E"/>
-                </a:solidFill>
-                <a:latin typeface="Georgia"/>
-              </a:rPr>
-              <a:t>McClelland, D. C. &amp; Burnham, D. H. (1976). Power is the great motivator. Harvard Business Review, 54(2), 100–110.</a:t>
-            </a:r>
-          </a:p>
-        </p:txBody>
-      </p:sp>
-      <p:sp>
-        <p:nvSpPr>
-          <p:cNvPr id="22" name="Rectangle 21"/>
-          <p:cNvSpPr/>
-          <p:nvPr/>
-        </p:nvSpPr>
-        <p:spPr>
-          <a:xfrm>
-            <a:off x="6502400" y="3498850"/>
-            <a:ext cx="5080000" cy="6350"/>
-          </a:xfrm>
-          <a:prstGeom prst="rect">
-            <a:avLst/>
-          </a:prstGeom>
-          <a:solidFill>
-            <a:srgbClr val="E0E0E8"/>
-          </a:solidFill>
-          <a:ln>
-            <a:noFill/>
-          </a:ln>
-        </p:spPr>
-        <p:style>
-          <a:lnRef idx="1">
-            <a:schemeClr val="accent1"/>
-          </a:lnRef>
-          <a:fillRef idx="3">
-            <a:schemeClr val="accent1"/>
-          </a:fillRef>
-          <a:effectRef idx="2">
-            <a:schemeClr val="accent1"/>
-          </a:effectRef>
-          <a:fontRef idx="minor">
-            <a:schemeClr val="lt1"/>
-          </a:fontRef>
-        </p:style>
-        <p:txBody>
-          <a:bodyPr rtlCol="0" anchor="ctr"/>
-          <a:lstStyle/>
-          <a:p>
-            <a:pPr algn="ctr"/>
-          </a:p>
-        </p:txBody>
-      </p:sp>
-      <p:sp>
-        <p:nvSpPr>
-          <p:cNvPr id="23" name="TextBox 22"/>
-          <p:cNvSpPr txBox="1"/>
-          <p:nvPr/>
-        </p:nvSpPr>
-        <p:spPr>
-          <a:xfrm>
-            <a:off x="6502400" y="3562350"/>
-            <a:ext cx="304800" cy="254000"/>
-          </a:xfrm>
-          <a:prstGeom prst="rect">
-            <a:avLst/>
-          </a:prstGeom>
-          <a:noFill/>
-        </p:spPr>
-        <p:txBody>
-          <a:bodyPr wrap="square">
-            <a:normAutofit/>
-          </a:bodyPr>
-          <a:lstStyle/>
-          <a:p>
-            <a:pPr algn="l"/>
-            <a:r>
-              <a:rPr sz="1000" b="0" i="0">
-                <a:solidFill>
-                  <a:srgbClr val="1F2B56"/>
-                </a:solidFill>
-                <a:latin typeface="Courier New"/>
-              </a:rPr>
-              <a:t>03</a:t>
-            </a:r>
-          </a:p>
-        </p:txBody>
-      </p:sp>
-      <p:sp>
-        <p:nvSpPr>
-          <p:cNvPr id="24" name="TextBox 23"/>
-          <p:cNvSpPr txBox="1"/>
-          <p:nvPr/>
-        </p:nvSpPr>
-        <p:spPr>
-          <a:xfrm>
-            <a:off x="6883400" y="3536950"/>
-            <a:ext cx="4699000" cy="558800"/>
-          </a:xfrm>
-          <a:prstGeom prst="rect">
-            <a:avLst/>
-          </a:prstGeom>
-          <a:noFill/>
-        </p:spPr>
-        <p:txBody>
-          <a:bodyPr wrap="square">
-            <a:normAutofit/>
-          </a:bodyPr>
-          <a:lstStyle/>
-          <a:p>
-            <a:pPr algn="l"/>
-            <a:r>
-              <a:rPr sz="1400" b="0" i="0">
-                <a:solidFill>
-                  <a:srgbClr val="191D2E"/>
-                </a:solidFill>
-                <a:latin typeface="Georgia"/>
-              </a:rPr>
-              <a:t>Wiklund, J., Nikolaev, B., Shir, N. &amp; Foo, M.-D. (2020). Entrepreneurship and well-being: Past, present, and future. Journal of Business Venturing, 35(4), Article 106092.</a:t>
-            </a:r>
-          </a:p>
-        </p:txBody>
-      </p:sp>
-      <p:sp>
-        <p:nvSpPr>
-          <p:cNvPr id="25" name="Rectangle 24"/>
-          <p:cNvSpPr/>
-          <p:nvPr/>
-        </p:nvSpPr>
-        <p:spPr>
-          <a:xfrm>
-            <a:off x="6502400" y="4108450"/>
-            <a:ext cx="5080000" cy="6350"/>
+            <a:off x="939799" y="3333750"/>
+            <a:ext cx="10642600" cy="6350"/>
           </a:xfrm>
           <a:prstGeom prst="rect">
             <a:avLst/>
@@ -20641,6 +20579,936 @@
 </file>
 
 <file path=ppt/slides/slide32.xml><?xml version="1.0" encoding="utf-8"?>
+<p:sld xmlns:a="http://schemas.openxmlformats.org/drawingml/2006/main" xmlns:p="http://schemas.openxmlformats.org/presentationml/2006/main" xmlns:r="http://schemas.openxmlformats.org/officeDocument/2006/relationships">
+  <p:cSld>
+    <p:bg>
+      <p:bgPr>
+        <a:solidFill>
+          <a:srgbClr val="F8F8FA"/>
+        </a:solidFill>
+        <a:effectLst/>
+      </p:bgPr>
+    </p:bg>
+    <p:spTree>
+      <p:nvGrpSpPr>
+        <p:cNvPr id="1" name=""/>
+        <p:cNvGrpSpPr/>
+        <p:nvPr/>
+      </p:nvGrpSpPr>
+      <p:grpSpPr/>
+      <p:sp>
+        <p:nvSpPr>
+          <p:cNvPr id="2" name="TextBox 1"/>
+          <p:cNvSpPr txBox="1"/>
+          <p:nvPr/>
+        </p:nvSpPr>
+        <p:spPr>
+          <a:xfrm>
+            <a:off x="609600" y="279400"/>
+            <a:ext cx="2540000" cy="279400"/>
+          </a:xfrm>
+          <a:prstGeom prst="rect">
+            <a:avLst/>
+          </a:prstGeom>
+          <a:noFill/>
+        </p:spPr>
+        <p:txBody>
+          <a:bodyPr wrap="square">
+            <a:normAutofit/>
+          </a:bodyPr>
+          <a:lstStyle/>
+          <a:p>
+            <a:pPr algn="l"/>
+            <a:r>
+              <a:rPr sz="1000" b="1" i="0">
+                <a:solidFill>
+                  <a:srgbClr val="191D2E"/>
+                </a:solidFill>
+                <a:latin typeface="Arial"/>
+              </a:rPr>
+              <a:t>FKB  Campus</a:t>
+            </a:r>
+          </a:p>
+        </p:txBody>
+      </p:sp>
+      <p:sp>
+        <p:nvSpPr>
+          <p:cNvPr id="3" name="TextBox 2"/>
+          <p:cNvSpPr txBox="1"/>
+          <p:nvPr/>
+        </p:nvSpPr>
+        <p:spPr>
+          <a:xfrm>
+            <a:off x="609600" y="279400"/>
+            <a:ext cx="10972800" cy="279400"/>
+          </a:xfrm>
+          <a:prstGeom prst="rect">
+            <a:avLst/>
+          </a:prstGeom>
+          <a:noFill/>
+        </p:spPr>
+        <p:txBody>
+          <a:bodyPr wrap="square">
+            <a:normAutofit/>
+          </a:bodyPr>
+          <a:lstStyle/>
+          <a:p>
+            <a:pPr algn="r"/>
+            <a:r>
+              <a:rPr sz="900" b="0" i="0">
+                <a:solidFill>
+                  <a:srgbClr val="7B7FA0"/>
+                </a:solidFill>
+                <a:latin typeface="Courier New"/>
+              </a:rPr>
+              <a:t>§ III · QUELLEN</a:t>
+            </a:r>
+          </a:p>
+        </p:txBody>
+      </p:sp>
+      <p:sp>
+        <p:nvSpPr>
+          <p:cNvPr id="4" name="TextBox 3"/>
+          <p:cNvSpPr txBox="1"/>
+          <p:nvPr/>
+        </p:nvSpPr>
+        <p:spPr>
+          <a:xfrm>
+            <a:off x="609600" y="6426200"/>
+            <a:ext cx="10972800" cy="228600"/>
+          </a:xfrm>
+          <a:prstGeom prst="rect">
+            <a:avLst/>
+          </a:prstGeom>
+          <a:noFill/>
+        </p:spPr>
+        <p:txBody>
+          <a:bodyPr wrap="square">
+            <a:normAutofit/>
+          </a:bodyPr>
+          <a:lstStyle/>
+          <a:p>
+            <a:pPr algn="r"/>
+            <a:r>
+              <a:rPr sz="900" b="0" i="0">
+                <a:solidFill>
+                  <a:srgbClr val="7B7FA0"/>
+                </a:solidFill>
+                <a:latin typeface="Courier New"/>
+              </a:rPr>
+              <a:t>32</a:t>
+            </a:r>
+          </a:p>
+        </p:txBody>
+      </p:sp>
+      <p:sp>
+        <p:nvSpPr>
+          <p:cNvPr id="5" name="Rectangle 4"/>
+          <p:cNvSpPr/>
+          <p:nvPr/>
+        </p:nvSpPr>
+        <p:spPr>
+          <a:xfrm>
+            <a:off x="609600" y="825500"/>
+            <a:ext cx="10972800" cy="6350"/>
+          </a:xfrm>
+          <a:prstGeom prst="rect">
+            <a:avLst/>
+          </a:prstGeom>
+          <a:solidFill>
+            <a:srgbClr val="191D2E"/>
+          </a:solidFill>
+          <a:ln>
+            <a:noFill/>
+          </a:ln>
+        </p:spPr>
+        <p:style>
+          <a:lnRef idx="1">
+            <a:schemeClr val="accent1"/>
+          </a:lnRef>
+          <a:fillRef idx="3">
+            <a:schemeClr val="accent1"/>
+          </a:fillRef>
+          <a:effectRef idx="2">
+            <a:schemeClr val="accent1"/>
+          </a:effectRef>
+          <a:fontRef idx="minor">
+            <a:schemeClr val="lt1"/>
+          </a:fontRef>
+        </p:style>
+        <p:txBody>
+          <a:bodyPr rtlCol="0" anchor="ctr"/>
+          <a:lstStyle/>
+          <a:p>
+            <a:pPr algn="ctr"/>
+          </a:p>
+        </p:txBody>
+      </p:sp>
+      <p:sp>
+        <p:nvSpPr>
+          <p:cNvPr id="6" name="TextBox 5"/>
+          <p:cNvSpPr txBox="1"/>
+          <p:nvPr/>
+        </p:nvSpPr>
+        <p:spPr>
+          <a:xfrm>
+            <a:off x="609600" y="920750"/>
+            <a:ext cx="10972800" cy="1270000"/>
+          </a:xfrm>
+          <a:prstGeom prst="rect">
+            <a:avLst/>
+          </a:prstGeom>
+          <a:noFill/>
+        </p:spPr>
+        <p:txBody>
+          <a:bodyPr wrap="square">
+            <a:normAutofit/>
+          </a:bodyPr>
+          <a:lstStyle/>
+          <a:p>
+            <a:pPr algn="l"/>
+            <a:r>
+              <a:rPr sz="3800" b="0" i="0">
+                <a:solidFill>
+                  <a:srgbClr val="191D2E"/>
+                </a:solidFill>
+                <a:latin typeface="Georgia"/>
+              </a:rPr>
+              <a:t>Unternehmernachfolge &amp; Organisationspsychologie</a:t>
+            </a:r>
+          </a:p>
+        </p:txBody>
+      </p:sp>
+      <p:sp>
+        <p:nvSpPr>
+          <p:cNvPr id="7" name="Rectangle 6"/>
+          <p:cNvSpPr/>
+          <p:nvPr/>
+        </p:nvSpPr>
+        <p:spPr>
+          <a:xfrm>
+            <a:off x="609600" y="2254250"/>
+            <a:ext cx="10972800" cy="6350"/>
+          </a:xfrm>
+          <a:prstGeom prst="rect">
+            <a:avLst/>
+          </a:prstGeom>
+          <a:solidFill>
+            <a:srgbClr val="191D2E"/>
+          </a:solidFill>
+          <a:ln>
+            <a:noFill/>
+          </a:ln>
+        </p:spPr>
+        <p:style>
+          <a:lnRef idx="1">
+            <a:schemeClr val="accent1"/>
+          </a:lnRef>
+          <a:fillRef idx="3">
+            <a:schemeClr val="accent1"/>
+          </a:fillRef>
+          <a:effectRef idx="2">
+            <a:schemeClr val="accent1"/>
+          </a:effectRef>
+          <a:fontRef idx="minor">
+            <a:schemeClr val="lt1"/>
+          </a:fontRef>
+        </p:style>
+        <p:txBody>
+          <a:bodyPr rtlCol="0" anchor="ctr"/>
+          <a:lstStyle/>
+          <a:p>
+            <a:pPr algn="ctr"/>
+          </a:p>
+        </p:txBody>
+      </p:sp>
+      <p:sp>
+        <p:nvSpPr>
+          <p:cNvPr id="8" name="TextBox 7"/>
+          <p:cNvSpPr txBox="1"/>
+          <p:nvPr/>
+        </p:nvSpPr>
+        <p:spPr>
+          <a:xfrm>
+            <a:off x="609600" y="2343150"/>
+            <a:ext cx="304800" cy="254000"/>
+          </a:xfrm>
+          <a:prstGeom prst="rect">
+            <a:avLst/>
+          </a:prstGeom>
+          <a:noFill/>
+        </p:spPr>
+        <p:txBody>
+          <a:bodyPr wrap="square">
+            <a:normAutofit/>
+          </a:bodyPr>
+          <a:lstStyle/>
+          <a:p>
+            <a:pPr algn="l"/>
+            <a:r>
+              <a:rPr sz="1000" b="0" i="0">
+                <a:solidFill>
+                  <a:srgbClr val="1F2B56"/>
+                </a:solidFill>
+                <a:latin typeface="Courier New"/>
+              </a:rPr>
+              <a:t>01</a:t>
+            </a:r>
+          </a:p>
+        </p:txBody>
+      </p:sp>
+      <p:sp>
+        <p:nvSpPr>
+          <p:cNvPr id="9" name="TextBox 8"/>
+          <p:cNvSpPr txBox="1"/>
+          <p:nvPr/>
+        </p:nvSpPr>
+        <p:spPr>
+          <a:xfrm>
+            <a:off x="990599" y="2317750"/>
+            <a:ext cx="4699000" cy="558800"/>
+          </a:xfrm>
+          <a:prstGeom prst="rect">
+            <a:avLst/>
+          </a:prstGeom>
+          <a:noFill/>
+        </p:spPr>
+        <p:txBody>
+          <a:bodyPr wrap="square">
+            <a:normAutofit/>
+          </a:bodyPr>
+          <a:lstStyle/>
+          <a:p>
+            <a:pPr algn="l"/>
+            <a:r>
+              <a:rPr sz="1400" b="0" i="0">
+                <a:solidFill>
+                  <a:srgbClr val="191D2E"/>
+                </a:solidFill>
+                <a:latin typeface="Georgia"/>
+              </a:rPr>
+              <a:t>Brown, B. (2018). Dare to lead: Brave work. Tough conversations. Whole hearts. Random House.</a:t>
+            </a:r>
+          </a:p>
+        </p:txBody>
+      </p:sp>
+      <p:sp>
+        <p:nvSpPr>
+          <p:cNvPr id="10" name="Rectangle 9"/>
+          <p:cNvSpPr/>
+          <p:nvPr/>
+        </p:nvSpPr>
+        <p:spPr>
+          <a:xfrm>
+            <a:off x="609600" y="2889250"/>
+            <a:ext cx="5080000" cy="6350"/>
+          </a:xfrm>
+          <a:prstGeom prst="rect">
+            <a:avLst/>
+          </a:prstGeom>
+          <a:solidFill>
+            <a:srgbClr val="E0E0E8"/>
+          </a:solidFill>
+          <a:ln>
+            <a:noFill/>
+          </a:ln>
+        </p:spPr>
+        <p:style>
+          <a:lnRef idx="1">
+            <a:schemeClr val="accent1"/>
+          </a:lnRef>
+          <a:fillRef idx="3">
+            <a:schemeClr val="accent1"/>
+          </a:fillRef>
+          <a:effectRef idx="2">
+            <a:schemeClr val="accent1"/>
+          </a:effectRef>
+          <a:fontRef idx="minor">
+            <a:schemeClr val="lt1"/>
+          </a:fontRef>
+        </p:style>
+        <p:txBody>
+          <a:bodyPr rtlCol="0" anchor="ctr"/>
+          <a:lstStyle/>
+          <a:p>
+            <a:pPr algn="ctr"/>
+          </a:p>
+        </p:txBody>
+      </p:sp>
+      <p:sp>
+        <p:nvSpPr>
+          <p:cNvPr id="11" name="TextBox 10"/>
+          <p:cNvSpPr txBox="1"/>
+          <p:nvPr/>
+        </p:nvSpPr>
+        <p:spPr>
+          <a:xfrm>
+            <a:off x="609600" y="2952750"/>
+            <a:ext cx="304800" cy="254000"/>
+          </a:xfrm>
+          <a:prstGeom prst="rect">
+            <a:avLst/>
+          </a:prstGeom>
+          <a:noFill/>
+        </p:spPr>
+        <p:txBody>
+          <a:bodyPr wrap="square">
+            <a:normAutofit/>
+          </a:bodyPr>
+          <a:lstStyle/>
+          <a:p>
+            <a:pPr algn="l"/>
+            <a:r>
+              <a:rPr sz="1000" b="0" i="0">
+                <a:solidFill>
+                  <a:srgbClr val="1F2B56"/>
+                </a:solidFill>
+                <a:latin typeface="Courier New"/>
+              </a:rPr>
+              <a:t>02</a:t>
+            </a:r>
+          </a:p>
+        </p:txBody>
+      </p:sp>
+      <p:sp>
+        <p:nvSpPr>
+          <p:cNvPr id="12" name="TextBox 11"/>
+          <p:cNvSpPr txBox="1"/>
+          <p:nvPr/>
+        </p:nvSpPr>
+        <p:spPr>
+          <a:xfrm>
+            <a:off x="990599" y="2927350"/>
+            <a:ext cx="4699000" cy="558800"/>
+          </a:xfrm>
+          <a:prstGeom prst="rect">
+            <a:avLst/>
+          </a:prstGeom>
+          <a:noFill/>
+        </p:spPr>
+        <p:txBody>
+          <a:bodyPr wrap="square">
+            <a:normAutofit/>
+          </a:bodyPr>
+          <a:lstStyle/>
+          <a:p>
+            <a:pPr algn="l"/>
+            <a:r>
+              <a:rPr sz="1400" b="0" i="0">
+                <a:solidFill>
+                  <a:srgbClr val="191D2E"/>
+                </a:solidFill>
+                <a:latin typeface="Georgia"/>
+              </a:rPr>
+              <a:t>Edmondson, A. C. (1999). Psychological safety and learning behavior in work teams. Administrative Science Quarterly, 44(2), 350–383.</a:t>
+            </a:r>
+          </a:p>
+        </p:txBody>
+      </p:sp>
+      <p:sp>
+        <p:nvSpPr>
+          <p:cNvPr id="13" name="Rectangle 12"/>
+          <p:cNvSpPr/>
+          <p:nvPr/>
+        </p:nvSpPr>
+        <p:spPr>
+          <a:xfrm>
+            <a:off x="609600" y="3498850"/>
+            <a:ext cx="5080000" cy="6350"/>
+          </a:xfrm>
+          <a:prstGeom prst="rect">
+            <a:avLst/>
+          </a:prstGeom>
+          <a:solidFill>
+            <a:srgbClr val="E0E0E8"/>
+          </a:solidFill>
+          <a:ln>
+            <a:noFill/>
+          </a:ln>
+        </p:spPr>
+        <p:style>
+          <a:lnRef idx="1">
+            <a:schemeClr val="accent1"/>
+          </a:lnRef>
+          <a:fillRef idx="3">
+            <a:schemeClr val="accent1"/>
+          </a:fillRef>
+          <a:effectRef idx="2">
+            <a:schemeClr val="accent1"/>
+          </a:effectRef>
+          <a:fontRef idx="minor">
+            <a:schemeClr val="lt1"/>
+          </a:fontRef>
+        </p:style>
+        <p:txBody>
+          <a:bodyPr rtlCol="0" anchor="ctr"/>
+          <a:lstStyle/>
+          <a:p>
+            <a:pPr algn="ctr"/>
+          </a:p>
+        </p:txBody>
+      </p:sp>
+      <p:sp>
+        <p:nvSpPr>
+          <p:cNvPr id="14" name="TextBox 13"/>
+          <p:cNvSpPr txBox="1"/>
+          <p:nvPr/>
+        </p:nvSpPr>
+        <p:spPr>
+          <a:xfrm>
+            <a:off x="609600" y="3562350"/>
+            <a:ext cx="304800" cy="254000"/>
+          </a:xfrm>
+          <a:prstGeom prst="rect">
+            <a:avLst/>
+          </a:prstGeom>
+          <a:noFill/>
+        </p:spPr>
+        <p:txBody>
+          <a:bodyPr wrap="square">
+            <a:normAutofit/>
+          </a:bodyPr>
+          <a:lstStyle/>
+          <a:p>
+            <a:pPr algn="l"/>
+            <a:r>
+              <a:rPr sz="1000" b="0" i="0">
+                <a:solidFill>
+                  <a:srgbClr val="1F2B56"/>
+                </a:solidFill>
+                <a:latin typeface="Courier New"/>
+              </a:rPr>
+              <a:t>03</a:t>
+            </a:r>
+          </a:p>
+        </p:txBody>
+      </p:sp>
+      <p:sp>
+        <p:nvSpPr>
+          <p:cNvPr id="15" name="TextBox 14"/>
+          <p:cNvSpPr txBox="1"/>
+          <p:nvPr/>
+        </p:nvSpPr>
+        <p:spPr>
+          <a:xfrm>
+            <a:off x="990599" y="3536950"/>
+            <a:ext cx="4699000" cy="558800"/>
+          </a:xfrm>
+          <a:prstGeom prst="rect">
+            <a:avLst/>
+          </a:prstGeom>
+          <a:noFill/>
+        </p:spPr>
+        <p:txBody>
+          <a:bodyPr wrap="square">
+            <a:normAutofit/>
+          </a:bodyPr>
+          <a:lstStyle/>
+          <a:p>
+            <a:pPr algn="l"/>
+            <a:r>
+              <a:rPr sz="1400" b="0" i="0">
+                <a:solidFill>
+                  <a:srgbClr val="191D2E"/>
+                </a:solidFill>
+                <a:latin typeface="Georgia"/>
+              </a:rPr>
+              <a:t>Institut für Mittelstandsforschung Bonn [IfM Bonn]. (2016). Unternehmernachfolgen in Deutschland 2016: Umfang, Anforderungen, Trends und Perspektiven. IfM Bonn.</a:t>
+            </a:r>
+          </a:p>
+        </p:txBody>
+      </p:sp>
+      <p:sp>
+        <p:nvSpPr>
+          <p:cNvPr id="16" name="Rectangle 15"/>
+          <p:cNvSpPr/>
+          <p:nvPr/>
+        </p:nvSpPr>
+        <p:spPr>
+          <a:xfrm>
+            <a:off x="609600" y="4108450"/>
+            <a:ext cx="5080000" cy="6350"/>
+          </a:xfrm>
+          <a:prstGeom prst="rect">
+            <a:avLst/>
+          </a:prstGeom>
+          <a:solidFill>
+            <a:srgbClr val="E0E0E8"/>
+          </a:solidFill>
+          <a:ln>
+            <a:noFill/>
+          </a:ln>
+        </p:spPr>
+        <p:style>
+          <a:lnRef idx="1">
+            <a:schemeClr val="accent1"/>
+          </a:lnRef>
+          <a:fillRef idx="3">
+            <a:schemeClr val="accent1"/>
+          </a:fillRef>
+          <a:effectRef idx="2">
+            <a:schemeClr val="accent1"/>
+          </a:effectRef>
+          <a:fontRef idx="minor">
+            <a:schemeClr val="lt1"/>
+          </a:fontRef>
+        </p:style>
+        <p:txBody>
+          <a:bodyPr rtlCol="0" anchor="ctr"/>
+          <a:lstStyle/>
+          <a:p>
+            <a:pPr algn="ctr"/>
+          </a:p>
+        </p:txBody>
+      </p:sp>
+      <p:sp>
+        <p:nvSpPr>
+          <p:cNvPr id="17" name="TextBox 16"/>
+          <p:cNvSpPr txBox="1"/>
+          <p:nvPr/>
+        </p:nvSpPr>
+        <p:spPr>
+          <a:xfrm>
+            <a:off x="6502400" y="2343150"/>
+            <a:ext cx="304800" cy="254000"/>
+          </a:xfrm>
+          <a:prstGeom prst="rect">
+            <a:avLst/>
+          </a:prstGeom>
+          <a:noFill/>
+        </p:spPr>
+        <p:txBody>
+          <a:bodyPr wrap="square">
+            <a:normAutofit/>
+          </a:bodyPr>
+          <a:lstStyle/>
+          <a:p>
+            <a:pPr algn="l"/>
+            <a:r>
+              <a:rPr sz="1000" b="0" i="0">
+                <a:solidFill>
+                  <a:srgbClr val="1F2B56"/>
+                </a:solidFill>
+                <a:latin typeface="Courier New"/>
+              </a:rPr>
+              <a:t>01</a:t>
+            </a:r>
+          </a:p>
+        </p:txBody>
+      </p:sp>
+      <p:sp>
+        <p:nvSpPr>
+          <p:cNvPr id="18" name="TextBox 17"/>
+          <p:cNvSpPr txBox="1"/>
+          <p:nvPr/>
+        </p:nvSpPr>
+        <p:spPr>
+          <a:xfrm>
+            <a:off x="6883400" y="2317750"/>
+            <a:ext cx="4699000" cy="558800"/>
+          </a:xfrm>
+          <a:prstGeom prst="rect">
+            <a:avLst/>
+          </a:prstGeom>
+          <a:noFill/>
+        </p:spPr>
+        <p:txBody>
+          <a:bodyPr wrap="square">
+            <a:normAutofit/>
+          </a:bodyPr>
+          <a:lstStyle/>
+          <a:p>
+            <a:pPr algn="l"/>
+            <a:r>
+              <a:rPr sz="1400" b="0" i="0">
+                <a:solidFill>
+                  <a:srgbClr val="191D2E"/>
+                </a:solidFill>
+                <a:latin typeface="Georgia"/>
+              </a:rPr>
+              <a:t>Kübler-Ross, E. (1969). On death and dying. Macmillan.</a:t>
+            </a:r>
+          </a:p>
+        </p:txBody>
+      </p:sp>
+      <p:sp>
+        <p:nvSpPr>
+          <p:cNvPr id="19" name="Rectangle 18"/>
+          <p:cNvSpPr/>
+          <p:nvPr/>
+        </p:nvSpPr>
+        <p:spPr>
+          <a:xfrm>
+            <a:off x="6502400" y="2889250"/>
+            <a:ext cx="5080000" cy="6350"/>
+          </a:xfrm>
+          <a:prstGeom prst="rect">
+            <a:avLst/>
+          </a:prstGeom>
+          <a:solidFill>
+            <a:srgbClr val="E0E0E8"/>
+          </a:solidFill>
+          <a:ln>
+            <a:noFill/>
+          </a:ln>
+        </p:spPr>
+        <p:style>
+          <a:lnRef idx="1">
+            <a:schemeClr val="accent1"/>
+          </a:lnRef>
+          <a:fillRef idx="3">
+            <a:schemeClr val="accent1"/>
+          </a:fillRef>
+          <a:effectRef idx="2">
+            <a:schemeClr val="accent1"/>
+          </a:effectRef>
+          <a:fontRef idx="minor">
+            <a:schemeClr val="lt1"/>
+          </a:fontRef>
+        </p:style>
+        <p:txBody>
+          <a:bodyPr rtlCol="0" anchor="ctr"/>
+          <a:lstStyle/>
+          <a:p>
+            <a:pPr algn="ctr"/>
+          </a:p>
+        </p:txBody>
+      </p:sp>
+      <p:sp>
+        <p:nvSpPr>
+          <p:cNvPr id="20" name="TextBox 19"/>
+          <p:cNvSpPr txBox="1"/>
+          <p:nvPr/>
+        </p:nvSpPr>
+        <p:spPr>
+          <a:xfrm>
+            <a:off x="6502400" y="2952750"/>
+            <a:ext cx="304800" cy="254000"/>
+          </a:xfrm>
+          <a:prstGeom prst="rect">
+            <a:avLst/>
+          </a:prstGeom>
+          <a:noFill/>
+        </p:spPr>
+        <p:txBody>
+          <a:bodyPr wrap="square">
+            <a:normAutofit/>
+          </a:bodyPr>
+          <a:lstStyle/>
+          <a:p>
+            <a:pPr algn="l"/>
+            <a:r>
+              <a:rPr sz="1000" b="0" i="0">
+                <a:solidFill>
+                  <a:srgbClr val="1F2B56"/>
+                </a:solidFill>
+                <a:latin typeface="Courier New"/>
+              </a:rPr>
+              <a:t>02</a:t>
+            </a:r>
+          </a:p>
+        </p:txBody>
+      </p:sp>
+      <p:sp>
+        <p:nvSpPr>
+          <p:cNvPr id="21" name="TextBox 20"/>
+          <p:cNvSpPr txBox="1"/>
+          <p:nvPr/>
+        </p:nvSpPr>
+        <p:spPr>
+          <a:xfrm>
+            <a:off x="6883400" y="2927350"/>
+            <a:ext cx="4699000" cy="558800"/>
+          </a:xfrm>
+          <a:prstGeom prst="rect">
+            <a:avLst/>
+          </a:prstGeom>
+          <a:noFill/>
+        </p:spPr>
+        <p:txBody>
+          <a:bodyPr wrap="square">
+            <a:normAutofit/>
+          </a:bodyPr>
+          <a:lstStyle/>
+          <a:p>
+            <a:pPr algn="l"/>
+            <a:r>
+              <a:rPr sz="1400" b="0" i="0">
+                <a:solidFill>
+                  <a:srgbClr val="191D2E"/>
+                </a:solidFill>
+                <a:latin typeface="Georgia"/>
+              </a:rPr>
+              <a:t>McClelland, D. C. &amp; Burnham, D. H. (1976). Power is the great motivator. Harvard Business Review, 54(2), 100–110.</a:t>
+            </a:r>
+          </a:p>
+        </p:txBody>
+      </p:sp>
+      <p:sp>
+        <p:nvSpPr>
+          <p:cNvPr id="22" name="Rectangle 21"/>
+          <p:cNvSpPr/>
+          <p:nvPr/>
+        </p:nvSpPr>
+        <p:spPr>
+          <a:xfrm>
+            <a:off x="6502400" y="3498850"/>
+            <a:ext cx="5080000" cy="6350"/>
+          </a:xfrm>
+          <a:prstGeom prst="rect">
+            <a:avLst/>
+          </a:prstGeom>
+          <a:solidFill>
+            <a:srgbClr val="E0E0E8"/>
+          </a:solidFill>
+          <a:ln>
+            <a:noFill/>
+          </a:ln>
+        </p:spPr>
+        <p:style>
+          <a:lnRef idx="1">
+            <a:schemeClr val="accent1"/>
+          </a:lnRef>
+          <a:fillRef idx="3">
+            <a:schemeClr val="accent1"/>
+          </a:fillRef>
+          <a:effectRef idx="2">
+            <a:schemeClr val="accent1"/>
+          </a:effectRef>
+          <a:fontRef idx="minor">
+            <a:schemeClr val="lt1"/>
+          </a:fontRef>
+        </p:style>
+        <p:txBody>
+          <a:bodyPr rtlCol="0" anchor="ctr"/>
+          <a:lstStyle/>
+          <a:p>
+            <a:pPr algn="ctr"/>
+          </a:p>
+        </p:txBody>
+      </p:sp>
+      <p:sp>
+        <p:nvSpPr>
+          <p:cNvPr id="23" name="TextBox 22"/>
+          <p:cNvSpPr txBox="1"/>
+          <p:nvPr/>
+        </p:nvSpPr>
+        <p:spPr>
+          <a:xfrm>
+            <a:off x="6502400" y="3562350"/>
+            <a:ext cx="304800" cy="254000"/>
+          </a:xfrm>
+          <a:prstGeom prst="rect">
+            <a:avLst/>
+          </a:prstGeom>
+          <a:noFill/>
+        </p:spPr>
+        <p:txBody>
+          <a:bodyPr wrap="square">
+            <a:normAutofit/>
+          </a:bodyPr>
+          <a:lstStyle/>
+          <a:p>
+            <a:pPr algn="l"/>
+            <a:r>
+              <a:rPr sz="1000" b="0" i="0">
+                <a:solidFill>
+                  <a:srgbClr val="1F2B56"/>
+                </a:solidFill>
+                <a:latin typeface="Courier New"/>
+              </a:rPr>
+              <a:t>03</a:t>
+            </a:r>
+          </a:p>
+        </p:txBody>
+      </p:sp>
+      <p:sp>
+        <p:nvSpPr>
+          <p:cNvPr id="24" name="TextBox 23"/>
+          <p:cNvSpPr txBox="1"/>
+          <p:nvPr/>
+        </p:nvSpPr>
+        <p:spPr>
+          <a:xfrm>
+            <a:off x="6883400" y="3536950"/>
+            <a:ext cx="4699000" cy="558800"/>
+          </a:xfrm>
+          <a:prstGeom prst="rect">
+            <a:avLst/>
+          </a:prstGeom>
+          <a:noFill/>
+        </p:spPr>
+        <p:txBody>
+          <a:bodyPr wrap="square">
+            <a:normAutofit/>
+          </a:bodyPr>
+          <a:lstStyle/>
+          <a:p>
+            <a:pPr algn="l"/>
+            <a:r>
+              <a:rPr sz="1400" b="0" i="0">
+                <a:solidFill>
+                  <a:srgbClr val="191D2E"/>
+                </a:solidFill>
+                <a:latin typeface="Georgia"/>
+              </a:rPr>
+              <a:t>Wiklund, J., Nikolaev, B., Shir, N. &amp; Foo, M.-D. (2020). Entrepreneurship and well-being: Past, present, and future. Journal of Business Venturing, 35(4), Article 106092.</a:t>
+            </a:r>
+          </a:p>
+        </p:txBody>
+      </p:sp>
+      <p:sp>
+        <p:nvSpPr>
+          <p:cNvPr id="25" name="Rectangle 24"/>
+          <p:cNvSpPr/>
+          <p:nvPr/>
+        </p:nvSpPr>
+        <p:spPr>
+          <a:xfrm>
+            <a:off x="6502400" y="4108450"/>
+            <a:ext cx="5080000" cy="6350"/>
+          </a:xfrm>
+          <a:prstGeom prst="rect">
+            <a:avLst/>
+          </a:prstGeom>
+          <a:solidFill>
+            <a:srgbClr val="E0E0E8"/>
+          </a:solidFill>
+          <a:ln>
+            <a:noFill/>
+          </a:ln>
+        </p:spPr>
+        <p:style>
+          <a:lnRef idx="1">
+            <a:schemeClr val="accent1"/>
+          </a:lnRef>
+          <a:fillRef idx="3">
+            <a:schemeClr val="accent1"/>
+          </a:fillRef>
+          <a:effectRef idx="2">
+            <a:schemeClr val="accent1"/>
+          </a:effectRef>
+          <a:fontRef idx="minor">
+            <a:schemeClr val="lt1"/>
+          </a:fontRef>
+        </p:style>
+        <p:txBody>
+          <a:bodyPr rtlCol="0" anchor="ctr"/>
+          <a:lstStyle/>
+          <a:p>
+            <a:pPr algn="ctr"/>
+          </a:p>
+        </p:txBody>
+      </p:sp>
+    </p:spTree>
+  </p:cSld>
+  <p:clrMapOvr>
+    <a:masterClrMapping/>
+  </p:clrMapOvr>
+</p:sld>
+</file>
+
+<file path=ppt/slides/slide33.xml><?xml version="1.0" encoding="utf-8"?>
 <p:sld xmlns:a="http://schemas.openxmlformats.org/drawingml/2006/main" xmlns:p="http://schemas.openxmlformats.org/presentationml/2006/main" xmlns:r="http://schemas.openxmlformats.org/officeDocument/2006/relationships">
   <p:cSld>
     <p:bg>
@@ -21268,7 +22136,7 @@
                   </a:txBody>
                   <a:tcPr>
                     <a:solidFill>
-                      <a:srgbClr val="191D2E"/>
+                      <a:srgbClr val="1F2B56"/>
                     </a:solidFill>
                   </a:tcPr>
                 </a:tc>
@@ -21290,7 +22158,7 @@
                   </a:txBody>
                   <a:tcPr>
                     <a:solidFill>
-                      <a:srgbClr val="191D2E"/>
+                      <a:srgbClr val="1F2B56"/>
                     </a:solidFill>
                   </a:tcPr>
                 </a:tc>
@@ -21312,7 +22180,7 @@
                   </a:txBody>
                   <a:tcPr>
                     <a:solidFill>
-                      <a:srgbClr val="191D2E"/>
+                      <a:srgbClr val="1F2B56"/>
                     </a:solidFill>
                   </a:tcPr>
                 </a:tc>

--- a/public/downloads/praesentation/M12.pptx
+++ b/public/downloads/praesentation/M12.pptx
@@ -3255,7 +3255,42 @@
       </p:sp>
       <p:sp>
         <p:nvSpPr>
-          <p:cNvPr id="6" name="Rectangle 5"/>
+          <p:cNvPr id="6" name="TextBox 5"/>
+          <p:cNvSpPr txBox="1"/>
+          <p:nvPr/>
+        </p:nvSpPr>
+        <p:spPr>
+          <a:xfrm>
+            <a:off x="685800" y="3977639"/>
+            <a:ext cx="10817352" cy="731520"/>
+          </a:xfrm>
+          <a:prstGeom prst="rect">
+            <a:avLst/>
+          </a:prstGeom>
+          <a:noFill/>
+        </p:spPr>
+        <p:txBody>
+          <a:bodyPr wrap="square">
+            <a:spAutoFit/>
+          </a:bodyPr>
+          <a:lstStyle/>
+          <a:p>
+            <a:pPr algn="l"/>
+            <a:r>
+              <a:rPr sz="1900" b="0" i="1">
+                <a:solidFill>
+                  <a:srgbClr val="BECDE6"/>
+                </a:solidFill>
+                <a:latin typeface="Source Serif 4"/>
+              </a:rPr>
+              <a:t>Auf Augenhöhe mit dem Unternehmer – Nachfolge begleiten und gestalten</a:t>
+            </a:r>
+          </a:p>
+        </p:txBody>
+      </p:sp>
+      <p:sp>
+        <p:nvSpPr>
+          <p:cNvPr id="7" name="Rectangle 6"/>
           <p:cNvSpPr/>
           <p:nvPr/>
         </p:nvSpPr>
@@ -3298,14 +3333,14 @@
       </p:sp>
       <p:sp>
         <p:nvSpPr>
-          <p:cNvPr id="7" name="TextBox 6"/>
+          <p:cNvPr id="8" name="TextBox 7"/>
           <p:cNvSpPr txBox="1"/>
           <p:nvPr/>
         </p:nvSpPr>
         <p:spPr>
           <a:xfrm>
             <a:off x="685800" y="5193792"/>
-            <a:ext cx="5408676" cy="201168"/>
+            <a:ext cx="3605784" cy="201168"/>
           </a:xfrm>
           <a:prstGeom prst="rect">
             <a:avLst/>
@@ -3333,14 +3368,14 @@
       </p:sp>
       <p:sp>
         <p:nvSpPr>
-          <p:cNvPr id="8" name="TextBox 7"/>
+          <p:cNvPr id="9" name="TextBox 8"/>
           <p:cNvSpPr txBox="1"/>
           <p:nvPr/>
         </p:nvSpPr>
         <p:spPr>
           <a:xfrm>
             <a:off x="685800" y="5394960"/>
-            <a:ext cx="5408676" cy="320040"/>
+            <a:ext cx="3605784" cy="320040"/>
           </a:xfrm>
           <a:prstGeom prst="rect">
             <a:avLst/>
@@ -3368,14 +3403,14 @@
       </p:sp>
       <p:sp>
         <p:nvSpPr>
-          <p:cNvPr id="9" name="TextBox 8"/>
+          <p:cNvPr id="10" name="TextBox 9"/>
           <p:cNvSpPr txBox="1"/>
           <p:nvPr/>
         </p:nvSpPr>
         <p:spPr>
           <a:xfrm>
-            <a:off x="6094476" y="5193792"/>
-            <a:ext cx="5408676" cy="201168"/>
+            <a:off x="4291584" y="5193792"/>
+            <a:ext cx="3605784" cy="201168"/>
           </a:xfrm>
           <a:prstGeom prst="rect">
             <a:avLst/>
@@ -3396,21 +3431,21 @@
                 </a:solidFill>
                 <a:latin typeface="JetBrains Mono"/>
               </a:rPr>
-              <a:t>VERSION</a:t>
-            </a:r>
-          </a:p>
-        </p:txBody>
-      </p:sp>
-      <p:sp>
-        <p:nvSpPr>
-          <p:cNvPr id="10" name="TextBox 9"/>
+              <a:t>KOMPETENZSTUFE</a:t>
+            </a:r>
+          </a:p>
+        </p:txBody>
+      </p:sp>
+      <p:sp>
+        <p:nvSpPr>
+          <p:cNvPr id="11" name="TextBox 10"/>
           <p:cNvSpPr txBox="1"/>
           <p:nvPr/>
         </p:nvSpPr>
         <p:spPr>
           <a:xfrm>
-            <a:off x="6094476" y="5394960"/>
-            <a:ext cx="5408676" cy="320040"/>
+            <a:off x="4291584" y="5394960"/>
+            <a:ext cx="3605784" cy="320040"/>
           </a:xfrm>
           <a:prstGeom prst="rect">
             <a:avLst/>
@@ -3431,6 +3466,76 @@
                 </a:solidFill>
                 <a:latin typeface="Arial"/>
               </a:rPr>
+              <a:t>Stratege</a:t>
+            </a:r>
+          </a:p>
+        </p:txBody>
+      </p:sp>
+      <p:sp>
+        <p:nvSpPr>
+          <p:cNvPr id="12" name="TextBox 11"/>
+          <p:cNvSpPr txBox="1"/>
+          <p:nvPr/>
+        </p:nvSpPr>
+        <p:spPr>
+          <a:xfrm>
+            <a:off x="7897368" y="5193792"/>
+            <a:ext cx="3605784" cy="201168"/>
+          </a:xfrm>
+          <a:prstGeom prst="rect">
+            <a:avLst/>
+          </a:prstGeom>
+          <a:noFill/>
+        </p:spPr>
+        <p:txBody>
+          <a:bodyPr wrap="none">
+            <a:spAutoFit/>
+          </a:bodyPr>
+          <a:lstStyle/>
+          <a:p>
+            <a:pPr algn="l"/>
+            <a:r>
+              <a:rPr sz="700">
+                <a:solidFill>
+                  <a:srgbClr val="A0B4D2"/>
+                </a:solidFill>
+                <a:latin typeface="JetBrains Mono"/>
+              </a:rPr>
+              <a:t>VERSION</a:t>
+            </a:r>
+          </a:p>
+        </p:txBody>
+      </p:sp>
+      <p:sp>
+        <p:nvSpPr>
+          <p:cNvPr id="13" name="TextBox 12"/>
+          <p:cNvSpPr txBox="1"/>
+          <p:nvPr/>
+        </p:nvSpPr>
+        <p:spPr>
+          <a:xfrm>
+            <a:off x="7897368" y="5394960"/>
+            <a:ext cx="3605784" cy="320040"/>
+          </a:xfrm>
+          <a:prstGeom prst="rect">
+            <a:avLst/>
+          </a:prstGeom>
+          <a:noFill/>
+        </p:spPr>
+        <p:txBody>
+          <a:bodyPr wrap="square">
+            <a:spAutoFit/>
+          </a:bodyPr>
+          <a:lstStyle/>
+          <a:p>
+            <a:pPr algn="l"/>
+            <a:r>
+              <a:rPr sz="1100" b="0" i="0">
+                <a:solidFill>
+                  <a:srgbClr val="FFFFFF"/>
+                </a:solidFill>
+                <a:latin typeface="Arial"/>
+              </a:rPr>
               <a:t>v0.3</a:t>
             </a:r>
           </a:p>
@@ -3438,7 +3543,7 @@
       </p:sp>
       <p:sp>
         <p:nvSpPr>
-          <p:cNvPr id="11" name="Rectangle 10"/>
+          <p:cNvPr id="14" name="Rectangle 13"/>
           <p:cNvSpPr/>
           <p:nvPr/>
         </p:nvSpPr>
@@ -3481,7 +3586,7 @@
       </p:sp>
       <p:sp>
         <p:nvSpPr>
-          <p:cNvPr id="12" name="TextBox 11"/>
+          <p:cNvPr id="15" name="TextBox 14"/>
           <p:cNvSpPr txBox="1"/>
           <p:nvPr/>
         </p:nvSpPr>
@@ -3516,7 +3621,7 @@
       </p:sp>
       <p:sp>
         <p:nvSpPr>
-          <p:cNvPr id="13" name="TextBox 12"/>
+          <p:cNvPr id="16" name="TextBox 15"/>
           <p:cNvSpPr txBox="1"/>
           <p:nvPr/>
         </p:nvSpPr>
